--- a/《誰在推動綠能？——.pptx
+++ b/《誰在推動綠能？——.pptx
@@ -11,16 +11,20 @@
     <p:sldId id="263" r:id="rId5"/>
     <p:sldId id="264" r:id="rId6"/>
     <p:sldId id="265" r:id="rId7"/>
-    <p:sldId id="266" r:id="rId8"/>
-    <p:sldId id="267" r:id="rId9"/>
-    <p:sldId id="268" r:id="rId10"/>
-    <p:sldId id="257" r:id="rId11"/>
-    <p:sldId id="258" r:id="rId12"/>
-    <p:sldId id="259" r:id="rId13"/>
-    <p:sldId id="260" r:id="rId14"/>
-    <p:sldId id="261" r:id="rId15"/>
-    <p:sldId id="270" r:id="rId16"/>
-    <p:sldId id="271" r:id="rId17"/>
+    <p:sldId id="272" r:id="rId8"/>
+    <p:sldId id="274" r:id="rId9"/>
+    <p:sldId id="275" r:id="rId10"/>
+    <p:sldId id="273" r:id="rId11"/>
+    <p:sldId id="266" r:id="rId12"/>
+    <p:sldId id="267" r:id="rId13"/>
+    <p:sldId id="268" r:id="rId14"/>
+    <p:sldId id="257" r:id="rId15"/>
+    <p:sldId id="258" r:id="rId16"/>
+    <p:sldId id="259" r:id="rId17"/>
+    <p:sldId id="260" r:id="rId18"/>
+    <p:sldId id="261" r:id="rId19"/>
+    <p:sldId id="270" r:id="rId20"/>
+    <p:sldId id="271" r:id="rId21"/>
   </p:sldIdLst>
   <p:sldSz cx="12192000" cy="6858000"/>
   <p:notesSz cx="6858000" cy="9144000"/>
@@ -119,6 +123,11 @@
       </a:defRPr>
     </a:lvl9pPr>
   </p:defaultTextStyle>
+  <p:extLst>
+    <p:ext uri="{EFAFB233-063F-42B5-8137-9DF3F51BA10A}">
+      <p15:sldGuideLst xmlns:p15="http://schemas.microsoft.com/office/powerpoint/2012/main"/>
+    </p:ext>
+  </p:extLst>
 </p:presentation>
 </file>
 
@@ -269,7 +278,7 @@
           <a:p>
             <a:fld id="{9CD0EF91-A124-4443-A6AC-125C7A94C0BC}" type="datetimeFigureOut">
               <a:rPr lang="zh-TW" altLang="en-US" smtClean="0"/>
-              <a:t>2026/3/21</a:t>
+              <a:t>2026/3/24</a:t>
             </a:fld>
             <a:endParaRPr lang="zh-TW" altLang="en-US"/>
           </a:p>
@@ -467,7 +476,7 @@
           <a:p>
             <a:fld id="{9CD0EF91-A124-4443-A6AC-125C7A94C0BC}" type="datetimeFigureOut">
               <a:rPr lang="zh-TW" altLang="en-US" smtClean="0"/>
-              <a:t>2026/3/21</a:t>
+              <a:t>2026/3/24</a:t>
             </a:fld>
             <a:endParaRPr lang="zh-TW" altLang="en-US"/>
           </a:p>
@@ -675,7 +684,7 @@
           <a:p>
             <a:fld id="{9CD0EF91-A124-4443-A6AC-125C7A94C0BC}" type="datetimeFigureOut">
               <a:rPr lang="zh-TW" altLang="en-US" smtClean="0"/>
-              <a:t>2026/3/21</a:t>
+              <a:t>2026/3/24</a:t>
             </a:fld>
             <a:endParaRPr lang="zh-TW" altLang="en-US"/>
           </a:p>
@@ -873,7 +882,7 @@
           <a:p>
             <a:fld id="{9CD0EF91-A124-4443-A6AC-125C7A94C0BC}" type="datetimeFigureOut">
               <a:rPr lang="zh-TW" altLang="en-US" smtClean="0"/>
-              <a:t>2026/3/21</a:t>
+              <a:t>2026/3/24</a:t>
             </a:fld>
             <a:endParaRPr lang="zh-TW" altLang="en-US"/>
           </a:p>
@@ -1148,7 +1157,7 @@
           <a:p>
             <a:fld id="{9CD0EF91-A124-4443-A6AC-125C7A94C0BC}" type="datetimeFigureOut">
               <a:rPr lang="zh-TW" altLang="en-US" smtClean="0"/>
-              <a:t>2026/3/21</a:t>
+              <a:t>2026/3/24</a:t>
             </a:fld>
             <a:endParaRPr lang="zh-TW" altLang="en-US"/>
           </a:p>
@@ -1413,7 +1422,7 @@
           <a:p>
             <a:fld id="{9CD0EF91-A124-4443-A6AC-125C7A94C0BC}" type="datetimeFigureOut">
               <a:rPr lang="zh-TW" altLang="en-US" smtClean="0"/>
-              <a:t>2026/3/21</a:t>
+              <a:t>2026/3/24</a:t>
             </a:fld>
             <a:endParaRPr lang="zh-TW" altLang="en-US"/>
           </a:p>
@@ -1825,7 +1834,7 @@
           <a:p>
             <a:fld id="{9CD0EF91-A124-4443-A6AC-125C7A94C0BC}" type="datetimeFigureOut">
               <a:rPr lang="zh-TW" altLang="en-US" smtClean="0"/>
-              <a:t>2026/3/21</a:t>
+              <a:t>2026/3/24</a:t>
             </a:fld>
             <a:endParaRPr lang="zh-TW" altLang="en-US"/>
           </a:p>
@@ -1966,7 +1975,7 @@
           <a:p>
             <a:fld id="{9CD0EF91-A124-4443-A6AC-125C7A94C0BC}" type="datetimeFigureOut">
               <a:rPr lang="zh-TW" altLang="en-US" smtClean="0"/>
-              <a:t>2026/3/21</a:t>
+              <a:t>2026/3/24</a:t>
             </a:fld>
             <a:endParaRPr lang="zh-TW" altLang="en-US"/>
           </a:p>
@@ -2079,7 +2088,7 @@
           <a:p>
             <a:fld id="{9CD0EF91-A124-4443-A6AC-125C7A94C0BC}" type="datetimeFigureOut">
               <a:rPr lang="zh-TW" altLang="en-US" smtClean="0"/>
-              <a:t>2026/3/21</a:t>
+              <a:t>2026/3/24</a:t>
             </a:fld>
             <a:endParaRPr lang="zh-TW" altLang="en-US"/>
           </a:p>
@@ -2390,7 +2399,7 @@
           <a:p>
             <a:fld id="{9CD0EF91-A124-4443-A6AC-125C7A94C0BC}" type="datetimeFigureOut">
               <a:rPr lang="zh-TW" altLang="en-US" smtClean="0"/>
-              <a:t>2026/3/21</a:t>
+              <a:t>2026/3/24</a:t>
             </a:fld>
             <a:endParaRPr lang="zh-TW" altLang="en-US"/>
           </a:p>
@@ -2678,7 +2687,7 @@
           <a:p>
             <a:fld id="{9CD0EF91-A124-4443-A6AC-125C7A94C0BC}" type="datetimeFigureOut">
               <a:rPr lang="zh-TW" altLang="en-US" smtClean="0"/>
-              <a:t>2026/3/21</a:t>
+              <a:t>2026/3/24</a:t>
             </a:fld>
             <a:endParaRPr lang="zh-TW" altLang="en-US"/>
           </a:p>
@@ -2919,7 +2928,7 @@
           <a:p>
             <a:fld id="{9CD0EF91-A124-4443-A6AC-125C7A94C0BC}" type="datetimeFigureOut">
               <a:rPr lang="zh-TW" altLang="en-US" smtClean="0"/>
-              <a:t>2026/3/21</a:t>
+              <a:t>2026/3/24</a:t>
             </a:fld>
             <a:endParaRPr lang="zh-TW" altLang="en-US"/>
           </a:p>
@@ -3412,7 +3421,14 @@
           <a:bodyPr/>
           <a:lstStyle/>
           <a:p>
-            <a:endParaRPr lang="zh-TW" altLang="en-US"/>
+            <a:r>
+              <a:rPr lang="en-US" altLang="zh-TW" dirty="0"/>
+              <a:t>2007-2026 </a:t>
+            </a:r>
+            <a:r>
+              <a:rPr lang="zh-TW" altLang="en-US" dirty="0"/>
+              <a:t>台灣潔淨能源佔比與自用發電設備崛起分析</a:t>
+            </a:r>
           </a:p>
         </p:txBody>
       </p:sp>
@@ -3451,7 +3467,7 @@
           <p:cNvPr id="2" name="標題 1">
             <a:extLst>
               <a:ext uri="{FF2B5EF4-FFF2-40B4-BE49-F238E27FC236}">
-                <a16:creationId xmlns:a16="http://schemas.microsoft.com/office/drawing/2014/main" id="{A82E70D9-A2F5-4DD7-6774-FDF0B13B48AE}"/>
+                <a16:creationId xmlns:a16="http://schemas.microsoft.com/office/drawing/2014/main" id="{6FFD45EB-ACDF-9234-7A3C-C925332B2978}"/>
               </a:ext>
             </a:extLst>
           </p:cNvPr>
@@ -3467,14 +3483,6 @@
           <a:bodyPr/>
           <a:lstStyle/>
           <a:p>
-            <a:r>
-              <a:rPr lang="zh-TW" altLang="en-US" dirty="0"/>
-              <a:t>專題資料處理技術報告 </a:t>
-            </a:r>
-            <a:r>
-              <a:rPr lang="en-US" altLang="zh-TW" dirty="0"/>
-              <a:t>(ETL Summary)</a:t>
-            </a:r>
             <a:endParaRPr lang="zh-TW" altLang="en-US" dirty="0"/>
           </a:p>
         </p:txBody>
@@ -3484,7 +3492,7 @@
           <p:cNvPr id="3" name="內容版面配置區 2">
             <a:extLst>
               <a:ext uri="{FF2B5EF4-FFF2-40B4-BE49-F238E27FC236}">
-                <a16:creationId xmlns:a16="http://schemas.microsoft.com/office/drawing/2014/main" id="{90BA0607-B15B-CA87-7EC6-ECF75025110D}"/>
+                <a16:creationId xmlns:a16="http://schemas.microsoft.com/office/drawing/2014/main" id="{4378E0AC-B0DB-F6B4-1D2B-99B335C5C5CA}"/>
               </a:ext>
             </a:extLst>
           </p:cNvPr>
@@ -3501,141 +3509,59 @@
           <a:lstStyle/>
           <a:p>
             <a:r>
-              <a:rPr lang="zh-TW" altLang="en-US" b="1" dirty="0"/>
-              <a:t>原始資料來源與挑戰</a:t>
-            </a:r>
-          </a:p>
-          <a:p>
-            <a:r>
-              <a:rPr lang="zh-TW" altLang="en-US" b="1" dirty="0"/>
-              <a:t>資料範疇：</a:t>
-            </a:r>
-            <a:r>
-              <a:rPr lang="zh-TW" altLang="en-US" dirty="0"/>
-              <a:t> </a:t>
-            </a:r>
+              <a:rPr lang="en-US" altLang="zh-TW" b="1" dirty="0"/>
+              <a:t>2017 </a:t>
+            </a:r>
+            <a:r>
+              <a:rPr lang="zh-TW" altLang="en-US" b="1" dirty="0"/>
+              <a:t>年後的「觸底反彈」：誰在推動？</a:t>
+            </a:r>
+          </a:p>
+          <a:p>
+            <a:r>
+              <a:rPr lang="zh-TW" altLang="en-US" dirty="0"/>
+              <a:t>這就是你專題的**「英雄出場」**時刻！</a:t>
+            </a:r>
+          </a:p>
+          <a:p>
             <a:r>
               <a:rPr lang="en-US" altLang="zh-TW" dirty="0"/>
-              <a:t>2007 </a:t>
-            </a:r>
-            <a:r>
-              <a:rPr lang="zh-TW" altLang="en-US" dirty="0"/>
-              <a:t>年至 </a:t>
+              <a:t>2017 </a:t>
+            </a:r>
+            <a:r>
+              <a:rPr lang="zh-TW" altLang="en-US" dirty="0"/>
+              <a:t>年後佔比開始反彈，你可以觀察你的 </a:t>
             </a:r>
             <a:r>
               <a:rPr lang="en-US" altLang="zh-TW" dirty="0"/>
-              <a:t>2026 </a:t>
-            </a:r>
-            <a:r>
-              <a:rPr lang="zh-TW" altLang="en-US" dirty="0"/>
-              <a:t>年台灣逐月發電量數據。</a:t>
-            </a:r>
-          </a:p>
-          <a:p>
-            <a:r>
-              <a:rPr lang="zh-TW" altLang="en-US" b="1" dirty="0"/>
-              <a:t>原始格式：</a:t>
-            </a:r>
-            <a:r>
-              <a:rPr lang="zh-TW" altLang="en-US" dirty="0"/>
-              <a:t> 典型「寬表 </a:t>
-            </a:r>
-            <a:r>
-              <a:rPr lang="en-US" altLang="zh-TW" dirty="0"/>
-              <a:t>(Wide Table)</a:t>
-            </a:r>
-            <a:r>
-              <a:rPr lang="zh-TW" altLang="en-US" dirty="0"/>
-              <a:t>」，包含超過 </a:t>
-            </a:r>
-            <a:r>
-              <a:rPr lang="en-US" altLang="zh-TW" dirty="0"/>
-              <a:t>50 </a:t>
-            </a:r>
-            <a:r>
-              <a:rPr lang="zh-TW" altLang="en-US" dirty="0"/>
-              <a:t>個欄位（如：再生能源</a:t>
-            </a:r>
-            <a:r>
-              <a:rPr lang="en-US" altLang="zh-TW" dirty="0"/>
-              <a:t>_</a:t>
-            </a:r>
-            <a:r>
-              <a:rPr lang="zh-TW" altLang="en-US" dirty="0"/>
-              <a:t>太陽光電</a:t>
-            </a:r>
-            <a:r>
-              <a:rPr lang="en-US" altLang="zh-TW" dirty="0"/>
-              <a:t>_</a:t>
-            </a:r>
-            <a:r>
-              <a:rPr lang="zh-TW" altLang="en-US" dirty="0"/>
-              <a:t>台電）。</a:t>
-            </a:r>
-          </a:p>
-          <a:p>
-            <a:r>
-              <a:rPr lang="zh-TW" altLang="en-US" b="1" dirty="0"/>
-              <a:t>面臨挑戰：</a:t>
-            </a:r>
-            <a:r>
-              <a:rPr lang="zh-TW" altLang="en-US" dirty="0"/>
-              <a:t> * </a:t>
-            </a:r>
-            <a:r>
-              <a:rPr lang="zh-TW" altLang="en-US" b="1" dirty="0"/>
-              <a:t>維度混雜：</a:t>
-            </a:r>
-            <a:r>
-              <a:rPr lang="zh-TW" altLang="en-US" dirty="0"/>
-              <a:t> 經營主體、能源類別、發電細項全擠在欄位名稱中，無法直接進行類別分析。</a:t>
-            </a:r>
-          </a:p>
-          <a:p>
-            <a:pPr lvl="1"/>
-            <a:r>
-              <a:rPr lang="zh-TW" altLang="en-US" b="1" dirty="0"/>
-              <a:t>資料冗餘：</a:t>
-            </a:r>
-            <a:r>
-              <a:rPr lang="zh-TW" altLang="en-US" dirty="0"/>
-              <a:t> 包含「全國總量」與「分項數據」，直接運算會造成重複計算。</a:t>
-            </a:r>
-          </a:p>
-          <a:p>
-            <a:pPr lvl="1"/>
-            <a:r>
-              <a:rPr lang="zh-TW" altLang="en-US" b="1" dirty="0"/>
-              <a:t>命名雜訊：</a:t>
-            </a:r>
-            <a:r>
-              <a:rPr lang="zh-TW" altLang="en-US" dirty="0"/>
-              <a:t> 欄位帶有 </a:t>
-            </a:r>
-            <a:r>
-              <a:rPr lang="en-US" altLang="zh-TW" dirty="0"/>
-              <a:t>(</a:t>
-            </a:r>
-            <a:r>
-              <a:rPr lang="zh-TW" altLang="en-US" dirty="0"/>
-              <a:t>數值</a:t>
-            </a:r>
-            <a:r>
-              <a:rPr lang="en-US" altLang="zh-TW" dirty="0"/>
-              <a:t>)</a:t>
-            </a:r>
-            <a:r>
-              <a:rPr lang="zh-TW" altLang="en-US" dirty="0"/>
-              <a:t> 或 </a:t>
-            </a:r>
-            <a:r>
-              <a:rPr lang="en-US" altLang="zh-TW" dirty="0"/>
-              <a:t>_</a:t>
-            </a:r>
-            <a:r>
-              <a:rPr lang="zh-TW" altLang="en-US" dirty="0"/>
-              <a:t>全國 等非結構化文字。</a:t>
-            </a:r>
+              <a:t>Power BI </a:t>
+            </a:r>
+            <a:r>
+              <a:rPr lang="zh-TW" altLang="en-US" dirty="0"/>
+              <a:t>圖表，看看是不是出現了以下現象：</a:t>
+            </a:r>
+          </a:p>
+          <a:p>
+            <a:r>
+              <a:rPr lang="zh-TW" altLang="en-US" b="1" dirty="0"/>
+              <a:t>「民間自用綠能」的線條開始陡峭上升。</a:t>
+            </a:r>
+            <a:endParaRPr lang="zh-TW" altLang="en-US" dirty="0"/>
+          </a:p>
+          <a:p>
+            <a:r>
+              <a:rPr lang="zh-TW" altLang="en-US" b="1" dirty="0"/>
+              <a:t>「民營電廠 </a:t>
+            </a:r>
+            <a:r>
+              <a:rPr lang="en-US" altLang="zh-TW" b="1" dirty="0"/>
+              <a:t>(IPP) </a:t>
+            </a:r>
+            <a:r>
+              <a:rPr lang="zh-TW" altLang="en-US" b="1" dirty="0"/>
+              <a:t>綠能」大型案場開始併網。</a:t>
+            </a:r>
+            <a:endParaRPr lang="zh-TW" altLang="en-US" dirty="0"/>
           </a:p>
           <a:p>
             <a:endParaRPr lang="zh-TW" altLang="en-US" dirty="0"/>
@@ -3645,7 +3571,7 @@
     </p:spTree>
     <p:extLst>
       <p:ext uri="{BB962C8B-B14F-4D97-AF65-F5344CB8AC3E}">
-        <p14:creationId xmlns:p14="http://schemas.microsoft.com/office/powerpoint/2010/main" val="1119287776"/>
+        <p14:creationId xmlns:p14="http://schemas.microsoft.com/office/powerpoint/2010/main" val="3335961805"/>
       </p:ext>
     </p:extLst>
   </p:cSld>
@@ -3677,6 +3603,750 @@
           <p:cNvPr id="2" name="標題 1">
             <a:extLst>
               <a:ext uri="{FF2B5EF4-FFF2-40B4-BE49-F238E27FC236}">
+                <a16:creationId xmlns:a16="http://schemas.microsoft.com/office/drawing/2014/main" id="{DDE79172-72BF-B270-BC98-57276887EC43}"/>
+              </a:ext>
+            </a:extLst>
+          </p:cNvPr>
+          <p:cNvSpPr>
+            <a:spLocks noGrp="1"/>
+          </p:cNvSpPr>
+          <p:nvPr>
+            <p:ph type="title"/>
+          </p:nvPr>
+        </p:nvSpPr>
+        <p:spPr/>
+        <p:txBody>
+          <a:bodyPr/>
+          <a:lstStyle/>
+          <a:p>
+            <a:endParaRPr lang="zh-TW" altLang="en-US"/>
+          </a:p>
+        </p:txBody>
+      </p:sp>
+      <p:sp>
+        <p:nvSpPr>
+          <p:cNvPr id="3" name="內容版面配置區 2">
+            <a:extLst>
+              <a:ext uri="{FF2B5EF4-FFF2-40B4-BE49-F238E27FC236}">
+                <a16:creationId xmlns:a16="http://schemas.microsoft.com/office/drawing/2014/main" id="{C5357848-2309-7B01-D90A-4FCA7E772186}"/>
+              </a:ext>
+            </a:extLst>
+          </p:cNvPr>
+          <p:cNvSpPr>
+            <a:spLocks noGrp="1"/>
+          </p:cNvSpPr>
+          <p:nvPr>
+            <p:ph idx="1"/>
+          </p:nvPr>
+        </p:nvSpPr>
+        <p:spPr/>
+        <p:txBody>
+          <a:bodyPr/>
+          <a:lstStyle/>
+          <a:p>
+            <a:r>
+              <a:rPr lang="en-US" altLang="zh-TW" b="1" dirty="0"/>
+              <a:t>5. Power BI </a:t>
+            </a:r>
+            <a:r>
+              <a:rPr lang="zh-TW" altLang="en-US" b="1" dirty="0"/>
+              <a:t>視覺化報表產出 </a:t>
+            </a:r>
+            <a:r>
+              <a:rPr lang="en-US" altLang="zh-TW" b="1" dirty="0"/>
+              <a:t>(Visual Dashboard)</a:t>
+            </a:r>
+          </a:p>
+          <a:p>
+            <a:r>
+              <a:rPr lang="zh-TW" altLang="en-US" b="1" dirty="0"/>
+              <a:t>趨勢圖表：</a:t>
+            </a:r>
+            <a:r>
+              <a:rPr lang="zh-TW" altLang="en-US" dirty="0"/>
+              <a:t> 繪製動態堆疊面積圖，展現 </a:t>
+            </a:r>
+            <a:r>
+              <a:rPr lang="en-US" altLang="zh-TW" dirty="0"/>
+              <a:t>20 </a:t>
+            </a:r>
+            <a:r>
+              <a:rPr lang="zh-TW" altLang="en-US" dirty="0"/>
+              <a:t>年結構變遷。</a:t>
+            </a:r>
+          </a:p>
+          <a:p>
+            <a:r>
+              <a:rPr lang="zh-TW" altLang="en-US" b="1" dirty="0"/>
+              <a:t>核心指標 </a:t>
+            </a:r>
+            <a:r>
+              <a:rPr lang="en-US" altLang="zh-TW" b="1" dirty="0"/>
+              <a:t>(KPI)</a:t>
+            </a:r>
+            <a:r>
+              <a:rPr lang="zh-TW" altLang="en-US" b="1" dirty="0"/>
+              <a:t>：</a:t>
+            </a:r>
+            <a:r>
+              <a:rPr lang="zh-TW" altLang="en-US" dirty="0"/>
+              <a:t> 建立動態量值卡片，即時顯示當前潔淨能源佔比。</a:t>
+            </a:r>
+          </a:p>
+          <a:p>
+            <a:r>
+              <a:rPr lang="zh-TW" altLang="en-US" b="1" dirty="0"/>
+              <a:t>互動設計：</a:t>
+            </a:r>
+            <a:r>
+              <a:rPr lang="zh-TW" altLang="en-US" dirty="0"/>
+              <a:t> 設置時間與主體切片器 </a:t>
+            </a:r>
+            <a:r>
+              <a:rPr lang="en-US" altLang="zh-TW" dirty="0"/>
+              <a:t>(Slicer)</a:t>
+            </a:r>
+            <a:r>
+              <a:rPr lang="zh-TW" altLang="en-US" dirty="0"/>
+              <a:t>，支持「下鑽式」探索。</a:t>
+            </a:r>
+          </a:p>
+          <a:p>
+            <a:endParaRPr lang="zh-TW" altLang="en-US" dirty="0"/>
+          </a:p>
+        </p:txBody>
+      </p:sp>
+    </p:spTree>
+    <p:extLst>
+      <p:ext uri="{BB962C8B-B14F-4D97-AF65-F5344CB8AC3E}">
+        <p14:creationId xmlns:p14="http://schemas.microsoft.com/office/powerpoint/2010/main" val="2226702609"/>
+      </p:ext>
+    </p:extLst>
+  </p:cSld>
+  <p:clrMapOvr>
+    <a:masterClrMapping/>
+  </p:clrMapOvr>
+</p:sld>
+</file>
+
+<file path=ppt/slides/slide12.xml><?xml version="1.0" encoding="utf-8"?>
+<p:sld xmlns:a="http://schemas.openxmlformats.org/drawingml/2006/main" xmlns:r="http://schemas.openxmlformats.org/officeDocument/2006/relationships" xmlns:p="http://schemas.openxmlformats.org/presentationml/2006/main">
+  <p:cSld>
+    <p:spTree>
+      <p:nvGrpSpPr>
+        <p:cNvPr id="1" name=""/>
+        <p:cNvGrpSpPr/>
+        <p:nvPr/>
+      </p:nvGrpSpPr>
+      <p:grpSpPr>
+        <a:xfrm>
+          <a:off x="0" y="0"/>
+          <a:ext cx="0" cy="0"/>
+          <a:chOff x="0" y="0"/>
+          <a:chExt cx="0" cy="0"/>
+        </a:xfrm>
+      </p:grpSpPr>
+      <p:sp>
+        <p:nvSpPr>
+          <p:cNvPr id="2" name="標題 1">
+            <a:extLst>
+              <a:ext uri="{FF2B5EF4-FFF2-40B4-BE49-F238E27FC236}">
+                <a16:creationId xmlns:a16="http://schemas.microsoft.com/office/drawing/2014/main" id="{9D24B10B-341A-DB2B-6121-2E6909E8CC98}"/>
+              </a:ext>
+            </a:extLst>
+          </p:cNvPr>
+          <p:cNvSpPr>
+            <a:spLocks noGrp="1"/>
+          </p:cNvSpPr>
+          <p:nvPr>
+            <p:ph type="title"/>
+          </p:nvPr>
+        </p:nvSpPr>
+        <p:spPr/>
+        <p:txBody>
+          <a:bodyPr/>
+          <a:lstStyle/>
+          <a:p>
+            <a:endParaRPr lang="zh-TW" altLang="en-US"/>
+          </a:p>
+        </p:txBody>
+      </p:sp>
+      <p:sp>
+        <p:nvSpPr>
+          <p:cNvPr id="3" name="內容版面配置區 2">
+            <a:extLst>
+              <a:ext uri="{FF2B5EF4-FFF2-40B4-BE49-F238E27FC236}">
+                <a16:creationId xmlns:a16="http://schemas.microsoft.com/office/drawing/2014/main" id="{0523407A-2F3A-C50B-3F64-91A8D5F85E66}"/>
+              </a:ext>
+            </a:extLst>
+          </p:cNvPr>
+          <p:cNvSpPr>
+            <a:spLocks noGrp="1"/>
+          </p:cNvSpPr>
+          <p:nvPr>
+            <p:ph idx="1"/>
+          </p:nvPr>
+        </p:nvSpPr>
+        <p:spPr/>
+        <p:txBody>
+          <a:bodyPr/>
+          <a:lstStyle/>
+          <a:p>
+            <a:r>
+              <a:rPr lang="en-US" altLang="zh-TW" b="1" dirty="0"/>
+              <a:t>6. </a:t>
+            </a:r>
+            <a:r>
+              <a:rPr lang="zh-TW" altLang="en-US" b="1" dirty="0"/>
+              <a:t>專題簡報生成與結論 </a:t>
+            </a:r>
+            <a:r>
+              <a:rPr lang="en-US" altLang="zh-TW" b="1" dirty="0"/>
+              <a:t>(Final Presentation)</a:t>
+            </a:r>
+          </a:p>
+          <a:p>
+            <a:r>
+              <a:rPr lang="zh-TW" altLang="en-US" b="1" dirty="0"/>
+              <a:t>技術總結：</a:t>
+            </a:r>
+            <a:r>
+              <a:rPr lang="zh-TW" altLang="en-US" dirty="0"/>
+              <a:t> 說明 </a:t>
+            </a:r>
+            <a:r>
+              <a:rPr lang="en-US" altLang="zh-TW" dirty="0"/>
+              <a:t>ETL </a:t>
+            </a:r>
+            <a:r>
+              <a:rPr lang="zh-TW" altLang="en-US" dirty="0"/>
+              <a:t>處理過程與資料嚴謹度。</a:t>
+            </a:r>
+          </a:p>
+          <a:p>
+            <a:r>
+              <a:rPr lang="zh-TW" altLang="en-US" b="1" dirty="0"/>
+              <a:t>關鍵洞察：</a:t>
+            </a:r>
+            <a:r>
+              <a:rPr lang="zh-TW" altLang="en-US" dirty="0"/>
+              <a:t> 總結自用發電設備如何引領能源轉型。</a:t>
+            </a:r>
+          </a:p>
+          <a:p>
+            <a:r>
+              <a:rPr lang="zh-TW" altLang="en-US" b="1" dirty="0"/>
+              <a:t>策略建議：</a:t>
+            </a:r>
+            <a:r>
+              <a:rPr lang="zh-TW" altLang="en-US" dirty="0"/>
+              <a:t> 根據數據預測 </a:t>
+            </a:r>
+            <a:r>
+              <a:rPr lang="en-US" altLang="zh-TW" dirty="0"/>
+              <a:t>2026 </a:t>
+            </a:r>
+            <a:r>
+              <a:rPr lang="zh-TW" altLang="en-US" dirty="0"/>
+              <a:t>年後台灣能源配比的挑戰。</a:t>
+            </a:r>
+          </a:p>
+          <a:p>
+            <a:endParaRPr lang="zh-TW" altLang="en-US" dirty="0"/>
+          </a:p>
+        </p:txBody>
+      </p:sp>
+    </p:spTree>
+    <p:extLst>
+      <p:ext uri="{BB962C8B-B14F-4D97-AF65-F5344CB8AC3E}">
+        <p14:creationId xmlns:p14="http://schemas.microsoft.com/office/powerpoint/2010/main" val="3236247884"/>
+      </p:ext>
+    </p:extLst>
+  </p:cSld>
+  <p:clrMapOvr>
+    <a:masterClrMapping/>
+  </p:clrMapOvr>
+</p:sld>
+</file>
+
+<file path=ppt/slides/slide13.xml><?xml version="1.0" encoding="utf-8"?>
+<p:sld xmlns:a="http://schemas.openxmlformats.org/drawingml/2006/main" xmlns:r="http://schemas.openxmlformats.org/officeDocument/2006/relationships" xmlns:p="http://schemas.openxmlformats.org/presentationml/2006/main">
+  <p:cSld>
+    <p:spTree>
+      <p:nvGrpSpPr>
+        <p:cNvPr id="1" name=""/>
+        <p:cNvGrpSpPr/>
+        <p:nvPr/>
+      </p:nvGrpSpPr>
+      <p:grpSpPr>
+        <a:xfrm>
+          <a:off x="0" y="0"/>
+          <a:ext cx="0" cy="0"/>
+          <a:chOff x="0" y="0"/>
+          <a:chExt cx="0" cy="0"/>
+        </a:xfrm>
+      </p:grpSpPr>
+      <p:sp>
+        <p:nvSpPr>
+          <p:cNvPr id="2" name="標題 1">
+            <a:extLst>
+              <a:ext uri="{FF2B5EF4-FFF2-40B4-BE49-F238E27FC236}">
+                <a16:creationId xmlns:a16="http://schemas.microsoft.com/office/drawing/2014/main" id="{DE433224-B4C8-50D2-0AD6-C468ADA62B8E}"/>
+              </a:ext>
+            </a:extLst>
+          </p:cNvPr>
+          <p:cNvSpPr>
+            <a:spLocks noGrp="1"/>
+          </p:cNvSpPr>
+          <p:nvPr>
+            <p:ph type="title"/>
+          </p:nvPr>
+        </p:nvSpPr>
+        <p:spPr/>
+        <p:txBody>
+          <a:bodyPr/>
+          <a:lstStyle/>
+          <a:p>
+            <a:endParaRPr lang="zh-TW" altLang="en-US"/>
+          </a:p>
+        </p:txBody>
+      </p:sp>
+      <p:sp>
+        <p:nvSpPr>
+          <p:cNvPr id="3" name="內容版面配置區 2">
+            <a:extLst>
+              <a:ext uri="{FF2B5EF4-FFF2-40B4-BE49-F238E27FC236}">
+                <a16:creationId xmlns:a16="http://schemas.microsoft.com/office/drawing/2014/main" id="{9E330D6F-1852-2386-A8C5-C7CAC62384CF}"/>
+              </a:ext>
+            </a:extLst>
+          </p:cNvPr>
+          <p:cNvSpPr>
+            <a:spLocks noGrp="1"/>
+          </p:cNvSpPr>
+          <p:nvPr>
+            <p:ph idx="1"/>
+          </p:nvPr>
+        </p:nvSpPr>
+        <p:spPr/>
+        <p:txBody>
+          <a:bodyPr>
+            <a:normAutofit lnSpcReduction="10000"/>
+          </a:bodyPr>
+          <a:lstStyle/>
+          <a:p>
+            <a:r>
+              <a:rPr lang="zh-TW" altLang="en-US" b="1" dirty="0"/>
+              <a:t>你的下一步建議</a:t>
+            </a:r>
+          </a:p>
+          <a:p>
+            <a:r>
+              <a:rPr lang="zh-TW" altLang="en-US" dirty="0"/>
+              <a:t>既然你已經完成了 </a:t>
+            </a:r>
+            <a:r>
+              <a:rPr lang="en-US" altLang="zh-TW" b="1" dirty="0"/>
+              <a:t>1 </a:t>
+            </a:r>
+            <a:r>
+              <a:rPr lang="zh-TW" altLang="en-US" b="1" dirty="0"/>
+              <a:t>到 </a:t>
+            </a:r>
+            <a:r>
+              <a:rPr lang="en-US" altLang="zh-TW" b="1" dirty="0"/>
+              <a:t>3 </a:t>
+            </a:r>
+            <a:r>
+              <a:rPr lang="zh-TW" altLang="en-US" b="1" dirty="0"/>
+              <a:t>步 </a:t>
+            </a:r>
+            <a:r>
+              <a:rPr lang="en-US" altLang="zh-TW" b="1" dirty="0"/>
+              <a:t>(ETL)</a:t>
+            </a:r>
+            <a:r>
+              <a:rPr lang="zh-TW" altLang="en-US" dirty="0"/>
+              <a:t>，現在進入 </a:t>
+            </a:r>
+            <a:r>
+              <a:rPr lang="zh-TW" altLang="en-US" b="1" dirty="0"/>
+              <a:t>第 </a:t>
+            </a:r>
+            <a:r>
+              <a:rPr lang="en-US" altLang="zh-TW" b="1" dirty="0"/>
+              <a:t>4 </a:t>
+            </a:r>
+            <a:r>
+              <a:rPr lang="zh-TW" altLang="en-US" b="1" dirty="0"/>
+              <a:t>步 </a:t>
+            </a:r>
+            <a:r>
+              <a:rPr lang="en-US" altLang="zh-TW" b="1" dirty="0"/>
+              <a:t>(</a:t>
+            </a:r>
+            <a:r>
+              <a:rPr lang="zh-TW" altLang="en-US" b="1" dirty="0"/>
+              <a:t>資料分析</a:t>
+            </a:r>
+            <a:r>
+              <a:rPr lang="en-US" altLang="zh-TW" b="1" dirty="0"/>
+              <a:t>)</a:t>
+            </a:r>
+            <a:r>
+              <a:rPr lang="zh-TW" altLang="en-US" dirty="0"/>
+              <a:t> 時，你可以試著在 </a:t>
+            </a:r>
+            <a:r>
+              <a:rPr lang="en-US" altLang="zh-TW" dirty="0"/>
+              <a:t>Power BI </a:t>
+            </a:r>
+            <a:r>
+              <a:rPr lang="zh-TW" altLang="en-US" dirty="0"/>
+              <a:t>裡找出這一個答案：</a:t>
+            </a:r>
+          </a:p>
+          <a:p>
+            <a:r>
+              <a:rPr lang="zh-TW" altLang="en-US" b="1" dirty="0"/>
+              <a:t>「在哪一個月份，自用發電設備的</a:t>
+            </a:r>
+            <a:r>
+              <a:rPr lang="en-US" altLang="zh-TW" b="1" dirty="0"/>
+              <a:t>『</a:t>
+            </a:r>
+            <a:r>
+              <a:rPr lang="zh-TW" altLang="en-US" b="1" dirty="0"/>
+              <a:t>太陽光電</a:t>
+            </a:r>
+            <a:r>
+              <a:rPr lang="en-US" altLang="zh-TW" b="1" dirty="0"/>
+              <a:t>』</a:t>
+            </a:r>
+            <a:r>
+              <a:rPr lang="zh-TW" altLang="en-US" b="1" dirty="0"/>
+              <a:t>發電量，第一次超越了台電自身的</a:t>
+            </a:r>
+            <a:r>
+              <a:rPr lang="en-US" altLang="zh-TW" b="1" dirty="0"/>
+              <a:t>『</a:t>
+            </a:r>
+            <a:r>
+              <a:rPr lang="zh-TW" altLang="en-US" b="1" dirty="0"/>
+              <a:t>太陽光電</a:t>
+            </a:r>
+            <a:r>
+              <a:rPr lang="en-US" altLang="zh-TW" b="1" dirty="0"/>
+              <a:t>』</a:t>
+            </a:r>
+            <a:r>
+              <a:rPr lang="zh-TW" altLang="en-US" b="1" dirty="0"/>
+              <a:t>發電量？」</a:t>
+            </a:r>
+            <a:endParaRPr lang="zh-TW" altLang="en-US" dirty="0"/>
+          </a:p>
+          <a:p>
+            <a:r>
+              <a:rPr lang="zh-TW" altLang="en-US" dirty="0"/>
+              <a:t>這會是你簡報中最酷、最有力的一張投影片，因為它直接證明了「能源民主化」的進程。</a:t>
+            </a:r>
+          </a:p>
+          <a:p>
+            <a:r>
+              <a:rPr lang="zh-TW" altLang="en-US" b="1" dirty="0"/>
+              <a:t>需要我幫你把這份 </a:t>
+            </a:r>
+            <a:r>
+              <a:rPr lang="en-US" altLang="zh-TW" b="1" dirty="0"/>
+              <a:t>Agenda </a:t>
+            </a:r>
+            <a:r>
+              <a:rPr lang="zh-TW" altLang="en-US" b="1" dirty="0"/>
+              <a:t>轉換成一份 </a:t>
+            </a:r>
+            <a:r>
+              <a:rPr lang="en-US" altLang="zh-TW" b="1" dirty="0"/>
+              <a:t>PPT </a:t>
+            </a:r>
+            <a:r>
+              <a:rPr lang="zh-TW" altLang="en-US" b="1" dirty="0"/>
+              <a:t>用的「專案時程圖 </a:t>
+            </a:r>
+            <a:r>
+              <a:rPr lang="en-US" altLang="zh-TW" b="1" dirty="0"/>
+              <a:t>(Gantt Chart)</a:t>
+            </a:r>
+            <a:r>
+              <a:rPr lang="zh-TW" altLang="en-US" b="1" dirty="0"/>
+              <a:t>」描述，或是幫你寫出簡報開場的第一張投影片內容嗎？</a:t>
+            </a:r>
+            <a:endParaRPr lang="zh-TW" altLang="en-US" dirty="0"/>
+          </a:p>
+          <a:p>
+            <a:endParaRPr lang="zh-TW" altLang="en-US" dirty="0"/>
+          </a:p>
+        </p:txBody>
+      </p:sp>
+    </p:spTree>
+    <p:extLst>
+      <p:ext uri="{BB962C8B-B14F-4D97-AF65-F5344CB8AC3E}">
+        <p14:creationId xmlns:p14="http://schemas.microsoft.com/office/powerpoint/2010/main" val="1148426050"/>
+      </p:ext>
+    </p:extLst>
+  </p:cSld>
+  <p:clrMapOvr>
+    <a:masterClrMapping/>
+  </p:clrMapOvr>
+</p:sld>
+</file>
+
+<file path=ppt/slides/slide14.xml><?xml version="1.0" encoding="utf-8"?>
+<p:sld xmlns:a="http://schemas.openxmlformats.org/drawingml/2006/main" xmlns:r="http://schemas.openxmlformats.org/officeDocument/2006/relationships" xmlns:p="http://schemas.openxmlformats.org/presentationml/2006/main">
+  <p:cSld>
+    <p:spTree>
+      <p:nvGrpSpPr>
+        <p:cNvPr id="1" name=""/>
+        <p:cNvGrpSpPr/>
+        <p:nvPr/>
+      </p:nvGrpSpPr>
+      <p:grpSpPr>
+        <a:xfrm>
+          <a:off x="0" y="0"/>
+          <a:ext cx="0" cy="0"/>
+          <a:chOff x="0" y="0"/>
+          <a:chExt cx="0" cy="0"/>
+        </a:xfrm>
+      </p:grpSpPr>
+      <p:sp>
+        <p:nvSpPr>
+          <p:cNvPr id="2" name="標題 1">
+            <a:extLst>
+              <a:ext uri="{FF2B5EF4-FFF2-40B4-BE49-F238E27FC236}">
+                <a16:creationId xmlns:a16="http://schemas.microsoft.com/office/drawing/2014/main" id="{A82E70D9-A2F5-4DD7-6774-FDF0B13B48AE}"/>
+              </a:ext>
+            </a:extLst>
+          </p:cNvPr>
+          <p:cNvSpPr>
+            <a:spLocks noGrp="1"/>
+          </p:cNvSpPr>
+          <p:nvPr>
+            <p:ph type="title"/>
+          </p:nvPr>
+        </p:nvSpPr>
+        <p:spPr/>
+        <p:txBody>
+          <a:bodyPr/>
+          <a:lstStyle/>
+          <a:p>
+            <a:r>
+              <a:rPr lang="zh-TW" altLang="en-US" dirty="0"/>
+              <a:t>專題資料處理技術報告 </a:t>
+            </a:r>
+            <a:r>
+              <a:rPr lang="en-US" altLang="zh-TW" dirty="0"/>
+              <a:t>(ETL Summary)</a:t>
+            </a:r>
+            <a:endParaRPr lang="zh-TW" altLang="en-US" dirty="0"/>
+          </a:p>
+        </p:txBody>
+      </p:sp>
+      <p:sp>
+        <p:nvSpPr>
+          <p:cNvPr id="3" name="內容版面配置區 2">
+            <a:extLst>
+              <a:ext uri="{FF2B5EF4-FFF2-40B4-BE49-F238E27FC236}">
+                <a16:creationId xmlns:a16="http://schemas.microsoft.com/office/drawing/2014/main" id="{90BA0607-B15B-CA87-7EC6-ECF75025110D}"/>
+              </a:ext>
+            </a:extLst>
+          </p:cNvPr>
+          <p:cNvSpPr>
+            <a:spLocks noGrp="1"/>
+          </p:cNvSpPr>
+          <p:nvPr>
+            <p:ph idx="1"/>
+          </p:nvPr>
+        </p:nvSpPr>
+        <p:spPr/>
+        <p:txBody>
+          <a:bodyPr/>
+          <a:lstStyle/>
+          <a:p>
+            <a:r>
+              <a:rPr lang="zh-TW" altLang="en-US" b="1" dirty="0"/>
+              <a:t>原始資料來源與挑戰</a:t>
+            </a:r>
+          </a:p>
+          <a:p>
+            <a:r>
+              <a:rPr lang="zh-TW" altLang="en-US" b="1" dirty="0"/>
+              <a:t>資料範疇：</a:t>
+            </a:r>
+            <a:r>
+              <a:rPr lang="zh-TW" altLang="en-US" dirty="0"/>
+              <a:t> </a:t>
+            </a:r>
+            <a:r>
+              <a:rPr lang="en-US" altLang="zh-TW" dirty="0"/>
+              <a:t>2007 </a:t>
+            </a:r>
+            <a:r>
+              <a:rPr lang="zh-TW" altLang="en-US" dirty="0"/>
+              <a:t>年至 </a:t>
+            </a:r>
+            <a:r>
+              <a:rPr lang="en-US" altLang="zh-TW" dirty="0"/>
+              <a:t>2026 </a:t>
+            </a:r>
+            <a:r>
+              <a:rPr lang="zh-TW" altLang="en-US" dirty="0"/>
+              <a:t>年台灣逐月發電量數據。</a:t>
+            </a:r>
+          </a:p>
+          <a:p>
+            <a:r>
+              <a:rPr lang="zh-TW" altLang="en-US" b="1" dirty="0"/>
+              <a:t>原始格式：</a:t>
+            </a:r>
+            <a:r>
+              <a:rPr lang="zh-TW" altLang="en-US" dirty="0"/>
+              <a:t> 典型「寬表 </a:t>
+            </a:r>
+            <a:r>
+              <a:rPr lang="en-US" altLang="zh-TW" dirty="0"/>
+              <a:t>(Wide Table)</a:t>
+            </a:r>
+            <a:r>
+              <a:rPr lang="zh-TW" altLang="en-US" dirty="0"/>
+              <a:t>」，包含超過 </a:t>
+            </a:r>
+            <a:r>
+              <a:rPr lang="en-US" altLang="zh-TW" dirty="0"/>
+              <a:t>50 </a:t>
+            </a:r>
+            <a:r>
+              <a:rPr lang="zh-TW" altLang="en-US" dirty="0"/>
+              <a:t>個欄位（如：再生能源</a:t>
+            </a:r>
+            <a:r>
+              <a:rPr lang="en-US" altLang="zh-TW" dirty="0"/>
+              <a:t>_</a:t>
+            </a:r>
+            <a:r>
+              <a:rPr lang="zh-TW" altLang="en-US" dirty="0"/>
+              <a:t>太陽光電</a:t>
+            </a:r>
+            <a:r>
+              <a:rPr lang="en-US" altLang="zh-TW" dirty="0"/>
+              <a:t>_</a:t>
+            </a:r>
+            <a:r>
+              <a:rPr lang="zh-TW" altLang="en-US" dirty="0"/>
+              <a:t>台電）。</a:t>
+            </a:r>
+          </a:p>
+          <a:p>
+            <a:r>
+              <a:rPr lang="zh-TW" altLang="en-US" b="1" dirty="0"/>
+              <a:t>面臨挑戰：</a:t>
+            </a:r>
+            <a:r>
+              <a:rPr lang="zh-TW" altLang="en-US" dirty="0"/>
+              <a:t> * </a:t>
+            </a:r>
+            <a:r>
+              <a:rPr lang="zh-TW" altLang="en-US" b="1" dirty="0"/>
+              <a:t>維度混雜：</a:t>
+            </a:r>
+            <a:r>
+              <a:rPr lang="zh-TW" altLang="en-US" dirty="0"/>
+              <a:t> 經營主體、能源類別、發電細項全擠在欄位名稱中，無法直接進行類別分析。</a:t>
+            </a:r>
+          </a:p>
+          <a:p>
+            <a:pPr lvl="1"/>
+            <a:r>
+              <a:rPr lang="zh-TW" altLang="en-US" b="1" dirty="0"/>
+              <a:t>資料冗餘：</a:t>
+            </a:r>
+            <a:r>
+              <a:rPr lang="zh-TW" altLang="en-US" dirty="0"/>
+              <a:t> 包含「全國總量」與「分項數據」，直接運算會造成重複計算。</a:t>
+            </a:r>
+          </a:p>
+          <a:p>
+            <a:pPr lvl="1"/>
+            <a:r>
+              <a:rPr lang="zh-TW" altLang="en-US" b="1" dirty="0"/>
+              <a:t>命名雜訊：</a:t>
+            </a:r>
+            <a:r>
+              <a:rPr lang="zh-TW" altLang="en-US" dirty="0"/>
+              <a:t> 欄位帶有 </a:t>
+            </a:r>
+            <a:r>
+              <a:rPr lang="en-US" altLang="zh-TW" dirty="0"/>
+              <a:t>(</a:t>
+            </a:r>
+            <a:r>
+              <a:rPr lang="zh-TW" altLang="en-US" dirty="0"/>
+              <a:t>數值</a:t>
+            </a:r>
+            <a:r>
+              <a:rPr lang="en-US" altLang="zh-TW" dirty="0"/>
+              <a:t>)</a:t>
+            </a:r>
+            <a:r>
+              <a:rPr lang="zh-TW" altLang="en-US" dirty="0"/>
+              <a:t> 或 </a:t>
+            </a:r>
+            <a:r>
+              <a:rPr lang="en-US" altLang="zh-TW" dirty="0"/>
+              <a:t>_</a:t>
+            </a:r>
+            <a:r>
+              <a:rPr lang="zh-TW" altLang="en-US" dirty="0"/>
+              <a:t>全國 等非結構化文字。</a:t>
+            </a:r>
+          </a:p>
+          <a:p>
+            <a:endParaRPr lang="zh-TW" altLang="en-US" dirty="0"/>
+          </a:p>
+        </p:txBody>
+      </p:sp>
+    </p:spTree>
+    <p:extLst>
+      <p:ext uri="{BB962C8B-B14F-4D97-AF65-F5344CB8AC3E}">
+        <p14:creationId xmlns:p14="http://schemas.microsoft.com/office/powerpoint/2010/main" val="1119287776"/>
+      </p:ext>
+    </p:extLst>
+  </p:cSld>
+  <p:clrMapOvr>
+    <a:masterClrMapping/>
+  </p:clrMapOvr>
+</p:sld>
+</file>
+
+<file path=ppt/slides/slide15.xml><?xml version="1.0" encoding="utf-8"?>
+<p:sld xmlns:a="http://schemas.openxmlformats.org/drawingml/2006/main" xmlns:r="http://schemas.openxmlformats.org/officeDocument/2006/relationships" xmlns:p="http://schemas.openxmlformats.org/presentationml/2006/main">
+  <p:cSld>
+    <p:spTree>
+      <p:nvGrpSpPr>
+        <p:cNvPr id="1" name=""/>
+        <p:cNvGrpSpPr/>
+        <p:nvPr/>
+      </p:nvGrpSpPr>
+      <p:grpSpPr>
+        <a:xfrm>
+          <a:off x="0" y="0"/>
+          <a:ext cx="0" cy="0"/>
+          <a:chOff x="0" y="0"/>
+          <a:chExt cx="0" cy="0"/>
+        </a:xfrm>
+      </p:grpSpPr>
+      <p:sp>
+        <p:nvSpPr>
+          <p:cNvPr id="2" name="標題 1">
+            <a:extLst>
+              <a:ext uri="{FF2B5EF4-FFF2-40B4-BE49-F238E27FC236}">
                 <a16:creationId xmlns:a16="http://schemas.microsoft.com/office/drawing/2014/main" id="{F3C46CB4-108E-A652-0C0E-D00F2D90AA4A}"/>
               </a:ext>
             </a:extLst>
@@ -3968,7 +4638,7 @@
 </p:sld>
 </file>
 
-<file path=ppt/slides/slide12.xml><?xml version="1.0" encoding="utf-8"?>
+<file path=ppt/slides/slide16.xml><?xml version="1.0" encoding="utf-8"?>
 <p:sld xmlns:a="http://schemas.openxmlformats.org/drawingml/2006/main" xmlns:r="http://schemas.openxmlformats.org/officeDocument/2006/relationships" xmlns:p="http://schemas.openxmlformats.org/presentationml/2006/main">
   <p:cSld>
     <p:spTree>
@@ -4257,7 +4927,7 @@
 </p:sld>
 </file>
 
-<file path=ppt/slides/slide13.xml><?xml version="1.0" encoding="utf-8"?>
+<file path=ppt/slides/slide17.xml><?xml version="1.0" encoding="utf-8"?>
 <p:sld xmlns:a="http://schemas.openxmlformats.org/drawingml/2006/main" xmlns:r="http://schemas.openxmlformats.org/officeDocument/2006/relationships" xmlns:p="http://schemas.openxmlformats.org/presentationml/2006/main">
   <p:cSld>
     <p:spTree>
@@ -4544,7 +5214,7 @@
 </p:sld>
 </file>
 
-<file path=ppt/slides/slide14.xml><?xml version="1.0" encoding="utf-8"?>
+<file path=ppt/slides/slide18.xml><?xml version="1.0" encoding="utf-8"?>
 <p:sld xmlns:a="http://schemas.openxmlformats.org/drawingml/2006/main" xmlns:r="http://schemas.openxmlformats.org/officeDocument/2006/relationships" xmlns:p="http://schemas.openxmlformats.org/presentationml/2006/main">
   <p:cSld>
     <p:spTree>
@@ -5443,7 +6113,7 @@
 </p:sld>
 </file>
 
-<file path=ppt/slides/slide15.xml><?xml version="1.0" encoding="utf-8"?>
+<file path=ppt/slides/slide19.xml><?xml version="1.0" encoding="utf-8"?>
 <p:sld xmlns:a="http://schemas.openxmlformats.org/drawingml/2006/main" xmlns:r="http://schemas.openxmlformats.org/officeDocument/2006/relationships" xmlns:p="http://schemas.openxmlformats.org/presentationml/2006/main">
   <p:cSld>
     <p:spTree>
@@ -5680,149 +6350,6 @@
     <p:extLst>
       <p:ext uri="{BB962C8B-B14F-4D97-AF65-F5344CB8AC3E}">
         <p14:creationId xmlns:p14="http://schemas.microsoft.com/office/powerpoint/2010/main" val="958773556"/>
-      </p:ext>
-    </p:extLst>
-  </p:cSld>
-  <p:clrMapOvr>
-    <a:masterClrMapping/>
-  </p:clrMapOvr>
-</p:sld>
-</file>
-
-<file path=ppt/slides/slide16.xml><?xml version="1.0" encoding="utf-8"?>
-<p:sld xmlns:a="http://schemas.openxmlformats.org/drawingml/2006/main" xmlns:r="http://schemas.openxmlformats.org/officeDocument/2006/relationships" xmlns:p="http://schemas.openxmlformats.org/presentationml/2006/main">
-  <p:cSld>
-    <p:spTree>
-      <p:nvGrpSpPr>
-        <p:cNvPr id="1" name=""/>
-        <p:cNvGrpSpPr/>
-        <p:nvPr/>
-      </p:nvGrpSpPr>
-      <p:grpSpPr>
-        <a:xfrm>
-          <a:off x="0" y="0"/>
-          <a:ext cx="0" cy="0"/>
-          <a:chOff x="0" y="0"/>
-          <a:chExt cx="0" cy="0"/>
-        </a:xfrm>
-      </p:grpSpPr>
-      <p:sp>
-        <p:nvSpPr>
-          <p:cNvPr id="2" name="標題 1">
-            <a:extLst>
-              <a:ext uri="{FF2B5EF4-FFF2-40B4-BE49-F238E27FC236}">
-                <a16:creationId xmlns:a16="http://schemas.microsoft.com/office/drawing/2014/main" id="{7CE3594B-799E-9DB7-10AF-5F6E79A716E6}"/>
-              </a:ext>
-            </a:extLst>
-          </p:cNvPr>
-          <p:cNvSpPr>
-            <a:spLocks noGrp="1"/>
-          </p:cNvSpPr>
-          <p:nvPr>
-            <p:ph type="title"/>
-          </p:nvPr>
-        </p:nvSpPr>
-        <p:spPr/>
-        <p:txBody>
-          <a:bodyPr/>
-          <a:lstStyle/>
-          <a:p>
-            <a:endParaRPr lang="zh-TW" altLang="en-US"/>
-          </a:p>
-        </p:txBody>
-      </p:sp>
-      <p:sp>
-        <p:nvSpPr>
-          <p:cNvPr id="3" name="內容版面配置區 2">
-            <a:extLst>
-              <a:ext uri="{FF2B5EF4-FFF2-40B4-BE49-F238E27FC236}">
-                <a16:creationId xmlns:a16="http://schemas.microsoft.com/office/drawing/2014/main" id="{2472D245-7BFF-56E4-1E1D-9FE302E3A3FF}"/>
-              </a:ext>
-            </a:extLst>
-          </p:cNvPr>
-          <p:cNvSpPr>
-            <a:spLocks noGrp="1"/>
-          </p:cNvSpPr>
-          <p:nvPr>
-            <p:ph idx="1"/>
-          </p:nvPr>
-        </p:nvSpPr>
-        <p:spPr/>
-        <p:txBody>
-          <a:bodyPr>
-            <a:normAutofit lnSpcReduction="10000"/>
-          </a:bodyPr>
-          <a:lstStyle/>
-          <a:p>
-            <a:r>
-              <a:rPr lang="zh-TW" altLang="en-US" b="1" dirty="0"/>
-              <a:t>簡報最後一頁的標語 </a:t>
-            </a:r>
-            <a:r>
-              <a:rPr lang="en-US" altLang="zh-TW" b="1" dirty="0"/>
-              <a:t>(The Final Quote)</a:t>
-            </a:r>
-          </a:p>
-          <a:p>
-            <a:r>
-              <a:rPr lang="zh-TW" altLang="en-US" dirty="0"/>
-              <a:t>你可以用一句強而有力的話作為 </a:t>
-            </a:r>
-            <a:r>
-              <a:rPr lang="en-US" altLang="zh-TW" dirty="0"/>
-              <a:t>Ending</a:t>
-            </a:r>
-            <a:r>
-              <a:rPr lang="zh-TW" altLang="en-US" dirty="0"/>
-              <a:t>：</a:t>
-            </a:r>
-          </a:p>
-          <a:p>
-            <a:r>
-              <a:rPr lang="zh-TW" altLang="en-US" b="1" dirty="0"/>
-              <a:t>「數據不只是紀錄過去的產量，更是指引未來能源轉型路徑的導航儀。」</a:t>
-            </a:r>
-            <a:endParaRPr lang="zh-TW" altLang="en-US" dirty="0"/>
-          </a:p>
-          <a:p>
-            <a:br>
-              <a:rPr lang="zh-TW" altLang="en-US" dirty="0"/>
-            </a:br>
-            <a:endParaRPr lang="zh-TW" altLang="en-US" dirty="0"/>
-          </a:p>
-          <a:p>
-            <a:r>
-              <a:rPr lang="zh-TW" altLang="en-US" b="1" dirty="0"/>
-              <a:t>🎨 簡報視覺建議 </a:t>
-            </a:r>
-            <a:r>
-              <a:rPr lang="en-US" altLang="zh-TW" b="1" dirty="0"/>
-              <a:t>(Visual Tips)</a:t>
-            </a:r>
-          </a:p>
-          <a:p>
-            <a:r>
-              <a:rPr lang="zh-TW" altLang="en-US" dirty="0"/>
-              <a:t>在講這一頁結語時，背景可以放一張你做出來的 </a:t>
-            </a:r>
-            <a:r>
-              <a:rPr lang="zh-TW" altLang="en-US" b="1" dirty="0"/>
-              <a:t>「潔淨能源佔比趨勢折線圖」</a:t>
-            </a:r>
-            <a:r>
-              <a:rPr lang="zh-TW" altLang="en-US" dirty="0"/>
-              <a:t>，但把透明度調高（變淡），上面疊加這三個結論。這樣會顯得非常專業且具備說服力。</a:t>
-            </a:r>
-          </a:p>
-          <a:p>
-            <a:endParaRPr lang="zh-TW" altLang="en-US" dirty="0"/>
-          </a:p>
-        </p:txBody>
-      </p:sp>
-    </p:spTree>
-    <p:extLst>
-      <p:ext uri="{BB962C8B-B14F-4D97-AF65-F5344CB8AC3E}">
-        <p14:creationId xmlns:p14="http://schemas.microsoft.com/office/powerpoint/2010/main" val="1300169952"/>
       </p:ext>
     </p:extLst>
   </p:cSld>
@@ -7348,6 +7875,149 @@
 </p:sld>
 </file>
 
+<file path=ppt/slides/slide20.xml><?xml version="1.0" encoding="utf-8"?>
+<p:sld xmlns:a="http://schemas.openxmlformats.org/drawingml/2006/main" xmlns:r="http://schemas.openxmlformats.org/officeDocument/2006/relationships" xmlns:p="http://schemas.openxmlformats.org/presentationml/2006/main">
+  <p:cSld>
+    <p:spTree>
+      <p:nvGrpSpPr>
+        <p:cNvPr id="1" name=""/>
+        <p:cNvGrpSpPr/>
+        <p:nvPr/>
+      </p:nvGrpSpPr>
+      <p:grpSpPr>
+        <a:xfrm>
+          <a:off x="0" y="0"/>
+          <a:ext cx="0" cy="0"/>
+          <a:chOff x="0" y="0"/>
+          <a:chExt cx="0" cy="0"/>
+        </a:xfrm>
+      </p:grpSpPr>
+      <p:sp>
+        <p:nvSpPr>
+          <p:cNvPr id="2" name="標題 1">
+            <a:extLst>
+              <a:ext uri="{FF2B5EF4-FFF2-40B4-BE49-F238E27FC236}">
+                <a16:creationId xmlns:a16="http://schemas.microsoft.com/office/drawing/2014/main" id="{7CE3594B-799E-9DB7-10AF-5F6E79A716E6}"/>
+              </a:ext>
+            </a:extLst>
+          </p:cNvPr>
+          <p:cNvSpPr>
+            <a:spLocks noGrp="1"/>
+          </p:cNvSpPr>
+          <p:nvPr>
+            <p:ph type="title"/>
+          </p:nvPr>
+        </p:nvSpPr>
+        <p:spPr/>
+        <p:txBody>
+          <a:bodyPr/>
+          <a:lstStyle/>
+          <a:p>
+            <a:endParaRPr lang="zh-TW" altLang="en-US"/>
+          </a:p>
+        </p:txBody>
+      </p:sp>
+      <p:sp>
+        <p:nvSpPr>
+          <p:cNvPr id="3" name="內容版面配置區 2">
+            <a:extLst>
+              <a:ext uri="{FF2B5EF4-FFF2-40B4-BE49-F238E27FC236}">
+                <a16:creationId xmlns:a16="http://schemas.microsoft.com/office/drawing/2014/main" id="{2472D245-7BFF-56E4-1E1D-9FE302E3A3FF}"/>
+              </a:ext>
+            </a:extLst>
+          </p:cNvPr>
+          <p:cNvSpPr>
+            <a:spLocks noGrp="1"/>
+          </p:cNvSpPr>
+          <p:nvPr>
+            <p:ph idx="1"/>
+          </p:nvPr>
+        </p:nvSpPr>
+        <p:spPr/>
+        <p:txBody>
+          <a:bodyPr>
+            <a:normAutofit lnSpcReduction="10000"/>
+          </a:bodyPr>
+          <a:lstStyle/>
+          <a:p>
+            <a:r>
+              <a:rPr lang="zh-TW" altLang="en-US" b="1" dirty="0"/>
+              <a:t>簡報最後一頁的標語 </a:t>
+            </a:r>
+            <a:r>
+              <a:rPr lang="en-US" altLang="zh-TW" b="1" dirty="0"/>
+              <a:t>(The Final Quote)</a:t>
+            </a:r>
+          </a:p>
+          <a:p>
+            <a:r>
+              <a:rPr lang="zh-TW" altLang="en-US" dirty="0"/>
+              <a:t>你可以用一句強而有力的話作為 </a:t>
+            </a:r>
+            <a:r>
+              <a:rPr lang="en-US" altLang="zh-TW" dirty="0"/>
+              <a:t>Ending</a:t>
+            </a:r>
+            <a:r>
+              <a:rPr lang="zh-TW" altLang="en-US" dirty="0"/>
+              <a:t>：</a:t>
+            </a:r>
+          </a:p>
+          <a:p>
+            <a:r>
+              <a:rPr lang="zh-TW" altLang="en-US" b="1" dirty="0"/>
+              <a:t>「數據不只是紀錄過去的產量，更是指引未來能源轉型路徑的導航儀。」</a:t>
+            </a:r>
+            <a:endParaRPr lang="zh-TW" altLang="en-US" dirty="0"/>
+          </a:p>
+          <a:p>
+            <a:br>
+              <a:rPr lang="zh-TW" altLang="en-US" dirty="0"/>
+            </a:br>
+            <a:endParaRPr lang="zh-TW" altLang="en-US" dirty="0"/>
+          </a:p>
+          <a:p>
+            <a:r>
+              <a:rPr lang="zh-TW" altLang="en-US" b="1" dirty="0"/>
+              <a:t>🎨 簡報視覺建議 </a:t>
+            </a:r>
+            <a:r>
+              <a:rPr lang="en-US" altLang="zh-TW" b="1" dirty="0"/>
+              <a:t>(Visual Tips)</a:t>
+            </a:r>
+          </a:p>
+          <a:p>
+            <a:r>
+              <a:rPr lang="zh-TW" altLang="en-US" dirty="0"/>
+              <a:t>在講這一頁結語時，背景可以放一張你做出來的 </a:t>
+            </a:r>
+            <a:r>
+              <a:rPr lang="zh-TW" altLang="en-US" b="1" dirty="0"/>
+              <a:t>「潔淨能源佔比趨勢折線圖」</a:t>
+            </a:r>
+            <a:r>
+              <a:rPr lang="zh-TW" altLang="en-US" dirty="0"/>
+              <a:t>，但把透明度調高（變淡），上面疊加這三個結論。這樣會顯得非常專業且具備說服力。</a:t>
+            </a:r>
+          </a:p>
+          <a:p>
+            <a:endParaRPr lang="zh-TW" altLang="en-US" dirty="0"/>
+          </a:p>
+        </p:txBody>
+      </p:sp>
+    </p:spTree>
+    <p:extLst>
+      <p:ext uri="{BB962C8B-B14F-4D97-AF65-F5344CB8AC3E}">
+        <p14:creationId xmlns:p14="http://schemas.microsoft.com/office/powerpoint/2010/main" val="1300169952"/>
+      </p:ext>
+    </p:extLst>
+  </p:cSld>
+  <p:clrMapOvr>
+    <a:masterClrMapping/>
+  </p:clrMapOvr>
+</p:sld>
+</file>
+
 <file path=ppt/slides/slide3.xml><?xml version="1.0" encoding="utf-8"?>
 <p:sld xmlns:a="http://schemas.openxmlformats.org/drawingml/2006/main" xmlns:r="http://schemas.openxmlformats.org/officeDocument/2006/relationships" xmlns:p="http://schemas.openxmlformats.org/presentationml/2006/main">
   <p:cSld>
@@ -8007,7 +8677,7 @@
           <p:cNvPr id="2" name="標題 1">
             <a:extLst>
               <a:ext uri="{FF2B5EF4-FFF2-40B4-BE49-F238E27FC236}">
-                <a16:creationId xmlns:a16="http://schemas.microsoft.com/office/drawing/2014/main" id="{DDE79172-72BF-B270-BC98-57276887EC43}"/>
+                <a16:creationId xmlns:a16="http://schemas.microsoft.com/office/drawing/2014/main" id="{0FAF05EE-A011-130D-84D5-615C1D8BF332}"/>
               </a:ext>
             </a:extLst>
           </p:cNvPr>
@@ -8032,7 +8702,7 @@
           <p:cNvPr id="3" name="內容版面配置區 2">
             <a:extLst>
               <a:ext uri="{FF2B5EF4-FFF2-40B4-BE49-F238E27FC236}">
-                <a16:creationId xmlns:a16="http://schemas.microsoft.com/office/drawing/2014/main" id="{C5357848-2309-7B01-D90A-4FCA7E772186}"/>
+                <a16:creationId xmlns:a16="http://schemas.microsoft.com/office/drawing/2014/main" id="{DAACC420-ECC0-F2E1-4707-3F59CAA33016}"/>
               </a:ext>
             </a:extLst>
           </p:cNvPr>
@@ -8045,74 +8715,90 @@
         </p:nvSpPr>
         <p:spPr/>
         <p:txBody>
-          <a:bodyPr/>
+          <a:bodyPr>
+            <a:normAutofit fontScale="92500" lnSpcReduction="10000"/>
+          </a:bodyPr>
           <a:lstStyle/>
           <a:p>
             <a:r>
+              <a:rPr lang="zh-TW" altLang="en-US" b="1" dirty="0"/>
+              <a:t>為什麼 </a:t>
+            </a:r>
+            <a:r>
               <a:rPr lang="en-US" altLang="zh-TW" b="1" dirty="0"/>
-              <a:t>5. Power BI </a:t>
-            </a:r>
-            <a:r>
-              <a:rPr lang="zh-TW" altLang="en-US" b="1" dirty="0"/>
-              <a:t>視覺化報表產出 </a:t>
+              <a:t>2013-2017 </a:t>
+            </a:r>
+            <a:r>
+              <a:rPr lang="zh-TW" altLang="en-US" b="1" dirty="0"/>
+              <a:t>會跌得這麼厲害？</a:t>
+            </a:r>
+          </a:p>
+          <a:p>
+            <a:r>
+              <a:rPr lang="zh-TW" altLang="en-US" dirty="0"/>
+              <a:t>這段時間的「潔淨能源佔比」下降，通常是因為 </a:t>
+            </a:r>
+            <a:r>
+              <a:rPr lang="zh-TW" altLang="en-US" b="1" dirty="0"/>
+              <a:t>「舊動能消失，新動能還沒跟上」</a:t>
+            </a:r>
+            <a:r>
+              <a:rPr lang="zh-TW" altLang="en-US" dirty="0"/>
+              <a:t> 的斷層期：</a:t>
+            </a:r>
+          </a:p>
+          <a:p>
+            <a:r>
+              <a:rPr lang="zh-TW" altLang="en-US" b="1" dirty="0"/>
+              <a:t>核能除役與停機 </a:t>
             </a:r>
             <a:r>
               <a:rPr lang="en-US" altLang="zh-TW" b="1" dirty="0"/>
-              <a:t>(Visual Dashboard)</a:t>
-            </a:r>
-          </a:p>
-          <a:p>
-            <a:r>
-              <a:rPr lang="zh-TW" altLang="en-US" b="1" dirty="0"/>
-              <a:t>趨勢圖表：</a:t>
-            </a:r>
-            <a:r>
-              <a:rPr lang="zh-TW" altLang="en-US" dirty="0"/>
-              <a:t> 繪製動態堆疊面積圖，展現 </a:t>
+              <a:t>(</a:t>
+            </a:r>
+            <a:r>
+              <a:rPr lang="zh-TW" altLang="en-US" b="1" dirty="0"/>
+              <a:t>舊動能撤退</a:t>
+            </a:r>
+            <a:r>
+              <a:rPr lang="en-US" altLang="zh-TW" b="1" dirty="0"/>
+              <a:t>)</a:t>
+            </a:r>
+            <a:r>
+              <a:rPr lang="zh-TW" altLang="en-US" b="1" dirty="0"/>
+              <a:t>：</a:t>
+            </a:r>
+            <a:r>
+              <a:rPr lang="zh-TW" altLang="en-US" dirty="0"/>
+              <a:t> 那幾年正好是核一、核二廠機組陸續因屆期或歲修停機的頻繁期。因為當時「潔淨能源」的分母很大一部分是核能，一旦核能發電量減少，佔比就會掉得很驚人。</a:t>
+            </a:r>
+          </a:p>
+          <a:p>
+            <a:r>
+              <a:rPr lang="zh-TW" altLang="en-US" b="1" dirty="0"/>
+              <a:t>火力發電補缺口：</a:t>
+            </a:r>
+            <a:r>
+              <a:rPr lang="zh-TW" altLang="en-US" dirty="0"/>
+              <a:t> 為了彌補核能留下的電力缺口，那幾年傳統火力（燃煤、燃氣）的發電量通常會衝高，導致潔淨能源的「相對比例」被稀釋。</a:t>
+            </a:r>
+          </a:p>
+          <a:p>
+            <a:r>
+              <a:rPr lang="zh-TW" altLang="en-US" b="1" dirty="0"/>
+              <a:t>再生能源還在「蹲點」：</a:t>
+            </a:r>
+            <a:r>
+              <a:rPr lang="zh-TW" altLang="en-US" dirty="0"/>
+              <a:t> </a:t>
             </a:r>
             <a:r>
               <a:rPr lang="en-US" altLang="zh-TW" dirty="0"/>
-              <a:t>20 </a:t>
-            </a:r>
-            <a:r>
-              <a:rPr lang="zh-TW" altLang="en-US" dirty="0"/>
-              <a:t>年結構變遷。</a:t>
-            </a:r>
-          </a:p>
-          <a:p>
-            <a:r>
-              <a:rPr lang="zh-TW" altLang="en-US" b="1" dirty="0"/>
-              <a:t>核心指標 </a:t>
-            </a:r>
-            <a:r>
-              <a:rPr lang="en-US" altLang="zh-TW" b="1" dirty="0"/>
-              <a:t>(KPI)</a:t>
-            </a:r>
-            <a:r>
-              <a:rPr lang="zh-TW" altLang="en-US" b="1" dirty="0"/>
-              <a:t>：</a:t>
-            </a:r>
-            <a:r>
-              <a:rPr lang="zh-TW" altLang="en-US" dirty="0"/>
-              <a:t> 建立動態量值卡片，即時顯示當前潔淨能源佔比。</a:t>
-            </a:r>
-          </a:p>
-          <a:p>
-            <a:r>
-              <a:rPr lang="zh-TW" altLang="en-US" b="1" dirty="0"/>
-              <a:t>互動設計：</a:t>
-            </a:r>
-            <a:r>
-              <a:rPr lang="zh-TW" altLang="en-US" dirty="0"/>
-              <a:t> 設置時間與主體切片器 </a:t>
-            </a:r>
-            <a:r>
-              <a:rPr lang="en-US" altLang="zh-TW" dirty="0"/>
-              <a:t>(Slicer)</a:t>
-            </a:r>
-            <a:r>
-              <a:rPr lang="zh-TW" altLang="en-US" dirty="0"/>
-              <a:t>，支持「下鑽式」探索。</a:t>
+              <a:t>2013-2016 </a:t>
+            </a:r>
+            <a:r>
+              <a:rPr lang="zh-TW" altLang="en-US" dirty="0"/>
+              <a:t>年間，大規模的光電與離岸風電政策才剛起步，發電貢獻還不足以抵銷核能的減量。</a:t>
             </a:r>
           </a:p>
           <a:p>
@@ -8123,7 +8809,7 @@
     </p:spTree>
     <p:extLst>
       <p:ext uri="{BB962C8B-B14F-4D97-AF65-F5344CB8AC3E}">
-        <p14:creationId xmlns:p14="http://schemas.microsoft.com/office/powerpoint/2010/main" val="2226702609"/>
+        <p14:creationId xmlns:p14="http://schemas.microsoft.com/office/powerpoint/2010/main" val="1765965026"/>
       </p:ext>
     </p:extLst>
   </p:cSld>
@@ -8155,7 +8841,7 @@
           <p:cNvPr id="2" name="標題 1">
             <a:extLst>
               <a:ext uri="{FF2B5EF4-FFF2-40B4-BE49-F238E27FC236}">
-                <a16:creationId xmlns:a16="http://schemas.microsoft.com/office/drawing/2014/main" id="{9D24B10B-341A-DB2B-6121-2E6909E8CC98}"/>
+                <a16:creationId xmlns:a16="http://schemas.microsoft.com/office/drawing/2014/main" id="{F32BE357-F0A7-E486-570D-8AE67608D386}"/>
               </a:ext>
             </a:extLst>
           </p:cNvPr>
@@ -8177,93 +8863,571 @@
       </p:sp>
       <p:sp>
         <p:nvSpPr>
-          <p:cNvPr id="3" name="內容版面配置區 2">
-            <a:extLst>
-              <a:ext uri="{FF2B5EF4-FFF2-40B4-BE49-F238E27FC236}">
-                <a16:creationId xmlns:a16="http://schemas.microsoft.com/office/drawing/2014/main" id="{0523407A-2F3A-C50B-3F64-91A8D5F85E66}"/>
-              </a:ext>
-            </a:extLst>
-          </p:cNvPr>
-          <p:cNvSpPr>
-            <a:spLocks noGrp="1"/>
+          <p:cNvPr id="4" name="Rectangle 1">
+            <a:extLst>
+              <a:ext uri="{FF2B5EF4-FFF2-40B4-BE49-F238E27FC236}">
+                <a16:creationId xmlns:a16="http://schemas.microsoft.com/office/drawing/2014/main" id="{8F7730FA-AD09-8D54-E7A6-BE94BC1E2168}"/>
+              </a:ext>
+            </a:extLst>
+          </p:cNvPr>
+          <p:cNvSpPr>
+            <a:spLocks noGrp="1" noChangeArrowheads="1"/>
           </p:cNvSpPr>
           <p:nvPr>
             <p:ph idx="1"/>
           </p:nvPr>
         </p:nvSpPr>
-        <p:spPr/>
-        <p:txBody>
-          <a:bodyPr/>
+        <p:spPr bwMode="auto">
+          <a:xfrm>
+            <a:off x="838200" y="1253331"/>
+            <a:ext cx="10515600" cy="4351338"/>
+          </a:xfrm>
+          <a:prstGeom prst="rect">
+            <a:avLst/>
+          </a:prstGeom>
+          <a:noFill/>
+          <a:ln>
+            <a:noFill/>
+          </a:ln>
+          <a:effectLst/>
+          <a:extLst>
+            <a:ext uri="{909E8E84-426E-40DD-AFC4-6F175D3DCCD1}">
+              <a14:hiddenFill xmlns:a14="http://schemas.microsoft.com/office/drawing/2010/main">
+                <a:solidFill>
+                  <a:schemeClr val="accent1"/>
+                </a:solidFill>
+              </a14:hiddenFill>
+            </a:ext>
+            <a:ext uri="{91240B29-F687-4F45-9708-019B960494DF}">
+              <a14:hiddenLine xmlns:a14="http://schemas.microsoft.com/office/drawing/2010/main" w="9525">
+                <a:solidFill>
+                  <a:schemeClr val="tx1"/>
+                </a:solidFill>
+                <a:miter lim="800000"/>
+                <a:headEnd/>
+                <a:tailEnd/>
+              </a14:hiddenLine>
+            </a:ext>
+            <a:ext uri="{AF507438-7753-43E0-B8FC-AC1667EBCBE1}">
+              <a14:hiddenEffects xmlns:a14="http://schemas.microsoft.com/office/drawing/2010/main">
+                <a:effectLst>
+                  <a:outerShdw dist="35921" dir="2700000" algn="ctr" rotWithShape="0">
+                    <a:schemeClr val="bg2"/>
+                  </a:outerShdw>
+                </a:effectLst>
+              </a14:hiddenEffects>
+            </a:ext>
+          </a:extLst>
+        </p:spPr>
+        <p:txBody>
+          <a:bodyPr vert="horz" wrap="none" lIns="91440" tIns="45720" rIns="91440" bIns="45720" numCol="1" anchor="ctr" anchorCtr="0" compatLnSpc="1">
+            <a:prstTxWarp prst="textNoShape">
+              <a:avLst/>
+            </a:prstTxWarp>
+            <a:spAutoFit/>
+          </a:bodyPr>
           <a:lstStyle/>
           <a:p>
-            <a:r>
-              <a:rPr lang="en-US" altLang="zh-TW" b="1" dirty="0"/>
-              <a:t>6. </a:t>
-            </a:r>
-            <a:r>
-              <a:rPr lang="zh-TW" altLang="en-US" b="1" dirty="0"/>
-              <a:t>專題簡報生成與結論 </a:t>
-            </a:r>
-            <a:r>
-              <a:rPr lang="en-US" altLang="zh-TW" b="1" dirty="0"/>
-              <a:t>(Final Presentation)</a:t>
-            </a:r>
-          </a:p>
-          <a:p>
-            <a:r>
-              <a:rPr lang="zh-TW" altLang="en-US" b="1" dirty="0"/>
-              <a:t>技術總結：</a:t>
-            </a:r>
-            <a:r>
-              <a:rPr lang="zh-TW" altLang="en-US" dirty="0"/>
-              <a:t> 說明 </a:t>
-            </a:r>
-            <a:r>
-              <a:rPr lang="en-US" altLang="zh-TW" dirty="0"/>
-              <a:t>ETL </a:t>
-            </a:r>
-            <a:r>
-              <a:rPr lang="zh-TW" altLang="en-US" dirty="0"/>
-              <a:t>處理過程與資料嚴謹度。</a:t>
-            </a:r>
-          </a:p>
-          <a:p>
-            <a:r>
-              <a:rPr lang="zh-TW" altLang="en-US" b="1" dirty="0"/>
-              <a:t>關鍵洞察：</a:t>
-            </a:r>
-            <a:r>
-              <a:rPr lang="zh-TW" altLang="en-US" dirty="0"/>
-              <a:t> 總結自用發電設備如何引領能源轉型。</a:t>
-            </a:r>
-          </a:p>
-          <a:p>
-            <a:r>
-              <a:rPr lang="zh-TW" altLang="en-US" b="1" dirty="0"/>
-              <a:t>策略建議：</a:t>
-            </a:r>
-            <a:r>
-              <a:rPr lang="zh-TW" altLang="en-US" dirty="0"/>
-              <a:t> 根據數據預測 </a:t>
-            </a:r>
-            <a:r>
-              <a:rPr lang="en-US" altLang="zh-TW" dirty="0"/>
-              <a:t>2026 </a:t>
-            </a:r>
-            <a:r>
-              <a:rPr lang="zh-TW" altLang="en-US" dirty="0"/>
-              <a:t>年後台灣能源配比的挑戰。</a:t>
-            </a:r>
-          </a:p>
-          <a:p>
-            <a:endParaRPr lang="zh-TW" altLang="en-US" dirty="0"/>
+            <a:pPr marL="0" marR="0" lvl="0" indent="0" algn="l" defTabSz="914400" rtl="0" eaLnBrk="0" fontAlgn="base" latinLnBrk="0" hangingPunct="0">
+              <a:lnSpc>
+                <a:spcPct val="100000"/>
+              </a:lnSpc>
+              <a:spcBef>
+                <a:spcPct val="0"/>
+              </a:spcBef>
+              <a:spcAft>
+                <a:spcPct val="0"/>
+              </a:spcAft>
+              <a:buClrTx/>
+              <a:buSzTx/>
+              <a:buFontTx/>
+              <a:buChar char="•"/>
+              <a:tabLst/>
+            </a:pPr>
+            <a:r>
+              <a:rPr kumimoji="0" lang="zh-TW" altLang="zh-TW" sz="1800" b="1" i="0" u="none" strike="noStrike" cap="none" normalizeH="0" baseline="0" dirty="0">
+                <a:ln>
+                  <a:noFill/>
+                </a:ln>
+                <a:solidFill>
+                  <a:schemeClr val="tx1"/>
+                </a:solidFill>
+                <a:effectLst/>
+                <a:latin typeface="Arial" panose="020B0604020202020204" pitchFamily="34" charset="0"/>
+              </a:rPr>
+              <a:t>第一頁：現況總覽 (The Big Picture)</a:t>
+            </a:r>
+            <a:endParaRPr kumimoji="0" lang="zh-TW" altLang="zh-TW" sz="1800" b="0" i="0" u="none" strike="noStrike" cap="none" normalizeH="0" baseline="0" dirty="0">
+              <a:ln>
+                <a:noFill/>
+              </a:ln>
+              <a:solidFill>
+                <a:schemeClr val="tx1"/>
+              </a:solidFill>
+              <a:effectLst/>
+              <a:latin typeface="Arial" panose="020B0604020202020204" pitchFamily="34" charset="0"/>
+            </a:endParaRPr>
+          </a:p>
+          <a:p>
+            <a:pPr marL="0" marR="0" lvl="0" indent="0" algn="l" defTabSz="914400" rtl="0" eaLnBrk="0" fontAlgn="base" latinLnBrk="0" hangingPunct="0">
+              <a:lnSpc>
+                <a:spcPct val="100000"/>
+              </a:lnSpc>
+              <a:spcBef>
+                <a:spcPct val="0"/>
+              </a:spcBef>
+              <a:spcAft>
+                <a:spcPct val="0"/>
+              </a:spcAft>
+              <a:buClrTx/>
+              <a:buSzTx/>
+              <a:buFontTx/>
+              <a:buChar char="•"/>
+              <a:tabLst/>
+            </a:pPr>
+            <a:r>
+              <a:rPr kumimoji="0" lang="zh-TW" altLang="zh-TW" sz="1800" b="0" i="0" u="none" strike="noStrike" cap="none" normalizeH="0" baseline="0" dirty="0">
+                <a:ln>
+                  <a:noFill/>
+                </a:ln>
+                <a:solidFill>
+                  <a:schemeClr val="tx1"/>
+                </a:solidFill>
+                <a:effectLst/>
+                <a:latin typeface="Arial" panose="020B0604020202020204" pitchFamily="34" charset="0"/>
+              </a:rPr>
+              <a:t>展示「全台潔淨能源滲透率」。</a:t>
+            </a:r>
+          </a:p>
+          <a:p>
+            <a:pPr marL="0" marR="0" lvl="0" indent="0" algn="l" defTabSz="914400" rtl="0" eaLnBrk="0" fontAlgn="base" latinLnBrk="0" hangingPunct="0">
+              <a:lnSpc>
+                <a:spcPct val="100000"/>
+              </a:lnSpc>
+              <a:spcBef>
+                <a:spcPct val="0"/>
+              </a:spcBef>
+              <a:spcAft>
+                <a:spcPct val="0"/>
+              </a:spcAft>
+              <a:buClrTx/>
+              <a:buSzTx/>
+              <a:buFontTx/>
+              <a:buChar char="•"/>
+              <a:tabLst/>
+            </a:pPr>
+            <a:r>
+              <a:rPr kumimoji="0" lang="zh-TW" altLang="zh-TW" sz="1800" b="1" i="0" u="none" strike="noStrike" cap="none" normalizeH="0" baseline="0" dirty="0">
+                <a:ln>
+                  <a:noFill/>
+                </a:ln>
+                <a:solidFill>
+                  <a:schemeClr val="tx1"/>
+                </a:solidFill>
+                <a:effectLst/>
+                <a:latin typeface="Arial" panose="020B0604020202020204" pitchFamily="34" charset="0"/>
+              </a:rPr>
+              <a:t>亮點：</a:t>
+            </a:r>
+            <a:r>
+              <a:rPr kumimoji="0" lang="zh-TW" altLang="zh-TW" sz="1800" b="0" i="0" u="none" strike="noStrike" cap="none" normalizeH="0" baseline="0" dirty="0">
+                <a:ln>
+                  <a:noFill/>
+                </a:ln>
+                <a:solidFill>
+                  <a:schemeClr val="tx1"/>
+                </a:solidFill>
+                <a:effectLst/>
+                <a:latin typeface="Arial" panose="020B0604020202020204" pitchFamily="34" charset="0"/>
+              </a:rPr>
+              <a:t> 指出你剛發現的 </a:t>
+            </a:r>
+            <a:r>
+              <a:rPr kumimoji="0" lang="zh-TW" altLang="zh-TW" sz="1800" b="1" i="0" u="none" strike="noStrike" cap="none" normalizeH="0" baseline="0" dirty="0">
+                <a:ln>
+                  <a:noFill/>
+                </a:ln>
+                <a:solidFill>
+                  <a:schemeClr val="tx1"/>
+                </a:solidFill>
+                <a:effectLst/>
+                <a:latin typeface="Arial" panose="020B0604020202020204" pitchFamily="34" charset="0"/>
+              </a:rPr>
+              <a:t>2017 年觸底反彈</a:t>
+            </a:r>
+            <a:r>
+              <a:rPr kumimoji="0" lang="zh-TW" altLang="zh-TW" sz="1800" b="0" i="0" u="none" strike="noStrike" cap="none" normalizeH="0" baseline="0" dirty="0">
+                <a:ln>
+                  <a:noFill/>
+                </a:ln>
+                <a:solidFill>
+                  <a:schemeClr val="tx1"/>
+                </a:solidFill>
+                <a:effectLst/>
+                <a:latin typeface="Arial" panose="020B0604020202020204" pitchFamily="34" charset="0"/>
+              </a:rPr>
+              <a:t> 現象。</a:t>
+            </a:r>
+          </a:p>
+          <a:p>
+            <a:pPr marL="0" marR="0" lvl="0" indent="0" algn="l" defTabSz="914400" rtl="0" eaLnBrk="0" fontAlgn="base" latinLnBrk="0" hangingPunct="0">
+              <a:lnSpc>
+                <a:spcPct val="100000"/>
+              </a:lnSpc>
+              <a:spcBef>
+                <a:spcPct val="0"/>
+              </a:spcBef>
+              <a:spcAft>
+                <a:spcPct val="0"/>
+              </a:spcAft>
+              <a:buClrTx/>
+              <a:buSzTx/>
+              <a:buFontTx/>
+              <a:buChar char="•"/>
+              <a:tabLst/>
+            </a:pPr>
+            <a:r>
+              <a:rPr kumimoji="0" lang="zh-TW" altLang="zh-TW" sz="1800" b="1" i="0" u="none" strike="noStrike" cap="none" normalizeH="0" baseline="0" dirty="0">
+                <a:ln>
+                  <a:noFill/>
+                </a:ln>
+                <a:solidFill>
+                  <a:schemeClr val="tx1"/>
+                </a:solidFill>
+                <a:effectLst/>
+                <a:latin typeface="Arial" panose="020B0604020202020204" pitchFamily="34" charset="0"/>
+              </a:rPr>
+              <a:t>第二頁：主體消長 (Who's Doing What?)</a:t>
+            </a:r>
+            <a:endParaRPr kumimoji="0" lang="zh-TW" altLang="zh-TW" sz="1800" b="0" i="0" u="none" strike="noStrike" cap="none" normalizeH="0" baseline="0" dirty="0">
+              <a:ln>
+                <a:noFill/>
+              </a:ln>
+              <a:solidFill>
+                <a:schemeClr val="tx1"/>
+              </a:solidFill>
+              <a:effectLst/>
+              <a:latin typeface="Arial" panose="020B0604020202020204" pitchFamily="34" charset="0"/>
+            </a:endParaRPr>
+          </a:p>
+          <a:p>
+            <a:pPr marL="0" marR="0" lvl="0" indent="0" algn="l" defTabSz="914400" rtl="0" eaLnBrk="0" fontAlgn="base" latinLnBrk="0" hangingPunct="0">
+              <a:lnSpc>
+                <a:spcPct val="100000"/>
+              </a:lnSpc>
+              <a:spcBef>
+                <a:spcPct val="0"/>
+              </a:spcBef>
+              <a:spcAft>
+                <a:spcPct val="0"/>
+              </a:spcAft>
+              <a:buClrTx/>
+              <a:buSzTx/>
+              <a:buFontTx/>
+              <a:buChar char="•"/>
+              <a:tabLst/>
+            </a:pPr>
+            <a:r>
+              <a:rPr kumimoji="0" lang="zh-TW" altLang="zh-TW" sz="1800" b="0" i="0" u="none" strike="noStrike" cap="none" normalizeH="0" baseline="0" dirty="0">
+                <a:ln>
+                  <a:noFill/>
+                </a:ln>
+                <a:solidFill>
+                  <a:schemeClr val="tx1"/>
+                </a:solidFill>
+                <a:effectLst/>
+                <a:latin typeface="Arial" panose="020B0604020202020204" pitchFamily="34" charset="0"/>
+              </a:rPr>
+              <a:t>展示「經營主體發電量堆疊圖」。</a:t>
+            </a:r>
+          </a:p>
+          <a:p>
+            <a:pPr marL="0" marR="0" lvl="0" indent="0" algn="l" defTabSz="914400" rtl="0" eaLnBrk="0" fontAlgn="base" latinLnBrk="0" hangingPunct="0">
+              <a:lnSpc>
+                <a:spcPct val="100000"/>
+              </a:lnSpc>
+              <a:spcBef>
+                <a:spcPct val="0"/>
+              </a:spcBef>
+              <a:spcAft>
+                <a:spcPct val="0"/>
+              </a:spcAft>
+              <a:buClrTx/>
+              <a:buSzTx/>
+              <a:buFontTx/>
+              <a:buChar char="•"/>
+              <a:tabLst/>
+            </a:pPr>
+            <a:r>
+              <a:rPr kumimoji="0" lang="zh-TW" altLang="zh-TW" sz="1800" b="1" i="0" u="none" strike="noStrike" cap="none" normalizeH="0" baseline="0" dirty="0">
+                <a:ln>
+                  <a:noFill/>
+                </a:ln>
+                <a:solidFill>
+                  <a:schemeClr val="tx1"/>
+                </a:solidFill>
+                <a:effectLst/>
+                <a:latin typeface="Arial" panose="020B0604020202020204" pitchFamily="34" charset="0"/>
+              </a:rPr>
+              <a:t>亮點：</a:t>
+            </a:r>
+            <a:r>
+              <a:rPr kumimoji="0" lang="zh-TW" altLang="zh-TW" sz="1800" b="0" i="0" u="none" strike="noStrike" cap="none" normalizeH="0" baseline="0" dirty="0">
+                <a:ln>
+                  <a:noFill/>
+                </a:ln>
+                <a:solidFill>
+                  <a:schemeClr val="tx1"/>
+                </a:solidFill>
+                <a:effectLst/>
+                <a:latin typeface="Arial" panose="020B0604020202020204" pitchFamily="34" charset="0"/>
+              </a:rPr>
+              <a:t> 看到台電、民營、自用設備在總量上的佔比演變。</a:t>
+            </a:r>
+          </a:p>
+          <a:p>
+            <a:pPr marL="0" marR="0" lvl="0" indent="0" algn="l" defTabSz="914400" rtl="0" eaLnBrk="0" fontAlgn="base" latinLnBrk="0" hangingPunct="0">
+              <a:lnSpc>
+                <a:spcPct val="100000"/>
+              </a:lnSpc>
+              <a:spcBef>
+                <a:spcPct val="0"/>
+              </a:spcBef>
+              <a:spcAft>
+                <a:spcPct val="0"/>
+              </a:spcAft>
+              <a:buClrTx/>
+              <a:buSzTx/>
+              <a:buFontTx/>
+              <a:buChar char="•"/>
+              <a:tabLst/>
+            </a:pPr>
+            <a:r>
+              <a:rPr kumimoji="0" lang="zh-TW" altLang="zh-TW" sz="1800" b="1" i="0" u="none" strike="noStrike" cap="none" normalizeH="0" baseline="0" dirty="0">
+                <a:ln>
+                  <a:noFill/>
+                </a:ln>
+                <a:solidFill>
+                  <a:schemeClr val="tx1"/>
+                </a:solidFill>
+                <a:effectLst/>
+                <a:latin typeface="Arial" panose="020B0604020202020204" pitchFamily="34" charset="0"/>
+              </a:rPr>
+              <a:t>第三頁：動能研究 (The Engine of Growth)</a:t>
+            </a:r>
+            <a:endParaRPr kumimoji="0" lang="zh-TW" altLang="zh-TW" sz="1800" b="0" i="0" u="none" strike="noStrike" cap="none" normalizeH="0" baseline="0" dirty="0">
+              <a:ln>
+                <a:noFill/>
+              </a:ln>
+              <a:solidFill>
+                <a:schemeClr val="tx1"/>
+              </a:solidFill>
+              <a:effectLst/>
+              <a:latin typeface="Arial" panose="020B0604020202020204" pitchFamily="34" charset="0"/>
+            </a:endParaRPr>
+          </a:p>
+          <a:p>
+            <a:pPr marL="0" marR="0" lvl="0" indent="0" algn="l" defTabSz="914400" rtl="0" eaLnBrk="0" fontAlgn="base" latinLnBrk="0" hangingPunct="0">
+              <a:lnSpc>
+                <a:spcPct val="100000"/>
+              </a:lnSpc>
+              <a:spcBef>
+                <a:spcPct val="0"/>
+              </a:spcBef>
+              <a:spcAft>
+                <a:spcPct val="0"/>
+              </a:spcAft>
+              <a:buClrTx/>
+              <a:buSzTx/>
+              <a:buFontTx/>
+              <a:buChar char="•"/>
+              <a:tabLst/>
+            </a:pPr>
+            <a:r>
+              <a:rPr kumimoji="0" lang="zh-TW" altLang="zh-TW" sz="1800" b="1" i="0" u="none" strike="noStrike" cap="none" normalizeH="0" baseline="0" dirty="0">
+                <a:ln>
+                  <a:noFill/>
+                </a:ln>
+                <a:solidFill>
+                  <a:schemeClr val="tx1"/>
+                </a:solidFill>
+                <a:effectLst/>
+                <a:latin typeface="Arial" panose="020B0604020202020204" pitchFamily="34" charset="0"/>
+              </a:rPr>
+              <a:t>這就是我們要做的這頁！</a:t>
+            </a:r>
+            <a:endParaRPr kumimoji="0" lang="zh-TW" altLang="zh-TW" sz="1800" b="0" i="0" u="none" strike="noStrike" cap="none" normalizeH="0" baseline="0" dirty="0">
+              <a:ln>
+                <a:noFill/>
+              </a:ln>
+              <a:solidFill>
+                <a:schemeClr val="tx1"/>
+              </a:solidFill>
+              <a:effectLst/>
+              <a:latin typeface="Arial" panose="020B0604020202020204" pitchFamily="34" charset="0"/>
+            </a:endParaRPr>
+          </a:p>
+          <a:p>
+            <a:pPr marL="0" marR="0" lvl="0" indent="0" algn="l" defTabSz="914400" rtl="0" eaLnBrk="0" fontAlgn="base" latinLnBrk="0" hangingPunct="0">
+              <a:lnSpc>
+                <a:spcPct val="100000"/>
+              </a:lnSpc>
+              <a:spcBef>
+                <a:spcPct val="0"/>
+              </a:spcBef>
+              <a:spcAft>
+                <a:spcPct val="0"/>
+              </a:spcAft>
+              <a:buClrTx/>
+              <a:buSzTx/>
+              <a:buFontTx/>
+              <a:buChar char="•"/>
+              <a:tabLst/>
+            </a:pPr>
+            <a:r>
+              <a:rPr kumimoji="0" lang="zh-TW" altLang="zh-TW" sz="1800" b="0" i="0" u="none" strike="noStrike" cap="none" normalizeH="0" baseline="0" dirty="0">
+                <a:ln>
+                  <a:noFill/>
+                </a:ln>
+                <a:solidFill>
+                  <a:schemeClr val="tx1"/>
+                </a:solidFill>
+                <a:effectLst/>
+                <a:latin typeface="Arial" panose="020B0604020202020204" pitchFamily="34" charset="0"/>
+              </a:rPr>
+              <a:t>展示「自用綠能 vs. 其他主體」的 </a:t>
+            </a:r>
+            <a:r>
+              <a:rPr kumimoji="0" lang="zh-TW" altLang="zh-TW" sz="1800" b="1" i="0" u="none" strike="noStrike" cap="none" normalizeH="0" baseline="0" dirty="0">
+                <a:ln>
+                  <a:noFill/>
+                </a:ln>
+                <a:solidFill>
+                  <a:schemeClr val="tx1"/>
+                </a:solidFill>
+                <a:effectLst/>
+                <a:latin typeface="Arial" panose="020B0604020202020204" pitchFamily="34" charset="0"/>
+              </a:rPr>
+              <a:t>成長率 (YoY%)</a:t>
+            </a:r>
+            <a:r>
+              <a:rPr kumimoji="0" lang="zh-TW" altLang="zh-TW" sz="1800" b="0" i="0" u="none" strike="noStrike" cap="none" normalizeH="0" baseline="0" dirty="0">
+                <a:ln>
+                  <a:noFill/>
+                </a:ln>
+                <a:solidFill>
+                  <a:schemeClr val="tx1"/>
+                </a:solidFill>
+                <a:effectLst/>
+                <a:latin typeface="Arial" panose="020B0604020202020204" pitchFamily="34" charset="0"/>
+              </a:rPr>
+              <a:t> 或 </a:t>
+            </a:r>
+            <a:r>
+              <a:rPr kumimoji="0" lang="zh-TW" altLang="zh-TW" sz="1800" b="1" i="0" u="none" strike="noStrike" cap="none" normalizeH="0" baseline="0" dirty="0">
+                <a:ln>
+                  <a:noFill/>
+                </a:ln>
+                <a:solidFill>
+                  <a:schemeClr val="tx1"/>
+                </a:solidFill>
+                <a:effectLst/>
+                <a:latin typeface="Arial" panose="020B0604020202020204" pitchFamily="34" charset="0"/>
+              </a:rPr>
+              <a:t>貢獻度折線</a:t>
+            </a:r>
+            <a:r>
+              <a:rPr kumimoji="0" lang="zh-TW" altLang="zh-TW" sz="1800" b="0" i="0" u="none" strike="noStrike" cap="none" normalizeH="0" baseline="0" dirty="0">
+                <a:ln>
+                  <a:noFill/>
+                </a:ln>
+                <a:solidFill>
+                  <a:schemeClr val="tx1"/>
+                </a:solidFill>
+                <a:effectLst/>
+                <a:latin typeface="Arial" panose="020B0604020202020204" pitchFamily="34" charset="0"/>
+              </a:rPr>
+              <a:t>。</a:t>
+            </a:r>
+          </a:p>
+          <a:p>
+            <a:pPr marL="0" marR="0" lvl="0" indent="0" algn="l" defTabSz="914400" rtl="0" eaLnBrk="0" fontAlgn="base" latinLnBrk="0" hangingPunct="0">
+              <a:lnSpc>
+                <a:spcPct val="100000"/>
+              </a:lnSpc>
+              <a:spcBef>
+                <a:spcPct val="0"/>
+              </a:spcBef>
+              <a:spcAft>
+                <a:spcPct val="0"/>
+              </a:spcAft>
+              <a:buClrTx/>
+              <a:buSzTx/>
+              <a:buFontTx/>
+              <a:buChar char="•"/>
+              <a:tabLst/>
+            </a:pPr>
+            <a:r>
+              <a:rPr kumimoji="0" lang="zh-TW" altLang="zh-TW" sz="1800" b="1" i="0" u="none" strike="noStrike" cap="none" normalizeH="0" baseline="0" dirty="0">
+                <a:ln>
+                  <a:noFill/>
+                </a:ln>
+                <a:solidFill>
+                  <a:schemeClr val="tx1"/>
+                </a:solidFill>
+                <a:effectLst/>
+                <a:latin typeface="Arial" panose="020B0604020202020204" pitchFamily="34" charset="0"/>
+              </a:rPr>
+              <a:t>亮點：</a:t>
+            </a:r>
+            <a:r>
+              <a:rPr kumimoji="0" lang="zh-TW" altLang="zh-TW" sz="1800" b="0" i="0" u="none" strike="noStrike" cap="none" normalizeH="0" baseline="0" dirty="0">
+                <a:ln>
+                  <a:noFill/>
+                </a:ln>
+                <a:solidFill>
+                  <a:schemeClr val="tx1"/>
+                </a:solidFill>
+                <a:effectLst/>
+                <a:latin typeface="Arial" panose="020B0604020202020204" pitchFamily="34" charset="0"/>
+              </a:rPr>
+              <a:t> 解釋為什麼 2017 年後能反彈？答案是「自用設備」的動能噴發。</a:t>
+            </a:r>
+          </a:p>
+          <a:p>
+            <a:pPr marL="0" marR="0" lvl="0" indent="0" algn="l" defTabSz="914400" rtl="0" eaLnBrk="0" fontAlgn="base" latinLnBrk="0" hangingPunct="0">
+              <a:lnSpc>
+                <a:spcPct val="100000"/>
+              </a:lnSpc>
+              <a:spcBef>
+                <a:spcPct val="0"/>
+              </a:spcBef>
+              <a:spcAft>
+                <a:spcPct val="0"/>
+              </a:spcAft>
+              <a:buClrTx/>
+              <a:buSzTx/>
+              <a:buFontTx/>
+              <a:buNone/>
+              <a:tabLst/>
+            </a:pPr>
+            <a:endParaRPr kumimoji="0" lang="zh-TW" altLang="zh-TW" sz="1800" b="0" i="0" u="none" strike="noStrike" cap="none" normalizeH="0" baseline="0" dirty="0">
+              <a:ln>
+                <a:noFill/>
+              </a:ln>
+              <a:solidFill>
+                <a:schemeClr val="tx1"/>
+              </a:solidFill>
+              <a:effectLst/>
+              <a:latin typeface="Arial" panose="020B0604020202020204" pitchFamily="34" charset="0"/>
+            </a:endParaRPr>
           </a:p>
         </p:txBody>
       </p:sp>
     </p:spTree>
     <p:extLst>
       <p:ext uri="{BB962C8B-B14F-4D97-AF65-F5344CB8AC3E}">
-        <p14:creationId xmlns:p14="http://schemas.microsoft.com/office/powerpoint/2010/main" val="3236247884"/>
+        <p14:creationId xmlns:p14="http://schemas.microsoft.com/office/powerpoint/2010/main" val="1235529604"/>
       </p:ext>
     </p:extLst>
   </p:cSld>
@@ -8295,7 +9459,7 @@
           <p:cNvPr id="2" name="標題 1">
             <a:extLst>
               <a:ext uri="{FF2B5EF4-FFF2-40B4-BE49-F238E27FC236}">
-                <a16:creationId xmlns:a16="http://schemas.microsoft.com/office/drawing/2014/main" id="{DE433224-B4C8-50D2-0AD6-C468ADA62B8E}"/>
+                <a16:creationId xmlns:a16="http://schemas.microsoft.com/office/drawing/2014/main" id="{FD6B156F-5280-2B66-542D-C27291886F01}"/>
               </a:ext>
             </a:extLst>
           </p:cNvPr>
@@ -8320,7 +9484,7 @@
           <p:cNvPr id="3" name="內容版面配置區 2">
             <a:extLst>
               <a:ext uri="{FF2B5EF4-FFF2-40B4-BE49-F238E27FC236}">
-                <a16:creationId xmlns:a16="http://schemas.microsoft.com/office/drawing/2014/main" id="{9E330D6F-1852-2386-A8C5-C7CAC62384CF}"/>
+                <a16:creationId xmlns:a16="http://schemas.microsoft.com/office/drawing/2014/main" id="{FEEE1DF6-7D04-E201-AF6D-9498E062835E}"/>
               </a:ext>
             </a:extLst>
           </p:cNvPr>
@@ -8333,157 +9497,47 @@
         </p:nvSpPr>
         <p:spPr/>
         <p:txBody>
-          <a:bodyPr>
-            <a:normAutofit lnSpcReduction="10000"/>
-          </a:bodyPr>
+          <a:bodyPr/>
           <a:lstStyle/>
           <a:p>
             <a:r>
-              <a:rPr lang="zh-TW" altLang="en-US" b="1" dirty="0"/>
-              <a:t>你的下一步建議</a:t>
-            </a:r>
-          </a:p>
-          <a:p>
-            <a:r>
-              <a:rPr lang="zh-TW" altLang="en-US" dirty="0"/>
-              <a:t>既然你已經完成了 </a:t>
-            </a:r>
-            <a:r>
-              <a:rPr lang="en-US" altLang="zh-TW" b="1" dirty="0"/>
-              <a:t>1 </a:t>
-            </a:r>
-            <a:r>
-              <a:rPr lang="zh-TW" altLang="en-US" b="1" dirty="0"/>
-              <a:t>到 </a:t>
-            </a:r>
-            <a:r>
-              <a:rPr lang="en-US" altLang="zh-TW" b="1" dirty="0"/>
-              <a:t>3 </a:t>
-            </a:r>
-            <a:r>
-              <a:rPr lang="zh-TW" altLang="en-US" b="1" dirty="0"/>
-              <a:t>步 </a:t>
-            </a:r>
-            <a:r>
-              <a:rPr lang="en-US" altLang="zh-TW" b="1" dirty="0"/>
-              <a:t>(ETL)</a:t>
-            </a:r>
-            <a:r>
-              <a:rPr lang="zh-TW" altLang="en-US" dirty="0"/>
-              <a:t>，現在進入 </a:t>
-            </a:r>
-            <a:r>
-              <a:rPr lang="zh-TW" altLang="en-US" b="1" dirty="0"/>
-              <a:t>第 </a:t>
-            </a:r>
-            <a:r>
-              <a:rPr lang="en-US" altLang="zh-TW" b="1" dirty="0"/>
-              <a:t>4 </a:t>
-            </a:r>
-            <a:r>
-              <a:rPr lang="zh-TW" altLang="en-US" b="1" dirty="0"/>
-              <a:t>步 </a:t>
-            </a:r>
-            <a:r>
-              <a:rPr lang="en-US" altLang="zh-TW" b="1" dirty="0"/>
-              <a:t>(</a:t>
-            </a:r>
-            <a:r>
-              <a:rPr lang="zh-TW" altLang="en-US" b="1" dirty="0"/>
-              <a:t>資料分析</a:t>
-            </a:r>
-            <a:r>
-              <a:rPr lang="en-US" altLang="zh-TW" b="1" dirty="0"/>
-              <a:t>)</a:t>
-            </a:r>
-            <a:r>
-              <a:rPr lang="zh-TW" altLang="en-US" dirty="0"/>
-              <a:t> 時，你可以試著在 </a:t>
+              <a:rPr lang="zh-TW" altLang="en-US" dirty="0"/>
+              <a:t>當你在巨匠做專題簡報時，這樣的順序非常有說服力：</a:t>
+            </a:r>
+          </a:p>
+          <a:p>
+            <a:r>
+              <a:rPr lang="zh-TW" altLang="en-US" dirty="0"/>
+              <a:t>先說：「台灣綠能在 </a:t>
             </a:r>
             <a:r>
               <a:rPr lang="en-US" altLang="zh-TW" dirty="0"/>
-              <a:t>Power BI </a:t>
-            </a:r>
-            <a:r>
-              <a:rPr lang="zh-TW" altLang="en-US" dirty="0"/>
-              <a:t>裡找出這一個答案：</a:t>
-            </a:r>
-          </a:p>
-          <a:p>
-            <a:r>
-              <a:rPr lang="zh-TW" altLang="en-US" b="1" dirty="0"/>
-              <a:t>「在哪一個月份，自用發電設備的</a:t>
-            </a:r>
-            <a:r>
-              <a:rPr lang="en-US" altLang="zh-TW" b="1" dirty="0"/>
-              <a:t>『</a:t>
-            </a:r>
-            <a:r>
-              <a:rPr lang="zh-TW" altLang="en-US" b="1" dirty="0"/>
-              <a:t>太陽光電</a:t>
-            </a:r>
-            <a:r>
-              <a:rPr lang="en-US" altLang="zh-TW" b="1" dirty="0"/>
-              <a:t>』</a:t>
-            </a:r>
-            <a:r>
-              <a:rPr lang="zh-TW" altLang="en-US" b="1" dirty="0"/>
-              <a:t>發電量，第一次超越了台電自身的</a:t>
-            </a:r>
-            <a:r>
-              <a:rPr lang="en-US" altLang="zh-TW" b="1" dirty="0"/>
-              <a:t>『</a:t>
-            </a:r>
-            <a:r>
-              <a:rPr lang="zh-TW" altLang="en-US" b="1" dirty="0"/>
-              <a:t>太陽光電</a:t>
-            </a:r>
-            <a:r>
-              <a:rPr lang="en-US" altLang="zh-TW" b="1" dirty="0"/>
-              <a:t>』</a:t>
-            </a:r>
-            <a:r>
-              <a:rPr lang="zh-TW" altLang="en-US" b="1" dirty="0"/>
-              <a:t>發電量？」</a:t>
-            </a:r>
-            <a:endParaRPr lang="zh-TW" altLang="en-US" dirty="0"/>
-          </a:p>
-          <a:p>
-            <a:r>
-              <a:rPr lang="zh-TW" altLang="en-US" dirty="0"/>
-              <a:t>這會是你簡報中最酷、最有力的一張投影片，因為它直接證明了「能源民主化」的進程。</a:t>
-            </a:r>
-          </a:p>
-          <a:p>
-            <a:r>
-              <a:rPr lang="zh-TW" altLang="en-US" b="1" dirty="0"/>
-              <a:t>需要我幫你把這份 </a:t>
-            </a:r>
-            <a:r>
-              <a:rPr lang="en-US" altLang="zh-TW" b="1" dirty="0"/>
-              <a:t>Agenda </a:t>
-            </a:r>
-            <a:r>
-              <a:rPr lang="zh-TW" altLang="en-US" b="1" dirty="0"/>
-              <a:t>轉換成一份 </a:t>
-            </a:r>
-            <a:r>
-              <a:rPr lang="en-US" altLang="zh-TW" b="1" dirty="0"/>
-              <a:t>PPT </a:t>
-            </a:r>
-            <a:r>
-              <a:rPr lang="zh-TW" altLang="en-US" b="1" dirty="0"/>
-              <a:t>用的「專案時程圖 </a:t>
-            </a:r>
-            <a:r>
-              <a:rPr lang="en-US" altLang="zh-TW" b="1" dirty="0"/>
-              <a:t>(Gantt Chart)</a:t>
-            </a:r>
-            <a:r>
-              <a:rPr lang="zh-TW" altLang="en-US" b="1" dirty="0"/>
-              <a:t>」描述，或是幫你寫出簡報開場的第一張投影片內容嗎？</a:t>
-            </a:r>
-            <a:endParaRPr lang="zh-TW" altLang="en-US" dirty="0"/>
+              <a:t>2017 </a:t>
+            </a:r>
+            <a:r>
+              <a:rPr lang="zh-TW" altLang="en-US" dirty="0"/>
+              <a:t>年掉到谷底。」（第一頁）</a:t>
+            </a:r>
+          </a:p>
+          <a:p>
+            <a:r>
+              <a:rPr lang="zh-TW" altLang="en-US" dirty="0"/>
+              <a:t>再問：「是誰把它拉起來的？」（第二頁）</a:t>
+            </a:r>
+          </a:p>
+          <a:p>
+            <a:r>
+              <a:rPr lang="zh-TW" altLang="en-US" dirty="0"/>
+              <a:t>最後證明：「看這條線，</a:t>
+            </a:r>
+            <a:r>
+              <a:rPr lang="zh-TW" altLang="en-US" b="1" dirty="0"/>
+              <a:t>自用設備</a:t>
+            </a:r>
+            <a:r>
+              <a:rPr lang="zh-TW" altLang="en-US" dirty="0"/>
+              <a:t> 的動能是所有主體中最強的！」（第三頁）</a:t>
+            </a:r>
           </a:p>
           <a:p>
             <a:endParaRPr lang="zh-TW" altLang="en-US" dirty="0"/>
@@ -8493,7 +9547,7 @@
     </p:spTree>
     <p:extLst>
       <p:ext uri="{BB962C8B-B14F-4D97-AF65-F5344CB8AC3E}">
-        <p14:creationId xmlns:p14="http://schemas.microsoft.com/office/powerpoint/2010/main" val="1148426050"/>
+        <p14:creationId xmlns:p14="http://schemas.microsoft.com/office/powerpoint/2010/main" val="746858911"/>
       </p:ext>
     </p:extLst>
   </p:cSld>

--- a/《誰在推動綠能？——.pptx
+++ b/《誰在推動綠能？——.pptx
@@ -14,17 +14,18 @@
     <p:sldId id="272" r:id="rId8"/>
     <p:sldId id="274" r:id="rId9"/>
     <p:sldId id="275" r:id="rId10"/>
-    <p:sldId id="273" r:id="rId11"/>
-    <p:sldId id="266" r:id="rId12"/>
-    <p:sldId id="267" r:id="rId13"/>
-    <p:sldId id="268" r:id="rId14"/>
-    <p:sldId id="257" r:id="rId15"/>
-    <p:sldId id="258" r:id="rId16"/>
-    <p:sldId id="259" r:id="rId17"/>
-    <p:sldId id="260" r:id="rId18"/>
-    <p:sldId id="261" r:id="rId19"/>
-    <p:sldId id="270" r:id="rId20"/>
-    <p:sldId id="271" r:id="rId21"/>
+    <p:sldId id="276" r:id="rId11"/>
+    <p:sldId id="273" r:id="rId12"/>
+    <p:sldId id="266" r:id="rId13"/>
+    <p:sldId id="267" r:id="rId14"/>
+    <p:sldId id="268" r:id="rId15"/>
+    <p:sldId id="257" r:id="rId16"/>
+    <p:sldId id="258" r:id="rId17"/>
+    <p:sldId id="259" r:id="rId18"/>
+    <p:sldId id="260" r:id="rId19"/>
+    <p:sldId id="261" r:id="rId20"/>
+    <p:sldId id="270" r:id="rId21"/>
+    <p:sldId id="271" r:id="rId22"/>
   </p:sldIdLst>
   <p:sldSz cx="12192000" cy="6858000"/>
   <p:notesSz cx="6858000" cy="9144000"/>
@@ -3467,7 +3468,7 @@
           <p:cNvPr id="2" name="標題 1">
             <a:extLst>
               <a:ext uri="{FF2B5EF4-FFF2-40B4-BE49-F238E27FC236}">
-                <a16:creationId xmlns:a16="http://schemas.microsoft.com/office/drawing/2014/main" id="{6FFD45EB-ACDF-9234-7A3C-C925332B2978}"/>
+                <a16:creationId xmlns:a16="http://schemas.microsoft.com/office/drawing/2014/main" id="{AF2CDDA6-70CA-92BD-7CB0-ECC9E03D964A}"/>
               </a:ext>
             </a:extLst>
           </p:cNvPr>
@@ -3483,7 +3484,7 @@
           <a:bodyPr/>
           <a:lstStyle/>
           <a:p>
-            <a:endParaRPr lang="zh-TW" altLang="en-US" dirty="0"/>
+            <a:endParaRPr lang="zh-TW" altLang="en-US"/>
           </a:p>
         </p:txBody>
       </p:sp>
@@ -3492,7 +3493,7 @@
           <p:cNvPr id="3" name="內容版面配置區 2">
             <a:extLst>
               <a:ext uri="{FF2B5EF4-FFF2-40B4-BE49-F238E27FC236}">
-                <a16:creationId xmlns:a16="http://schemas.microsoft.com/office/drawing/2014/main" id="{4378E0AC-B0DB-F6B4-1D2B-99B335C5C5CA}"/>
+                <a16:creationId xmlns:a16="http://schemas.microsoft.com/office/drawing/2014/main" id="{4F08B5EC-FE21-E533-A5FE-493D4A80401E}"/>
               </a:ext>
             </a:extLst>
           </p:cNvPr>
@@ -3505,63 +3506,267 @@
         </p:nvSpPr>
         <p:spPr/>
         <p:txBody>
-          <a:bodyPr/>
+          <a:bodyPr>
+            <a:normAutofit fontScale="55000" lnSpcReduction="20000"/>
+          </a:bodyPr>
           <a:lstStyle/>
           <a:p>
             <a:r>
-              <a:rPr lang="en-US" altLang="zh-TW" b="1" dirty="0"/>
-              <a:t>2017 </a:t>
-            </a:r>
-            <a:r>
-              <a:rPr lang="zh-TW" altLang="en-US" b="1" dirty="0"/>
-              <a:t>年後的「觸底反彈」：誰在推動？</a:t>
-            </a:r>
-          </a:p>
-          <a:p>
-            <a:r>
-              <a:rPr lang="zh-TW" altLang="en-US" dirty="0"/>
-              <a:t>這就是你專題的**「英雄出場」**時刻！</a:t>
-            </a:r>
-          </a:p>
-          <a:p>
+              <a:rPr lang="zh-TW" altLang="en-US" b="1" dirty="0"/>
+              <a:t>第一頁：開場介紹劇本 </a:t>
+            </a:r>
+            <a:r>
+              <a:rPr lang="en-US" altLang="zh-TW" b="1" dirty="0"/>
+              <a:t>(</a:t>
+            </a:r>
+            <a:r>
+              <a:rPr lang="zh-TW" altLang="en-US" b="1" dirty="0"/>
+              <a:t>三部曲</a:t>
+            </a:r>
+            <a:r>
+              <a:rPr lang="en-US" altLang="zh-TW" b="1" dirty="0"/>
+              <a:t>)</a:t>
+            </a:r>
+          </a:p>
+          <a:p>
+            <a:r>
+              <a:rPr lang="zh-TW" altLang="en-US" b="1" dirty="0"/>
+              <a:t>第一部：看大局 </a:t>
+            </a:r>
+            <a:r>
+              <a:rPr lang="en-US" altLang="zh-TW" b="1" dirty="0"/>
+              <a:t>—— </a:t>
+            </a:r>
+            <a:r>
+              <a:rPr lang="zh-TW" altLang="en-US" b="1" dirty="0"/>
+              <a:t>結構的轉位 </a:t>
+            </a:r>
+            <a:r>
+              <a:rPr lang="en-US" altLang="zh-TW" b="1" dirty="0"/>
+              <a:t>(</a:t>
+            </a:r>
+            <a:r>
+              <a:rPr lang="zh-TW" altLang="en-US" b="1" dirty="0"/>
+              <a:t>左側：</a:t>
+            </a:r>
+            <a:r>
+              <a:rPr lang="en-US" altLang="zh-TW" b="1" dirty="0"/>
+              <a:t>100% </a:t>
+            </a:r>
+            <a:r>
+              <a:rPr lang="zh-TW" altLang="en-US" b="1" dirty="0"/>
+              <a:t>堆疊面積圖</a:t>
+            </a:r>
+            <a:r>
+              <a:rPr lang="en-US" altLang="zh-TW" b="1" dirty="0"/>
+              <a:t>)</a:t>
+            </a:r>
+          </a:p>
+          <a:p>
+            <a:r>
+              <a:rPr lang="zh-TW" altLang="en-US" dirty="0"/>
+              <a:t>「各位評審請看左方的趨勢圖。這張圖記錄了從 </a:t>
+            </a:r>
+            <a:r>
+              <a:rPr lang="en-US" altLang="zh-TW" dirty="0"/>
+              <a:t>2007 </a:t>
+            </a:r>
+            <a:r>
+              <a:rPr lang="zh-TW" altLang="en-US" dirty="0"/>
+              <a:t>年到 </a:t>
+            </a:r>
+            <a:r>
+              <a:rPr lang="en-US" altLang="zh-TW" dirty="0"/>
+              <a:t>2026 </a:t>
+            </a:r>
+            <a:r>
+              <a:rPr lang="zh-TW" altLang="en-US" dirty="0"/>
+              <a:t>年台灣能源結構的演變。</a:t>
+            </a:r>
+          </a:p>
+          <a:p>
+            <a:r>
+              <a:rPr lang="zh-TW" altLang="en-US" dirty="0"/>
+              <a:t>我特別調整了 </a:t>
+            </a:r>
+            <a:r>
+              <a:rPr lang="en-US" altLang="zh-TW" dirty="0"/>
+              <a:t>Y </a:t>
+            </a:r>
+            <a:r>
+              <a:rPr lang="zh-TW" altLang="en-US" dirty="0"/>
+              <a:t>軸比例，讓大家能清晰看到：雖然火力發電仍是支撐電網的基石，但**再生能源（綠色區塊）</a:t>
+            </a:r>
+            <a:r>
+              <a:rPr lang="zh-TW" altLang="en-US" b="1" dirty="0"/>
+              <a:t>正在顯著增厚。最關鍵的洞察在於，它正精準地填補了</a:t>
+            </a:r>
+            <a:r>
+              <a:rPr lang="zh-TW" altLang="en-US" dirty="0"/>
+              <a:t>核能（紫色區塊）**逐步除役後的電力缺口。這證實了台灣的能源轉型不只是總量的變動，更是結構性的接棒。」</a:t>
+            </a:r>
+          </a:p>
+          <a:p>
+            <a:r>
+              <a:rPr lang="zh-TW" altLang="en-US" b="1" dirty="0"/>
+              <a:t>第二部：定結論 </a:t>
+            </a:r>
+            <a:r>
+              <a:rPr lang="en-US" altLang="zh-TW" b="1" dirty="0"/>
+              <a:t>—— </a:t>
+            </a:r>
+            <a:r>
+              <a:rPr lang="zh-TW" altLang="en-US" b="1" dirty="0"/>
+              <a:t>現狀的切片 </a:t>
+            </a:r>
+            <a:r>
+              <a:rPr lang="en-US" altLang="zh-TW" b="1" dirty="0"/>
+              <a:t>(</a:t>
+            </a:r>
+            <a:r>
+              <a:rPr lang="zh-TW" altLang="en-US" b="1" dirty="0"/>
+              <a:t>右上：環狀圖</a:t>
+            </a:r>
+            <a:r>
+              <a:rPr lang="en-US" altLang="zh-TW" b="1" dirty="0"/>
+              <a:t>)</a:t>
+            </a:r>
+          </a:p>
+          <a:p>
+            <a:r>
+              <a:rPr lang="zh-TW" altLang="en-US" dirty="0"/>
+              <a:t>「為了讓大家對目前的進度有具體概念，請看右上的環狀圖。這份 </a:t>
+            </a:r>
+            <a:r>
+              <a:rPr lang="en-US" altLang="zh-TW" dirty="0"/>
+              <a:t>2025 </a:t>
+            </a:r>
+            <a:r>
+              <a:rPr lang="zh-TW" altLang="en-US" dirty="0"/>
+              <a:t>年的全年定格數據，與左側趨勢是完全吻合的。</a:t>
+            </a:r>
+          </a:p>
+          <a:p>
+            <a:r>
+              <a:rPr lang="zh-TW" altLang="en-US" dirty="0"/>
+              <a:t>目前，再生能源的佔比已穩健達成 </a:t>
+            </a:r>
+            <a:r>
+              <a:rPr lang="en-US" altLang="zh-TW" b="1" dirty="0"/>
+              <a:t>[X]%</a:t>
+            </a:r>
+            <a:r>
+              <a:rPr lang="zh-TW" altLang="en-US" dirty="0"/>
+              <a:t>。這個數字代表我們已經跨越了轉型初期的門檻，進入了規模化發展的階段。這張圖為我們設定了一個清楚的基準點：</a:t>
+            </a:r>
+            <a:r>
+              <a:rPr lang="zh-TW" altLang="en-US" b="1" dirty="0"/>
+              <a:t>每 </a:t>
+            </a:r>
+            <a:r>
+              <a:rPr lang="en-US" altLang="zh-TW" b="1" dirty="0"/>
+              <a:t>10 </a:t>
+            </a:r>
+            <a:r>
+              <a:rPr lang="zh-TW" altLang="en-US" b="1" dirty="0"/>
+              <a:t>度電中，就有將近 </a:t>
+            </a:r>
+            <a:r>
+              <a:rPr lang="en-US" altLang="zh-TW" b="1" dirty="0"/>
+              <a:t>[X] </a:t>
+            </a:r>
+            <a:r>
+              <a:rPr lang="zh-TW" altLang="en-US" b="1" dirty="0"/>
+              <a:t>度來自綠能。</a:t>
+            </a:r>
+            <a:r>
+              <a:rPr lang="zh-TW" altLang="en-US" dirty="0"/>
+              <a:t>」</a:t>
+            </a:r>
+          </a:p>
+          <a:p>
+            <a:r>
+              <a:rPr lang="zh-TW" altLang="en-US" b="1" dirty="0"/>
+              <a:t>第三部：看動能 </a:t>
+            </a:r>
+            <a:r>
+              <a:rPr lang="en-US" altLang="zh-TW" b="1" dirty="0"/>
+              <a:t>—— </a:t>
+            </a:r>
+            <a:r>
+              <a:rPr lang="zh-TW" altLang="en-US" b="1" dirty="0"/>
+              <a:t>爆發的力道 </a:t>
+            </a:r>
+            <a:r>
+              <a:rPr lang="en-US" altLang="zh-TW" b="1" dirty="0"/>
+              <a:t>(</a:t>
+            </a:r>
+            <a:r>
+              <a:rPr lang="zh-TW" altLang="en-US" b="1" dirty="0"/>
+              <a:t>右下：再生能源柱狀圖</a:t>
+            </a:r>
+            <a:r>
+              <a:rPr lang="en-US" altLang="zh-TW" b="1" dirty="0"/>
+              <a:t>)</a:t>
+            </a:r>
+          </a:p>
+          <a:p>
+            <a:r>
+              <a:rPr lang="zh-TW" altLang="en-US" dirty="0"/>
+              <a:t>「最後，我們單獨把再生能源拉出來看。右下方的柱狀圖直觀展現了它的成長幅度。</a:t>
+            </a:r>
+          </a:p>
+          <a:p>
+            <a:r>
+              <a:rPr lang="zh-TW" altLang="en-US" dirty="0"/>
+              <a:t>大家可以看到，這不是緩步爬升，而是</a:t>
+            </a:r>
+            <a:r>
+              <a:rPr lang="zh-TW" altLang="en-US" b="1" dirty="0"/>
+              <a:t>爆發性的增長</a:t>
+            </a:r>
+            <a:r>
+              <a:rPr lang="zh-TW" altLang="en-US" dirty="0"/>
+              <a:t>。特別是 </a:t>
+            </a:r>
             <a:r>
               <a:rPr lang="en-US" altLang="zh-TW" dirty="0"/>
               <a:t>2017 </a:t>
             </a:r>
             <a:r>
               <a:rPr lang="zh-TW" altLang="en-US" dirty="0"/>
-              <a:t>年後佔比開始反彈，你可以觀察你的 </a:t>
+              <a:t>年後，柱狀高度幾乎是翻倍跳躍。這張圖回答了</a:t>
             </a:r>
             <a:r>
               <a:rPr lang="en-US" altLang="zh-TW" dirty="0"/>
-              <a:t>Power BI </a:t>
-            </a:r>
-            <a:r>
-              <a:rPr lang="zh-TW" altLang="en-US" dirty="0"/>
-              <a:t>圖表，看看是不是出現了以下現象：</a:t>
-            </a:r>
-          </a:p>
-          <a:p>
-            <a:r>
-              <a:rPr lang="zh-TW" altLang="en-US" b="1" dirty="0"/>
-              <a:t>「民間自用綠能」的線條開始陡峭上升。</a:t>
-            </a:r>
-            <a:endParaRPr lang="zh-TW" altLang="en-US" dirty="0"/>
-          </a:p>
-          <a:p>
-            <a:r>
-              <a:rPr lang="zh-TW" altLang="en-US" b="1" dirty="0"/>
-              <a:t>「民營電廠 </a:t>
-            </a:r>
-            <a:r>
-              <a:rPr lang="en-US" altLang="zh-TW" b="1" dirty="0"/>
-              <a:t>(IPP) </a:t>
-            </a:r>
-            <a:r>
-              <a:rPr lang="zh-TW" altLang="en-US" b="1" dirty="0"/>
-              <a:t>綠能」大型案場開始併網。</a:t>
-            </a:r>
-            <a:endParaRPr lang="zh-TW" altLang="en-US" dirty="0"/>
+              <a:t>『</a:t>
+            </a:r>
+            <a:r>
+              <a:rPr lang="zh-TW" altLang="en-US" dirty="0"/>
+              <a:t>綠能長得夠快嗎？</a:t>
+            </a:r>
+            <a:r>
+              <a:rPr lang="en-US" altLang="zh-TW" dirty="0"/>
+              <a:t>』</a:t>
+            </a:r>
+            <a:r>
+              <a:rPr lang="zh-TW" altLang="en-US" dirty="0"/>
+              <a:t>的疑問，答案是肯定的。</a:t>
+            </a:r>
+          </a:p>
+          <a:p>
+            <a:r>
+              <a:rPr lang="zh-TW" altLang="en-US" dirty="0"/>
+              <a:t>但這引發了一個核心問題：</a:t>
+            </a:r>
+            <a:r>
+              <a:rPr lang="zh-TW" altLang="en-US" b="1" dirty="0"/>
+              <a:t>這股強大的綠能動能，背後是誰在推動？是大電廠，還是分散在民間的設備？</a:t>
+            </a:r>
+            <a:r>
+              <a:rPr lang="zh-TW" altLang="en-US" dirty="0"/>
+              <a:t> 這就是我們下一頁要揭開的關鍵結構。」</a:t>
+            </a:r>
           </a:p>
           <a:p>
             <a:endParaRPr lang="zh-TW" altLang="en-US" dirty="0"/>
@@ -3571,7 +3776,7 @@
     </p:spTree>
     <p:extLst>
       <p:ext uri="{BB962C8B-B14F-4D97-AF65-F5344CB8AC3E}">
-        <p14:creationId xmlns:p14="http://schemas.microsoft.com/office/powerpoint/2010/main" val="3335961805"/>
+        <p14:creationId xmlns:p14="http://schemas.microsoft.com/office/powerpoint/2010/main" val="779095830"/>
       </p:ext>
     </p:extLst>
   </p:cSld>
@@ -3603,7 +3808,7 @@
           <p:cNvPr id="2" name="標題 1">
             <a:extLst>
               <a:ext uri="{FF2B5EF4-FFF2-40B4-BE49-F238E27FC236}">
-                <a16:creationId xmlns:a16="http://schemas.microsoft.com/office/drawing/2014/main" id="{DDE79172-72BF-B270-BC98-57276887EC43}"/>
+                <a16:creationId xmlns:a16="http://schemas.microsoft.com/office/drawing/2014/main" id="{6FFD45EB-ACDF-9234-7A3C-C925332B2978}"/>
               </a:ext>
             </a:extLst>
           </p:cNvPr>
@@ -3619,7 +3824,7 @@
           <a:bodyPr/>
           <a:lstStyle/>
           <a:p>
-            <a:endParaRPr lang="zh-TW" altLang="en-US"/>
+            <a:endParaRPr lang="zh-TW" altLang="en-US" dirty="0"/>
           </a:p>
         </p:txBody>
       </p:sp>
@@ -3628,7 +3833,7 @@
           <p:cNvPr id="3" name="內容版面配置區 2">
             <a:extLst>
               <a:ext uri="{FF2B5EF4-FFF2-40B4-BE49-F238E27FC236}">
-                <a16:creationId xmlns:a16="http://schemas.microsoft.com/office/drawing/2014/main" id="{C5357848-2309-7B01-D90A-4FCA7E772186}"/>
+                <a16:creationId xmlns:a16="http://schemas.microsoft.com/office/drawing/2014/main" id="{4378E0AC-B0DB-F6B4-1D2B-99B335C5C5CA}"/>
               </a:ext>
             </a:extLst>
           </p:cNvPr>
@@ -3646,80 +3851,95 @@
           <a:p>
             <a:r>
               <a:rPr lang="en-US" altLang="zh-TW" b="1" dirty="0"/>
-              <a:t>5. Power BI </a:t>
-            </a:r>
-            <a:r>
-              <a:rPr lang="zh-TW" altLang="en-US" b="1" dirty="0"/>
-              <a:t>視覺化報表產出 </a:t>
-            </a:r>
-            <a:r>
-              <a:rPr lang="en-US" altLang="zh-TW" b="1" dirty="0"/>
-              <a:t>(Visual Dashboard)</a:t>
-            </a:r>
-          </a:p>
-          <a:p>
-            <a:r>
-              <a:rPr lang="zh-TW" altLang="en-US" b="1" dirty="0"/>
-              <a:t>趨勢圖表：</a:t>
-            </a:r>
-            <a:r>
-              <a:rPr lang="zh-TW" altLang="en-US" dirty="0"/>
-              <a:t> 繪製動態堆疊面積圖，展現 </a:t>
-            </a:r>
+              <a:t>2017 </a:t>
+            </a:r>
+            <a:r>
+              <a:rPr lang="zh-TW" altLang="en-US" b="1" dirty="0"/>
+              <a:t>年後的「觸底反彈」：誰在推動？</a:t>
+            </a:r>
+          </a:p>
+          <a:p>
+            <a:r>
+              <a:rPr lang="zh-TW" altLang="en-US" dirty="0"/>
+              <a:t>這就是你專題的**「英雄出場」**時刻！</a:t>
+            </a:r>
+          </a:p>
+          <a:p>
             <a:r>
               <a:rPr lang="en-US" altLang="zh-TW" dirty="0"/>
-              <a:t>20 </a:t>
-            </a:r>
-            <a:r>
-              <a:rPr lang="zh-TW" altLang="en-US" dirty="0"/>
-              <a:t>年結構變遷。</a:t>
-            </a:r>
-          </a:p>
-          <a:p>
-            <a:r>
-              <a:rPr lang="zh-TW" altLang="en-US" b="1" dirty="0"/>
-              <a:t>核心指標 </a:t>
-            </a:r>
-            <a:r>
-              <a:rPr lang="en-US" altLang="zh-TW" b="1" dirty="0"/>
-              <a:t>(KPI)</a:t>
-            </a:r>
-            <a:r>
-              <a:rPr lang="zh-TW" altLang="en-US" b="1" dirty="0"/>
-              <a:t>：</a:t>
-            </a:r>
-            <a:r>
-              <a:rPr lang="zh-TW" altLang="en-US" dirty="0"/>
-              <a:t> 建立動態量值卡片，即時顯示當前潔淨能源佔比。</a:t>
-            </a:r>
-          </a:p>
-          <a:p>
-            <a:r>
-              <a:rPr lang="zh-TW" altLang="en-US" b="1" dirty="0"/>
-              <a:t>互動設計：</a:t>
-            </a:r>
-            <a:r>
-              <a:rPr lang="zh-TW" altLang="en-US" dirty="0"/>
-              <a:t> 設置時間與主體切片器 </a:t>
+              <a:t>2017 </a:t>
+            </a:r>
+            <a:r>
+              <a:rPr lang="zh-TW" altLang="en-US" dirty="0"/>
+              <a:t>年後佔比開始反彈，你可以觀察你的 </a:t>
             </a:r>
             <a:r>
               <a:rPr lang="en-US" altLang="zh-TW" dirty="0"/>
-              <a:t>(Slicer)</a:t>
-            </a:r>
-            <a:r>
-              <a:rPr lang="zh-TW" altLang="en-US" dirty="0"/>
-              <a:t>，支持「下鑽式」探索。</a:t>
-            </a:r>
-          </a:p>
-          <a:p>
+              <a:t>Power BI </a:t>
+            </a:r>
+            <a:r>
+              <a:rPr lang="zh-TW" altLang="en-US" dirty="0"/>
+              <a:t>圖表，看看是不是出現了以下現象：</a:t>
+            </a:r>
+          </a:p>
+          <a:p>
+            <a:r>
+              <a:rPr lang="zh-TW" altLang="en-US" b="1" dirty="0"/>
+              <a:t>「民間自用綠能」的線條開始陡峭上升。</a:t>
+            </a:r>
             <a:endParaRPr lang="zh-TW" altLang="en-US" dirty="0"/>
+          </a:p>
+          <a:p>
+            <a:r>
+              <a:rPr lang="zh-TW" altLang="en-US" b="1" dirty="0"/>
+              <a:t>「民營電廠 </a:t>
+            </a:r>
+            <a:r>
+              <a:rPr lang="en-US" altLang="zh-TW" b="1" dirty="0"/>
+              <a:t>(IPP) </a:t>
+            </a:r>
+            <a:r>
+              <a:rPr lang="zh-TW" altLang="en-US" b="1" dirty="0"/>
+              <a:t>綠能」大型案場開始併網。</a:t>
+            </a:r>
+            <a:endParaRPr lang="zh-TW" altLang="en-US" dirty="0"/>
+          </a:p>
+          <a:p>
+            <a:r>
+              <a:rPr lang="zh-TW" altLang="en-US" dirty="0"/>
+              <a:t>「自 </a:t>
+            </a:r>
+            <a:r>
+              <a:rPr lang="en-US" altLang="zh-TW" dirty="0"/>
+              <a:t>2017 </a:t>
+            </a:r>
+            <a:r>
+              <a:rPr lang="zh-TW" altLang="en-US" dirty="0"/>
+              <a:t>年能源轉型以來，民間自用綠能設備規模已達成 </a:t>
+            </a:r>
+            <a:r>
+              <a:rPr lang="en-US" altLang="zh-TW" dirty="0"/>
+              <a:t>200% </a:t>
+            </a:r>
+            <a:r>
+              <a:rPr lang="zh-TW" altLang="en-US" dirty="0"/>
+              <a:t>的爆發式成長，發電量翻逐 </a:t>
+            </a:r>
+            <a:r>
+              <a:rPr lang="en-US" altLang="zh-TW" dirty="0"/>
+              <a:t>3 </a:t>
+            </a:r>
+            <a:r>
+              <a:rPr lang="zh-TW" altLang="en-US" dirty="0"/>
+              <a:t>倍，成為台灣分散式電網最強大的動能。」</a:t>
+            </a:r>
           </a:p>
         </p:txBody>
       </p:sp>
     </p:spTree>
     <p:extLst>
       <p:ext uri="{BB962C8B-B14F-4D97-AF65-F5344CB8AC3E}">
-        <p14:creationId xmlns:p14="http://schemas.microsoft.com/office/powerpoint/2010/main" val="2226702609"/>
+        <p14:creationId xmlns:p14="http://schemas.microsoft.com/office/powerpoint/2010/main" val="3335961805"/>
       </p:ext>
     </p:extLst>
   </p:cSld>
@@ -3751,7 +3971,7 @@
           <p:cNvPr id="2" name="標題 1">
             <a:extLst>
               <a:ext uri="{FF2B5EF4-FFF2-40B4-BE49-F238E27FC236}">
-                <a16:creationId xmlns:a16="http://schemas.microsoft.com/office/drawing/2014/main" id="{9D24B10B-341A-DB2B-6121-2E6909E8CC98}"/>
+                <a16:creationId xmlns:a16="http://schemas.microsoft.com/office/drawing/2014/main" id="{DDE79172-72BF-B270-BC98-57276887EC43}"/>
               </a:ext>
             </a:extLst>
           </p:cNvPr>
@@ -3776,7 +3996,7 @@
           <p:cNvPr id="3" name="內容版面配置區 2">
             <a:extLst>
               <a:ext uri="{FF2B5EF4-FFF2-40B4-BE49-F238E27FC236}">
-                <a16:creationId xmlns:a16="http://schemas.microsoft.com/office/drawing/2014/main" id="{0523407A-2F3A-C50B-3F64-91A8D5F85E66}"/>
+                <a16:creationId xmlns:a16="http://schemas.microsoft.com/office/drawing/2014/main" id="{C5357848-2309-7B01-D90A-4FCA7E772186}"/>
               </a:ext>
             </a:extLst>
           </p:cNvPr>
@@ -3794,61 +4014,69 @@
           <a:p>
             <a:r>
               <a:rPr lang="en-US" altLang="zh-TW" b="1" dirty="0"/>
-              <a:t>6. </a:t>
-            </a:r>
-            <a:r>
-              <a:rPr lang="zh-TW" altLang="en-US" b="1" dirty="0"/>
-              <a:t>專題簡報生成與結論 </a:t>
-            </a:r>
-            <a:r>
-              <a:rPr lang="en-US" altLang="zh-TW" b="1" dirty="0"/>
-              <a:t>(Final Presentation)</a:t>
-            </a:r>
-          </a:p>
-          <a:p>
-            <a:r>
-              <a:rPr lang="zh-TW" altLang="en-US" b="1" dirty="0"/>
-              <a:t>技術總結：</a:t>
-            </a:r>
-            <a:r>
-              <a:rPr lang="zh-TW" altLang="en-US" dirty="0"/>
-              <a:t> 說明 </a:t>
+              <a:t>5. Power BI </a:t>
+            </a:r>
+            <a:r>
+              <a:rPr lang="zh-TW" altLang="en-US" b="1" dirty="0"/>
+              <a:t>視覺化報表產出 </a:t>
+            </a:r>
+            <a:r>
+              <a:rPr lang="en-US" altLang="zh-TW" b="1" dirty="0"/>
+              <a:t>(Visual Dashboard)</a:t>
+            </a:r>
+          </a:p>
+          <a:p>
+            <a:r>
+              <a:rPr lang="zh-TW" altLang="en-US" b="1" dirty="0"/>
+              <a:t>趨勢圖表：</a:t>
+            </a:r>
+            <a:r>
+              <a:rPr lang="zh-TW" altLang="en-US" dirty="0"/>
+              <a:t> 繪製動態堆疊面積圖，展現 </a:t>
             </a:r>
             <a:r>
               <a:rPr lang="en-US" altLang="zh-TW" dirty="0"/>
-              <a:t>ETL </a:t>
-            </a:r>
-            <a:r>
-              <a:rPr lang="zh-TW" altLang="en-US" dirty="0"/>
-              <a:t>處理過程與資料嚴謹度。</a:t>
-            </a:r>
-          </a:p>
-          <a:p>
-            <a:r>
-              <a:rPr lang="zh-TW" altLang="en-US" b="1" dirty="0"/>
-              <a:t>關鍵洞察：</a:t>
-            </a:r>
-            <a:r>
-              <a:rPr lang="zh-TW" altLang="en-US" dirty="0"/>
-              <a:t> 總結自用發電設備如何引領能源轉型。</a:t>
-            </a:r>
-          </a:p>
-          <a:p>
-            <a:r>
-              <a:rPr lang="zh-TW" altLang="en-US" b="1" dirty="0"/>
-              <a:t>策略建議：</a:t>
-            </a:r>
-            <a:r>
-              <a:rPr lang="zh-TW" altLang="en-US" dirty="0"/>
-              <a:t> 根據數據預測 </a:t>
+              <a:t>20 </a:t>
+            </a:r>
+            <a:r>
+              <a:rPr lang="zh-TW" altLang="en-US" dirty="0"/>
+              <a:t>年結構變遷。</a:t>
+            </a:r>
+          </a:p>
+          <a:p>
+            <a:r>
+              <a:rPr lang="zh-TW" altLang="en-US" b="1" dirty="0"/>
+              <a:t>核心指標 </a:t>
+            </a:r>
+            <a:r>
+              <a:rPr lang="en-US" altLang="zh-TW" b="1" dirty="0"/>
+              <a:t>(KPI)</a:t>
+            </a:r>
+            <a:r>
+              <a:rPr lang="zh-TW" altLang="en-US" b="1" dirty="0"/>
+              <a:t>：</a:t>
+            </a:r>
+            <a:r>
+              <a:rPr lang="zh-TW" altLang="en-US" dirty="0"/>
+              <a:t> 建立動態量值卡片，即時顯示當前潔淨能源佔比。</a:t>
+            </a:r>
+          </a:p>
+          <a:p>
+            <a:r>
+              <a:rPr lang="zh-TW" altLang="en-US" b="1" dirty="0"/>
+              <a:t>互動設計：</a:t>
+            </a:r>
+            <a:r>
+              <a:rPr lang="zh-TW" altLang="en-US" dirty="0"/>
+              <a:t> 設置時間與主體切片器 </a:t>
             </a:r>
             <a:r>
               <a:rPr lang="en-US" altLang="zh-TW" dirty="0"/>
-              <a:t>2026 </a:t>
-            </a:r>
-            <a:r>
-              <a:rPr lang="zh-TW" altLang="en-US" dirty="0"/>
-              <a:t>年後台灣能源配比的挑戰。</a:t>
+              <a:t>(Slicer)</a:t>
+            </a:r>
+            <a:r>
+              <a:rPr lang="zh-TW" altLang="en-US" dirty="0"/>
+              <a:t>，支持「下鑽式」探索。</a:t>
             </a:r>
           </a:p>
           <a:p>
@@ -3859,7 +4087,7 @@
     </p:spTree>
     <p:extLst>
       <p:ext uri="{BB962C8B-B14F-4D97-AF65-F5344CB8AC3E}">
-        <p14:creationId xmlns:p14="http://schemas.microsoft.com/office/powerpoint/2010/main" val="3236247884"/>
+        <p14:creationId xmlns:p14="http://schemas.microsoft.com/office/powerpoint/2010/main" val="2226702609"/>
       </p:ext>
     </p:extLst>
   </p:cSld>
@@ -3891,7 +4119,7 @@
           <p:cNvPr id="2" name="標題 1">
             <a:extLst>
               <a:ext uri="{FF2B5EF4-FFF2-40B4-BE49-F238E27FC236}">
-                <a16:creationId xmlns:a16="http://schemas.microsoft.com/office/drawing/2014/main" id="{DE433224-B4C8-50D2-0AD6-C468ADA62B8E}"/>
+                <a16:creationId xmlns:a16="http://schemas.microsoft.com/office/drawing/2014/main" id="{9D24B10B-341A-DB2B-6121-2E6909E8CC98}"/>
               </a:ext>
             </a:extLst>
           </p:cNvPr>
@@ -3916,7 +4144,7 @@
           <p:cNvPr id="3" name="內容版面配置區 2">
             <a:extLst>
               <a:ext uri="{FF2B5EF4-FFF2-40B4-BE49-F238E27FC236}">
-                <a16:creationId xmlns:a16="http://schemas.microsoft.com/office/drawing/2014/main" id="{9E330D6F-1852-2386-A8C5-C7CAC62384CF}"/>
+                <a16:creationId xmlns:a16="http://schemas.microsoft.com/office/drawing/2014/main" id="{0523407A-2F3A-C50B-3F64-91A8D5F85E66}"/>
               </a:ext>
             </a:extLst>
           </p:cNvPr>
@@ -3929,157 +4157,67 @@
         </p:nvSpPr>
         <p:spPr/>
         <p:txBody>
-          <a:bodyPr>
-            <a:normAutofit lnSpcReduction="10000"/>
-          </a:bodyPr>
+          <a:bodyPr/>
           <a:lstStyle/>
           <a:p>
             <a:r>
-              <a:rPr lang="zh-TW" altLang="en-US" b="1" dirty="0"/>
-              <a:t>你的下一步建議</a:t>
-            </a:r>
-          </a:p>
-          <a:p>
-            <a:r>
-              <a:rPr lang="zh-TW" altLang="en-US" dirty="0"/>
-              <a:t>既然你已經完成了 </a:t>
-            </a:r>
-            <a:r>
-              <a:rPr lang="en-US" altLang="zh-TW" b="1" dirty="0"/>
-              <a:t>1 </a:t>
-            </a:r>
-            <a:r>
-              <a:rPr lang="zh-TW" altLang="en-US" b="1" dirty="0"/>
-              <a:t>到 </a:t>
-            </a:r>
-            <a:r>
-              <a:rPr lang="en-US" altLang="zh-TW" b="1" dirty="0"/>
-              <a:t>3 </a:t>
-            </a:r>
-            <a:r>
-              <a:rPr lang="zh-TW" altLang="en-US" b="1" dirty="0"/>
-              <a:t>步 </a:t>
-            </a:r>
-            <a:r>
-              <a:rPr lang="en-US" altLang="zh-TW" b="1" dirty="0"/>
-              <a:t>(ETL)</a:t>
-            </a:r>
-            <a:r>
-              <a:rPr lang="zh-TW" altLang="en-US" dirty="0"/>
-              <a:t>，現在進入 </a:t>
-            </a:r>
-            <a:r>
-              <a:rPr lang="zh-TW" altLang="en-US" b="1" dirty="0"/>
-              <a:t>第 </a:t>
-            </a:r>
-            <a:r>
-              <a:rPr lang="en-US" altLang="zh-TW" b="1" dirty="0"/>
-              <a:t>4 </a:t>
-            </a:r>
-            <a:r>
-              <a:rPr lang="zh-TW" altLang="en-US" b="1" dirty="0"/>
-              <a:t>步 </a:t>
-            </a:r>
-            <a:r>
-              <a:rPr lang="en-US" altLang="zh-TW" b="1" dirty="0"/>
-              <a:t>(</a:t>
-            </a:r>
-            <a:r>
-              <a:rPr lang="zh-TW" altLang="en-US" b="1" dirty="0"/>
-              <a:t>資料分析</a:t>
-            </a:r>
-            <a:r>
-              <a:rPr lang="en-US" altLang="zh-TW" b="1" dirty="0"/>
-              <a:t>)</a:t>
-            </a:r>
-            <a:r>
-              <a:rPr lang="zh-TW" altLang="en-US" dirty="0"/>
-              <a:t> 時，你可以試著在 </a:t>
+              <a:rPr lang="en-US" altLang="zh-TW" b="1" dirty="0"/>
+              <a:t>6. </a:t>
+            </a:r>
+            <a:r>
+              <a:rPr lang="zh-TW" altLang="en-US" b="1" dirty="0"/>
+              <a:t>專題簡報生成與結論 </a:t>
+            </a:r>
+            <a:r>
+              <a:rPr lang="en-US" altLang="zh-TW" b="1" dirty="0"/>
+              <a:t>(Final Presentation)</a:t>
+            </a:r>
+          </a:p>
+          <a:p>
+            <a:r>
+              <a:rPr lang="zh-TW" altLang="en-US" b="1" dirty="0"/>
+              <a:t>技術總結：</a:t>
+            </a:r>
+            <a:r>
+              <a:rPr lang="zh-TW" altLang="en-US" dirty="0"/>
+              <a:t> 說明 </a:t>
             </a:r>
             <a:r>
               <a:rPr lang="en-US" altLang="zh-TW" dirty="0"/>
-              <a:t>Power BI </a:t>
-            </a:r>
-            <a:r>
-              <a:rPr lang="zh-TW" altLang="en-US" dirty="0"/>
-              <a:t>裡找出這一個答案：</a:t>
-            </a:r>
-          </a:p>
-          <a:p>
-            <a:r>
-              <a:rPr lang="zh-TW" altLang="en-US" b="1" dirty="0"/>
-              <a:t>「在哪一個月份，自用發電設備的</a:t>
-            </a:r>
-            <a:r>
-              <a:rPr lang="en-US" altLang="zh-TW" b="1" dirty="0"/>
-              <a:t>『</a:t>
-            </a:r>
-            <a:r>
-              <a:rPr lang="zh-TW" altLang="en-US" b="1" dirty="0"/>
-              <a:t>太陽光電</a:t>
-            </a:r>
-            <a:r>
-              <a:rPr lang="en-US" altLang="zh-TW" b="1" dirty="0"/>
-              <a:t>』</a:t>
-            </a:r>
-            <a:r>
-              <a:rPr lang="zh-TW" altLang="en-US" b="1" dirty="0"/>
-              <a:t>發電量，第一次超越了台電自身的</a:t>
-            </a:r>
-            <a:r>
-              <a:rPr lang="en-US" altLang="zh-TW" b="1" dirty="0"/>
-              <a:t>『</a:t>
-            </a:r>
-            <a:r>
-              <a:rPr lang="zh-TW" altLang="en-US" b="1" dirty="0"/>
-              <a:t>太陽光電</a:t>
-            </a:r>
-            <a:r>
-              <a:rPr lang="en-US" altLang="zh-TW" b="1" dirty="0"/>
-              <a:t>』</a:t>
-            </a:r>
-            <a:r>
-              <a:rPr lang="zh-TW" altLang="en-US" b="1" dirty="0"/>
-              <a:t>發電量？」</a:t>
-            </a:r>
-            <a:endParaRPr lang="zh-TW" altLang="en-US" dirty="0"/>
-          </a:p>
-          <a:p>
-            <a:r>
-              <a:rPr lang="zh-TW" altLang="en-US" dirty="0"/>
-              <a:t>這會是你簡報中最酷、最有力的一張投影片，因為它直接證明了「能源民主化」的進程。</a:t>
-            </a:r>
-          </a:p>
-          <a:p>
-            <a:r>
-              <a:rPr lang="zh-TW" altLang="en-US" b="1" dirty="0"/>
-              <a:t>需要我幫你把這份 </a:t>
-            </a:r>
-            <a:r>
-              <a:rPr lang="en-US" altLang="zh-TW" b="1" dirty="0"/>
-              <a:t>Agenda </a:t>
-            </a:r>
-            <a:r>
-              <a:rPr lang="zh-TW" altLang="en-US" b="1" dirty="0"/>
-              <a:t>轉換成一份 </a:t>
-            </a:r>
-            <a:r>
-              <a:rPr lang="en-US" altLang="zh-TW" b="1" dirty="0"/>
-              <a:t>PPT </a:t>
-            </a:r>
-            <a:r>
-              <a:rPr lang="zh-TW" altLang="en-US" b="1" dirty="0"/>
-              <a:t>用的「專案時程圖 </a:t>
-            </a:r>
-            <a:r>
-              <a:rPr lang="en-US" altLang="zh-TW" b="1" dirty="0"/>
-              <a:t>(Gantt Chart)</a:t>
-            </a:r>
-            <a:r>
-              <a:rPr lang="zh-TW" altLang="en-US" b="1" dirty="0"/>
-              <a:t>」描述，或是幫你寫出簡報開場的第一張投影片內容嗎？</a:t>
-            </a:r>
-            <a:endParaRPr lang="zh-TW" altLang="en-US" dirty="0"/>
+              <a:t>ETL </a:t>
+            </a:r>
+            <a:r>
+              <a:rPr lang="zh-TW" altLang="en-US" dirty="0"/>
+              <a:t>處理過程與資料嚴謹度。</a:t>
+            </a:r>
+          </a:p>
+          <a:p>
+            <a:r>
+              <a:rPr lang="zh-TW" altLang="en-US" b="1" dirty="0"/>
+              <a:t>關鍵洞察：</a:t>
+            </a:r>
+            <a:r>
+              <a:rPr lang="zh-TW" altLang="en-US" dirty="0"/>
+              <a:t> 總結自用發電設備如何引領能源轉型。</a:t>
+            </a:r>
+          </a:p>
+          <a:p>
+            <a:r>
+              <a:rPr lang="zh-TW" altLang="en-US" b="1" dirty="0"/>
+              <a:t>策略建議：</a:t>
+            </a:r>
+            <a:r>
+              <a:rPr lang="zh-TW" altLang="en-US" dirty="0"/>
+              <a:t> 根據數據預測 </a:t>
+            </a:r>
+            <a:r>
+              <a:rPr lang="en-US" altLang="zh-TW" dirty="0"/>
+              <a:t>2026 </a:t>
+            </a:r>
+            <a:r>
+              <a:rPr lang="zh-TW" altLang="en-US" dirty="0"/>
+              <a:t>年後台灣能源配比的挑戰。</a:t>
+            </a:r>
           </a:p>
           <a:p>
             <a:endParaRPr lang="zh-TW" altLang="en-US" dirty="0"/>
@@ -4089,7 +4227,7 @@
     </p:spTree>
     <p:extLst>
       <p:ext uri="{BB962C8B-B14F-4D97-AF65-F5344CB8AC3E}">
-        <p14:creationId xmlns:p14="http://schemas.microsoft.com/office/powerpoint/2010/main" val="1148426050"/>
+        <p14:creationId xmlns:p14="http://schemas.microsoft.com/office/powerpoint/2010/main" val="3236247884"/>
       </p:ext>
     </p:extLst>
   </p:cSld>
@@ -4121,7 +4259,7 @@
           <p:cNvPr id="2" name="標題 1">
             <a:extLst>
               <a:ext uri="{FF2B5EF4-FFF2-40B4-BE49-F238E27FC236}">
-                <a16:creationId xmlns:a16="http://schemas.microsoft.com/office/drawing/2014/main" id="{A82E70D9-A2F5-4DD7-6774-FDF0B13B48AE}"/>
+                <a16:creationId xmlns:a16="http://schemas.microsoft.com/office/drawing/2014/main" id="{DE433224-B4C8-50D2-0AD6-C468ADA62B8E}"/>
               </a:ext>
             </a:extLst>
           </p:cNvPr>
@@ -4137,175 +4275,179 @@
           <a:bodyPr/>
           <a:lstStyle/>
           <a:p>
-            <a:r>
-              <a:rPr lang="zh-TW" altLang="en-US" dirty="0"/>
-              <a:t>專題資料處理技術報告 </a:t>
+            <a:endParaRPr lang="zh-TW" altLang="en-US"/>
+          </a:p>
+        </p:txBody>
+      </p:sp>
+      <p:sp>
+        <p:nvSpPr>
+          <p:cNvPr id="3" name="內容版面配置區 2">
+            <a:extLst>
+              <a:ext uri="{FF2B5EF4-FFF2-40B4-BE49-F238E27FC236}">
+                <a16:creationId xmlns:a16="http://schemas.microsoft.com/office/drawing/2014/main" id="{9E330D6F-1852-2386-A8C5-C7CAC62384CF}"/>
+              </a:ext>
+            </a:extLst>
+          </p:cNvPr>
+          <p:cNvSpPr>
+            <a:spLocks noGrp="1"/>
+          </p:cNvSpPr>
+          <p:nvPr>
+            <p:ph idx="1"/>
+          </p:nvPr>
+        </p:nvSpPr>
+        <p:spPr/>
+        <p:txBody>
+          <a:bodyPr>
+            <a:normAutofit lnSpcReduction="10000"/>
+          </a:bodyPr>
+          <a:lstStyle/>
+          <a:p>
+            <a:r>
+              <a:rPr lang="zh-TW" altLang="en-US" b="1" dirty="0"/>
+              <a:t>你的下一步建議</a:t>
+            </a:r>
+          </a:p>
+          <a:p>
+            <a:r>
+              <a:rPr lang="zh-TW" altLang="en-US" dirty="0"/>
+              <a:t>既然你已經完成了 </a:t>
+            </a:r>
+            <a:r>
+              <a:rPr lang="en-US" altLang="zh-TW" b="1" dirty="0"/>
+              <a:t>1 </a:t>
+            </a:r>
+            <a:r>
+              <a:rPr lang="zh-TW" altLang="en-US" b="1" dirty="0"/>
+              <a:t>到 </a:t>
+            </a:r>
+            <a:r>
+              <a:rPr lang="en-US" altLang="zh-TW" b="1" dirty="0"/>
+              <a:t>3 </a:t>
+            </a:r>
+            <a:r>
+              <a:rPr lang="zh-TW" altLang="en-US" b="1" dirty="0"/>
+              <a:t>步 </a:t>
+            </a:r>
+            <a:r>
+              <a:rPr lang="en-US" altLang="zh-TW" b="1" dirty="0"/>
+              <a:t>(ETL)</a:t>
+            </a:r>
+            <a:r>
+              <a:rPr lang="zh-TW" altLang="en-US" dirty="0"/>
+              <a:t>，現在進入 </a:t>
+            </a:r>
+            <a:r>
+              <a:rPr lang="zh-TW" altLang="en-US" b="1" dirty="0"/>
+              <a:t>第 </a:t>
+            </a:r>
+            <a:r>
+              <a:rPr lang="en-US" altLang="zh-TW" b="1" dirty="0"/>
+              <a:t>4 </a:t>
+            </a:r>
+            <a:r>
+              <a:rPr lang="zh-TW" altLang="en-US" b="1" dirty="0"/>
+              <a:t>步 </a:t>
+            </a:r>
+            <a:r>
+              <a:rPr lang="en-US" altLang="zh-TW" b="1" dirty="0"/>
+              <a:t>(</a:t>
+            </a:r>
+            <a:r>
+              <a:rPr lang="zh-TW" altLang="en-US" b="1" dirty="0"/>
+              <a:t>資料分析</a:t>
+            </a:r>
+            <a:r>
+              <a:rPr lang="en-US" altLang="zh-TW" b="1" dirty="0"/>
+              <a:t>)</a:t>
+            </a:r>
+            <a:r>
+              <a:rPr lang="zh-TW" altLang="en-US" dirty="0"/>
+              <a:t> 時，你可以試著在 </a:t>
             </a:r>
             <a:r>
               <a:rPr lang="en-US" altLang="zh-TW" dirty="0"/>
-              <a:t>(ETL Summary)</a:t>
+              <a:t>Power BI </a:t>
+            </a:r>
+            <a:r>
+              <a:rPr lang="zh-TW" altLang="en-US" dirty="0"/>
+              <a:t>裡找出這一個答案：</a:t>
+            </a:r>
+          </a:p>
+          <a:p>
+            <a:r>
+              <a:rPr lang="zh-TW" altLang="en-US" b="1" dirty="0"/>
+              <a:t>「在哪一個月份，自用發電設備的</a:t>
+            </a:r>
+            <a:r>
+              <a:rPr lang="en-US" altLang="zh-TW" b="1" dirty="0"/>
+              <a:t>『</a:t>
+            </a:r>
+            <a:r>
+              <a:rPr lang="zh-TW" altLang="en-US" b="1" dirty="0"/>
+              <a:t>太陽光電</a:t>
+            </a:r>
+            <a:r>
+              <a:rPr lang="en-US" altLang="zh-TW" b="1" dirty="0"/>
+              <a:t>』</a:t>
+            </a:r>
+            <a:r>
+              <a:rPr lang="zh-TW" altLang="en-US" b="1" dirty="0"/>
+              <a:t>發電量，第一次超越了台電自身的</a:t>
+            </a:r>
+            <a:r>
+              <a:rPr lang="en-US" altLang="zh-TW" b="1" dirty="0"/>
+              <a:t>『</a:t>
+            </a:r>
+            <a:r>
+              <a:rPr lang="zh-TW" altLang="en-US" b="1" dirty="0"/>
+              <a:t>太陽光電</a:t>
+            </a:r>
+            <a:r>
+              <a:rPr lang="en-US" altLang="zh-TW" b="1" dirty="0"/>
+              <a:t>』</a:t>
+            </a:r>
+            <a:r>
+              <a:rPr lang="zh-TW" altLang="en-US" b="1" dirty="0"/>
+              <a:t>發電量？」</a:t>
             </a:r>
             <a:endParaRPr lang="zh-TW" altLang="en-US" dirty="0"/>
           </a:p>
-        </p:txBody>
-      </p:sp>
-      <p:sp>
-        <p:nvSpPr>
-          <p:cNvPr id="3" name="內容版面配置區 2">
-            <a:extLst>
-              <a:ext uri="{FF2B5EF4-FFF2-40B4-BE49-F238E27FC236}">
-                <a16:creationId xmlns:a16="http://schemas.microsoft.com/office/drawing/2014/main" id="{90BA0607-B15B-CA87-7EC6-ECF75025110D}"/>
-              </a:ext>
-            </a:extLst>
-          </p:cNvPr>
-          <p:cNvSpPr>
-            <a:spLocks noGrp="1"/>
-          </p:cNvSpPr>
-          <p:nvPr>
-            <p:ph idx="1"/>
-          </p:nvPr>
-        </p:nvSpPr>
-        <p:spPr/>
-        <p:txBody>
-          <a:bodyPr/>
-          <a:lstStyle/>
-          <a:p>
-            <a:r>
-              <a:rPr lang="zh-TW" altLang="en-US" b="1" dirty="0"/>
-              <a:t>原始資料來源與挑戰</a:t>
-            </a:r>
-          </a:p>
-          <a:p>
-            <a:r>
-              <a:rPr lang="zh-TW" altLang="en-US" b="1" dirty="0"/>
-              <a:t>資料範疇：</a:t>
-            </a:r>
-            <a:r>
-              <a:rPr lang="zh-TW" altLang="en-US" dirty="0"/>
-              <a:t> </a:t>
-            </a:r>
-            <a:r>
-              <a:rPr lang="en-US" altLang="zh-TW" dirty="0"/>
-              <a:t>2007 </a:t>
-            </a:r>
-            <a:r>
-              <a:rPr lang="zh-TW" altLang="en-US" dirty="0"/>
-              <a:t>年至 </a:t>
-            </a:r>
-            <a:r>
-              <a:rPr lang="en-US" altLang="zh-TW" dirty="0"/>
-              <a:t>2026 </a:t>
-            </a:r>
-            <a:r>
-              <a:rPr lang="zh-TW" altLang="en-US" dirty="0"/>
-              <a:t>年台灣逐月發電量數據。</a:t>
-            </a:r>
-          </a:p>
-          <a:p>
-            <a:r>
-              <a:rPr lang="zh-TW" altLang="en-US" b="1" dirty="0"/>
-              <a:t>原始格式：</a:t>
-            </a:r>
-            <a:r>
-              <a:rPr lang="zh-TW" altLang="en-US" dirty="0"/>
-              <a:t> 典型「寬表 </a:t>
-            </a:r>
-            <a:r>
-              <a:rPr lang="en-US" altLang="zh-TW" dirty="0"/>
-              <a:t>(Wide Table)</a:t>
-            </a:r>
-            <a:r>
-              <a:rPr lang="zh-TW" altLang="en-US" dirty="0"/>
-              <a:t>」，包含超過 </a:t>
-            </a:r>
-            <a:r>
-              <a:rPr lang="en-US" altLang="zh-TW" dirty="0"/>
-              <a:t>50 </a:t>
-            </a:r>
-            <a:r>
-              <a:rPr lang="zh-TW" altLang="en-US" dirty="0"/>
-              <a:t>個欄位（如：再生能源</a:t>
-            </a:r>
-            <a:r>
-              <a:rPr lang="en-US" altLang="zh-TW" dirty="0"/>
-              <a:t>_</a:t>
-            </a:r>
-            <a:r>
-              <a:rPr lang="zh-TW" altLang="en-US" dirty="0"/>
-              <a:t>太陽光電</a:t>
-            </a:r>
-            <a:r>
-              <a:rPr lang="en-US" altLang="zh-TW" dirty="0"/>
-              <a:t>_</a:t>
-            </a:r>
-            <a:r>
-              <a:rPr lang="zh-TW" altLang="en-US" dirty="0"/>
-              <a:t>台電）。</a:t>
-            </a:r>
-          </a:p>
-          <a:p>
-            <a:r>
-              <a:rPr lang="zh-TW" altLang="en-US" b="1" dirty="0"/>
-              <a:t>面臨挑戰：</a:t>
-            </a:r>
-            <a:r>
-              <a:rPr lang="zh-TW" altLang="en-US" dirty="0"/>
-              <a:t> * </a:t>
-            </a:r>
-            <a:r>
-              <a:rPr lang="zh-TW" altLang="en-US" b="1" dirty="0"/>
-              <a:t>維度混雜：</a:t>
-            </a:r>
-            <a:r>
-              <a:rPr lang="zh-TW" altLang="en-US" dirty="0"/>
-              <a:t> 經營主體、能源類別、發電細項全擠在欄位名稱中，無法直接進行類別分析。</a:t>
-            </a:r>
-          </a:p>
-          <a:p>
-            <a:pPr lvl="1"/>
-            <a:r>
-              <a:rPr lang="zh-TW" altLang="en-US" b="1" dirty="0"/>
-              <a:t>資料冗餘：</a:t>
-            </a:r>
-            <a:r>
-              <a:rPr lang="zh-TW" altLang="en-US" dirty="0"/>
-              <a:t> 包含「全國總量」與「分項數據」，直接運算會造成重複計算。</a:t>
-            </a:r>
-          </a:p>
-          <a:p>
-            <a:pPr lvl="1"/>
-            <a:r>
-              <a:rPr lang="zh-TW" altLang="en-US" b="1" dirty="0"/>
-              <a:t>命名雜訊：</a:t>
-            </a:r>
-            <a:r>
-              <a:rPr lang="zh-TW" altLang="en-US" dirty="0"/>
-              <a:t> 欄位帶有 </a:t>
-            </a:r>
-            <a:r>
-              <a:rPr lang="en-US" altLang="zh-TW" dirty="0"/>
-              <a:t>(</a:t>
-            </a:r>
-            <a:r>
-              <a:rPr lang="zh-TW" altLang="en-US" dirty="0"/>
-              <a:t>數值</a:t>
-            </a:r>
-            <a:r>
-              <a:rPr lang="en-US" altLang="zh-TW" dirty="0"/>
-              <a:t>)</a:t>
-            </a:r>
-            <a:r>
-              <a:rPr lang="zh-TW" altLang="en-US" dirty="0"/>
-              <a:t> 或 </a:t>
-            </a:r>
-            <a:r>
-              <a:rPr lang="en-US" altLang="zh-TW" dirty="0"/>
-              <a:t>_</a:t>
-            </a:r>
-            <a:r>
-              <a:rPr lang="zh-TW" altLang="en-US" dirty="0"/>
-              <a:t>全國 等非結構化文字。</a:t>
-            </a:r>
+          <a:p>
+            <a:r>
+              <a:rPr lang="zh-TW" altLang="en-US" dirty="0"/>
+              <a:t>這會是你簡報中最酷、最有力的一張投影片，因為它直接證明了「能源民主化」的進程。</a:t>
+            </a:r>
+          </a:p>
+          <a:p>
+            <a:r>
+              <a:rPr lang="zh-TW" altLang="en-US" b="1" dirty="0"/>
+              <a:t>需要我幫你把這份 </a:t>
+            </a:r>
+            <a:r>
+              <a:rPr lang="en-US" altLang="zh-TW" b="1" dirty="0"/>
+              <a:t>Agenda </a:t>
+            </a:r>
+            <a:r>
+              <a:rPr lang="zh-TW" altLang="en-US" b="1" dirty="0"/>
+              <a:t>轉換成一份 </a:t>
+            </a:r>
+            <a:r>
+              <a:rPr lang="en-US" altLang="zh-TW" b="1" dirty="0"/>
+              <a:t>PPT </a:t>
+            </a:r>
+            <a:r>
+              <a:rPr lang="zh-TW" altLang="en-US" b="1" dirty="0"/>
+              <a:t>用的「專案時程圖 </a:t>
+            </a:r>
+            <a:r>
+              <a:rPr lang="en-US" altLang="zh-TW" b="1" dirty="0"/>
+              <a:t>(Gantt Chart)</a:t>
+            </a:r>
+            <a:r>
+              <a:rPr lang="zh-TW" altLang="en-US" b="1" dirty="0"/>
+              <a:t>」描述，或是幫你寫出簡報開場的第一張投影片內容嗎？</a:t>
+            </a:r>
+            <a:endParaRPr lang="zh-TW" altLang="en-US" dirty="0"/>
           </a:p>
           <a:p>
             <a:endParaRPr lang="zh-TW" altLang="en-US" dirty="0"/>
@@ -4315,7 +4457,7 @@
     </p:spTree>
     <p:extLst>
       <p:ext uri="{BB962C8B-B14F-4D97-AF65-F5344CB8AC3E}">
-        <p14:creationId xmlns:p14="http://schemas.microsoft.com/office/powerpoint/2010/main" val="1119287776"/>
+        <p14:creationId xmlns:p14="http://schemas.microsoft.com/office/powerpoint/2010/main" val="1148426050"/>
       </p:ext>
     </p:extLst>
   </p:cSld>
@@ -4347,6 +4489,232 @@
           <p:cNvPr id="2" name="標題 1">
             <a:extLst>
               <a:ext uri="{FF2B5EF4-FFF2-40B4-BE49-F238E27FC236}">
+                <a16:creationId xmlns:a16="http://schemas.microsoft.com/office/drawing/2014/main" id="{A82E70D9-A2F5-4DD7-6774-FDF0B13B48AE}"/>
+              </a:ext>
+            </a:extLst>
+          </p:cNvPr>
+          <p:cNvSpPr>
+            <a:spLocks noGrp="1"/>
+          </p:cNvSpPr>
+          <p:nvPr>
+            <p:ph type="title"/>
+          </p:nvPr>
+        </p:nvSpPr>
+        <p:spPr/>
+        <p:txBody>
+          <a:bodyPr/>
+          <a:lstStyle/>
+          <a:p>
+            <a:r>
+              <a:rPr lang="zh-TW" altLang="en-US" dirty="0"/>
+              <a:t>專題資料處理技術報告 </a:t>
+            </a:r>
+            <a:r>
+              <a:rPr lang="en-US" altLang="zh-TW" dirty="0"/>
+              <a:t>(ETL Summary)</a:t>
+            </a:r>
+            <a:endParaRPr lang="zh-TW" altLang="en-US" dirty="0"/>
+          </a:p>
+        </p:txBody>
+      </p:sp>
+      <p:sp>
+        <p:nvSpPr>
+          <p:cNvPr id="3" name="內容版面配置區 2">
+            <a:extLst>
+              <a:ext uri="{FF2B5EF4-FFF2-40B4-BE49-F238E27FC236}">
+                <a16:creationId xmlns:a16="http://schemas.microsoft.com/office/drawing/2014/main" id="{90BA0607-B15B-CA87-7EC6-ECF75025110D}"/>
+              </a:ext>
+            </a:extLst>
+          </p:cNvPr>
+          <p:cNvSpPr>
+            <a:spLocks noGrp="1"/>
+          </p:cNvSpPr>
+          <p:nvPr>
+            <p:ph idx="1"/>
+          </p:nvPr>
+        </p:nvSpPr>
+        <p:spPr/>
+        <p:txBody>
+          <a:bodyPr/>
+          <a:lstStyle/>
+          <a:p>
+            <a:r>
+              <a:rPr lang="zh-TW" altLang="en-US" b="1" dirty="0"/>
+              <a:t>原始資料來源與挑戰</a:t>
+            </a:r>
+          </a:p>
+          <a:p>
+            <a:r>
+              <a:rPr lang="zh-TW" altLang="en-US" b="1" dirty="0"/>
+              <a:t>資料範疇：</a:t>
+            </a:r>
+            <a:r>
+              <a:rPr lang="zh-TW" altLang="en-US" dirty="0"/>
+              <a:t> </a:t>
+            </a:r>
+            <a:r>
+              <a:rPr lang="en-US" altLang="zh-TW" dirty="0"/>
+              <a:t>2007 </a:t>
+            </a:r>
+            <a:r>
+              <a:rPr lang="zh-TW" altLang="en-US" dirty="0"/>
+              <a:t>年至 </a:t>
+            </a:r>
+            <a:r>
+              <a:rPr lang="en-US" altLang="zh-TW" dirty="0"/>
+              <a:t>2026 </a:t>
+            </a:r>
+            <a:r>
+              <a:rPr lang="zh-TW" altLang="en-US" dirty="0"/>
+              <a:t>年台灣逐月發電量數據。</a:t>
+            </a:r>
+          </a:p>
+          <a:p>
+            <a:r>
+              <a:rPr lang="zh-TW" altLang="en-US" b="1" dirty="0"/>
+              <a:t>原始格式：</a:t>
+            </a:r>
+            <a:r>
+              <a:rPr lang="zh-TW" altLang="en-US" dirty="0"/>
+              <a:t> 典型「寬表 </a:t>
+            </a:r>
+            <a:r>
+              <a:rPr lang="en-US" altLang="zh-TW" dirty="0"/>
+              <a:t>(Wide Table)</a:t>
+            </a:r>
+            <a:r>
+              <a:rPr lang="zh-TW" altLang="en-US" dirty="0"/>
+              <a:t>」，包含超過 </a:t>
+            </a:r>
+            <a:r>
+              <a:rPr lang="en-US" altLang="zh-TW" dirty="0"/>
+              <a:t>50 </a:t>
+            </a:r>
+            <a:r>
+              <a:rPr lang="zh-TW" altLang="en-US" dirty="0"/>
+              <a:t>個欄位（如：再生能源</a:t>
+            </a:r>
+            <a:r>
+              <a:rPr lang="en-US" altLang="zh-TW" dirty="0"/>
+              <a:t>_</a:t>
+            </a:r>
+            <a:r>
+              <a:rPr lang="zh-TW" altLang="en-US" dirty="0"/>
+              <a:t>太陽光電</a:t>
+            </a:r>
+            <a:r>
+              <a:rPr lang="en-US" altLang="zh-TW" dirty="0"/>
+              <a:t>_</a:t>
+            </a:r>
+            <a:r>
+              <a:rPr lang="zh-TW" altLang="en-US" dirty="0"/>
+              <a:t>台電）。</a:t>
+            </a:r>
+          </a:p>
+          <a:p>
+            <a:r>
+              <a:rPr lang="zh-TW" altLang="en-US" b="1" dirty="0"/>
+              <a:t>面臨挑戰：</a:t>
+            </a:r>
+            <a:r>
+              <a:rPr lang="zh-TW" altLang="en-US" dirty="0"/>
+              <a:t> * </a:t>
+            </a:r>
+            <a:r>
+              <a:rPr lang="zh-TW" altLang="en-US" b="1" dirty="0"/>
+              <a:t>維度混雜：</a:t>
+            </a:r>
+            <a:r>
+              <a:rPr lang="zh-TW" altLang="en-US" dirty="0"/>
+              <a:t> 經營主體、能源類別、發電細項全擠在欄位名稱中，無法直接進行類別分析。</a:t>
+            </a:r>
+          </a:p>
+          <a:p>
+            <a:pPr lvl="1"/>
+            <a:r>
+              <a:rPr lang="zh-TW" altLang="en-US" b="1" dirty="0"/>
+              <a:t>資料冗餘：</a:t>
+            </a:r>
+            <a:r>
+              <a:rPr lang="zh-TW" altLang="en-US" dirty="0"/>
+              <a:t> 包含「全國總量」與「分項數據」，直接運算會造成重複計算。</a:t>
+            </a:r>
+          </a:p>
+          <a:p>
+            <a:pPr lvl="1"/>
+            <a:r>
+              <a:rPr lang="zh-TW" altLang="en-US" b="1" dirty="0"/>
+              <a:t>命名雜訊：</a:t>
+            </a:r>
+            <a:r>
+              <a:rPr lang="zh-TW" altLang="en-US" dirty="0"/>
+              <a:t> 欄位帶有 </a:t>
+            </a:r>
+            <a:r>
+              <a:rPr lang="en-US" altLang="zh-TW" dirty="0"/>
+              <a:t>(</a:t>
+            </a:r>
+            <a:r>
+              <a:rPr lang="zh-TW" altLang="en-US" dirty="0"/>
+              <a:t>數值</a:t>
+            </a:r>
+            <a:r>
+              <a:rPr lang="en-US" altLang="zh-TW" dirty="0"/>
+              <a:t>)</a:t>
+            </a:r>
+            <a:r>
+              <a:rPr lang="zh-TW" altLang="en-US" dirty="0"/>
+              <a:t> 或 </a:t>
+            </a:r>
+            <a:r>
+              <a:rPr lang="en-US" altLang="zh-TW" dirty="0"/>
+              <a:t>_</a:t>
+            </a:r>
+            <a:r>
+              <a:rPr lang="zh-TW" altLang="en-US" dirty="0"/>
+              <a:t>全國 等非結構化文字。</a:t>
+            </a:r>
+          </a:p>
+          <a:p>
+            <a:endParaRPr lang="zh-TW" altLang="en-US" dirty="0"/>
+          </a:p>
+        </p:txBody>
+      </p:sp>
+    </p:spTree>
+    <p:extLst>
+      <p:ext uri="{BB962C8B-B14F-4D97-AF65-F5344CB8AC3E}">
+        <p14:creationId xmlns:p14="http://schemas.microsoft.com/office/powerpoint/2010/main" val="1119287776"/>
+      </p:ext>
+    </p:extLst>
+  </p:cSld>
+  <p:clrMapOvr>
+    <a:masterClrMapping/>
+  </p:clrMapOvr>
+</p:sld>
+</file>
+
+<file path=ppt/slides/slide16.xml><?xml version="1.0" encoding="utf-8"?>
+<p:sld xmlns:a="http://schemas.openxmlformats.org/drawingml/2006/main" xmlns:r="http://schemas.openxmlformats.org/officeDocument/2006/relationships" xmlns:p="http://schemas.openxmlformats.org/presentationml/2006/main">
+  <p:cSld>
+    <p:spTree>
+      <p:nvGrpSpPr>
+        <p:cNvPr id="1" name=""/>
+        <p:cNvGrpSpPr/>
+        <p:nvPr/>
+      </p:nvGrpSpPr>
+      <p:grpSpPr>
+        <a:xfrm>
+          <a:off x="0" y="0"/>
+          <a:ext cx="0" cy="0"/>
+          <a:chOff x="0" y="0"/>
+          <a:chExt cx="0" cy="0"/>
+        </a:xfrm>
+      </p:grpSpPr>
+      <p:sp>
+        <p:nvSpPr>
+          <p:cNvPr id="2" name="標題 1">
+            <a:extLst>
+              <a:ext uri="{FF2B5EF4-FFF2-40B4-BE49-F238E27FC236}">
                 <a16:creationId xmlns:a16="http://schemas.microsoft.com/office/drawing/2014/main" id="{F3C46CB4-108E-A652-0C0E-D00F2D90AA4A}"/>
               </a:ext>
             </a:extLst>
@@ -4638,7 +5006,7 @@
 </p:sld>
 </file>
 
-<file path=ppt/slides/slide16.xml><?xml version="1.0" encoding="utf-8"?>
+<file path=ppt/slides/slide17.xml><?xml version="1.0" encoding="utf-8"?>
 <p:sld xmlns:a="http://schemas.openxmlformats.org/drawingml/2006/main" xmlns:r="http://schemas.openxmlformats.org/officeDocument/2006/relationships" xmlns:p="http://schemas.openxmlformats.org/presentationml/2006/main">
   <p:cSld>
     <p:spTree>
@@ -4927,293 +5295,6 @@
 </p:sld>
 </file>
 
-<file path=ppt/slides/slide17.xml><?xml version="1.0" encoding="utf-8"?>
-<p:sld xmlns:a="http://schemas.openxmlformats.org/drawingml/2006/main" xmlns:r="http://schemas.openxmlformats.org/officeDocument/2006/relationships" xmlns:p="http://schemas.openxmlformats.org/presentationml/2006/main">
-  <p:cSld>
-    <p:spTree>
-      <p:nvGrpSpPr>
-        <p:cNvPr id="1" name=""/>
-        <p:cNvGrpSpPr/>
-        <p:nvPr/>
-      </p:nvGrpSpPr>
-      <p:grpSpPr>
-        <a:xfrm>
-          <a:off x="0" y="0"/>
-          <a:ext cx="0" cy="0"/>
-          <a:chOff x="0" y="0"/>
-          <a:chExt cx="0" cy="0"/>
-        </a:xfrm>
-      </p:grpSpPr>
-      <p:sp>
-        <p:nvSpPr>
-          <p:cNvPr id="2" name="標題 1">
-            <a:extLst>
-              <a:ext uri="{FF2B5EF4-FFF2-40B4-BE49-F238E27FC236}">
-                <a16:creationId xmlns:a16="http://schemas.microsoft.com/office/drawing/2014/main" id="{2DD9E8DE-6366-C9E2-2316-E298ADBC0203}"/>
-              </a:ext>
-            </a:extLst>
-          </p:cNvPr>
-          <p:cNvSpPr>
-            <a:spLocks noGrp="1"/>
-          </p:cNvSpPr>
-          <p:nvPr>
-            <p:ph type="title"/>
-          </p:nvPr>
-        </p:nvSpPr>
-        <p:spPr/>
-        <p:txBody>
-          <a:bodyPr/>
-          <a:lstStyle/>
-          <a:p>
-            <a:endParaRPr lang="zh-TW" altLang="en-US"/>
-          </a:p>
-        </p:txBody>
-      </p:sp>
-      <p:sp>
-        <p:nvSpPr>
-          <p:cNvPr id="3" name="內容版面配置區 2">
-            <a:extLst>
-              <a:ext uri="{FF2B5EF4-FFF2-40B4-BE49-F238E27FC236}">
-                <a16:creationId xmlns:a16="http://schemas.microsoft.com/office/drawing/2014/main" id="{E3D7B753-0588-CBC2-B10F-10F5DC3A4CB8}"/>
-              </a:ext>
-            </a:extLst>
-          </p:cNvPr>
-          <p:cNvSpPr>
-            <a:spLocks noGrp="1"/>
-          </p:cNvSpPr>
-          <p:nvPr>
-            <p:ph idx="1"/>
-          </p:nvPr>
-        </p:nvSpPr>
-        <p:spPr/>
-        <p:txBody>
-          <a:bodyPr>
-            <a:normAutofit fontScale="62500" lnSpcReduction="20000"/>
-          </a:bodyPr>
-          <a:lstStyle/>
-          <a:p>
-            <a:r>
-              <a:rPr lang="en-US" altLang="zh-TW" b="1" dirty="0"/>
-              <a:t>3. </a:t>
-            </a:r>
-            <a:r>
-              <a:rPr lang="zh-TW" altLang="en-US" b="1" dirty="0"/>
-              <a:t>資料建模與分析亮點 </a:t>
-            </a:r>
-            <a:r>
-              <a:rPr lang="en-US" altLang="zh-TW" b="1" dirty="0"/>
-              <a:t>(</a:t>
-            </a:r>
-            <a:r>
-              <a:rPr lang="zh-TW" altLang="en-US" b="1" dirty="0"/>
-              <a:t>簡報結論預告</a:t>
-            </a:r>
-            <a:r>
-              <a:rPr lang="en-US" altLang="zh-TW" b="1" dirty="0"/>
-              <a:t>)</a:t>
-            </a:r>
-          </a:p>
-          <a:p>
-            <a:r>
-              <a:rPr lang="zh-TW" altLang="en-US" dirty="0"/>
-              <a:t>透過上述處理，這份資料現在具備了支持以下兩大發現的能力：</a:t>
-            </a:r>
-          </a:p>
-          <a:p>
-            <a:r>
-              <a:rPr lang="zh-TW" altLang="en-US" b="1" dirty="0"/>
-              <a:t>結構交叉點 </a:t>
-            </a:r>
-            <a:r>
-              <a:rPr lang="en-US" altLang="zh-TW" b="1" dirty="0"/>
-              <a:t>(</a:t>
-            </a:r>
-            <a:r>
-              <a:rPr lang="zh-TW" altLang="en-US" b="1" dirty="0"/>
-              <a:t>方向四</a:t>
-            </a:r>
-            <a:r>
-              <a:rPr lang="en-US" altLang="zh-TW" b="1" dirty="0"/>
-              <a:t>)</a:t>
-            </a:r>
-            <a:r>
-              <a:rPr lang="zh-TW" altLang="en-US" b="1" dirty="0"/>
-              <a:t>：</a:t>
-            </a:r>
-            <a:r>
-              <a:rPr lang="zh-TW" altLang="en-US" dirty="0"/>
-              <a:t> 能夠精準鎖定「再生能源」月產出正式超越「核能」的歷史瞬間，觀察能源接力賽的轉折。</a:t>
-            </a:r>
-          </a:p>
-          <a:p>
-            <a:r>
-              <a:rPr lang="zh-TW" altLang="en-US" b="1" dirty="0"/>
-              <a:t>民間動能 </a:t>
-            </a:r>
-            <a:r>
-              <a:rPr lang="en-US" altLang="zh-TW" b="1" dirty="0"/>
-              <a:t>(</a:t>
-            </a:r>
-            <a:r>
-              <a:rPr lang="zh-TW" altLang="en-US" b="1" dirty="0"/>
-              <a:t>方向三</a:t>
-            </a:r>
-            <a:r>
-              <a:rPr lang="en-US" altLang="zh-TW" b="1" dirty="0"/>
-              <a:t>)</a:t>
-            </a:r>
-            <a:r>
-              <a:rPr lang="zh-TW" altLang="en-US" b="1" dirty="0"/>
-              <a:t>：</a:t>
-            </a:r>
-            <a:r>
-              <a:rPr lang="zh-TW" altLang="en-US" dirty="0"/>
-              <a:t> 透過 經營主體 與 潔淨標籤 的交叉分析，實證了 </a:t>
-            </a:r>
-            <a:r>
-              <a:rPr lang="zh-TW" altLang="en-US" b="1" dirty="0"/>
-              <a:t>「自用發電設備」</a:t>
-            </a:r>
-            <a:r>
-              <a:rPr lang="zh-TW" altLang="en-US" dirty="0"/>
-              <a:t> 才是目前推動潔淨能源佔比上升的最快引擎（能源民主化趨勢）。</a:t>
-            </a:r>
-          </a:p>
-          <a:p>
-            <a:br>
-              <a:rPr lang="zh-TW" altLang="en-US" dirty="0"/>
-            </a:br>
-            <a:endParaRPr lang="zh-TW" altLang="en-US" dirty="0"/>
-          </a:p>
-          <a:p>
-            <a:r>
-              <a:rPr lang="zh-TW" altLang="en-US" b="1" dirty="0"/>
-              <a:t>💡 給簡報的小建議</a:t>
-            </a:r>
-          </a:p>
-          <a:p>
-            <a:r>
-              <a:rPr lang="zh-TW" altLang="en-US" dirty="0"/>
-              <a:t>在簡報這部分時，你可以放一張 </a:t>
-            </a:r>
-            <a:r>
-              <a:rPr lang="zh-TW" altLang="en-US" b="1" dirty="0"/>
-              <a:t>「清洗前 </a:t>
-            </a:r>
-            <a:r>
-              <a:rPr lang="en-US" altLang="zh-TW" b="1" dirty="0"/>
-              <a:t>(Before) vs. </a:t>
-            </a:r>
-            <a:r>
-              <a:rPr lang="zh-TW" altLang="en-US" b="1" dirty="0"/>
-              <a:t>清洗後 </a:t>
-            </a:r>
-            <a:r>
-              <a:rPr lang="en-US" altLang="zh-TW" b="1" dirty="0"/>
-              <a:t>(After)</a:t>
-            </a:r>
-            <a:r>
-              <a:rPr lang="zh-TW" altLang="en-US" b="1" dirty="0"/>
-              <a:t>」</a:t>
-            </a:r>
-            <a:r>
-              <a:rPr lang="zh-TW" altLang="en-US" dirty="0"/>
-              <a:t> 的截圖對比。</a:t>
-            </a:r>
-          </a:p>
-          <a:p>
-            <a:r>
-              <a:rPr lang="en-US" altLang="zh-TW" b="1" dirty="0"/>
-              <a:t>Before:</a:t>
-            </a:r>
-            <a:r>
-              <a:rPr lang="zh-TW" altLang="en-US" dirty="0"/>
-              <a:t> 密密麻麻、看不到盡頭的 </a:t>
-            </a:r>
-            <a:r>
-              <a:rPr lang="en-US" altLang="zh-TW" dirty="0"/>
-              <a:t>Excel </a:t>
-            </a:r>
-            <a:r>
-              <a:rPr lang="zh-TW" altLang="en-US" dirty="0"/>
-              <a:t>欄位。</a:t>
-            </a:r>
-          </a:p>
-          <a:p>
-            <a:r>
-              <a:rPr lang="en-US" altLang="zh-TW" b="1" dirty="0"/>
-              <a:t>After:</a:t>
-            </a:r>
-            <a:r>
-              <a:rPr lang="zh-TW" altLang="en-US" dirty="0"/>
-              <a:t> 簡潔、具有「大類</a:t>
-            </a:r>
-            <a:r>
-              <a:rPr lang="en-US" altLang="zh-TW" dirty="0"/>
-              <a:t>/</a:t>
-            </a:r>
-            <a:r>
-              <a:rPr lang="zh-TW" altLang="en-US" dirty="0"/>
-              <a:t>主體</a:t>
-            </a:r>
-            <a:r>
-              <a:rPr lang="en-US" altLang="zh-TW" dirty="0"/>
-              <a:t>/</a:t>
-            </a:r>
-            <a:r>
-              <a:rPr lang="zh-TW" altLang="en-US" dirty="0"/>
-              <a:t>潔淨」標籤的結構化表格。 這能讓評審或主管立刻看出你的 </a:t>
-            </a:r>
-            <a:r>
-              <a:rPr lang="en-US" altLang="zh-TW" b="1" dirty="0"/>
-              <a:t>Data Sense (</a:t>
-            </a:r>
-            <a:r>
-              <a:rPr lang="zh-TW" altLang="en-US" b="1" dirty="0"/>
-              <a:t>資料感</a:t>
-            </a:r>
-            <a:r>
-              <a:rPr lang="en-US" altLang="zh-TW" b="1" dirty="0"/>
-              <a:t>)</a:t>
-            </a:r>
-            <a:r>
-              <a:rPr lang="zh-TW" altLang="en-US" dirty="0"/>
-              <a:t>。</a:t>
-            </a:r>
-          </a:p>
-          <a:p>
-            <a:r>
-              <a:rPr lang="zh-TW" altLang="en-US" b="1" dirty="0"/>
-              <a:t>既然 </a:t>
-            </a:r>
-            <a:r>
-              <a:rPr lang="en-US" altLang="zh-TW" b="1" dirty="0"/>
-              <a:t>ETL Summary </a:t>
-            </a:r>
-            <a:r>
-              <a:rPr lang="zh-TW" altLang="en-US" b="1" dirty="0"/>
-              <a:t>做好了，需要我幫你擬一份這份專題簡報的「大綱與目錄」嗎？幫你把分析發現串成一個有溫度的故事。</a:t>
-            </a:r>
-            <a:endParaRPr lang="zh-TW" altLang="en-US" dirty="0"/>
-          </a:p>
-          <a:p>
-            <a:endParaRPr lang="zh-TW" altLang="en-US" dirty="0"/>
-          </a:p>
-        </p:txBody>
-      </p:sp>
-    </p:spTree>
-    <p:extLst>
-      <p:ext uri="{BB962C8B-B14F-4D97-AF65-F5344CB8AC3E}">
-        <p14:creationId xmlns:p14="http://schemas.microsoft.com/office/powerpoint/2010/main" val="2689570967"/>
-      </p:ext>
-    </p:extLst>
-  </p:cSld>
-  <p:clrMapOvr>
-    <a:masterClrMapping/>
-  </p:clrMapOvr>
-</p:sld>
-</file>
-
 <file path=ppt/slides/slide18.xml><?xml version="1.0" encoding="utf-8"?>
 <p:sld xmlns:a="http://schemas.openxmlformats.org/drawingml/2006/main" xmlns:r="http://schemas.openxmlformats.org/officeDocument/2006/relationships" xmlns:p="http://schemas.openxmlformats.org/presentationml/2006/main">
   <p:cSld>
@@ -5236,7 +5317,7 @@
           <p:cNvPr id="2" name="標題 1">
             <a:extLst>
               <a:ext uri="{FF2B5EF4-FFF2-40B4-BE49-F238E27FC236}">
-                <a16:creationId xmlns:a16="http://schemas.microsoft.com/office/drawing/2014/main" id="{C343A1D4-1F22-0E32-9B64-AD1583DFCA49}"/>
+                <a16:creationId xmlns:a16="http://schemas.microsoft.com/office/drawing/2014/main" id="{2DD9E8DE-6366-C9E2-2316-E298ADBC0203}"/>
               </a:ext>
             </a:extLst>
           </p:cNvPr>
@@ -5261,7 +5342,7 @@
           <p:cNvPr id="3" name="內容版面配置區 2">
             <a:extLst>
               <a:ext uri="{FF2B5EF4-FFF2-40B4-BE49-F238E27FC236}">
-                <a16:creationId xmlns:a16="http://schemas.microsoft.com/office/drawing/2014/main" id="{239686E7-8DAA-2821-8CE5-DDC316FA8AD3}"/>
+                <a16:creationId xmlns:a16="http://schemas.microsoft.com/office/drawing/2014/main" id="{E3D7B753-0588-CBC2-B10F-10F5DC3A4CB8}"/>
               </a:ext>
             </a:extLst>
           </p:cNvPr>
@@ -5274,132 +5355,166 @@
         </p:nvSpPr>
         <p:spPr/>
         <p:txBody>
-          <a:bodyPr/>
-          <a:lstStyle/>
-          <a:p>
-            <a:endParaRPr lang="zh-TW" altLang="en-US"/>
-          </a:p>
-        </p:txBody>
-      </p:sp>
-      <p:sp>
-        <p:nvSpPr>
-          <p:cNvPr id="5" name="文字方塊 4">
-            <a:extLst>
-              <a:ext uri="{FF2B5EF4-FFF2-40B4-BE49-F238E27FC236}">
-                <a16:creationId xmlns:a16="http://schemas.microsoft.com/office/drawing/2014/main" id="{37AEF719-94EA-D524-FCCC-04205D3EB30D}"/>
-              </a:ext>
-            </a:extLst>
-          </p:cNvPr>
-          <p:cNvSpPr txBox="1"/>
-          <p:nvPr/>
-        </p:nvSpPr>
-        <p:spPr>
-          <a:xfrm>
-            <a:off x="3048000" y="-3262682"/>
-            <a:ext cx="6096000" cy="13388280"/>
-          </a:xfrm>
-          <a:prstGeom prst="rect">
-            <a:avLst/>
-          </a:prstGeom>
-          <a:noFill/>
-        </p:spPr>
-        <p:txBody>
-          <a:bodyPr wrap="square">
-            <a:spAutoFit/>
+          <a:bodyPr>
+            <a:normAutofit fontScale="62500" lnSpcReduction="20000"/>
           </a:bodyPr>
           <a:lstStyle/>
           <a:p>
-            <a:pPr>
-              <a:buNone/>
-            </a:pPr>
-            <a:r>
-              <a:rPr lang="zh-TW" altLang="en-US" b="1" dirty="0"/>
-              <a:t>📊 專題資料處理與清洗技術紀錄 </a:t>
-            </a:r>
-            <a:r>
-              <a:rPr lang="en-US" altLang="zh-TW" b="1" dirty="0"/>
-              <a:t>(ETL Summary)</a:t>
-            </a:r>
-          </a:p>
-          <a:p>
-            <a:pPr>
-              <a:buNone/>
-            </a:pPr>
-            <a:r>
-              <a:rPr lang="zh-TW" altLang="en-US" b="1" dirty="0"/>
-              <a:t>階段一：原始資料檢視 </a:t>
-            </a:r>
-            <a:r>
-              <a:rPr lang="en-US" altLang="zh-TW" b="1" dirty="0"/>
-              <a:t>(Data Assessment)</a:t>
-            </a:r>
-          </a:p>
-          <a:p>
-            <a:pPr>
-              <a:buFont typeface="Arial" panose="020B0604020202020204" pitchFamily="34" charset="0"/>
-              <a:buChar char="•"/>
-            </a:pPr>
-            <a:r>
-              <a:rPr lang="zh-TW" altLang="en-US" b="1" dirty="0"/>
-              <a:t>資料特徵：</a:t>
-            </a:r>
-            <a:r>
-              <a:rPr lang="zh-TW" altLang="en-US" dirty="0"/>
-              <a:t> 涵蓋 </a:t>
+            <a:r>
+              <a:rPr lang="en-US" altLang="zh-TW" b="1" dirty="0"/>
+              <a:t>3. </a:t>
+            </a:r>
+            <a:r>
+              <a:rPr lang="zh-TW" altLang="en-US" b="1" dirty="0"/>
+              <a:t>資料建模與分析亮點 </a:t>
+            </a:r>
+            <a:r>
+              <a:rPr lang="en-US" altLang="zh-TW" b="1" dirty="0"/>
+              <a:t>(</a:t>
+            </a:r>
+            <a:r>
+              <a:rPr lang="zh-TW" altLang="en-US" b="1" dirty="0"/>
+              <a:t>簡報結論預告</a:t>
+            </a:r>
+            <a:r>
+              <a:rPr lang="en-US" altLang="zh-TW" b="1" dirty="0"/>
+              <a:t>)</a:t>
+            </a:r>
+          </a:p>
+          <a:p>
+            <a:r>
+              <a:rPr lang="zh-TW" altLang="en-US" dirty="0"/>
+              <a:t>透過上述處理，這份資料現在具備了支持以下兩大發現的能力：</a:t>
+            </a:r>
+          </a:p>
+          <a:p>
+            <a:r>
+              <a:rPr lang="zh-TW" altLang="en-US" b="1" dirty="0"/>
+              <a:t>結構交叉點 </a:t>
+            </a:r>
+            <a:r>
+              <a:rPr lang="en-US" altLang="zh-TW" b="1" dirty="0"/>
+              <a:t>(</a:t>
+            </a:r>
+            <a:r>
+              <a:rPr lang="zh-TW" altLang="en-US" b="1" dirty="0"/>
+              <a:t>方向四</a:t>
+            </a:r>
+            <a:r>
+              <a:rPr lang="en-US" altLang="zh-TW" b="1" dirty="0"/>
+              <a:t>)</a:t>
+            </a:r>
+            <a:r>
+              <a:rPr lang="zh-TW" altLang="en-US" b="1" dirty="0"/>
+              <a:t>：</a:t>
+            </a:r>
+            <a:r>
+              <a:rPr lang="zh-TW" altLang="en-US" dirty="0"/>
+              <a:t> 能夠精準鎖定「再生能源」月產出正式超越「核能」的歷史瞬間，觀察能源接力賽的轉折。</a:t>
+            </a:r>
+          </a:p>
+          <a:p>
+            <a:r>
+              <a:rPr lang="zh-TW" altLang="en-US" b="1" dirty="0"/>
+              <a:t>民間動能 </a:t>
+            </a:r>
+            <a:r>
+              <a:rPr lang="en-US" altLang="zh-TW" b="1" dirty="0"/>
+              <a:t>(</a:t>
+            </a:r>
+            <a:r>
+              <a:rPr lang="zh-TW" altLang="en-US" b="1" dirty="0"/>
+              <a:t>方向三</a:t>
+            </a:r>
+            <a:r>
+              <a:rPr lang="en-US" altLang="zh-TW" b="1" dirty="0"/>
+              <a:t>)</a:t>
+            </a:r>
+            <a:r>
+              <a:rPr lang="zh-TW" altLang="en-US" b="1" dirty="0"/>
+              <a:t>：</a:t>
+            </a:r>
+            <a:r>
+              <a:rPr lang="zh-TW" altLang="en-US" dirty="0"/>
+              <a:t> 透過 經營主體 與 潔淨標籤 的交叉分析，實證了 </a:t>
+            </a:r>
+            <a:r>
+              <a:rPr lang="zh-TW" altLang="en-US" b="1" dirty="0"/>
+              <a:t>「自用發電設備」</a:t>
+            </a:r>
+            <a:r>
+              <a:rPr lang="zh-TW" altLang="en-US" dirty="0"/>
+              <a:t> 才是目前推動潔淨能源佔比上升的最快引擎（能源民主化趨勢）。</a:t>
+            </a:r>
+          </a:p>
+          <a:p>
+            <a:br>
+              <a:rPr lang="zh-TW" altLang="en-US" dirty="0"/>
+            </a:br>
+            <a:endParaRPr lang="zh-TW" altLang="en-US" dirty="0"/>
+          </a:p>
+          <a:p>
+            <a:r>
+              <a:rPr lang="zh-TW" altLang="en-US" b="1" dirty="0"/>
+              <a:t>💡 給簡報的小建議</a:t>
+            </a:r>
+          </a:p>
+          <a:p>
+            <a:r>
+              <a:rPr lang="zh-TW" altLang="en-US" dirty="0"/>
+              <a:t>在簡報這部分時，你可以放一張 </a:t>
+            </a:r>
+            <a:r>
+              <a:rPr lang="zh-TW" altLang="en-US" b="1" dirty="0"/>
+              <a:t>「清洗前 </a:t>
+            </a:r>
+            <a:r>
+              <a:rPr lang="en-US" altLang="zh-TW" b="1" dirty="0"/>
+              <a:t>(Before) vs. </a:t>
+            </a:r>
+            <a:r>
+              <a:rPr lang="zh-TW" altLang="en-US" b="1" dirty="0"/>
+              <a:t>清洗後 </a:t>
+            </a:r>
+            <a:r>
+              <a:rPr lang="en-US" altLang="zh-TW" b="1" dirty="0"/>
+              <a:t>(After)</a:t>
+            </a:r>
+            <a:r>
+              <a:rPr lang="zh-TW" altLang="en-US" b="1" dirty="0"/>
+              <a:t>」</a:t>
+            </a:r>
+            <a:r>
+              <a:rPr lang="zh-TW" altLang="en-US" dirty="0"/>
+              <a:t> 的截圖對比。</a:t>
+            </a:r>
+          </a:p>
+          <a:p>
+            <a:r>
+              <a:rPr lang="en-US" altLang="zh-TW" b="1" dirty="0"/>
+              <a:t>Before:</a:t>
+            </a:r>
+            <a:r>
+              <a:rPr lang="zh-TW" altLang="en-US" dirty="0"/>
+              <a:t> 密密麻麻、看不到盡頭的 </a:t>
             </a:r>
             <a:r>
               <a:rPr lang="en-US" altLang="zh-TW" dirty="0"/>
-              <a:t>2007 </a:t>
-            </a:r>
-            <a:r>
-              <a:rPr lang="zh-TW" altLang="en-US" dirty="0"/>
-              <a:t>年至 </a:t>
-            </a:r>
-            <a:r>
-              <a:rPr lang="en-US" altLang="zh-TW" dirty="0"/>
-              <a:t>2026 </a:t>
-            </a:r>
-            <a:r>
-              <a:rPr lang="zh-TW" altLang="en-US" dirty="0"/>
-              <a:t>年（預估）之台灣逐月發電量，欄位多達 </a:t>
-            </a:r>
-            <a:r>
-              <a:rPr lang="en-US" altLang="zh-TW" dirty="0"/>
-              <a:t>50 </a:t>
-            </a:r>
-            <a:r>
-              <a:rPr lang="zh-TW" altLang="en-US" dirty="0"/>
-              <a:t>餘項。</a:t>
-            </a:r>
-          </a:p>
-          <a:p>
-            <a:pPr>
-              <a:buFont typeface="Arial" panose="020B0604020202020204" pitchFamily="34" charset="0"/>
-              <a:buChar char="•"/>
-            </a:pPr>
-            <a:r>
-              <a:rPr lang="zh-TW" altLang="en-US" b="1" dirty="0"/>
-              <a:t>原始挑戰：</a:t>
-            </a:r>
-            <a:r>
-              <a:rPr lang="zh-TW" altLang="en-US" dirty="0"/>
-              <a:t> * </a:t>
-            </a:r>
-            <a:r>
-              <a:rPr lang="zh-TW" altLang="en-US" b="1" dirty="0"/>
-              <a:t>寬表困境 </a:t>
-            </a:r>
-            <a:r>
-              <a:rPr lang="en-US" altLang="zh-TW" b="1" dirty="0"/>
-              <a:t>(Wide Format)</a:t>
-            </a:r>
-            <a:r>
-              <a:rPr lang="zh-TW" altLang="en-US" b="1" dirty="0"/>
-              <a:t>：</a:t>
-            </a:r>
-            <a:r>
-              <a:rPr lang="zh-TW" altLang="en-US" dirty="0"/>
-              <a:t> 經營主體（台電</a:t>
+              <a:t>Excel </a:t>
+            </a:r>
+            <a:r>
+              <a:rPr lang="zh-TW" altLang="en-US" dirty="0"/>
+              <a:t>欄位。</a:t>
+            </a:r>
+          </a:p>
+          <a:p>
+            <a:r>
+              <a:rPr lang="en-US" altLang="zh-TW" b="1" dirty="0"/>
+              <a:t>After:</a:t>
+            </a:r>
+            <a:r>
+              <a:rPr lang="zh-TW" altLang="en-US" dirty="0"/>
+              <a:t> 簡潔、具有「大類</a:t>
             </a:r>
             <a:r>
               <a:rPr lang="en-US" altLang="zh-TW" dirty="0"/>
@@ -5407,7 +5522,7 @@
             </a:r>
             <a:r>
               <a:rPr lang="zh-TW" altLang="en-US" dirty="0"/>
-              <a:t>民營</a:t>
+              <a:t>主體</a:t>
             </a:r>
             <a:r>
               <a:rPr lang="en-US" altLang="zh-TW" dirty="0"/>
@@ -5415,695 +5530,49 @@
             </a:r>
             <a:r>
               <a:rPr lang="zh-TW" altLang="en-US" dirty="0"/>
-              <a:t>自用）與能源細項全擠在欄位名稱中，無法進行動態分類。</a:t>
-            </a:r>
-          </a:p>
-          <a:p>
-            <a:pPr marL="742950" lvl="1" indent="-285750">
-              <a:buFont typeface="Arial" panose="020B0604020202020204" pitchFamily="34" charset="0"/>
-              <a:buChar char="•"/>
-            </a:pPr>
-            <a:r>
-              <a:rPr lang="zh-TW" altLang="en-US" b="1" dirty="0"/>
-              <a:t>命名雜訊：</a:t>
-            </a:r>
-            <a:r>
-              <a:rPr lang="zh-TW" altLang="en-US" dirty="0"/>
-              <a:t> 欄位標題帶有 </a:t>
-            </a:r>
-            <a:r>
-              <a:rPr lang="en-US" altLang="zh-TW" dirty="0">
-                <a:latin typeface="Courier New" panose="02070309020205020404" pitchFamily="49" charset="0"/>
-              </a:rPr>
-              <a:t>(</a:t>
-            </a:r>
-            <a:r>
-              <a:rPr lang="zh-TW" altLang="en-US" dirty="0">
-                <a:latin typeface="Courier New" panose="02070309020205020404" pitchFamily="49" charset="0"/>
-              </a:rPr>
-              <a:t>數值</a:t>
-            </a:r>
-            <a:r>
-              <a:rPr lang="en-US" altLang="zh-TW" dirty="0">
-                <a:latin typeface="Courier New" panose="02070309020205020404" pitchFamily="49" charset="0"/>
-              </a:rPr>
+              <a:t>潔淨」標籤的結構化表格。 這能讓評審或主管立刻看出你的 </a:t>
+            </a:r>
+            <a:r>
+              <a:rPr lang="en-US" altLang="zh-TW" b="1" dirty="0"/>
+              <a:t>Data Sense (</a:t>
+            </a:r>
+            <a:r>
+              <a:rPr lang="zh-TW" altLang="en-US" b="1" dirty="0"/>
+              <a:t>資料感</a:t>
+            </a:r>
+            <a:r>
+              <a:rPr lang="en-US" altLang="zh-TW" b="1" dirty="0"/>
               <a:t>)</a:t>
             </a:r>
             <a:r>
               <a:rPr lang="zh-TW" altLang="en-US" dirty="0"/>
-              <a:t> 或 </a:t>
-            </a:r>
-            <a:r>
-              <a:rPr lang="en-US" altLang="zh-TW" dirty="0">
-                <a:latin typeface="Courier New" panose="02070309020205020404" pitchFamily="49" charset="0"/>
-              </a:rPr>
-              <a:t>_</a:t>
-            </a:r>
-            <a:r>
-              <a:rPr lang="zh-TW" altLang="en-US" dirty="0">
-                <a:latin typeface="Courier New" panose="02070309020205020404" pitchFamily="49" charset="0"/>
-              </a:rPr>
-              <a:t>全國</a:t>
-            </a:r>
-            <a:r>
-              <a:rPr lang="zh-TW" altLang="en-US" dirty="0"/>
-              <a:t> 等非結構化贅字。</a:t>
-            </a:r>
-          </a:p>
-          <a:p>
-            <a:pPr marL="742950" lvl="1" indent="-285750">
-              <a:buFont typeface="Arial" panose="020B0604020202020204" pitchFamily="34" charset="0"/>
-              <a:buChar char="•"/>
-            </a:pPr>
-            <a:r>
-              <a:rPr lang="zh-TW" altLang="en-US" b="1" dirty="0"/>
-              <a:t>重複計算風險：</a:t>
-            </a:r>
-            <a:r>
-              <a:rPr lang="zh-TW" altLang="en-US" dirty="0"/>
-              <a:t> 原始表包含「全國總量」與「各主體細項」，若不處理會造成數據加倍。</a:t>
-            </a:r>
-          </a:p>
-          <a:p>
-            <a:pPr>
-              <a:buNone/>
-            </a:pPr>
-            <a:r>
-              <a:rPr lang="zh-TW" altLang="en-US" b="1" dirty="0"/>
-              <a:t>階段二：核心 </a:t>
-            </a:r>
-            <a:r>
-              <a:rPr lang="en-US" altLang="zh-TW" b="1" dirty="0"/>
-              <a:t>ETL </a:t>
-            </a:r>
-            <a:r>
-              <a:rPr lang="zh-TW" altLang="en-US" b="1" dirty="0"/>
-              <a:t>清洗流程 </a:t>
-            </a:r>
-            <a:r>
-              <a:rPr lang="en-US" altLang="zh-TW" b="1" dirty="0"/>
-              <a:t>(The Transformation)</a:t>
-            </a:r>
-          </a:p>
-          <a:p>
-            <a:pPr>
-              <a:buNone/>
-            </a:pPr>
-            <a:r>
-              <a:rPr lang="zh-TW" altLang="en-US" dirty="0"/>
-              <a:t>在 </a:t>
-            </a:r>
-            <a:r>
-              <a:rPr lang="en-US" altLang="zh-TW" dirty="0"/>
-              <a:t>Power BI </a:t>
-            </a:r>
-            <a:r>
-              <a:rPr lang="zh-TW" altLang="en-US" dirty="0"/>
-              <a:t>的 </a:t>
-            </a:r>
-            <a:r>
-              <a:rPr lang="en-US" altLang="zh-TW" dirty="0"/>
-              <a:t>Power Query </a:t>
-            </a:r>
-            <a:r>
-              <a:rPr lang="zh-TW" altLang="en-US" dirty="0"/>
-              <a:t>環境中，我們執行了以下關鍵轉換：</a:t>
-            </a:r>
-          </a:p>
-          <a:p>
-            <a:pPr>
-              <a:buFont typeface="+mj-lt"/>
-              <a:buAutoNum type="arabicPeriod"/>
-            </a:pPr>
-            <a:r>
-              <a:rPr lang="zh-TW" altLang="en-US" b="1" dirty="0"/>
-              <a:t>取消樞紐 </a:t>
-            </a:r>
-            <a:r>
-              <a:rPr lang="en-US" altLang="zh-TW" b="1" dirty="0"/>
-              <a:t>(Unpivot Columns)</a:t>
-            </a:r>
-            <a:r>
-              <a:rPr lang="zh-TW" altLang="en-US" b="1" dirty="0"/>
-              <a:t>：</a:t>
-            </a:r>
-            <a:r>
-              <a:rPr lang="zh-TW" altLang="en-US" dirty="0"/>
-              <a:t> 將 </a:t>
-            </a:r>
-            <a:r>
-              <a:rPr lang="en-US" altLang="zh-TW" dirty="0"/>
-              <a:t>50 </a:t>
-            </a:r>
-            <a:r>
-              <a:rPr lang="zh-TW" altLang="en-US" dirty="0"/>
-              <a:t>幾個橫向欄位轉化為縱向的 </a:t>
-            </a:r>
-            <a:r>
-              <a:rPr lang="zh-TW" altLang="en-US" b="1" dirty="0"/>
-              <a:t>「多列 </a:t>
-            </a:r>
-            <a:r>
-              <a:rPr lang="en-US" altLang="zh-TW" b="1" dirty="0"/>
-              <a:t>(Rows) </a:t>
-            </a:r>
-            <a:r>
-              <a:rPr lang="zh-TW" altLang="en-US" b="1" dirty="0"/>
-              <a:t>結構」</a:t>
-            </a:r>
-            <a:r>
-              <a:rPr lang="zh-TW" altLang="en-US" dirty="0"/>
-              <a:t>，讓每一筆數據都配備一組屬性標籤。</a:t>
-            </a:r>
-          </a:p>
-          <a:p>
-            <a:pPr>
-              <a:buFont typeface="+mj-lt"/>
-              <a:buAutoNum type="arabicPeriod"/>
-            </a:pPr>
-            <a:r>
-              <a:rPr lang="zh-TW" altLang="en-US" b="1" dirty="0"/>
-              <a:t>階層式拆分 </a:t>
-            </a:r>
-            <a:r>
-              <a:rPr lang="en-US" altLang="zh-TW" b="1" dirty="0"/>
-              <a:t>(Split by Delimiter)</a:t>
-            </a:r>
-            <a:r>
-              <a:rPr lang="zh-TW" altLang="en-US" b="1" dirty="0"/>
-              <a:t>：</a:t>
-            </a:r>
-            <a:r>
-              <a:rPr lang="zh-TW" altLang="en-US" dirty="0"/>
-              <a:t> 利用底線 </a:t>
-            </a:r>
-            <a:r>
-              <a:rPr lang="en-US" altLang="zh-TW" dirty="0">
-                <a:latin typeface="Courier New" panose="02070309020205020404" pitchFamily="49" charset="0"/>
-              </a:rPr>
-              <a:t>_</a:t>
-            </a:r>
-            <a:r>
-              <a:rPr lang="zh-TW" altLang="en-US" dirty="0"/>
-              <a:t> 將屬性拆解為三個核心維度：</a:t>
-            </a:r>
-            <a:r>
-              <a:rPr lang="en-US" altLang="zh-TW" b="1" dirty="0"/>
-              <a:t>[</a:t>
-            </a:r>
-            <a:r>
-              <a:rPr lang="zh-TW" altLang="en-US" b="1" dirty="0"/>
-              <a:t>經營主體</a:t>
-            </a:r>
-            <a:r>
-              <a:rPr lang="en-US" altLang="zh-TW" b="1" dirty="0"/>
-              <a:t>]</a:t>
-            </a:r>
-            <a:r>
-              <a:rPr lang="zh-TW" altLang="en-US" b="1" dirty="0"/>
-              <a:t>、</a:t>
-            </a:r>
-            <a:r>
-              <a:rPr lang="en-US" altLang="zh-TW" b="1" dirty="0"/>
-              <a:t>[</a:t>
-            </a:r>
-            <a:r>
-              <a:rPr lang="zh-TW" altLang="en-US" b="1" dirty="0"/>
-              <a:t>能源大類</a:t>
-            </a:r>
-            <a:r>
-              <a:rPr lang="en-US" altLang="zh-TW" b="1" dirty="0"/>
-              <a:t>]</a:t>
-            </a:r>
-            <a:r>
-              <a:rPr lang="zh-TW" altLang="en-US" b="1" dirty="0"/>
-              <a:t>、</a:t>
-            </a:r>
-            <a:r>
-              <a:rPr lang="en-US" altLang="zh-TW" b="1" dirty="0"/>
-              <a:t>[</a:t>
-            </a:r>
-            <a:r>
-              <a:rPr lang="zh-TW" altLang="en-US" b="1" dirty="0"/>
-              <a:t>能源細項</a:t>
-            </a:r>
-            <a:r>
-              <a:rPr lang="en-US" altLang="zh-TW" b="1" dirty="0"/>
-              <a:t>]</a:t>
-            </a:r>
-            <a:r>
-              <a:rPr lang="zh-TW" altLang="en-US" dirty="0"/>
               <a:t>。</a:t>
             </a:r>
           </a:p>
           <a:p>
-            <a:pPr>
-              <a:buFont typeface="+mj-lt"/>
-              <a:buAutoNum type="arabicPeriod"/>
-            </a:pPr>
-            <a:r>
-              <a:rPr lang="zh-TW" altLang="en-US" b="1" dirty="0"/>
-              <a:t>精準清理 </a:t>
-            </a:r>
-            <a:r>
-              <a:rPr lang="en-US" altLang="zh-TW" b="1" dirty="0"/>
-              <a:t>(Data Cleansing)</a:t>
-            </a:r>
-            <a:r>
-              <a:rPr lang="zh-TW" altLang="en-US" b="1" dirty="0"/>
-              <a:t>：</a:t>
-            </a:r>
-            <a:r>
-              <a:rPr lang="zh-TW" altLang="en-US" dirty="0"/>
-              <a:t> * 批次移除 </a:t>
-            </a:r>
-            <a:r>
-              <a:rPr lang="en-US" altLang="zh-TW" dirty="0">
-                <a:latin typeface="Courier New" panose="02070309020205020404" pitchFamily="49" charset="0"/>
-              </a:rPr>
-              <a:t>(</a:t>
-            </a:r>
-            <a:r>
-              <a:rPr lang="zh-TW" altLang="en-US" dirty="0">
-                <a:latin typeface="Courier New" panose="02070309020205020404" pitchFamily="49" charset="0"/>
-              </a:rPr>
-              <a:t>數值</a:t>
-            </a:r>
-            <a:r>
-              <a:rPr lang="en-US" altLang="zh-TW" dirty="0">
-                <a:latin typeface="Courier New" panose="02070309020205020404" pitchFamily="49" charset="0"/>
-              </a:rPr>
-              <a:t>)</a:t>
-            </a:r>
-            <a:r>
-              <a:rPr lang="zh-TW" altLang="en-US" dirty="0"/>
-              <a:t> 與 </a:t>
-            </a:r>
-            <a:r>
-              <a:rPr lang="en-US" altLang="zh-TW" dirty="0">
-                <a:latin typeface="Courier New" panose="02070309020205020404" pitchFamily="49" charset="0"/>
-              </a:rPr>
-              <a:t>_</a:t>
-            </a:r>
-            <a:r>
-              <a:rPr lang="zh-TW" altLang="en-US" dirty="0">
-                <a:latin typeface="Courier New" panose="02070309020205020404" pitchFamily="49" charset="0"/>
-              </a:rPr>
-              <a:t>全國</a:t>
-            </a:r>
-            <a:r>
-              <a:rPr lang="zh-TW" altLang="en-US" dirty="0"/>
-              <a:t> 字眼。</a:t>
-            </a:r>
-          </a:p>
-          <a:p>
-            <a:pPr marL="742950" lvl="1" indent="-285750">
-              <a:buFont typeface="+mj-lt"/>
-              <a:buAutoNum type="arabicPeriod"/>
-            </a:pPr>
-            <a:r>
-              <a:rPr lang="zh-TW" altLang="en-US" dirty="0"/>
-              <a:t>執行 </a:t>
-            </a:r>
-            <a:r>
-              <a:rPr lang="zh-TW" altLang="en-US" b="1" dirty="0"/>
-              <a:t>修剪 </a:t>
-            </a:r>
-            <a:r>
-              <a:rPr lang="en-US" altLang="zh-TW" b="1" dirty="0"/>
-              <a:t>(Trim)</a:t>
-            </a:r>
-            <a:r>
-              <a:rPr lang="zh-TW" altLang="en-US" dirty="0"/>
-              <a:t> 與 </a:t>
-            </a:r>
-            <a:r>
-              <a:rPr lang="zh-TW" altLang="en-US" b="1" dirty="0"/>
-              <a:t>清除 </a:t>
-            </a:r>
-            <a:r>
-              <a:rPr lang="en-US" altLang="zh-TW" b="1" dirty="0"/>
-              <a:t>(Clean)</a:t>
-            </a:r>
-            <a:r>
-              <a:rPr lang="zh-TW" altLang="en-US" dirty="0"/>
-              <a:t>，排除看不見的空白字元，確保資料比對 </a:t>
-            </a:r>
-            <a:r>
-              <a:rPr lang="en-US" altLang="zh-TW" dirty="0"/>
-              <a:t>100% </a:t>
-            </a:r>
-            <a:r>
-              <a:rPr lang="zh-TW" altLang="en-US" dirty="0"/>
-              <a:t>精確。</a:t>
-            </a:r>
-          </a:p>
-          <a:p>
-            <a:pPr>
-              <a:buFont typeface="+mj-lt"/>
-              <a:buAutoNum type="arabicPeriod"/>
-            </a:pPr>
-            <a:r>
-              <a:rPr lang="zh-TW" altLang="en-US" b="1" dirty="0"/>
-              <a:t>條件式校正 </a:t>
-            </a:r>
-            <a:r>
-              <a:rPr lang="en-US" altLang="zh-TW" b="1" dirty="0"/>
-              <a:t>(Conditional Alignment)</a:t>
-            </a:r>
-            <a:r>
-              <a:rPr lang="zh-TW" altLang="en-US" b="1" dirty="0"/>
-              <a:t>：</a:t>
-            </a:r>
-            <a:r>
-              <a:rPr lang="zh-TW" altLang="en-US" dirty="0"/>
-              <a:t> 針對核能等不對稱層級（只有兩層），利用「條件式資料行」實施 </a:t>
-            </a:r>
-            <a:r>
-              <a:rPr lang="zh-TW" altLang="en-US" b="1" dirty="0"/>
-              <a:t>「向左填補邏輯」</a:t>
-            </a:r>
-            <a:r>
-              <a:rPr lang="zh-TW" altLang="en-US" dirty="0"/>
-              <a:t>，確保所有標籤對齊。</a:t>
-            </a:r>
-          </a:p>
-          <a:p>
-            <a:pPr>
-              <a:buNone/>
-            </a:pPr>
-            <a:r>
-              <a:rPr lang="zh-TW" altLang="en-US" b="1" dirty="0"/>
-              <a:t>階段三：特徵工程與價值定義 </a:t>
-            </a:r>
-            <a:r>
-              <a:rPr lang="en-US" altLang="zh-TW" b="1" dirty="0"/>
-              <a:t>(Feature Engineering)</a:t>
-            </a:r>
-          </a:p>
-          <a:p>
-            <a:pPr>
-              <a:buFont typeface="Arial" panose="020B0604020202020204" pitchFamily="34" charset="0"/>
-              <a:buChar char="•"/>
-            </a:pPr>
-            <a:r>
-              <a:rPr lang="zh-TW" altLang="en-US" b="1" dirty="0"/>
-              <a:t>新增「潔淨能源」判定欄位：</a:t>
-            </a:r>
-            <a:r>
-              <a:rPr lang="zh-TW" altLang="en-US" dirty="0"/>
-              <a:t> * </a:t>
-            </a:r>
-            <a:r>
-              <a:rPr lang="zh-TW" altLang="en-US" b="1" dirty="0"/>
-              <a:t>邏輯定義：</a:t>
-            </a:r>
-            <a:r>
-              <a:rPr lang="zh-TW" altLang="en-US" dirty="0"/>
-              <a:t> 將 </a:t>
-            </a:r>
-            <a:r>
-              <a:rPr lang="zh-TW" altLang="en-US" dirty="0">
-                <a:latin typeface="Courier New" panose="02070309020205020404" pitchFamily="49" charset="0"/>
-              </a:rPr>
-              <a:t>再生能源</a:t>
-            </a:r>
-            <a:r>
-              <a:rPr lang="zh-TW" altLang="en-US" dirty="0"/>
-              <a:t> 與 </a:t>
-            </a:r>
-            <a:r>
-              <a:rPr lang="zh-TW" altLang="en-US" dirty="0">
-                <a:latin typeface="Courier New" panose="02070309020205020404" pitchFamily="49" charset="0"/>
-              </a:rPr>
-              <a:t>核能</a:t>
-            </a:r>
-            <a:r>
-              <a:rPr lang="zh-TW" altLang="en-US" dirty="0"/>
-              <a:t> 統一標註為 </a:t>
-            </a:r>
-            <a:r>
-              <a:rPr lang="zh-TW" altLang="en-US" b="1" dirty="0"/>
-              <a:t>「潔淨能源」</a:t>
-            </a:r>
-            <a:r>
-              <a:rPr lang="zh-TW" altLang="en-US" dirty="0"/>
-              <a:t>，其餘標註為 </a:t>
-            </a:r>
-            <a:r>
-              <a:rPr lang="zh-TW" altLang="en-US" b="1" dirty="0"/>
-              <a:t>「傳統火力」</a:t>
-            </a:r>
-            <a:r>
-              <a:rPr lang="zh-TW" altLang="en-US" dirty="0"/>
-              <a:t>。</a:t>
-            </a:r>
-          </a:p>
-          <a:p>
-            <a:pPr marL="742950" lvl="1" indent="-285750">
-              <a:buFont typeface="Arial" panose="020B0604020202020204" pitchFamily="34" charset="0"/>
-              <a:buChar char="•"/>
-            </a:pPr>
-            <a:r>
-              <a:rPr lang="zh-TW" altLang="en-US" b="1" dirty="0"/>
-              <a:t>特殊處理：</a:t>
-            </a:r>
-            <a:r>
-              <a:rPr lang="zh-TW" altLang="en-US" dirty="0"/>
-              <a:t> 將 </a:t>
-            </a:r>
-            <a:r>
-              <a:rPr lang="zh-TW" altLang="en-US" b="1" dirty="0"/>
-              <a:t>「抽蓄水力」</a:t>
-            </a:r>
-            <a:r>
-              <a:rPr lang="zh-TW" altLang="en-US" dirty="0"/>
-              <a:t> 納入標籤，作為儲能調度的觀測指標。</a:t>
-            </a:r>
-          </a:p>
-          <a:p>
-            <a:pPr>
-              <a:buFont typeface="Arial" panose="020B0604020202020204" pitchFamily="34" charset="0"/>
-              <a:buChar char="•"/>
-            </a:pPr>
-            <a:r>
-              <a:rPr lang="en-US" altLang="zh-TW" b="1" dirty="0"/>
-              <a:t>DAX </a:t>
-            </a:r>
-            <a:r>
-              <a:rPr lang="zh-TW" altLang="en-US" b="1" dirty="0"/>
-              <a:t>建模：</a:t>
-            </a:r>
-            <a:r>
-              <a:rPr lang="zh-TW" altLang="en-US" dirty="0"/>
-              <a:t> 撰寫動態量值 </a:t>
-            </a:r>
-            <a:r>
-              <a:rPr lang="en-US" altLang="zh-TW" dirty="0"/>
-              <a:t>(Measures)</a:t>
-            </a:r>
-            <a:r>
-              <a:rPr lang="zh-TW" altLang="en-US" dirty="0"/>
-              <a:t>，即時計算 </a:t>
-            </a:r>
-            <a:r>
-              <a:rPr lang="zh-TW" altLang="en-US" b="1" dirty="0"/>
-              <a:t>「潔淨能源佔比 </a:t>
-            </a:r>
-            <a:r>
-              <a:rPr lang="en-US" altLang="zh-TW" b="1" dirty="0"/>
-              <a:t>%</a:t>
-            </a:r>
-            <a:r>
-              <a:rPr lang="zh-TW" altLang="en-US" b="1" dirty="0"/>
-              <a:t>」</a:t>
-            </a:r>
-            <a:r>
-              <a:rPr lang="zh-TW" altLang="en-US" dirty="0"/>
-              <a:t>。</a:t>
-            </a:r>
-          </a:p>
-          <a:p>
-            <a:pPr>
-              <a:buNone/>
-            </a:pPr>
-            <a:r>
-              <a:rPr lang="zh-TW" altLang="en-US" b="1" dirty="0"/>
-              <a:t>階段四：專題分析發現預告 </a:t>
-            </a:r>
-            <a:r>
-              <a:rPr lang="en-US" altLang="zh-TW" b="1" dirty="0"/>
-              <a:t>(Analytical Insights)</a:t>
-            </a:r>
-          </a:p>
-          <a:p>
-            <a:pPr>
-              <a:buFont typeface="Arial" panose="020B0604020202020204" pitchFamily="34" charset="0"/>
-              <a:buChar char="•"/>
-            </a:pPr>
-            <a:r>
-              <a:rPr lang="zh-TW" altLang="en-US" b="1" dirty="0"/>
-              <a:t>結構交叉分析 </a:t>
-            </a:r>
-            <a:r>
-              <a:rPr lang="en-US" altLang="zh-TW" b="1" dirty="0"/>
-              <a:t>(</a:t>
-            </a:r>
-            <a:r>
-              <a:rPr lang="zh-TW" altLang="en-US" b="1" dirty="0"/>
-              <a:t>方向四</a:t>
-            </a:r>
-            <a:r>
-              <a:rPr lang="en-US" altLang="zh-TW" b="1" dirty="0"/>
-              <a:t>)</a:t>
-            </a:r>
-            <a:r>
-              <a:rPr lang="zh-TW" altLang="en-US" b="1" dirty="0"/>
-              <a:t>：</a:t>
-            </a:r>
-            <a:r>
-              <a:rPr lang="zh-TW" altLang="en-US" dirty="0"/>
-              <a:t> 成功鎖定再生能源超越核能的歷史「黃金交叉點」。</a:t>
-            </a:r>
-          </a:p>
-          <a:p>
-            <a:pPr>
-              <a:buFont typeface="Arial" panose="020B0604020202020204" pitchFamily="34" charset="0"/>
-              <a:buChar char="•"/>
-            </a:pPr>
-            <a:r>
-              <a:rPr lang="zh-TW" altLang="en-US" b="1" dirty="0"/>
-              <a:t>主體動能對比 </a:t>
-            </a:r>
-            <a:r>
-              <a:rPr lang="en-US" altLang="zh-TW" b="1" dirty="0"/>
-              <a:t>(</a:t>
-            </a:r>
-            <a:r>
-              <a:rPr lang="zh-TW" altLang="en-US" b="1" dirty="0"/>
-              <a:t>方向三</a:t>
-            </a:r>
-            <a:r>
-              <a:rPr lang="en-US" altLang="zh-TW" b="1" dirty="0"/>
-              <a:t>)</a:t>
-            </a:r>
-            <a:r>
-              <a:rPr lang="zh-TW" altLang="en-US" b="1" dirty="0"/>
-              <a:t>：</a:t>
-            </a:r>
-            <a:r>
-              <a:rPr lang="zh-TW" altLang="en-US" dirty="0"/>
-              <a:t> 實證 </a:t>
-            </a:r>
-            <a:r>
-              <a:rPr lang="zh-TW" altLang="en-US" b="1" dirty="0"/>
-              <a:t>「自用發電設備」</a:t>
-            </a:r>
-            <a:r>
-              <a:rPr lang="zh-TW" altLang="en-US" dirty="0"/>
-              <a:t> 在潔淨能源佔比的成長率遠高於國營電廠，反映企業 </a:t>
-            </a:r>
-            <a:r>
-              <a:rPr lang="en-US" altLang="zh-TW" dirty="0"/>
-              <a:t>ESG </a:t>
-            </a:r>
-            <a:r>
-              <a:rPr lang="zh-TW" altLang="en-US" dirty="0"/>
-              <a:t>的強勁拉動力。</a:t>
-            </a:r>
-          </a:p>
-          <a:p>
-            <a:pPr>
-              <a:buNone/>
-            </a:pPr>
-            <a:br>
-              <a:rPr lang="zh-TW" altLang="en-US" dirty="0"/>
-            </a:br>
+            <a:r>
+              <a:rPr lang="zh-TW" altLang="en-US" b="1" dirty="0"/>
+              <a:t>既然 </a:t>
+            </a:r>
+            <a:r>
+              <a:rPr lang="en-US" altLang="zh-TW" b="1" dirty="0"/>
+              <a:t>ETL Summary </a:t>
+            </a:r>
+            <a:r>
+              <a:rPr lang="zh-TW" altLang="en-US" b="1" dirty="0"/>
+              <a:t>做好了，需要我幫你擬一份這份專題簡報的「大綱與目錄」嗎？幫你把分析發現串成一個有溫度的故事。</a:t>
+            </a:r>
             <a:endParaRPr lang="zh-TW" altLang="en-US" dirty="0"/>
           </a:p>
           <a:p>
-            <a:pPr>
-              <a:buNone/>
-            </a:pPr>
-            <a:r>
-              <a:rPr lang="zh-TW" altLang="en-US" b="1" dirty="0"/>
-              <a:t>💡 簡報呈現小秘訣</a:t>
-            </a:r>
-          </a:p>
-          <a:p>
-            <a:pPr>
-              <a:buFont typeface="+mj-lt"/>
-              <a:buAutoNum type="arabicPeriod"/>
-            </a:pPr>
-            <a:r>
-              <a:rPr lang="zh-TW" altLang="en-US" b="1" dirty="0"/>
-              <a:t>放一張 </a:t>
-            </a:r>
-            <a:r>
-              <a:rPr lang="en-US" altLang="zh-TW" b="1" dirty="0"/>
-              <a:t>Before/After </a:t>
-            </a:r>
-            <a:r>
-              <a:rPr lang="zh-TW" altLang="en-US" b="1" dirty="0"/>
-              <a:t>圖：</a:t>
-            </a:r>
-            <a:r>
-              <a:rPr lang="zh-TW" altLang="en-US" dirty="0"/>
-              <a:t> 左邊放雜亂的 </a:t>
-            </a:r>
-            <a:r>
-              <a:rPr lang="en-US" altLang="zh-TW" dirty="0"/>
-              <a:t>Excel </a:t>
-            </a:r>
-            <a:r>
-              <a:rPr lang="zh-TW" altLang="en-US" dirty="0"/>
-              <a:t>原始截圖，右邊放你整理好的漂亮長表。</a:t>
-            </a:r>
-          </a:p>
-          <a:p>
-            <a:pPr>
-              <a:buFont typeface="+mj-lt"/>
-              <a:buAutoNum type="arabicPeriod"/>
-            </a:pPr>
-            <a:r>
-              <a:rPr lang="zh-TW" altLang="en-US" b="1" dirty="0"/>
-              <a:t>強調「自動化」：</a:t>
-            </a:r>
-            <a:r>
-              <a:rPr lang="zh-TW" altLang="en-US" dirty="0"/>
-              <a:t> 提到這套 </a:t>
-            </a:r>
-            <a:r>
-              <a:rPr lang="en-US" altLang="zh-TW" dirty="0"/>
-              <a:t>ETL </a:t>
-            </a:r>
-            <a:r>
-              <a:rPr lang="zh-TW" altLang="en-US" dirty="0"/>
-              <a:t>流程未來只要「點擊重新整理」，就能自動處理 </a:t>
-            </a:r>
-            <a:r>
-              <a:rPr lang="en-US" altLang="zh-TW" dirty="0"/>
-              <a:t>2026 </a:t>
-            </a:r>
-            <a:r>
-              <a:rPr lang="zh-TW" altLang="en-US" dirty="0"/>
-              <a:t>年以後的新數據，這展現了你的</a:t>
-            </a:r>
-            <a:r>
-              <a:rPr lang="zh-TW" altLang="en-US" b="1" dirty="0"/>
-              <a:t>工程思維</a:t>
-            </a:r>
-            <a:r>
-              <a:rPr lang="zh-TW" altLang="en-US" dirty="0"/>
-              <a:t>。</a:t>
-            </a:r>
+            <a:endParaRPr lang="zh-TW" altLang="en-US" dirty="0"/>
           </a:p>
         </p:txBody>
       </p:sp>
     </p:spTree>
     <p:extLst>
       <p:ext uri="{BB962C8B-B14F-4D97-AF65-F5344CB8AC3E}">
-        <p14:creationId xmlns:p14="http://schemas.microsoft.com/office/powerpoint/2010/main" val="92267392"/>
+        <p14:creationId xmlns:p14="http://schemas.microsoft.com/office/powerpoint/2010/main" val="2689570967"/>
       </p:ext>
     </p:extLst>
   </p:cSld>
@@ -6135,7 +5604,7 @@
           <p:cNvPr id="2" name="標題 1">
             <a:extLst>
               <a:ext uri="{FF2B5EF4-FFF2-40B4-BE49-F238E27FC236}">
-                <a16:creationId xmlns:a16="http://schemas.microsoft.com/office/drawing/2014/main" id="{2012A99B-5995-015E-CA3A-30F5F5478ECE}"/>
+                <a16:creationId xmlns:a16="http://schemas.microsoft.com/office/drawing/2014/main" id="{C343A1D4-1F22-0E32-9B64-AD1583DFCA49}"/>
               </a:ext>
             </a:extLst>
           </p:cNvPr>
@@ -6160,7 +5629,7 @@
           <p:cNvPr id="3" name="內容版面配置區 2">
             <a:extLst>
               <a:ext uri="{FF2B5EF4-FFF2-40B4-BE49-F238E27FC236}">
-                <a16:creationId xmlns:a16="http://schemas.microsoft.com/office/drawing/2014/main" id="{7DBEED38-26D9-8059-695A-D2CF7E1B8DD2}"/>
+                <a16:creationId xmlns:a16="http://schemas.microsoft.com/office/drawing/2014/main" id="{239686E7-8DAA-2821-8CE5-DDC316FA8AD3}"/>
               </a:ext>
             </a:extLst>
           </p:cNvPr>
@@ -6173,38 +5642,244 @@
         </p:nvSpPr>
         <p:spPr/>
         <p:txBody>
-          <a:bodyPr>
-            <a:normAutofit fontScale="62500" lnSpcReduction="20000"/>
+          <a:bodyPr/>
+          <a:lstStyle/>
+          <a:p>
+            <a:endParaRPr lang="zh-TW" altLang="en-US"/>
+          </a:p>
+        </p:txBody>
+      </p:sp>
+      <p:sp>
+        <p:nvSpPr>
+          <p:cNvPr id="5" name="文字方塊 4">
+            <a:extLst>
+              <a:ext uri="{FF2B5EF4-FFF2-40B4-BE49-F238E27FC236}">
+                <a16:creationId xmlns:a16="http://schemas.microsoft.com/office/drawing/2014/main" id="{37AEF719-94EA-D524-FCCC-04205D3EB30D}"/>
+              </a:ext>
+            </a:extLst>
+          </p:cNvPr>
+          <p:cNvSpPr txBox="1"/>
+          <p:nvPr/>
+        </p:nvSpPr>
+        <p:spPr>
+          <a:xfrm>
+            <a:off x="3048000" y="-3262682"/>
+            <a:ext cx="6096000" cy="13388280"/>
+          </a:xfrm>
+          <a:prstGeom prst="rect">
+            <a:avLst/>
+          </a:prstGeom>
+          <a:noFill/>
+        </p:spPr>
+        <p:txBody>
+          <a:bodyPr wrap="square">
+            <a:spAutoFit/>
           </a:bodyPr>
           <a:lstStyle/>
           <a:p>
-            <a:r>
-              <a:rPr lang="zh-TW" altLang="en-US" b="1" dirty="0"/>
-              <a:t>簡報結語與建議 </a:t>
-            </a:r>
-            <a:r>
-              <a:rPr lang="en-US" altLang="zh-TW" b="1" dirty="0"/>
-              <a:t>(Conclusion &amp; Call to Action)</a:t>
-            </a:r>
-          </a:p>
-          <a:p>
-            <a:r>
-              <a:rPr lang="en-US" altLang="zh-TW" b="1" dirty="0"/>
-              <a:t>1. </a:t>
-            </a:r>
-            <a:r>
-              <a:rPr lang="zh-TW" altLang="en-US" b="1" dirty="0"/>
-              <a:t>核心洞察：能源民主化與企業動能</a:t>
-            </a:r>
-          </a:p>
-          <a:p>
-            <a:r>
-              <a:rPr lang="zh-TW" altLang="en-US" b="1" dirty="0"/>
-              <a:t>數據實證：</a:t>
-            </a:r>
-            <a:r>
-              <a:rPr lang="zh-TW" altLang="en-US" dirty="0"/>
-              <a:t> 透過 </a:t>
+            <a:pPr>
+              <a:buNone/>
+            </a:pPr>
+            <a:r>
+              <a:rPr lang="zh-TW" altLang="en-US" b="1" dirty="0"/>
+              <a:t>📊 專題資料處理與清洗技術紀錄 </a:t>
+            </a:r>
+            <a:r>
+              <a:rPr lang="en-US" altLang="zh-TW" b="1" dirty="0"/>
+              <a:t>(ETL Summary)</a:t>
+            </a:r>
+          </a:p>
+          <a:p>
+            <a:pPr>
+              <a:buNone/>
+            </a:pPr>
+            <a:r>
+              <a:rPr lang="zh-TW" altLang="en-US" b="1" dirty="0"/>
+              <a:t>階段一：原始資料檢視 </a:t>
+            </a:r>
+            <a:r>
+              <a:rPr lang="en-US" altLang="zh-TW" b="1" dirty="0"/>
+              <a:t>(Data Assessment)</a:t>
+            </a:r>
+          </a:p>
+          <a:p>
+            <a:pPr>
+              <a:buFont typeface="Arial" panose="020B0604020202020204" pitchFamily="34" charset="0"/>
+              <a:buChar char="•"/>
+            </a:pPr>
+            <a:r>
+              <a:rPr lang="zh-TW" altLang="en-US" b="1" dirty="0"/>
+              <a:t>資料特徵：</a:t>
+            </a:r>
+            <a:r>
+              <a:rPr lang="zh-TW" altLang="en-US" dirty="0"/>
+              <a:t> 涵蓋 </a:t>
+            </a:r>
+            <a:r>
+              <a:rPr lang="en-US" altLang="zh-TW" dirty="0"/>
+              <a:t>2007 </a:t>
+            </a:r>
+            <a:r>
+              <a:rPr lang="zh-TW" altLang="en-US" dirty="0"/>
+              <a:t>年至 </a:t>
+            </a:r>
+            <a:r>
+              <a:rPr lang="en-US" altLang="zh-TW" dirty="0"/>
+              <a:t>2026 </a:t>
+            </a:r>
+            <a:r>
+              <a:rPr lang="zh-TW" altLang="en-US" dirty="0"/>
+              <a:t>年（預估）之台灣逐月發電量，欄位多達 </a:t>
+            </a:r>
+            <a:r>
+              <a:rPr lang="en-US" altLang="zh-TW" dirty="0"/>
+              <a:t>50 </a:t>
+            </a:r>
+            <a:r>
+              <a:rPr lang="zh-TW" altLang="en-US" dirty="0"/>
+              <a:t>餘項。</a:t>
+            </a:r>
+          </a:p>
+          <a:p>
+            <a:pPr>
+              <a:buFont typeface="Arial" panose="020B0604020202020204" pitchFamily="34" charset="0"/>
+              <a:buChar char="•"/>
+            </a:pPr>
+            <a:r>
+              <a:rPr lang="zh-TW" altLang="en-US" b="1" dirty="0"/>
+              <a:t>原始挑戰：</a:t>
+            </a:r>
+            <a:r>
+              <a:rPr lang="zh-TW" altLang="en-US" dirty="0"/>
+              <a:t> * </a:t>
+            </a:r>
+            <a:r>
+              <a:rPr lang="zh-TW" altLang="en-US" b="1" dirty="0"/>
+              <a:t>寬表困境 </a:t>
+            </a:r>
+            <a:r>
+              <a:rPr lang="en-US" altLang="zh-TW" b="1" dirty="0"/>
+              <a:t>(Wide Format)</a:t>
+            </a:r>
+            <a:r>
+              <a:rPr lang="zh-TW" altLang="en-US" b="1" dirty="0"/>
+              <a:t>：</a:t>
+            </a:r>
+            <a:r>
+              <a:rPr lang="zh-TW" altLang="en-US" dirty="0"/>
+              <a:t> 經營主體（台電</a:t>
+            </a:r>
+            <a:r>
+              <a:rPr lang="en-US" altLang="zh-TW" dirty="0"/>
+              <a:t>/</a:t>
+            </a:r>
+            <a:r>
+              <a:rPr lang="zh-TW" altLang="en-US" dirty="0"/>
+              <a:t>民營</a:t>
+            </a:r>
+            <a:r>
+              <a:rPr lang="en-US" altLang="zh-TW" dirty="0"/>
+              <a:t>/</a:t>
+            </a:r>
+            <a:r>
+              <a:rPr lang="zh-TW" altLang="en-US" dirty="0"/>
+              <a:t>自用）與能源細項全擠在欄位名稱中，無法進行動態分類。</a:t>
+            </a:r>
+          </a:p>
+          <a:p>
+            <a:pPr marL="742950" lvl="1" indent="-285750">
+              <a:buFont typeface="Arial" panose="020B0604020202020204" pitchFamily="34" charset="0"/>
+              <a:buChar char="•"/>
+            </a:pPr>
+            <a:r>
+              <a:rPr lang="zh-TW" altLang="en-US" b="1" dirty="0"/>
+              <a:t>命名雜訊：</a:t>
+            </a:r>
+            <a:r>
+              <a:rPr lang="zh-TW" altLang="en-US" dirty="0"/>
+              <a:t> 欄位標題帶有 </a:t>
+            </a:r>
+            <a:r>
+              <a:rPr lang="en-US" altLang="zh-TW" dirty="0">
+                <a:latin typeface="Courier New" panose="02070309020205020404" pitchFamily="49" charset="0"/>
+              </a:rPr>
+              <a:t>(</a:t>
+            </a:r>
+            <a:r>
+              <a:rPr lang="zh-TW" altLang="en-US" dirty="0">
+                <a:latin typeface="Courier New" panose="02070309020205020404" pitchFamily="49" charset="0"/>
+              </a:rPr>
+              <a:t>數值</a:t>
+            </a:r>
+            <a:r>
+              <a:rPr lang="en-US" altLang="zh-TW" dirty="0">
+                <a:latin typeface="Courier New" panose="02070309020205020404" pitchFamily="49" charset="0"/>
+              </a:rPr>
+              <a:t>)</a:t>
+            </a:r>
+            <a:r>
+              <a:rPr lang="zh-TW" altLang="en-US" dirty="0"/>
+              <a:t> 或 </a:t>
+            </a:r>
+            <a:r>
+              <a:rPr lang="en-US" altLang="zh-TW" dirty="0">
+                <a:latin typeface="Courier New" panose="02070309020205020404" pitchFamily="49" charset="0"/>
+              </a:rPr>
+              <a:t>_</a:t>
+            </a:r>
+            <a:r>
+              <a:rPr lang="zh-TW" altLang="en-US" dirty="0">
+                <a:latin typeface="Courier New" panose="02070309020205020404" pitchFamily="49" charset="0"/>
+              </a:rPr>
+              <a:t>全國</a:t>
+            </a:r>
+            <a:r>
+              <a:rPr lang="zh-TW" altLang="en-US" dirty="0"/>
+              <a:t> 等非結構化贅字。</a:t>
+            </a:r>
+          </a:p>
+          <a:p>
+            <a:pPr marL="742950" lvl="1" indent="-285750">
+              <a:buFont typeface="Arial" panose="020B0604020202020204" pitchFamily="34" charset="0"/>
+              <a:buChar char="•"/>
+            </a:pPr>
+            <a:r>
+              <a:rPr lang="zh-TW" altLang="en-US" b="1" dirty="0"/>
+              <a:t>重複計算風險：</a:t>
+            </a:r>
+            <a:r>
+              <a:rPr lang="zh-TW" altLang="en-US" dirty="0"/>
+              <a:t> 原始表包含「全國總量」與「各主體細項」，若不處理會造成數據加倍。</a:t>
+            </a:r>
+          </a:p>
+          <a:p>
+            <a:pPr>
+              <a:buNone/>
+            </a:pPr>
+            <a:r>
+              <a:rPr lang="zh-TW" altLang="en-US" b="1" dirty="0"/>
+              <a:t>階段二：核心 </a:t>
+            </a:r>
+            <a:r>
+              <a:rPr lang="en-US" altLang="zh-TW" b="1" dirty="0"/>
+              <a:t>ETL </a:t>
+            </a:r>
+            <a:r>
+              <a:rPr lang="zh-TW" altLang="en-US" b="1" dirty="0"/>
+              <a:t>清洗流程 </a:t>
+            </a:r>
+            <a:r>
+              <a:rPr lang="en-US" altLang="zh-TW" b="1" dirty="0"/>
+              <a:t>(The Transformation)</a:t>
+            </a:r>
+          </a:p>
+          <a:p>
+            <a:pPr>
+              <a:buNone/>
+            </a:pPr>
+            <a:r>
+              <a:rPr lang="zh-TW" altLang="en-US" dirty="0"/>
+              <a:t>在 </a:t>
             </a:r>
             <a:r>
               <a:rPr lang="en-US" altLang="zh-TW" dirty="0"/>
@@ -6212,17 +5887,489 @@
             </a:r>
             <a:r>
               <a:rPr lang="zh-TW" altLang="en-US" dirty="0"/>
-              <a:t>的主體分析，我們發現「自用發電設備」的潔淨能源成長率顯著高於傳統電廠。</a:t>
-            </a:r>
-          </a:p>
-          <a:p>
-            <a:r>
-              <a:rPr lang="zh-TW" altLang="en-US" b="1" dirty="0"/>
-              <a:t>洞察：</a:t>
-            </a:r>
-            <a:r>
-              <a:rPr lang="zh-TW" altLang="en-US" dirty="0"/>
-              <a:t> 台灣的能源轉型已從「政策驅動」轉向「產業驅動」。企業（如半導體產業）為了符合國際 </a:t>
+              <a:t>的 </a:t>
+            </a:r>
+            <a:r>
+              <a:rPr lang="en-US" altLang="zh-TW" dirty="0"/>
+              <a:t>Power Query </a:t>
+            </a:r>
+            <a:r>
+              <a:rPr lang="zh-TW" altLang="en-US" dirty="0"/>
+              <a:t>環境中，我們執行了以下關鍵轉換：</a:t>
+            </a:r>
+          </a:p>
+          <a:p>
+            <a:pPr>
+              <a:buFont typeface="+mj-lt"/>
+              <a:buAutoNum type="arabicPeriod"/>
+            </a:pPr>
+            <a:r>
+              <a:rPr lang="zh-TW" altLang="en-US" b="1" dirty="0"/>
+              <a:t>取消樞紐 </a:t>
+            </a:r>
+            <a:r>
+              <a:rPr lang="en-US" altLang="zh-TW" b="1" dirty="0"/>
+              <a:t>(Unpivot Columns)</a:t>
+            </a:r>
+            <a:r>
+              <a:rPr lang="zh-TW" altLang="en-US" b="1" dirty="0"/>
+              <a:t>：</a:t>
+            </a:r>
+            <a:r>
+              <a:rPr lang="zh-TW" altLang="en-US" dirty="0"/>
+              <a:t> 將 </a:t>
+            </a:r>
+            <a:r>
+              <a:rPr lang="en-US" altLang="zh-TW" dirty="0"/>
+              <a:t>50 </a:t>
+            </a:r>
+            <a:r>
+              <a:rPr lang="zh-TW" altLang="en-US" dirty="0"/>
+              <a:t>幾個橫向欄位轉化為縱向的 </a:t>
+            </a:r>
+            <a:r>
+              <a:rPr lang="zh-TW" altLang="en-US" b="1" dirty="0"/>
+              <a:t>「多列 </a:t>
+            </a:r>
+            <a:r>
+              <a:rPr lang="en-US" altLang="zh-TW" b="1" dirty="0"/>
+              <a:t>(Rows) </a:t>
+            </a:r>
+            <a:r>
+              <a:rPr lang="zh-TW" altLang="en-US" b="1" dirty="0"/>
+              <a:t>結構」</a:t>
+            </a:r>
+            <a:r>
+              <a:rPr lang="zh-TW" altLang="en-US" dirty="0"/>
+              <a:t>，讓每一筆數據都配備一組屬性標籤。</a:t>
+            </a:r>
+          </a:p>
+          <a:p>
+            <a:pPr>
+              <a:buFont typeface="+mj-lt"/>
+              <a:buAutoNum type="arabicPeriod"/>
+            </a:pPr>
+            <a:r>
+              <a:rPr lang="zh-TW" altLang="en-US" b="1" dirty="0"/>
+              <a:t>階層式拆分 </a:t>
+            </a:r>
+            <a:r>
+              <a:rPr lang="en-US" altLang="zh-TW" b="1" dirty="0"/>
+              <a:t>(Split by Delimiter)</a:t>
+            </a:r>
+            <a:r>
+              <a:rPr lang="zh-TW" altLang="en-US" b="1" dirty="0"/>
+              <a:t>：</a:t>
+            </a:r>
+            <a:r>
+              <a:rPr lang="zh-TW" altLang="en-US" dirty="0"/>
+              <a:t> 利用底線 </a:t>
+            </a:r>
+            <a:r>
+              <a:rPr lang="en-US" altLang="zh-TW" dirty="0">
+                <a:latin typeface="Courier New" panose="02070309020205020404" pitchFamily="49" charset="0"/>
+              </a:rPr>
+              <a:t>_</a:t>
+            </a:r>
+            <a:r>
+              <a:rPr lang="zh-TW" altLang="en-US" dirty="0"/>
+              <a:t> 將屬性拆解為三個核心維度：</a:t>
+            </a:r>
+            <a:r>
+              <a:rPr lang="en-US" altLang="zh-TW" b="1" dirty="0"/>
+              <a:t>[</a:t>
+            </a:r>
+            <a:r>
+              <a:rPr lang="zh-TW" altLang="en-US" b="1" dirty="0"/>
+              <a:t>經營主體</a:t>
+            </a:r>
+            <a:r>
+              <a:rPr lang="en-US" altLang="zh-TW" b="1" dirty="0"/>
+              <a:t>]</a:t>
+            </a:r>
+            <a:r>
+              <a:rPr lang="zh-TW" altLang="en-US" b="1" dirty="0"/>
+              <a:t>、</a:t>
+            </a:r>
+            <a:r>
+              <a:rPr lang="en-US" altLang="zh-TW" b="1" dirty="0"/>
+              <a:t>[</a:t>
+            </a:r>
+            <a:r>
+              <a:rPr lang="zh-TW" altLang="en-US" b="1" dirty="0"/>
+              <a:t>能源大類</a:t>
+            </a:r>
+            <a:r>
+              <a:rPr lang="en-US" altLang="zh-TW" b="1" dirty="0"/>
+              <a:t>]</a:t>
+            </a:r>
+            <a:r>
+              <a:rPr lang="zh-TW" altLang="en-US" b="1" dirty="0"/>
+              <a:t>、</a:t>
+            </a:r>
+            <a:r>
+              <a:rPr lang="en-US" altLang="zh-TW" b="1" dirty="0"/>
+              <a:t>[</a:t>
+            </a:r>
+            <a:r>
+              <a:rPr lang="zh-TW" altLang="en-US" b="1" dirty="0"/>
+              <a:t>能源細項</a:t>
+            </a:r>
+            <a:r>
+              <a:rPr lang="en-US" altLang="zh-TW" b="1" dirty="0"/>
+              <a:t>]</a:t>
+            </a:r>
+            <a:r>
+              <a:rPr lang="zh-TW" altLang="en-US" dirty="0"/>
+              <a:t>。</a:t>
+            </a:r>
+          </a:p>
+          <a:p>
+            <a:pPr>
+              <a:buFont typeface="+mj-lt"/>
+              <a:buAutoNum type="arabicPeriod"/>
+            </a:pPr>
+            <a:r>
+              <a:rPr lang="zh-TW" altLang="en-US" b="1" dirty="0"/>
+              <a:t>精準清理 </a:t>
+            </a:r>
+            <a:r>
+              <a:rPr lang="en-US" altLang="zh-TW" b="1" dirty="0"/>
+              <a:t>(Data Cleansing)</a:t>
+            </a:r>
+            <a:r>
+              <a:rPr lang="zh-TW" altLang="en-US" b="1" dirty="0"/>
+              <a:t>：</a:t>
+            </a:r>
+            <a:r>
+              <a:rPr lang="zh-TW" altLang="en-US" dirty="0"/>
+              <a:t> * 批次移除 </a:t>
+            </a:r>
+            <a:r>
+              <a:rPr lang="en-US" altLang="zh-TW" dirty="0">
+                <a:latin typeface="Courier New" panose="02070309020205020404" pitchFamily="49" charset="0"/>
+              </a:rPr>
+              <a:t>(</a:t>
+            </a:r>
+            <a:r>
+              <a:rPr lang="zh-TW" altLang="en-US" dirty="0">
+                <a:latin typeface="Courier New" panose="02070309020205020404" pitchFamily="49" charset="0"/>
+              </a:rPr>
+              <a:t>數值</a:t>
+            </a:r>
+            <a:r>
+              <a:rPr lang="en-US" altLang="zh-TW" dirty="0">
+                <a:latin typeface="Courier New" panose="02070309020205020404" pitchFamily="49" charset="0"/>
+              </a:rPr>
+              <a:t>)</a:t>
+            </a:r>
+            <a:r>
+              <a:rPr lang="zh-TW" altLang="en-US" dirty="0"/>
+              <a:t> 與 </a:t>
+            </a:r>
+            <a:r>
+              <a:rPr lang="en-US" altLang="zh-TW" dirty="0">
+                <a:latin typeface="Courier New" panose="02070309020205020404" pitchFamily="49" charset="0"/>
+              </a:rPr>
+              <a:t>_</a:t>
+            </a:r>
+            <a:r>
+              <a:rPr lang="zh-TW" altLang="en-US" dirty="0">
+                <a:latin typeface="Courier New" panose="02070309020205020404" pitchFamily="49" charset="0"/>
+              </a:rPr>
+              <a:t>全國</a:t>
+            </a:r>
+            <a:r>
+              <a:rPr lang="zh-TW" altLang="en-US" dirty="0"/>
+              <a:t> 字眼。</a:t>
+            </a:r>
+          </a:p>
+          <a:p>
+            <a:pPr marL="742950" lvl="1" indent="-285750">
+              <a:buFont typeface="+mj-lt"/>
+              <a:buAutoNum type="arabicPeriod"/>
+            </a:pPr>
+            <a:r>
+              <a:rPr lang="zh-TW" altLang="en-US" dirty="0"/>
+              <a:t>執行 </a:t>
+            </a:r>
+            <a:r>
+              <a:rPr lang="zh-TW" altLang="en-US" b="1" dirty="0"/>
+              <a:t>修剪 </a:t>
+            </a:r>
+            <a:r>
+              <a:rPr lang="en-US" altLang="zh-TW" b="1" dirty="0"/>
+              <a:t>(Trim)</a:t>
+            </a:r>
+            <a:r>
+              <a:rPr lang="zh-TW" altLang="en-US" dirty="0"/>
+              <a:t> 與 </a:t>
+            </a:r>
+            <a:r>
+              <a:rPr lang="zh-TW" altLang="en-US" b="1" dirty="0"/>
+              <a:t>清除 </a:t>
+            </a:r>
+            <a:r>
+              <a:rPr lang="en-US" altLang="zh-TW" b="1" dirty="0"/>
+              <a:t>(Clean)</a:t>
+            </a:r>
+            <a:r>
+              <a:rPr lang="zh-TW" altLang="en-US" dirty="0"/>
+              <a:t>，排除看不見的空白字元，確保資料比對 </a:t>
+            </a:r>
+            <a:r>
+              <a:rPr lang="en-US" altLang="zh-TW" dirty="0"/>
+              <a:t>100% </a:t>
+            </a:r>
+            <a:r>
+              <a:rPr lang="zh-TW" altLang="en-US" dirty="0"/>
+              <a:t>精確。</a:t>
+            </a:r>
+          </a:p>
+          <a:p>
+            <a:pPr>
+              <a:buFont typeface="+mj-lt"/>
+              <a:buAutoNum type="arabicPeriod"/>
+            </a:pPr>
+            <a:r>
+              <a:rPr lang="zh-TW" altLang="en-US" b="1" dirty="0"/>
+              <a:t>條件式校正 </a:t>
+            </a:r>
+            <a:r>
+              <a:rPr lang="en-US" altLang="zh-TW" b="1" dirty="0"/>
+              <a:t>(Conditional Alignment)</a:t>
+            </a:r>
+            <a:r>
+              <a:rPr lang="zh-TW" altLang="en-US" b="1" dirty="0"/>
+              <a:t>：</a:t>
+            </a:r>
+            <a:r>
+              <a:rPr lang="zh-TW" altLang="en-US" dirty="0"/>
+              <a:t> 針對核能等不對稱層級（只有兩層），利用「條件式資料行」實施 </a:t>
+            </a:r>
+            <a:r>
+              <a:rPr lang="zh-TW" altLang="en-US" b="1" dirty="0"/>
+              <a:t>「向左填補邏輯」</a:t>
+            </a:r>
+            <a:r>
+              <a:rPr lang="zh-TW" altLang="en-US" dirty="0"/>
+              <a:t>，確保所有標籤對齊。</a:t>
+            </a:r>
+          </a:p>
+          <a:p>
+            <a:pPr>
+              <a:buNone/>
+            </a:pPr>
+            <a:r>
+              <a:rPr lang="zh-TW" altLang="en-US" b="1" dirty="0"/>
+              <a:t>階段三：特徵工程與價值定義 </a:t>
+            </a:r>
+            <a:r>
+              <a:rPr lang="en-US" altLang="zh-TW" b="1" dirty="0"/>
+              <a:t>(Feature Engineering)</a:t>
+            </a:r>
+          </a:p>
+          <a:p>
+            <a:pPr>
+              <a:buFont typeface="Arial" panose="020B0604020202020204" pitchFamily="34" charset="0"/>
+              <a:buChar char="•"/>
+            </a:pPr>
+            <a:r>
+              <a:rPr lang="zh-TW" altLang="en-US" b="1" dirty="0"/>
+              <a:t>新增「潔淨能源」判定欄位：</a:t>
+            </a:r>
+            <a:r>
+              <a:rPr lang="zh-TW" altLang="en-US" dirty="0"/>
+              <a:t> * </a:t>
+            </a:r>
+            <a:r>
+              <a:rPr lang="zh-TW" altLang="en-US" b="1" dirty="0"/>
+              <a:t>邏輯定義：</a:t>
+            </a:r>
+            <a:r>
+              <a:rPr lang="zh-TW" altLang="en-US" dirty="0"/>
+              <a:t> 將 </a:t>
+            </a:r>
+            <a:r>
+              <a:rPr lang="zh-TW" altLang="en-US" dirty="0">
+                <a:latin typeface="Courier New" panose="02070309020205020404" pitchFamily="49" charset="0"/>
+              </a:rPr>
+              <a:t>再生能源</a:t>
+            </a:r>
+            <a:r>
+              <a:rPr lang="zh-TW" altLang="en-US" dirty="0"/>
+              <a:t> 與 </a:t>
+            </a:r>
+            <a:r>
+              <a:rPr lang="zh-TW" altLang="en-US" dirty="0">
+                <a:latin typeface="Courier New" panose="02070309020205020404" pitchFamily="49" charset="0"/>
+              </a:rPr>
+              <a:t>核能</a:t>
+            </a:r>
+            <a:r>
+              <a:rPr lang="zh-TW" altLang="en-US" dirty="0"/>
+              <a:t> 統一標註為 </a:t>
+            </a:r>
+            <a:r>
+              <a:rPr lang="zh-TW" altLang="en-US" b="1" dirty="0"/>
+              <a:t>「潔淨能源」</a:t>
+            </a:r>
+            <a:r>
+              <a:rPr lang="zh-TW" altLang="en-US" dirty="0"/>
+              <a:t>，其餘標註為 </a:t>
+            </a:r>
+            <a:r>
+              <a:rPr lang="zh-TW" altLang="en-US" b="1" dirty="0"/>
+              <a:t>「傳統火力」</a:t>
+            </a:r>
+            <a:r>
+              <a:rPr lang="zh-TW" altLang="en-US" dirty="0"/>
+              <a:t>。</a:t>
+            </a:r>
+          </a:p>
+          <a:p>
+            <a:pPr marL="742950" lvl="1" indent="-285750">
+              <a:buFont typeface="Arial" panose="020B0604020202020204" pitchFamily="34" charset="0"/>
+              <a:buChar char="•"/>
+            </a:pPr>
+            <a:r>
+              <a:rPr lang="zh-TW" altLang="en-US" b="1" dirty="0"/>
+              <a:t>特殊處理：</a:t>
+            </a:r>
+            <a:r>
+              <a:rPr lang="zh-TW" altLang="en-US" dirty="0"/>
+              <a:t> 將 </a:t>
+            </a:r>
+            <a:r>
+              <a:rPr lang="zh-TW" altLang="en-US" b="1" dirty="0"/>
+              <a:t>「抽蓄水力」</a:t>
+            </a:r>
+            <a:r>
+              <a:rPr lang="zh-TW" altLang="en-US" dirty="0"/>
+              <a:t> 納入標籤，作為儲能調度的觀測指標。</a:t>
+            </a:r>
+          </a:p>
+          <a:p>
+            <a:pPr>
+              <a:buFont typeface="Arial" panose="020B0604020202020204" pitchFamily="34" charset="0"/>
+              <a:buChar char="•"/>
+            </a:pPr>
+            <a:r>
+              <a:rPr lang="en-US" altLang="zh-TW" b="1" dirty="0"/>
+              <a:t>DAX </a:t>
+            </a:r>
+            <a:r>
+              <a:rPr lang="zh-TW" altLang="en-US" b="1" dirty="0"/>
+              <a:t>建模：</a:t>
+            </a:r>
+            <a:r>
+              <a:rPr lang="zh-TW" altLang="en-US" dirty="0"/>
+              <a:t> 撰寫動態量值 </a:t>
+            </a:r>
+            <a:r>
+              <a:rPr lang="en-US" altLang="zh-TW" dirty="0"/>
+              <a:t>(Measures)</a:t>
+            </a:r>
+            <a:r>
+              <a:rPr lang="zh-TW" altLang="en-US" dirty="0"/>
+              <a:t>，即時計算 </a:t>
+            </a:r>
+            <a:r>
+              <a:rPr lang="zh-TW" altLang="en-US" b="1" dirty="0"/>
+              <a:t>「潔淨能源佔比 </a:t>
+            </a:r>
+            <a:r>
+              <a:rPr lang="en-US" altLang="zh-TW" b="1" dirty="0"/>
+              <a:t>%</a:t>
+            </a:r>
+            <a:r>
+              <a:rPr lang="zh-TW" altLang="en-US" b="1" dirty="0"/>
+              <a:t>」</a:t>
+            </a:r>
+            <a:r>
+              <a:rPr lang="zh-TW" altLang="en-US" dirty="0"/>
+              <a:t>。</a:t>
+            </a:r>
+          </a:p>
+          <a:p>
+            <a:pPr>
+              <a:buNone/>
+            </a:pPr>
+            <a:r>
+              <a:rPr lang="zh-TW" altLang="en-US" b="1" dirty="0"/>
+              <a:t>階段四：專題分析發現預告 </a:t>
+            </a:r>
+            <a:r>
+              <a:rPr lang="en-US" altLang="zh-TW" b="1" dirty="0"/>
+              <a:t>(Analytical Insights)</a:t>
+            </a:r>
+          </a:p>
+          <a:p>
+            <a:pPr>
+              <a:buFont typeface="Arial" panose="020B0604020202020204" pitchFamily="34" charset="0"/>
+              <a:buChar char="•"/>
+            </a:pPr>
+            <a:r>
+              <a:rPr lang="zh-TW" altLang="en-US" b="1" dirty="0"/>
+              <a:t>結構交叉分析 </a:t>
+            </a:r>
+            <a:r>
+              <a:rPr lang="en-US" altLang="zh-TW" b="1" dirty="0"/>
+              <a:t>(</a:t>
+            </a:r>
+            <a:r>
+              <a:rPr lang="zh-TW" altLang="en-US" b="1" dirty="0"/>
+              <a:t>方向四</a:t>
+            </a:r>
+            <a:r>
+              <a:rPr lang="en-US" altLang="zh-TW" b="1" dirty="0"/>
+              <a:t>)</a:t>
+            </a:r>
+            <a:r>
+              <a:rPr lang="zh-TW" altLang="en-US" b="1" dirty="0"/>
+              <a:t>：</a:t>
+            </a:r>
+            <a:r>
+              <a:rPr lang="zh-TW" altLang="en-US" dirty="0"/>
+              <a:t> 成功鎖定再生能源超越核能的歷史「黃金交叉點」。</a:t>
+            </a:r>
+          </a:p>
+          <a:p>
+            <a:pPr>
+              <a:buFont typeface="Arial" panose="020B0604020202020204" pitchFamily="34" charset="0"/>
+              <a:buChar char="•"/>
+            </a:pPr>
+            <a:r>
+              <a:rPr lang="zh-TW" altLang="en-US" b="1" dirty="0"/>
+              <a:t>主體動能對比 </a:t>
+            </a:r>
+            <a:r>
+              <a:rPr lang="en-US" altLang="zh-TW" b="1" dirty="0"/>
+              <a:t>(</a:t>
+            </a:r>
+            <a:r>
+              <a:rPr lang="zh-TW" altLang="en-US" b="1" dirty="0"/>
+              <a:t>方向三</a:t>
+            </a:r>
+            <a:r>
+              <a:rPr lang="en-US" altLang="zh-TW" b="1" dirty="0"/>
+              <a:t>)</a:t>
+            </a:r>
+            <a:r>
+              <a:rPr lang="zh-TW" altLang="en-US" b="1" dirty="0"/>
+              <a:t>：</a:t>
+            </a:r>
+            <a:r>
+              <a:rPr lang="zh-TW" altLang="en-US" dirty="0"/>
+              <a:t> 實證 </a:t>
+            </a:r>
+            <a:r>
+              <a:rPr lang="zh-TW" altLang="en-US" b="1" dirty="0"/>
+              <a:t>「自用發電設備」</a:t>
+            </a:r>
+            <a:r>
+              <a:rPr lang="zh-TW" altLang="en-US" dirty="0"/>
+              <a:t> 在潔淨能源佔比的成長率遠高於國營電廠，反映企業 </a:t>
             </a:r>
             <a:r>
               <a:rPr lang="en-US" altLang="zh-TW" dirty="0"/>
@@ -6230,35 +6377,77 @@
             </a:r>
             <a:r>
               <a:rPr lang="zh-TW" altLang="en-US" dirty="0"/>
-              <a:t>與 </a:t>
+              <a:t>的強勁拉動力。</a:t>
+            </a:r>
+          </a:p>
+          <a:p>
+            <a:pPr>
+              <a:buNone/>
+            </a:pPr>
+            <a:br>
+              <a:rPr lang="zh-TW" altLang="en-US" dirty="0"/>
+            </a:br>
+            <a:endParaRPr lang="zh-TW" altLang="en-US" dirty="0"/>
+          </a:p>
+          <a:p>
+            <a:pPr>
+              <a:buNone/>
+            </a:pPr>
+            <a:r>
+              <a:rPr lang="zh-TW" altLang="en-US" b="1" dirty="0"/>
+              <a:t>💡 簡報呈現小秘訣</a:t>
+            </a:r>
+          </a:p>
+          <a:p>
+            <a:pPr>
+              <a:buFont typeface="+mj-lt"/>
+              <a:buAutoNum type="arabicPeriod"/>
+            </a:pPr>
+            <a:r>
+              <a:rPr lang="zh-TW" altLang="en-US" b="1" dirty="0"/>
+              <a:t>放一張 </a:t>
+            </a:r>
+            <a:r>
+              <a:rPr lang="en-US" altLang="zh-TW" b="1" dirty="0"/>
+              <a:t>Before/After </a:t>
+            </a:r>
+            <a:r>
+              <a:rPr lang="zh-TW" altLang="en-US" b="1" dirty="0"/>
+              <a:t>圖：</a:t>
+            </a:r>
+            <a:r>
+              <a:rPr lang="zh-TW" altLang="en-US" dirty="0"/>
+              <a:t> 左邊放雜亂的 </a:t>
             </a:r>
             <a:r>
               <a:rPr lang="en-US" altLang="zh-TW" dirty="0"/>
-              <a:t>RE100 </a:t>
-            </a:r>
-            <a:r>
-              <a:rPr lang="zh-TW" altLang="en-US" dirty="0"/>
-              <a:t>規範，已成為綠能發展的最強引擎。</a:t>
-            </a:r>
-          </a:p>
-          <a:p>
-            <a:r>
-              <a:rPr lang="en-US" altLang="zh-TW" b="1" dirty="0"/>
-              <a:t>2. </a:t>
-            </a:r>
-            <a:r>
-              <a:rPr lang="zh-TW" altLang="en-US" b="1" dirty="0"/>
-              <a:t>預測趨勢：黃金交叉後的穩定性挑戰</a:t>
-            </a:r>
-          </a:p>
-          <a:p>
-            <a:r>
-              <a:rPr lang="zh-TW" altLang="en-US" b="1" dirty="0"/>
-              <a:t>數據趨勢：</a:t>
-            </a:r>
-            <a:r>
-              <a:rPr lang="zh-TW" altLang="en-US" dirty="0"/>
-              <a:t> </a:t>
+              <a:t>Excel </a:t>
+            </a:r>
+            <a:r>
+              <a:rPr lang="zh-TW" altLang="en-US" dirty="0"/>
+              <a:t>原始截圖，右邊放你整理好的漂亮長表。</a:t>
+            </a:r>
+          </a:p>
+          <a:p>
+            <a:pPr>
+              <a:buFont typeface="+mj-lt"/>
+              <a:buAutoNum type="arabicPeriod"/>
+            </a:pPr>
+            <a:r>
+              <a:rPr lang="zh-TW" altLang="en-US" b="1" dirty="0"/>
+              <a:t>強調「自動化」：</a:t>
+            </a:r>
+            <a:r>
+              <a:rPr lang="zh-TW" altLang="en-US" dirty="0"/>
+              <a:t> 提到這套 </a:t>
+            </a:r>
+            <a:r>
+              <a:rPr lang="en-US" altLang="zh-TW" dirty="0"/>
+              <a:t>ETL </a:t>
+            </a:r>
+            <a:r>
+              <a:rPr lang="zh-TW" altLang="en-US" dirty="0"/>
+              <a:t>流程未來只要「點擊重新整理」，就能自動處理 </a:t>
             </a:r>
             <a:r>
               <a:rPr lang="en-US" altLang="zh-TW" dirty="0"/>
@@ -6266,90 +6455,23 @@
             </a:r>
             <a:r>
               <a:rPr lang="zh-TW" altLang="en-US" dirty="0"/>
-              <a:t>年再生能源佔比正式銜接核能退場。</a:t>
-            </a:r>
-          </a:p>
-          <a:p>
-            <a:r>
-              <a:rPr lang="zh-TW" altLang="en-US" b="1" dirty="0"/>
-              <a:t>建議：</a:t>
-            </a:r>
-            <a:r>
-              <a:rPr lang="zh-TW" altLang="en-US" dirty="0"/>
-              <a:t> 隨著潔淨能源（特別是變動性高的光電與風電）佔比提升，「抽蓄水力」與「民間儲能系統」的調度數據將成為下一階段電網韌性的關鍵指標。</a:t>
-            </a:r>
-          </a:p>
-          <a:p>
-            <a:r>
-              <a:rPr lang="en-US" altLang="zh-TW" b="1" dirty="0"/>
-              <a:t>3. </a:t>
-            </a:r>
-            <a:r>
-              <a:rPr lang="zh-TW" altLang="en-US" b="1" dirty="0"/>
-              <a:t>技術價值：自動化監測管線 </a:t>
-            </a:r>
-            <a:r>
-              <a:rPr lang="en-US" altLang="zh-TW" b="1" dirty="0"/>
-              <a:t>(The Scalable Solution)</a:t>
-            </a:r>
-          </a:p>
-          <a:p>
-            <a:r>
-              <a:rPr lang="zh-TW" altLang="en-US" b="1" dirty="0"/>
-              <a:t>專案成果：</a:t>
-            </a:r>
-            <a:r>
-              <a:rPr lang="zh-TW" altLang="en-US" dirty="0"/>
-              <a:t> 本專案建立的 </a:t>
-            </a:r>
-            <a:r>
-              <a:rPr lang="en-US" altLang="zh-TW" b="1" dirty="0"/>
-              <a:t>ETL </a:t>
-            </a:r>
-            <a:r>
-              <a:rPr lang="zh-TW" altLang="en-US" b="1" dirty="0"/>
-              <a:t>自動化模型</a:t>
-            </a:r>
-            <a:r>
-              <a:rPr lang="zh-TW" altLang="en-US" dirty="0"/>
-              <a:t>，解決了長達 </a:t>
-            </a:r>
-            <a:r>
-              <a:rPr lang="en-US" altLang="zh-TW" dirty="0"/>
-              <a:t>20 </a:t>
-            </a:r>
-            <a:r>
-              <a:rPr lang="zh-TW" altLang="en-US" dirty="0"/>
-              <a:t>年、非對稱層級的複雜電力數據清洗難題。</a:t>
-            </a:r>
-          </a:p>
-          <a:p>
-            <a:r>
-              <a:rPr lang="zh-TW" altLang="en-US" b="1" dirty="0"/>
-              <a:t>擴充性：</a:t>
-            </a:r>
-            <a:r>
-              <a:rPr lang="zh-TW" altLang="en-US" dirty="0"/>
-              <a:t> 該模型具備高度擴充性，未來可直接串接台電 </a:t>
-            </a:r>
-            <a:r>
-              <a:rPr lang="en-US" altLang="zh-TW" dirty="0"/>
-              <a:t>API </a:t>
-            </a:r>
-            <a:r>
-              <a:rPr lang="zh-TW" altLang="en-US" dirty="0"/>
-              <a:t>或台積電等企業電力監測數據，實現即時的能源佔比監控。</a:t>
-            </a:r>
-          </a:p>
-          <a:p>
-            <a:endParaRPr lang="zh-TW" altLang="en-US" dirty="0"/>
+              <a:t>年以後的新數據，這展現了你的</a:t>
+            </a:r>
+            <a:r>
+              <a:rPr lang="zh-TW" altLang="en-US" b="1" dirty="0"/>
+              <a:t>工程思維</a:t>
+            </a:r>
+            <a:r>
+              <a:rPr lang="zh-TW" altLang="en-US" dirty="0"/>
+              <a:t>。</a:t>
+            </a:r>
           </a:p>
         </p:txBody>
       </p:sp>
     </p:spTree>
     <p:extLst>
       <p:ext uri="{BB962C8B-B14F-4D97-AF65-F5344CB8AC3E}">
-        <p14:creationId xmlns:p14="http://schemas.microsoft.com/office/powerpoint/2010/main" val="958773556"/>
+        <p14:creationId xmlns:p14="http://schemas.microsoft.com/office/powerpoint/2010/main" val="92267392"/>
       </p:ext>
     </p:extLst>
   </p:cSld>
@@ -7897,6 +8019,252 @@
           <p:cNvPr id="2" name="標題 1">
             <a:extLst>
               <a:ext uri="{FF2B5EF4-FFF2-40B4-BE49-F238E27FC236}">
+                <a16:creationId xmlns:a16="http://schemas.microsoft.com/office/drawing/2014/main" id="{2012A99B-5995-015E-CA3A-30F5F5478ECE}"/>
+              </a:ext>
+            </a:extLst>
+          </p:cNvPr>
+          <p:cNvSpPr>
+            <a:spLocks noGrp="1"/>
+          </p:cNvSpPr>
+          <p:nvPr>
+            <p:ph type="title"/>
+          </p:nvPr>
+        </p:nvSpPr>
+        <p:spPr/>
+        <p:txBody>
+          <a:bodyPr/>
+          <a:lstStyle/>
+          <a:p>
+            <a:endParaRPr lang="zh-TW" altLang="en-US"/>
+          </a:p>
+        </p:txBody>
+      </p:sp>
+      <p:sp>
+        <p:nvSpPr>
+          <p:cNvPr id="3" name="內容版面配置區 2">
+            <a:extLst>
+              <a:ext uri="{FF2B5EF4-FFF2-40B4-BE49-F238E27FC236}">
+                <a16:creationId xmlns:a16="http://schemas.microsoft.com/office/drawing/2014/main" id="{7DBEED38-26D9-8059-695A-D2CF7E1B8DD2}"/>
+              </a:ext>
+            </a:extLst>
+          </p:cNvPr>
+          <p:cNvSpPr>
+            <a:spLocks noGrp="1"/>
+          </p:cNvSpPr>
+          <p:nvPr>
+            <p:ph idx="1"/>
+          </p:nvPr>
+        </p:nvSpPr>
+        <p:spPr/>
+        <p:txBody>
+          <a:bodyPr>
+            <a:normAutofit fontScale="62500" lnSpcReduction="20000"/>
+          </a:bodyPr>
+          <a:lstStyle/>
+          <a:p>
+            <a:r>
+              <a:rPr lang="zh-TW" altLang="en-US" b="1" dirty="0"/>
+              <a:t>簡報結語與建議 </a:t>
+            </a:r>
+            <a:r>
+              <a:rPr lang="en-US" altLang="zh-TW" b="1" dirty="0"/>
+              <a:t>(Conclusion &amp; Call to Action)</a:t>
+            </a:r>
+          </a:p>
+          <a:p>
+            <a:r>
+              <a:rPr lang="en-US" altLang="zh-TW" b="1" dirty="0"/>
+              <a:t>1. </a:t>
+            </a:r>
+            <a:r>
+              <a:rPr lang="zh-TW" altLang="en-US" b="1" dirty="0"/>
+              <a:t>核心洞察：能源民主化與企業動能</a:t>
+            </a:r>
+          </a:p>
+          <a:p>
+            <a:r>
+              <a:rPr lang="zh-TW" altLang="en-US" b="1" dirty="0"/>
+              <a:t>數據實證：</a:t>
+            </a:r>
+            <a:r>
+              <a:rPr lang="zh-TW" altLang="en-US" dirty="0"/>
+              <a:t> 透過 </a:t>
+            </a:r>
+            <a:r>
+              <a:rPr lang="en-US" altLang="zh-TW" dirty="0"/>
+              <a:t>Power BI </a:t>
+            </a:r>
+            <a:r>
+              <a:rPr lang="zh-TW" altLang="en-US" dirty="0"/>
+              <a:t>的主體分析，我們發現「自用發電設備」的潔淨能源成長率顯著高於傳統電廠。</a:t>
+            </a:r>
+          </a:p>
+          <a:p>
+            <a:r>
+              <a:rPr lang="zh-TW" altLang="en-US" b="1" dirty="0"/>
+              <a:t>洞察：</a:t>
+            </a:r>
+            <a:r>
+              <a:rPr lang="zh-TW" altLang="en-US" dirty="0"/>
+              <a:t> 台灣的能源轉型已從「政策驅動」轉向「產業驅動」。企業（如半導體產業）為了符合國際 </a:t>
+            </a:r>
+            <a:r>
+              <a:rPr lang="en-US" altLang="zh-TW" dirty="0"/>
+              <a:t>ESG </a:t>
+            </a:r>
+            <a:r>
+              <a:rPr lang="zh-TW" altLang="en-US" dirty="0"/>
+              <a:t>與 </a:t>
+            </a:r>
+            <a:r>
+              <a:rPr lang="en-US" altLang="zh-TW" dirty="0"/>
+              <a:t>RE100 </a:t>
+            </a:r>
+            <a:r>
+              <a:rPr lang="zh-TW" altLang="en-US" dirty="0"/>
+              <a:t>規範，已成為綠能發展的最強引擎。</a:t>
+            </a:r>
+          </a:p>
+          <a:p>
+            <a:r>
+              <a:rPr lang="en-US" altLang="zh-TW" b="1" dirty="0"/>
+              <a:t>2. </a:t>
+            </a:r>
+            <a:r>
+              <a:rPr lang="zh-TW" altLang="en-US" b="1" dirty="0"/>
+              <a:t>預測趨勢：黃金交叉後的穩定性挑戰</a:t>
+            </a:r>
+          </a:p>
+          <a:p>
+            <a:r>
+              <a:rPr lang="zh-TW" altLang="en-US" b="1" dirty="0"/>
+              <a:t>數據趨勢：</a:t>
+            </a:r>
+            <a:r>
+              <a:rPr lang="zh-TW" altLang="en-US" dirty="0"/>
+              <a:t> </a:t>
+            </a:r>
+            <a:r>
+              <a:rPr lang="en-US" altLang="zh-TW" dirty="0"/>
+              <a:t>2026 </a:t>
+            </a:r>
+            <a:r>
+              <a:rPr lang="zh-TW" altLang="en-US" dirty="0"/>
+              <a:t>年再生能源佔比正式銜接核能退場。</a:t>
+            </a:r>
+          </a:p>
+          <a:p>
+            <a:r>
+              <a:rPr lang="zh-TW" altLang="en-US" b="1" dirty="0"/>
+              <a:t>建議：</a:t>
+            </a:r>
+            <a:r>
+              <a:rPr lang="zh-TW" altLang="en-US" dirty="0"/>
+              <a:t> 隨著潔淨能源（特別是變動性高的光電與風電）佔比提升，「抽蓄水力」與「民間儲能系統」的調度數據將成為下一階段電網韌性的關鍵指標。</a:t>
+            </a:r>
+          </a:p>
+          <a:p>
+            <a:r>
+              <a:rPr lang="en-US" altLang="zh-TW" b="1" dirty="0"/>
+              <a:t>3. </a:t>
+            </a:r>
+            <a:r>
+              <a:rPr lang="zh-TW" altLang="en-US" b="1" dirty="0"/>
+              <a:t>技術價值：自動化監測管線 </a:t>
+            </a:r>
+            <a:r>
+              <a:rPr lang="en-US" altLang="zh-TW" b="1" dirty="0"/>
+              <a:t>(The Scalable Solution)</a:t>
+            </a:r>
+          </a:p>
+          <a:p>
+            <a:r>
+              <a:rPr lang="zh-TW" altLang="en-US" b="1" dirty="0"/>
+              <a:t>專案成果：</a:t>
+            </a:r>
+            <a:r>
+              <a:rPr lang="zh-TW" altLang="en-US" dirty="0"/>
+              <a:t> 本專案建立的 </a:t>
+            </a:r>
+            <a:r>
+              <a:rPr lang="en-US" altLang="zh-TW" b="1" dirty="0"/>
+              <a:t>ETL </a:t>
+            </a:r>
+            <a:r>
+              <a:rPr lang="zh-TW" altLang="en-US" b="1" dirty="0"/>
+              <a:t>自動化模型</a:t>
+            </a:r>
+            <a:r>
+              <a:rPr lang="zh-TW" altLang="en-US" dirty="0"/>
+              <a:t>，解決了長達 </a:t>
+            </a:r>
+            <a:r>
+              <a:rPr lang="en-US" altLang="zh-TW" dirty="0"/>
+              <a:t>20 </a:t>
+            </a:r>
+            <a:r>
+              <a:rPr lang="zh-TW" altLang="en-US" dirty="0"/>
+              <a:t>年、非對稱層級的複雜電力數據清洗難題。</a:t>
+            </a:r>
+          </a:p>
+          <a:p>
+            <a:r>
+              <a:rPr lang="zh-TW" altLang="en-US" b="1" dirty="0"/>
+              <a:t>擴充性：</a:t>
+            </a:r>
+            <a:r>
+              <a:rPr lang="zh-TW" altLang="en-US" dirty="0"/>
+              <a:t> 該模型具備高度擴充性，未來可直接串接台電 </a:t>
+            </a:r>
+            <a:r>
+              <a:rPr lang="en-US" altLang="zh-TW" dirty="0"/>
+              <a:t>API </a:t>
+            </a:r>
+            <a:r>
+              <a:rPr lang="zh-TW" altLang="en-US" dirty="0"/>
+              <a:t>或台積電等企業電力監測數據，實現即時的能源佔比監控。</a:t>
+            </a:r>
+          </a:p>
+          <a:p>
+            <a:endParaRPr lang="zh-TW" altLang="en-US" dirty="0"/>
+          </a:p>
+        </p:txBody>
+      </p:sp>
+    </p:spTree>
+    <p:extLst>
+      <p:ext uri="{BB962C8B-B14F-4D97-AF65-F5344CB8AC3E}">
+        <p14:creationId xmlns:p14="http://schemas.microsoft.com/office/powerpoint/2010/main" val="958773556"/>
+      </p:ext>
+    </p:extLst>
+  </p:cSld>
+  <p:clrMapOvr>
+    <a:masterClrMapping/>
+  </p:clrMapOvr>
+</p:sld>
+</file>
+
+<file path=ppt/slides/slide21.xml><?xml version="1.0" encoding="utf-8"?>
+<p:sld xmlns:a="http://schemas.openxmlformats.org/drawingml/2006/main" xmlns:r="http://schemas.openxmlformats.org/officeDocument/2006/relationships" xmlns:p="http://schemas.openxmlformats.org/presentationml/2006/main">
+  <p:cSld>
+    <p:spTree>
+      <p:nvGrpSpPr>
+        <p:cNvPr id="1" name=""/>
+        <p:cNvGrpSpPr/>
+        <p:nvPr/>
+      </p:nvGrpSpPr>
+      <p:grpSpPr>
+        <a:xfrm>
+          <a:off x="0" y="0"/>
+          <a:ext cx="0" cy="0"/>
+          <a:chOff x="0" y="0"/>
+          <a:chExt cx="0" cy="0"/>
+        </a:xfrm>
+      </p:grpSpPr>
+      <p:sp>
+        <p:nvSpPr>
+          <p:cNvPr id="2" name="標題 1">
+            <a:extLst>
+              <a:ext uri="{FF2B5EF4-FFF2-40B4-BE49-F238E27FC236}">
                 <a16:creationId xmlns:a16="http://schemas.microsoft.com/office/drawing/2014/main" id="{7CE3594B-799E-9DB7-10AF-5F6E79A716E6}"/>
               </a:ext>
             </a:extLst>

--- a/《誰在推動綠能？——.pptx
+++ b/《誰在推動綠能？——.pptx
@@ -16,16 +16,17 @@
     <p:sldId id="275" r:id="rId10"/>
     <p:sldId id="276" r:id="rId11"/>
     <p:sldId id="273" r:id="rId12"/>
-    <p:sldId id="266" r:id="rId13"/>
-    <p:sldId id="267" r:id="rId14"/>
-    <p:sldId id="268" r:id="rId15"/>
-    <p:sldId id="257" r:id="rId16"/>
-    <p:sldId id="258" r:id="rId17"/>
-    <p:sldId id="259" r:id="rId18"/>
-    <p:sldId id="260" r:id="rId19"/>
-    <p:sldId id="261" r:id="rId20"/>
-    <p:sldId id="270" r:id="rId21"/>
-    <p:sldId id="271" r:id="rId22"/>
+    <p:sldId id="277" r:id="rId13"/>
+    <p:sldId id="266" r:id="rId14"/>
+    <p:sldId id="267" r:id="rId15"/>
+    <p:sldId id="268" r:id="rId16"/>
+    <p:sldId id="257" r:id="rId17"/>
+    <p:sldId id="258" r:id="rId18"/>
+    <p:sldId id="259" r:id="rId19"/>
+    <p:sldId id="260" r:id="rId20"/>
+    <p:sldId id="261" r:id="rId21"/>
+    <p:sldId id="270" r:id="rId22"/>
+    <p:sldId id="271" r:id="rId23"/>
   </p:sldIdLst>
   <p:sldSz cx="12192000" cy="6858000"/>
   <p:notesSz cx="6858000" cy="9144000"/>
@@ -279,7 +280,7 @@
           <a:p>
             <a:fld id="{9CD0EF91-A124-4443-A6AC-125C7A94C0BC}" type="datetimeFigureOut">
               <a:rPr lang="zh-TW" altLang="en-US" smtClean="0"/>
-              <a:t>2026/3/24</a:t>
+              <a:t>2026/3/25</a:t>
             </a:fld>
             <a:endParaRPr lang="zh-TW" altLang="en-US"/>
           </a:p>
@@ -477,7 +478,7 @@
           <a:p>
             <a:fld id="{9CD0EF91-A124-4443-A6AC-125C7A94C0BC}" type="datetimeFigureOut">
               <a:rPr lang="zh-TW" altLang="en-US" smtClean="0"/>
-              <a:t>2026/3/24</a:t>
+              <a:t>2026/3/25</a:t>
             </a:fld>
             <a:endParaRPr lang="zh-TW" altLang="en-US"/>
           </a:p>
@@ -685,7 +686,7 @@
           <a:p>
             <a:fld id="{9CD0EF91-A124-4443-A6AC-125C7A94C0BC}" type="datetimeFigureOut">
               <a:rPr lang="zh-TW" altLang="en-US" smtClean="0"/>
-              <a:t>2026/3/24</a:t>
+              <a:t>2026/3/25</a:t>
             </a:fld>
             <a:endParaRPr lang="zh-TW" altLang="en-US"/>
           </a:p>
@@ -883,7 +884,7 @@
           <a:p>
             <a:fld id="{9CD0EF91-A124-4443-A6AC-125C7A94C0BC}" type="datetimeFigureOut">
               <a:rPr lang="zh-TW" altLang="en-US" smtClean="0"/>
-              <a:t>2026/3/24</a:t>
+              <a:t>2026/3/25</a:t>
             </a:fld>
             <a:endParaRPr lang="zh-TW" altLang="en-US"/>
           </a:p>
@@ -1158,7 +1159,7 @@
           <a:p>
             <a:fld id="{9CD0EF91-A124-4443-A6AC-125C7A94C0BC}" type="datetimeFigureOut">
               <a:rPr lang="zh-TW" altLang="en-US" smtClean="0"/>
-              <a:t>2026/3/24</a:t>
+              <a:t>2026/3/25</a:t>
             </a:fld>
             <a:endParaRPr lang="zh-TW" altLang="en-US"/>
           </a:p>
@@ -1423,7 +1424,7 @@
           <a:p>
             <a:fld id="{9CD0EF91-A124-4443-A6AC-125C7A94C0BC}" type="datetimeFigureOut">
               <a:rPr lang="zh-TW" altLang="en-US" smtClean="0"/>
-              <a:t>2026/3/24</a:t>
+              <a:t>2026/3/25</a:t>
             </a:fld>
             <a:endParaRPr lang="zh-TW" altLang="en-US"/>
           </a:p>
@@ -1835,7 +1836,7 @@
           <a:p>
             <a:fld id="{9CD0EF91-A124-4443-A6AC-125C7A94C0BC}" type="datetimeFigureOut">
               <a:rPr lang="zh-TW" altLang="en-US" smtClean="0"/>
-              <a:t>2026/3/24</a:t>
+              <a:t>2026/3/25</a:t>
             </a:fld>
             <a:endParaRPr lang="zh-TW" altLang="en-US"/>
           </a:p>
@@ -1976,7 +1977,7 @@
           <a:p>
             <a:fld id="{9CD0EF91-A124-4443-A6AC-125C7A94C0BC}" type="datetimeFigureOut">
               <a:rPr lang="zh-TW" altLang="en-US" smtClean="0"/>
-              <a:t>2026/3/24</a:t>
+              <a:t>2026/3/25</a:t>
             </a:fld>
             <a:endParaRPr lang="zh-TW" altLang="en-US"/>
           </a:p>
@@ -2089,7 +2090,7 @@
           <a:p>
             <a:fld id="{9CD0EF91-A124-4443-A6AC-125C7A94C0BC}" type="datetimeFigureOut">
               <a:rPr lang="zh-TW" altLang="en-US" smtClean="0"/>
-              <a:t>2026/3/24</a:t>
+              <a:t>2026/3/25</a:t>
             </a:fld>
             <a:endParaRPr lang="zh-TW" altLang="en-US"/>
           </a:p>
@@ -2400,7 +2401,7 @@
           <a:p>
             <a:fld id="{9CD0EF91-A124-4443-A6AC-125C7A94C0BC}" type="datetimeFigureOut">
               <a:rPr lang="zh-TW" altLang="en-US" smtClean="0"/>
-              <a:t>2026/3/24</a:t>
+              <a:t>2026/3/25</a:t>
             </a:fld>
             <a:endParaRPr lang="zh-TW" altLang="en-US"/>
           </a:p>
@@ -2688,7 +2689,7 @@
           <a:p>
             <a:fld id="{9CD0EF91-A124-4443-A6AC-125C7A94C0BC}" type="datetimeFigureOut">
               <a:rPr lang="zh-TW" altLang="en-US" smtClean="0"/>
-              <a:t>2026/3/24</a:t>
+              <a:t>2026/3/25</a:t>
             </a:fld>
             <a:endParaRPr lang="zh-TW" altLang="en-US"/>
           </a:p>
@@ -2929,7 +2930,7 @@
           <a:p>
             <a:fld id="{9CD0EF91-A124-4443-A6AC-125C7A94C0BC}" type="datetimeFigureOut">
               <a:rPr lang="zh-TW" altLang="en-US" smtClean="0"/>
-              <a:t>2026/3/24</a:t>
+              <a:t>2026/3/25</a:t>
             </a:fld>
             <a:endParaRPr lang="zh-TW" altLang="en-US"/>
           </a:p>
@@ -3971,7 +3972,7 @@
           <p:cNvPr id="2" name="標題 1">
             <a:extLst>
               <a:ext uri="{FF2B5EF4-FFF2-40B4-BE49-F238E27FC236}">
-                <a16:creationId xmlns:a16="http://schemas.microsoft.com/office/drawing/2014/main" id="{DDE79172-72BF-B270-BC98-57276887EC43}"/>
+                <a16:creationId xmlns:a16="http://schemas.microsoft.com/office/drawing/2014/main" id="{6F7F2941-DD0A-74BC-341A-EC75482D6B05}"/>
               </a:ext>
             </a:extLst>
           </p:cNvPr>
@@ -3996,7 +3997,7 @@
           <p:cNvPr id="3" name="內容版面配置區 2">
             <a:extLst>
               <a:ext uri="{FF2B5EF4-FFF2-40B4-BE49-F238E27FC236}">
-                <a16:creationId xmlns:a16="http://schemas.microsoft.com/office/drawing/2014/main" id="{C5357848-2309-7B01-D90A-4FCA7E772186}"/>
+                <a16:creationId xmlns:a16="http://schemas.microsoft.com/office/drawing/2014/main" id="{D75DB23D-3F58-9D0A-64D6-135637D9F815}"/>
               </a:ext>
             </a:extLst>
           </p:cNvPr>
@@ -4013,81 +4014,16 @@
           <a:lstStyle/>
           <a:p>
             <a:r>
-              <a:rPr lang="en-US" altLang="zh-TW" b="1" dirty="0"/>
-              <a:t>5. Power BI </a:t>
-            </a:r>
-            <a:r>
-              <a:rPr lang="zh-TW" altLang="en-US" b="1" dirty="0"/>
-              <a:t>視覺化報表產出 </a:t>
-            </a:r>
-            <a:r>
-              <a:rPr lang="en-US" altLang="zh-TW" b="1" dirty="0"/>
-              <a:t>(Visual Dashboard)</a:t>
-            </a:r>
-          </a:p>
-          <a:p>
-            <a:r>
-              <a:rPr lang="zh-TW" altLang="en-US" b="1" dirty="0"/>
-              <a:t>趨勢圖表：</a:t>
-            </a:r>
-            <a:r>
-              <a:rPr lang="zh-TW" altLang="en-US" dirty="0"/>
-              <a:t> 繪製動態堆疊面積圖，展現 </a:t>
-            </a:r>
-            <a:r>
-              <a:rPr lang="en-US" altLang="zh-TW" dirty="0"/>
-              <a:t>20 </a:t>
-            </a:r>
-            <a:r>
-              <a:rPr lang="zh-TW" altLang="en-US" dirty="0"/>
-              <a:t>年結構變遷。</a:t>
-            </a:r>
-          </a:p>
-          <a:p>
-            <a:r>
-              <a:rPr lang="zh-TW" altLang="en-US" b="1" dirty="0"/>
-              <a:t>核心指標 </a:t>
-            </a:r>
-            <a:r>
-              <a:rPr lang="en-US" altLang="zh-TW" b="1" dirty="0"/>
-              <a:t>(KPI)</a:t>
-            </a:r>
-            <a:r>
-              <a:rPr lang="zh-TW" altLang="en-US" b="1" dirty="0"/>
-              <a:t>：</a:t>
-            </a:r>
-            <a:r>
-              <a:rPr lang="zh-TW" altLang="en-US" dirty="0"/>
-              <a:t> 建立動態量值卡片，即時顯示當前潔淨能源佔比。</a:t>
-            </a:r>
-          </a:p>
-          <a:p>
-            <a:r>
-              <a:rPr lang="zh-TW" altLang="en-US" b="1" dirty="0"/>
-              <a:t>互動設計：</a:t>
-            </a:r>
-            <a:r>
-              <a:rPr lang="zh-TW" altLang="en-US" dirty="0"/>
-              <a:t> 設置時間與主體切片器 </a:t>
-            </a:r>
-            <a:r>
-              <a:rPr lang="en-US" altLang="zh-TW" dirty="0"/>
-              <a:t>(Slicer)</a:t>
-            </a:r>
-            <a:r>
-              <a:rPr lang="zh-TW" altLang="en-US" dirty="0"/>
-              <a:t>，支持「下鑽式」探索。</a:t>
-            </a:r>
-          </a:p>
-          <a:p>
-            <a:endParaRPr lang="zh-TW" altLang="en-US" dirty="0"/>
+              <a:rPr lang="zh-TW" altLang="en-US" dirty="0"/>
+              <a:t>「再生能源貢獻拆解：民間自用設備的崛起」</a:t>
+            </a:r>
           </a:p>
         </p:txBody>
       </p:sp>
     </p:spTree>
     <p:extLst>
       <p:ext uri="{BB962C8B-B14F-4D97-AF65-F5344CB8AC3E}">
-        <p14:creationId xmlns:p14="http://schemas.microsoft.com/office/powerpoint/2010/main" val="2226702609"/>
+        <p14:creationId xmlns:p14="http://schemas.microsoft.com/office/powerpoint/2010/main" val="1673019752"/>
       </p:ext>
     </p:extLst>
   </p:cSld>
@@ -4119,7 +4055,7 @@
           <p:cNvPr id="2" name="標題 1">
             <a:extLst>
               <a:ext uri="{FF2B5EF4-FFF2-40B4-BE49-F238E27FC236}">
-                <a16:creationId xmlns:a16="http://schemas.microsoft.com/office/drawing/2014/main" id="{9D24B10B-341A-DB2B-6121-2E6909E8CC98}"/>
+                <a16:creationId xmlns:a16="http://schemas.microsoft.com/office/drawing/2014/main" id="{DDE79172-72BF-B270-BC98-57276887EC43}"/>
               </a:ext>
             </a:extLst>
           </p:cNvPr>
@@ -4144,7 +4080,7 @@
           <p:cNvPr id="3" name="內容版面配置區 2">
             <a:extLst>
               <a:ext uri="{FF2B5EF4-FFF2-40B4-BE49-F238E27FC236}">
-                <a16:creationId xmlns:a16="http://schemas.microsoft.com/office/drawing/2014/main" id="{0523407A-2F3A-C50B-3F64-91A8D5F85E66}"/>
+                <a16:creationId xmlns:a16="http://schemas.microsoft.com/office/drawing/2014/main" id="{C5357848-2309-7B01-D90A-4FCA7E772186}"/>
               </a:ext>
             </a:extLst>
           </p:cNvPr>
@@ -4162,61 +4098,69 @@
           <a:p>
             <a:r>
               <a:rPr lang="en-US" altLang="zh-TW" b="1" dirty="0"/>
-              <a:t>6. </a:t>
-            </a:r>
-            <a:r>
-              <a:rPr lang="zh-TW" altLang="en-US" b="1" dirty="0"/>
-              <a:t>專題簡報生成與結論 </a:t>
+              <a:t>5. Power BI </a:t>
+            </a:r>
+            <a:r>
+              <a:rPr lang="zh-TW" altLang="en-US" b="1" dirty="0"/>
+              <a:t>視覺化報表產出 </a:t>
             </a:r>
             <a:r>
               <a:rPr lang="en-US" altLang="zh-TW" b="1" dirty="0"/>
-              <a:t>(Final Presentation)</a:t>
-            </a:r>
-          </a:p>
-          <a:p>
-            <a:r>
-              <a:rPr lang="zh-TW" altLang="en-US" b="1" dirty="0"/>
-              <a:t>技術總結：</a:t>
-            </a:r>
-            <a:r>
-              <a:rPr lang="zh-TW" altLang="en-US" dirty="0"/>
-              <a:t> 說明 </a:t>
+              <a:t>(Visual Dashboard)</a:t>
+            </a:r>
+          </a:p>
+          <a:p>
+            <a:r>
+              <a:rPr lang="zh-TW" altLang="en-US" b="1" dirty="0"/>
+              <a:t>趨勢圖表：</a:t>
+            </a:r>
+            <a:r>
+              <a:rPr lang="zh-TW" altLang="en-US" dirty="0"/>
+              <a:t> 繪製動態堆疊面積圖，展現 </a:t>
             </a:r>
             <a:r>
               <a:rPr lang="en-US" altLang="zh-TW" dirty="0"/>
-              <a:t>ETL </a:t>
-            </a:r>
-            <a:r>
-              <a:rPr lang="zh-TW" altLang="en-US" dirty="0"/>
-              <a:t>處理過程與資料嚴謹度。</a:t>
-            </a:r>
-          </a:p>
-          <a:p>
-            <a:r>
-              <a:rPr lang="zh-TW" altLang="en-US" b="1" dirty="0"/>
-              <a:t>關鍵洞察：</a:t>
-            </a:r>
-            <a:r>
-              <a:rPr lang="zh-TW" altLang="en-US" dirty="0"/>
-              <a:t> 總結自用發電設備如何引領能源轉型。</a:t>
-            </a:r>
-          </a:p>
-          <a:p>
-            <a:r>
-              <a:rPr lang="zh-TW" altLang="en-US" b="1" dirty="0"/>
-              <a:t>策略建議：</a:t>
-            </a:r>
-            <a:r>
-              <a:rPr lang="zh-TW" altLang="en-US" dirty="0"/>
-              <a:t> 根據數據預測 </a:t>
+              <a:t>20 </a:t>
+            </a:r>
+            <a:r>
+              <a:rPr lang="zh-TW" altLang="en-US" dirty="0"/>
+              <a:t>年結構變遷。</a:t>
+            </a:r>
+          </a:p>
+          <a:p>
+            <a:r>
+              <a:rPr lang="zh-TW" altLang="en-US" b="1" dirty="0"/>
+              <a:t>核心指標 </a:t>
+            </a:r>
+            <a:r>
+              <a:rPr lang="en-US" altLang="zh-TW" b="1" dirty="0"/>
+              <a:t>(KPI)</a:t>
+            </a:r>
+            <a:r>
+              <a:rPr lang="zh-TW" altLang="en-US" b="1" dirty="0"/>
+              <a:t>：</a:t>
+            </a:r>
+            <a:r>
+              <a:rPr lang="zh-TW" altLang="en-US" dirty="0"/>
+              <a:t> 建立動態量值卡片，即時顯示當前潔淨能源佔比。</a:t>
+            </a:r>
+          </a:p>
+          <a:p>
+            <a:r>
+              <a:rPr lang="zh-TW" altLang="en-US" b="1" dirty="0"/>
+              <a:t>互動設計：</a:t>
+            </a:r>
+            <a:r>
+              <a:rPr lang="zh-TW" altLang="en-US" dirty="0"/>
+              <a:t> 設置時間與主體切片器 </a:t>
             </a:r>
             <a:r>
               <a:rPr lang="en-US" altLang="zh-TW" dirty="0"/>
-              <a:t>2026 </a:t>
-            </a:r>
-            <a:r>
-              <a:rPr lang="zh-TW" altLang="en-US" dirty="0"/>
-              <a:t>年後台灣能源配比的挑戰。</a:t>
+              <a:t>(Slicer)</a:t>
+            </a:r>
+            <a:r>
+              <a:rPr lang="zh-TW" altLang="en-US" dirty="0"/>
+              <a:t>，支持「下鑽式」探索。</a:t>
             </a:r>
           </a:p>
           <a:p>
@@ -4227,7 +4171,7 @@
     </p:spTree>
     <p:extLst>
       <p:ext uri="{BB962C8B-B14F-4D97-AF65-F5344CB8AC3E}">
-        <p14:creationId xmlns:p14="http://schemas.microsoft.com/office/powerpoint/2010/main" val="3236247884"/>
+        <p14:creationId xmlns:p14="http://schemas.microsoft.com/office/powerpoint/2010/main" val="2226702609"/>
       </p:ext>
     </p:extLst>
   </p:cSld>
@@ -4259,7 +4203,7 @@
           <p:cNvPr id="2" name="標題 1">
             <a:extLst>
               <a:ext uri="{FF2B5EF4-FFF2-40B4-BE49-F238E27FC236}">
-                <a16:creationId xmlns:a16="http://schemas.microsoft.com/office/drawing/2014/main" id="{DE433224-B4C8-50D2-0AD6-C468ADA62B8E}"/>
+                <a16:creationId xmlns:a16="http://schemas.microsoft.com/office/drawing/2014/main" id="{9D24B10B-341A-DB2B-6121-2E6909E8CC98}"/>
               </a:ext>
             </a:extLst>
           </p:cNvPr>
@@ -4284,7 +4228,7 @@
           <p:cNvPr id="3" name="內容版面配置區 2">
             <a:extLst>
               <a:ext uri="{FF2B5EF4-FFF2-40B4-BE49-F238E27FC236}">
-                <a16:creationId xmlns:a16="http://schemas.microsoft.com/office/drawing/2014/main" id="{9E330D6F-1852-2386-A8C5-C7CAC62384CF}"/>
+                <a16:creationId xmlns:a16="http://schemas.microsoft.com/office/drawing/2014/main" id="{0523407A-2F3A-C50B-3F64-91A8D5F85E66}"/>
               </a:ext>
             </a:extLst>
           </p:cNvPr>
@@ -4297,157 +4241,67 @@
         </p:nvSpPr>
         <p:spPr/>
         <p:txBody>
-          <a:bodyPr>
-            <a:normAutofit lnSpcReduction="10000"/>
-          </a:bodyPr>
+          <a:bodyPr/>
           <a:lstStyle/>
           <a:p>
             <a:r>
-              <a:rPr lang="zh-TW" altLang="en-US" b="1" dirty="0"/>
-              <a:t>你的下一步建議</a:t>
-            </a:r>
-          </a:p>
-          <a:p>
-            <a:r>
-              <a:rPr lang="zh-TW" altLang="en-US" dirty="0"/>
-              <a:t>既然你已經完成了 </a:t>
-            </a:r>
-            <a:r>
               <a:rPr lang="en-US" altLang="zh-TW" b="1" dirty="0"/>
-              <a:t>1 </a:t>
-            </a:r>
-            <a:r>
-              <a:rPr lang="zh-TW" altLang="en-US" b="1" dirty="0"/>
-              <a:t>到 </a:t>
+              <a:t>6. </a:t>
+            </a:r>
+            <a:r>
+              <a:rPr lang="zh-TW" altLang="en-US" b="1" dirty="0"/>
+              <a:t>專題簡報生成與結論 </a:t>
             </a:r>
             <a:r>
               <a:rPr lang="en-US" altLang="zh-TW" b="1" dirty="0"/>
-              <a:t>3 </a:t>
-            </a:r>
-            <a:r>
-              <a:rPr lang="zh-TW" altLang="en-US" b="1" dirty="0"/>
-              <a:t>步 </a:t>
-            </a:r>
-            <a:r>
-              <a:rPr lang="en-US" altLang="zh-TW" b="1" dirty="0"/>
-              <a:t>(ETL)</a:t>
-            </a:r>
-            <a:r>
-              <a:rPr lang="zh-TW" altLang="en-US" dirty="0"/>
-              <a:t>，現在進入 </a:t>
-            </a:r>
-            <a:r>
-              <a:rPr lang="zh-TW" altLang="en-US" b="1" dirty="0"/>
-              <a:t>第 </a:t>
-            </a:r>
-            <a:r>
-              <a:rPr lang="en-US" altLang="zh-TW" b="1" dirty="0"/>
-              <a:t>4 </a:t>
-            </a:r>
-            <a:r>
-              <a:rPr lang="zh-TW" altLang="en-US" b="1" dirty="0"/>
-              <a:t>步 </a:t>
-            </a:r>
-            <a:r>
-              <a:rPr lang="en-US" altLang="zh-TW" b="1" dirty="0"/>
-              <a:t>(</a:t>
-            </a:r>
-            <a:r>
-              <a:rPr lang="zh-TW" altLang="en-US" b="1" dirty="0"/>
-              <a:t>資料分析</a:t>
-            </a:r>
-            <a:r>
-              <a:rPr lang="en-US" altLang="zh-TW" b="1" dirty="0"/>
-              <a:t>)</a:t>
-            </a:r>
-            <a:r>
-              <a:rPr lang="zh-TW" altLang="en-US" dirty="0"/>
-              <a:t> 時，你可以試著在 </a:t>
+              <a:t>(Final Presentation)</a:t>
+            </a:r>
+          </a:p>
+          <a:p>
+            <a:r>
+              <a:rPr lang="zh-TW" altLang="en-US" b="1" dirty="0"/>
+              <a:t>技術總結：</a:t>
+            </a:r>
+            <a:r>
+              <a:rPr lang="zh-TW" altLang="en-US" dirty="0"/>
+              <a:t> 說明 </a:t>
             </a:r>
             <a:r>
               <a:rPr lang="en-US" altLang="zh-TW" dirty="0"/>
-              <a:t>Power BI </a:t>
-            </a:r>
-            <a:r>
-              <a:rPr lang="zh-TW" altLang="en-US" dirty="0"/>
-              <a:t>裡找出這一個答案：</a:t>
-            </a:r>
-          </a:p>
-          <a:p>
-            <a:r>
-              <a:rPr lang="zh-TW" altLang="en-US" b="1" dirty="0"/>
-              <a:t>「在哪一個月份，自用發電設備的</a:t>
-            </a:r>
-            <a:r>
-              <a:rPr lang="en-US" altLang="zh-TW" b="1" dirty="0"/>
-              <a:t>『</a:t>
-            </a:r>
-            <a:r>
-              <a:rPr lang="zh-TW" altLang="en-US" b="1" dirty="0"/>
-              <a:t>太陽光電</a:t>
-            </a:r>
-            <a:r>
-              <a:rPr lang="en-US" altLang="zh-TW" b="1" dirty="0"/>
-              <a:t>』</a:t>
-            </a:r>
-            <a:r>
-              <a:rPr lang="zh-TW" altLang="en-US" b="1" dirty="0"/>
-              <a:t>發電量，第一次超越了台電自身的</a:t>
-            </a:r>
-            <a:r>
-              <a:rPr lang="en-US" altLang="zh-TW" b="1" dirty="0"/>
-              <a:t>『</a:t>
-            </a:r>
-            <a:r>
-              <a:rPr lang="zh-TW" altLang="en-US" b="1" dirty="0"/>
-              <a:t>太陽光電</a:t>
-            </a:r>
-            <a:r>
-              <a:rPr lang="en-US" altLang="zh-TW" b="1" dirty="0"/>
-              <a:t>』</a:t>
-            </a:r>
-            <a:r>
-              <a:rPr lang="zh-TW" altLang="en-US" b="1" dirty="0"/>
-              <a:t>發電量？」</a:t>
-            </a:r>
-            <a:endParaRPr lang="zh-TW" altLang="en-US" dirty="0"/>
-          </a:p>
-          <a:p>
-            <a:r>
-              <a:rPr lang="zh-TW" altLang="en-US" dirty="0"/>
-              <a:t>這會是你簡報中最酷、最有力的一張投影片，因為它直接證明了「能源民主化」的進程。</a:t>
-            </a:r>
-          </a:p>
-          <a:p>
-            <a:r>
-              <a:rPr lang="zh-TW" altLang="en-US" b="1" dirty="0"/>
-              <a:t>需要我幫你把這份 </a:t>
-            </a:r>
-            <a:r>
-              <a:rPr lang="en-US" altLang="zh-TW" b="1" dirty="0"/>
-              <a:t>Agenda </a:t>
-            </a:r>
-            <a:r>
-              <a:rPr lang="zh-TW" altLang="en-US" b="1" dirty="0"/>
-              <a:t>轉換成一份 </a:t>
-            </a:r>
-            <a:r>
-              <a:rPr lang="en-US" altLang="zh-TW" b="1" dirty="0"/>
-              <a:t>PPT </a:t>
-            </a:r>
-            <a:r>
-              <a:rPr lang="zh-TW" altLang="en-US" b="1" dirty="0"/>
-              <a:t>用的「專案時程圖 </a:t>
-            </a:r>
-            <a:r>
-              <a:rPr lang="en-US" altLang="zh-TW" b="1" dirty="0"/>
-              <a:t>(Gantt Chart)</a:t>
-            </a:r>
-            <a:r>
-              <a:rPr lang="zh-TW" altLang="en-US" b="1" dirty="0"/>
-              <a:t>」描述，或是幫你寫出簡報開場的第一張投影片內容嗎？</a:t>
-            </a:r>
-            <a:endParaRPr lang="zh-TW" altLang="en-US" dirty="0"/>
+              <a:t>ETL </a:t>
+            </a:r>
+            <a:r>
+              <a:rPr lang="zh-TW" altLang="en-US" dirty="0"/>
+              <a:t>處理過程與資料嚴謹度。</a:t>
+            </a:r>
+          </a:p>
+          <a:p>
+            <a:r>
+              <a:rPr lang="zh-TW" altLang="en-US" b="1" dirty="0"/>
+              <a:t>關鍵洞察：</a:t>
+            </a:r>
+            <a:r>
+              <a:rPr lang="zh-TW" altLang="en-US" dirty="0"/>
+              <a:t> 總結自用發電設備如何引領能源轉型。</a:t>
+            </a:r>
+          </a:p>
+          <a:p>
+            <a:r>
+              <a:rPr lang="zh-TW" altLang="en-US" b="1" dirty="0"/>
+              <a:t>策略建議：</a:t>
+            </a:r>
+            <a:r>
+              <a:rPr lang="zh-TW" altLang="en-US" dirty="0"/>
+              <a:t> 根據數據預測 </a:t>
+            </a:r>
+            <a:r>
+              <a:rPr lang="en-US" altLang="zh-TW" dirty="0"/>
+              <a:t>2026 </a:t>
+            </a:r>
+            <a:r>
+              <a:rPr lang="zh-TW" altLang="en-US" dirty="0"/>
+              <a:t>年後台灣能源配比的挑戰。</a:t>
+            </a:r>
           </a:p>
           <a:p>
             <a:endParaRPr lang="zh-TW" altLang="en-US" dirty="0"/>
@@ -4457,7 +4311,7 @@
     </p:spTree>
     <p:extLst>
       <p:ext uri="{BB962C8B-B14F-4D97-AF65-F5344CB8AC3E}">
-        <p14:creationId xmlns:p14="http://schemas.microsoft.com/office/powerpoint/2010/main" val="1148426050"/>
+        <p14:creationId xmlns:p14="http://schemas.microsoft.com/office/powerpoint/2010/main" val="3236247884"/>
       </p:ext>
     </p:extLst>
   </p:cSld>
@@ -4489,7 +4343,7 @@
           <p:cNvPr id="2" name="標題 1">
             <a:extLst>
               <a:ext uri="{FF2B5EF4-FFF2-40B4-BE49-F238E27FC236}">
-                <a16:creationId xmlns:a16="http://schemas.microsoft.com/office/drawing/2014/main" id="{A82E70D9-A2F5-4DD7-6774-FDF0B13B48AE}"/>
+                <a16:creationId xmlns:a16="http://schemas.microsoft.com/office/drawing/2014/main" id="{DE433224-B4C8-50D2-0AD6-C468ADA62B8E}"/>
               </a:ext>
             </a:extLst>
           </p:cNvPr>
@@ -4505,175 +4359,179 @@
           <a:bodyPr/>
           <a:lstStyle/>
           <a:p>
-            <a:r>
-              <a:rPr lang="zh-TW" altLang="en-US" dirty="0"/>
-              <a:t>專題資料處理技術報告 </a:t>
+            <a:endParaRPr lang="zh-TW" altLang="en-US"/>
+          </a:p>
+        </p:txBody>
+      </p:sp>
+      <p:sp>
+        <p:nvSpPr>
+          <p:cNvPr id="3" name="內容版面配置區 2">
+            <a:extLst>
+              <a:ext uri="{FF2B5EF4-FFF2-40B4-BE49-F238E27FC236}">
+                <a16:creationId xmlns:a16="http://schemas.microsoft.com/office/drawing/2014/main" id="{9E330D6F-1852-2386-A8C5-C7CAC62384CF}"/>
+              </a:ext>
+            </a:extLst>
+          </p:cNvPr>
+          <p:cNvSpPr>
+            <a:spLocks noGrp="1"/>
+          </p:cNvSpPr>
+          <p:nvPr>
+            <p:ph idx="1"/>
+          </p:nvPr>
+        </p:nvSpPr>
+        <p:spPr/>
+        <p:txBody>
+          <a:bodyPr>
+            <a:normAutofit lnSpcReduction="10000"/>
+          </a:bodyPr>
+          <a:lstStyle/>
+          <a:p>
+            <a:r>
+              <a:rPr lang="zh-TW" altLang="en-US" b="1" dirty="0"/>
+              <a:t>你的下一步建議</a:t>
+            </a:r>
+          </a:p>
+          <a:p>
+            <a:r>
+              <a:rPr lang="zh-TW" altLang="en-US" dirty="0"/>
+              <a:t>既然你已經完成了 </a:t>
+            </a:r>
+            <a:r>
+              <a:rPr lang="en-US" altLang="zh-TW" b="1" dirty="0"/>
+              <a:t>1 </a:t>
+            </a:r>
+            <a:r>
+              <a:rPr lang="zh-TW" altLang="en-US" b="1" dirty="0"/>
+              <a:t>到 </a:t>
+            </a:r>
+            <a:r>
+              <a:rPr lang="en-US" altLang="zh-TW" b="1" dirty="0"/>
+              <a:t>3 </a:t>
+            </a:r>
+            <a:r>
+              <a:rPr lang="zh-TW" altLang="en-US" b="1" dirty="0"/>
+              <a:t>步 </a:t>
+            </a:r>
+            <a:r>
+              <a:rPr lang="en-US" altLang="zh-TW" b="1" dirty="0"/>
+              <a:t>(ETL)</a:t>
+            </a:r>
+            <a:r>
+              <a:rPr lang="zh-TW" altLang="en-US" dirty="0"/>
+              <a:t>，現在進入 </a:t>
+            </a:r>
+            <a:r>
+              <a:rPr lang="zh-TW" altLang="en-US" b="1" dirty="0"/>
+              <a:t>第 </a:t>
+            </a:r>
+            <a:r>
+              <a:rPr lang="en-US" altLang="zh-TW" b="1" dirty="0"/>
+              <a:t>4 </a:t>
+            </a:r>
+            <a:r>
+              <a:rPr lang="zh-TW" altLang="en-US" b="1" dirty="0"/>
+              <a:t>步 </a:t>
+            </a:r>
+            <a:r>
+              <a:rPr lang="en-US" altLang="zh-TW" b="1" dirty="0"/>
+              <a:t>(</a:t>
+            </a:r>
+            <a:r>
+              <a:rPr lang="zh-TW" altLang="en-US" b="1" dirty="0"/>
+              <a:t>資料分析</a:t>
+            </a:r>
+            <a:r>
+              <a:rPr lang="en-US" altLang="zh-TW" b="1" dirty="0"/>
+              <a:t>)</a:t>
+            </a:r>
+            <a:r>
+              <a:rPr lang="zh-TW" altLang="en-US" dirty="0"/>
+              <a:t> 時，你可以試著在 </a:t>
             </a:r>
             <a:r>
               <a:rPr lang="en-US" altLang="zh-TW" dirty="0"/>
-              <a:t>(ETL Summary)</a:t>
+              <a:t>Power BI </a:t>
+            </a:r>
+            <a:r>
+              <a:rPr lang="zh-TW" altLang="en-US" dirty="0"/>
+              <a:t>裡找出這一個答案：</a:t>
+            </a:r>
+          </a:p>
+          <a:p>
+            <a:r>
+              <a:rPr lang="zh-TW" altLang="en-US" b="1" dirty="0"/>
+              <a:t>「在哪一個月份，自用發電設備的</a:t>
+            </a:r>
+            <a:r>
+              <a:rPr lang="en-US" altLang="zh-TW" b="1" dirty="0"/>
+              <a:t>『</a:t>
+            </a:r>
+            <a:r>
+              <a:rPr lang="zh-TW" altLang="en-US" b="1" dirty="0"/>
+              <a:t>太陽光電</a:t>
+            </a:r>
+            <a:r>
+              <a:rPr lang="en-US" altLang="zh-TW" b="1" dirty="0"/>
+              <a:t>』</a:t>
+            </a:r>
+            <a:r>
+              <a:rPr lang="zh-TW" altLang="en-US" b="1" dirty="0"/>
+              <a:t>發電量，第一次超越了台電自身的</a:t>
+            </a:r>
+            <a:r>
+              <a:rPr lang="en-US" altLang="zh-TW" b="1" dirty="0"/>
+              <a:t>『</a:t>
+            </a:r>
+            <a:r>
+              <a:rPr lang="zh-TW" altLang="en-US" b="1" dirty="0"/>
+              <a:t>太陽光電</a:t>
+            </a:r>
+            <a:r>
+              <a:rPr lang="en-US" altLang="zh-TW" b="1" dirty="0"/>
+              <a:t>』</a:t>
+            </a:r>
+            <a:r>
+              <a:rPr lang="zh-TW" altLang="en-US" b="1" dirty="0"/>
+              <a:t>發電量？」</a:t>
             </a:r>
             <a:endParaRPr lang="zh-TW" altLang="en-US" dirty="0"/>
           </a:p>
-        </p:txBody>
-      </p:sp>
-      <p:sp>
-        <p:nvSpPr>
-          <p:cNvPr id="3" name="內容版面配置區 2">
-            <a:extLst>
-              <a:ext uri="{FF2B5EF4-FFF2-40B4-BE49-F238E27FC236}">
-                <a16:creationId xmlns:a16="http://schemas.microsoft.com/office/drawing/2014/main" id="{90BA0607-B15B-CA87-7EC6-ECF75025110D}"/>
-              </a:ext>
-            </a:extLst>
-          </p:cNvPr>
-          <p:cNvSpPr>
-            <a:spLocks noGrp="1"/>
-          </p:cNvSpPr>
-          <p:nvPr>
-            <p:ph idx="1"/>
-          </p:nvPr>
-        </p:nvSpPr>
-        <p:spPr/>
-        <p:txBody>
-          <a:bodyPr/>
-          <a:lstStyle/>
-          <a:p>
-            <a:r>
-              <a:rPr lang="zh-TW" altLang="en-US" b="1" dirty="0"/>
-              <a:t>原始資料來源與挑戰</a:t>
-            </a:r>
-          </a:p>
-          <a:p>
-            <a:r>
-              <a:rPr lang="zh-TW" altLang="en-US" b="1" dirty="0"/>
-              <a:t>資料範疇：</a:t>
-            </a:r>
-            <a:r>
-              <a:rPr lang="zh-TW" altLang="en-US" dirty="0"/>
-              <a:t> </a:t>
-            </a:r>
-            <a:r>
-              <a:rPr lang="en-US" altLang="zh-TW" dirty="0"/>
-              <a:t>2007 </a:t>
-            </a:r>
-            <a:r>
-              <a:rPr lang="zh-TW" altLang="en-US" dirty="0"/>
-              <a:t>年至 </a:t>
-            </a:r>
-            <a:r>
-              <a:rPr lang="en-US" altLang="zh-TW" dirty="0"/>
-              <a:t>2026 </a:t>
-            </a:r>
-            <a:r>
-              <a:rPr lang="zh-TW" altLang="en-US" dirty="0"/>
-              <a:t>年台灣逐月發電量數據。</a:t>
-            </a:r>
-          </a:p>
-          <a:p>
-            <a:r>
-              <a:rPr lang="zh-TW" altLang="en-US" b="1" dirty="0"/>
-              <a:t>原始格式：</a:t>
-            </a:r>
-            <a:r>
-              <a:rPr lang="zh-TW" altLang="en-US" dirty="0"/>
-              <a:t> 典型「寬表 </a:t>
-            </a:r>
-            <a:r>
-              <a:rPr lang="en-US" altLang="zh-TW" dirty="0"/>
-              <a:t>(Wide Table)</a:t>
-            </a:r>
-            <a:r>
-              <a:rPr lang="zh-TW" altLang="en-US" dirty="0"/>
-              <a:t>」，包含超過 </a:t>
-            </a:r>
-            <a:r>
-              <a:rPr lang="en-US" altLang="zh-TW" dirty="0"/>
-              <a:t>50 </a:t>
-            </a:r>
-            <a:r>
-              <a:rPr lang="zh-TW" altLang="en-US" dirty="0"/>
-              <a:t>個欄位（如：再生能源</a:t>
-            </a:r>
-            <a:r>
-              <a:rPr lang="en-US" altLang="zh-TW" dirty="0"/>
-              <a:t>_</a:t>
-            </a:r>
-            <a:r>
-              <a:rPr lang="zh-TW" altLang="en-US" dirty="0"/>
-              <a:t>太陽光電</a:t>
-            </a:r>
-            <a:r>
-              <a:rPr lang="en-US" altLang="zh-TW" dirty="0"/>
-              <a:t>_</a:t>
-            </a:r>
-            <a:r>
-              <a:rPr lang="zh-TW" altLang="en-US" dirty="0"/>
-              <a:t>台電）。</a:t>
-            </a:r>
-          </a:p>
-          <a:p>
-            <a:r>
-              <a:rPr lang="zh-TW" altLang="en-US" b="1" dirty="0"/>
-              <a:t>面臨挑戰：</a:t>
-            </a:r>
-            <a:r>
-              <a:rPr lang="zh-TW" altLang="en-US" dirty="0"/>
-              <a:t> * </a:t>
-            </a:r>
-            <a:r>
-              <a:rPr lang="zh-TW" altLang="en-US" b="1" dirty="0"/>
-              <a:t>維度混雜：</a:t>
-            </a:r>
-            <a:r>
-              <a:rPr lang="zh-TW" altLang="en-US" dirty="0"/>
-              <a:t> 經營主體、能源類別、發電細項全擠在欄位名稱中，無法直接進行類別分析。</a:t>
-            </a:r>
-          </a:p>
-          <a:p>
-            <a:pPr lvl="1"/>
-            <a:r>
-              <a:rPr lang="zh-TW" altLang="en-US" b="1" dirty="0"/>
-              <a:t>資料冗餘：</a:t>
-            </a:r>
-            <a:r>
-              <a:rPr lang="zh-TW" altLang="en-US" dirty="0"/>
-              <a:t> 包含「全國總量」與「分項數據」，直接運算會造成重複計算。</a:t>
-            </a:r>
-          </a:p>
-          <a:p>
-            <a:pPr lvl="1"/>
-            <a:r>
-              <a:rPr lang="zh-TW" altLang="en-US" b="1" dirty="0"/>
-              <a:t>命名雜訊：</a:t>
-            </a:r>
-            <a:r>
-              <a:rPr lang="zh-TW" altLang="en-US" dirty="0"/>
-              <a:t> 欄位帶有 </a:t>
-            </a:r>
-            <a:r>
-              <a:rPr lang="en-US" altLang="zh-TW" dirty="0"/>
-              <a:t>(</a:t>
-            </a:r>
-            <a:r>
-              <a:rPr lang="zh-TW" altLang="en-US" dirty="0"/>
-              <a:t>數值</a:t>
-            </a:r>
-            <a:r>
-              <a:rPr lang="en-US" altLang="zh-TW" dirty="0"/>
-              <a:t>)</a:t>
-            </a:r>
-            <a:r>
-              <a:rPr lang="zh-TW" altLang="en-US" dirty="0"/>
-              <a:t> 或 </a:t>
-            </a:r>
-            <a:r>
-              <a:rPr lang="en-US" altLang="zh-TW" dirty="0"/>
-              <a:t>_</a:t>
-            </a:r>
-            <a:r>
-              <a:rPr lang="zh-TW" altLang="en-US" dirty="0"/>
-              <a:t>全國 等非結構化文字。</a:t>
-            </a:r>
+          <a:p>
+            <a:r>
+              <a:rPr lang="zh-TW" altLang="en-US" dirty="0"/>
+              <a:t>這會是你簡報中最酷、最有力的一張投影片，因為它直接證明了「能源民主化」的進程。</a:t>
+            </a:r>
+          </a:p>
+          <a:p>
+            <a:r>
+              <a:rPr lang="zh-TW" altLang="en-US" b="1" dirty="0"/>
+              <a:t>需要我幫你把這份 </a:t>
+            </a:r>
+            <a:r>
+              <a:rPr lang="en-US" altLang="zh-TW" b="1" dirty="0"/>
+              <a:t>Agenda </a:t>
+            </a:r>
+            <a:r>
+              <a:rPr lang="zh-TW" altLang="en-US" b="1" dirty="0"/>
+              <a:t>轉換成一份 </a:t>
+            </a:r>
+            <a:r>
+              <a:rPr lang="en-US" altLang="zh-TW" b="1" dirty="0"/>
+              <a:t>PPT </a:t>
+            </a:r>
+            <a:r>
+              <a:rPr lang="zh-TW" altLang="en-US" b="1" dirty="0"/>
+              <a:t>用的「專案時程圖 </a:t>
+            </a:r>
+            <a:r>
+              <a:rPr lang="en-US" altLang="zh-TW" b="1" dirty="0"/>
+              <a:t>(Gantt Chart)</a:t>
+            </a:r>
+            <a:r>
+              <a:rPr lang="zh-TW" altLang="en-US" b="1" dirty="0"/>
+              <a:t>」描述，或是幫你寫出簡報開場的第一張投影片內容嗎？</a:t>
+            </a:r>
+            <a:endParaRPr lang="zh-TW" altLang="en-US" dirty="0"/>
           </a:p>
           <a:p>
             <a:endParaRPr lang="zh-TW" altLang="en-US" dirty="0"/>
@@ -4683,7 +4541,7 @@
     </p:spTree>
     <p:extLst>
       <p:ext uri="{BB962C8B-B14F-4D97-AF65-F5344CB8AC3E}">
-        <p14:creationId xmlns:p14="http://schemas.microsoft.com/office/powerpoint/2010/main" val="1119287776"/>
+        <p14:creationId xmlns:p14="http://schemas.microsoft.com/office/powerpoint/2010/main" val="1148426050"/>
       </p:ext>
     </p:extLst>
   </p:cSld>
@@ -4715,6 +4573,232 @@
           <p:cNvPr id="2" name="標題 1">
             <a:extLst>
               <a:ext uri="{FF2B5EF4-FFF2-40B4-BE49-F238E27FC236}">
+                <a16:creationId xmlns:a16="http://schemas.microsoft.com/office/drawing/2014/main" id="{A82E70D9-A2F5-4DD7-6774-FDF0B13B48AE}"/>
+              </a:ext>
+            </a:extLst>
+          </p:cNvPr>
+          <p:cNvSpPr>
+            <a:spLocks noGrp="1"/>
+          </p:cNvSpPr>
+          <p:nvPr>
+            <p:ph type="title"/>
+          </p:nvPr>
+        </p:nvSpPr>
+        <p:spPr/>
+        <p:txBody>
+          <a:bodyPr/>
+          <a:lstStyle/>
+          <a:p>
+            <a:r>
+              <a:rPr lang="zh-TW" altLang="en-US" dirty="0"/>
+              <a:t>專題資料處理技術報告 </a:t>
+            </a:r>
+            <a:r>
+              <a:rPr lang="en-US" altLang="zh-TW" dirty="0"/>
+              <a:t>(ETL Summary)</a:t>
+            </a:r>
+            <a:endParaRPr lang="zh-TW" altLang="en-US" dirty="0"/>
+          </a:p>
+        </p:txBody>
+      </p:sp>
+      <p:sp>
+        <p:nvSpPr>
+          <p:cNvPr id="3" name="內容版面配置區 2">
+            <a:extLst>
+              <a:ext uri="{FF2B5EF4-FFF2-40B4-BE49-F238E27FC236}">
+                <a16:creationId xmlns:a16="http://schemas.microsoft.com/office/drawing/2014/main" id="{90BA0607-B15B-CA87-7EC6-ECF75025110D}"/>
+              </a:ext>
+            </a:extLst>
+          </p:cNvPr>
+          <p:cNvSpPr>
+            <a:spLocks noGrp="1"/>
+          </p:cNvSpPr>
+          <p:nvPr>
+            <p:ph idx="1"/>
+          </p:nvPr>
+        </p:nvSpPr>
+        <p:spPr/>
+        <p:txBody>
+          <a:bodyPr/>
+          <a:lstStyle/>
+          <a:p>
+            <a:r>
+              <a:rPr lang="zh-TW" altLang="en-US" b="1" dirty="0"/>
+              <a:t>原始資料來源與挑戰</a:t>
+            </a:r>
+          </a:p>
+          <a:p>
+            <a:r>
+              <a:rPr lang="zh-TW" altLang="en-US" b="1" dirty="0"/>
+              <a:t>資料範疇：</a:t>
+            </a:r>
+            <a:r>
+              <a:rPr lang="zh-TW" altLang="en-US" dirty="0"/>
+              <a:t> </a:t>
+            </a:r>
+            <a:r>
+              <a:rPr lang="en-US" altLang="zh-TW" dirty="0"/>
+              <a:t>2007 </a:t>
+            </a:r>
+            <a:r>
+              <a:rPr lang="zh-TW" altLang="en-US" dirty="0"/>
+              <a:t>年至 </a:t>
+            </a:r>
+            <a:r>
+              <a:rPr lang="en-US" altLang="zh-TW" dirty="0"/>
+              <a:t>2026 </a:t>
+            </a:r>
+            <a:r>
+              <a:rPr lang="zh-TW" altLang="en-US" dirty="0"/>
+              <a:t>年台灣逐月發電量數據。</a:t>
+            </a:r>
+          </a:p>
+          <a:p>
+            <a:r>
+              <a:rPr lang="zh-TW" altLang="en-US" b="1" dirty="0"/>
+              <a:t>原始格式：</a:t>
+            </a:r>
+            <a:r>
+              <a:rPr lang="zh-TW" altLang="en-US" dirty="0"/>
+              <a:t> 典型「寬表 </a:t>
+            </a:r>
+            <a:r>
+              <a:rPr lang="en-US" altLang="zh-TW" dirty="0"/>
+              <a:t>(Wide Table)</a:t>
+            </a:r>
+            <a:r>
+              <a:rPr lang="zh-TW" altLang="en-US" dirty="0"/>
+              <a:t>」，包含超過 </a:t>
+            </a:r>
+            <a:r>
+              <a:rPr lang="en-US" altLang="zh-TW" dirty="0"/>
+              <a:t>50 </a:t>
+            </a:r>
+            <a:r>
+              <a:rPr lang="zh-TW" altLang="en-US" dirty="0"/>
+              <a:t>個欄位（如：再生能源</a:t>
+            </a:r>
+            <a:r>
+              <a:rPr lang="en-US" altLang="zh-TW" dirty="0"/>
+              <a:t>_</a:t>
+            </a:r>
+            <a:r>
+              <a:rPr lang="zh-TW" altLang="en-US" dirty="0"/>
+              <a:t>太陽光電</a:t>
+            </a:r>
+            <a:r>
+              <a:rPr lang="en-US" altLang="zh-TW" dirty="0"/>
+              <a:t>_</a:t>
+            </a:r>
+            <a:r>
+              <a:rPr lang="zh-TW" altLang="en-US" dirty="0"/>
+              <a:t>台電）。</a:t>
+            </a:r>
+          </a:p>
+          <a:p>
+            <a:r>
+              <a:rPr lang="zh-TW" altLang="en-US" b="1" dirty="0"/>
+              <a:t>面臨挑戰：</a:t>
+            </a:r>
+            <a:r>
+              <a:rPr lang="zh-TW" altLang="en-US" dirty="0"/>
+              <a:t> * </a:t>
+            </a:r>
+            <a:r>
+              <a:rPr lang="zh-TW" altLang="en-US" b="1" dirty="0"/>
+              <a:t>維度混雜：</a:t>
+            </a:r>
+            <a:r>
+              <a:rPr lang="zh-TW" altLang="en-US" dirty="0"/>
+              <a:t> 經營主體、能源類別、發電細項全擠在欄位名稱中，無法直接進行類別分析。</a:t>
+            </a:r>
+          </a:p>
+          <a:p>
+            <a:pPr lvl="1"/>
+            <a:r>
+              <a:rPr lang="zh-TW" altLang="en-US" b="1" dirty="0"/>
+              <a:t>資料冗餘：</a:t>
+            </a:r>
+            <a:r>
+              <a:rPr lang="zh-TW" altLang="en-US" dirty="0"/>
+              <a:t> 包含「全國總量」與「分項數據」，直接運算會造成重複計算。</a:t>
+            </a:r>
+          </a:p>
+          <a:p>
+            <a:pPr lvl="1"/>
+            <a:r>
+              <a:rPr lang="zh-TW" altLang="en-US" b="1" dirty="0"/>
+              <a:t>命名雜訊：</a:t>
+            </a:r>
+            <a:r>
+              <a:rPr lang="zh-TW" altLang="en-US" dirty="0"/>
+              <a:t> 欄位帶有 </a:t>
+            </a:r>
+            <a:r>
+              <a:rPr lang="en-US" altLang="zh-TW" dirty="0"/>
+              <a:t>(</a:t>
+            </a:r>
+            <a:r>
+              <a:rPr lang="zh-TW" altLang="en-US" dirty="0"/>
+              <a:t>數值</a:t>
+            </a:r>
+            <a:r>
+              <a:rPr lang="en-US" altLang="zh-TW" dirty="0"/>
+              <a:t>)</a:t>
+            </a:r>
+            <a:r>
+              <a:rPr lang="zh-TW" altLang="en-US" dirty="0"/>
+              <a:t> 或 </a:t>
+            </a:r>
+            <a:r>
+              <a:rPr lang="en-US" altLang="zh-TW" dirty="0"/>
+              <a:t>_</a:t>
+            </a:r>
+            <a:r>
+              <a:rPr lang="zh-TW" altLang="en-US" dirty="0"/>
+              <a:t>全國 等非結構化文字。</a:t>
+            </a:r>
+          </a:p>
+          <a:p>
+            <a:endParaRPr lang="zh-TW" altLang="en-US" dirty="0"/>
+          </a:p>
+        </p:txBody>
+      </p:sp>
+    </p:spTree>
+    <p:extLst>
+      <p:ext uri="{BB962C8B-B14F-4D97-AF65-F5344CB8AC3E}">
+        <p14:creationId xmlns:p14="http://schemas.microsoft.com/office/powerpoint/2010/main" val="1119287776"/>
+      </p:ext>
+    </p:extLst>
+  </p:cSld>
+  <p:clrMapOvr>
+    <a:masterClrMapping/>
+  </p:clrMapOvr>
+</p:sld>
+</file>
+
+<file path=ppt/slides/slide17.xml><?xml version="1.0" encoding="utf-8"?>
+<p:sld xmlns:a="http://schemas.openxmlformats.org/drawingml/2006/main" xmlns:r="http://schemas.openxmlformats.org/officeDocument/2006/relationships" xmlns:p="http://schemas.openxmlformats.org/presentationml/2006/main">
+  <p:cSld>
+    <p:spTree>
+      <p:nvGrpSpPr>
+        <p:cNvPr id="1" name=""/>
+        <p:cNvGrpSpPr/>
+        <p:nvPr/>
+      </p:nvGrpSpPr>
+      <p:grpSpPr>
+        <a:xfrm>
+          <a:off x="0" y="0"/>
+          <a:ext cx="0" cy="0"/>
+          <a:chOff x="0" y="0"/>
+          <a:chExt cx="0" cy="0"/>
+        </a:xfrm>
+      </p:grpSpPr>
+      <p:sp>
+        <p:nvSpPr>
+          <p:cNvPr id="2" name="標題 1">
+            <a:extLst>
+              <a:ext uri="{FF2B5EF4-FFF2-40B4-BE49-F238E27FC236}">
                 <a16:creationId xmlns:a16="http://schemas.microsoft.com/office/drawing/2014/main" id="{F3C46CB4-108E-A652-0C0E-D00F2D90AA4A}"/>
               </a:ext>
             </a:extLst>
@@ -5006,7 +5090,7 @@
 </p:sld>
 </file>
 
-<file path=ppt/slides/slide17.xml><?xml version="1.0" encoding="utf-8"?>
+<file path=ppt/slides/slide18.xml><?xml version="1.0" encoding="utf-8"?>
 <p:sld xmlns:a="http://schemas.openxmlformats.org/drawingml/2006/main" xmlns:r="http://schemas.openxmlformats.org/officeDocument/2006/relationships" xmlns:p="http://schemas.openxmlformats.org/presentationml/2006/main">
   <p:cSld>
     <p:spTree>
@@ -5295,293 +5379,6 @@
 </p:sld>
 </file>
 
-<file path=ppt/slides/slide18.xml><?xml version="1.0" encoding="utf-8"?>
-<p:sld xmlns:a="http://schemas.openxmlformats.org/drawingml/2006/main" xmlns:r="http://schemas.openxmlformats.org/officeDocument/2006/relationships" xmlns:p="http://schemas.openxmlformats.org/presentationml/2006/main">
-  <p:cSld>
-    <p:spTree>
-      <p:nvGrpSpPr>
-        <p:cNvPr id="1" name=""/>
-        <p:cNvGrpSpPr/>
-        <p:nvPr/>
-      </p:nvGrpSpPr>
-      <p:grpSpPr>
-        <a:xfrm>
-          <a:off x="0" y="0"/>
-          <a:ext cx="0" cy="0"/>
-          <a:chOff x="0" y="0"/>
-          <a:chExt cx="0" cy="0"/>
-        </a:xfrm>
-      </p:grpSpPr>
-      <p:sp>
-        <p:nvSpPr>
-          <p:cNvPr id="2" name="標題 1">
-            <a:extLst>
-              <a:ext uri="{FF2B5EF4-FFF2-40B4-BE49-F238E27FC236}">
-                <a16:creationId xmlns:a16="http://schemas.microsoft.com/office/drawing/2014/main" id="{2DD9E8DE-6366-C9E2-2316-E298ADBC0203}"/>
-              </a:ext>
-            </a:extLst>
-          </p:cNvPr>
-          <p:cNvSpPr>
-            <a:spLocks noGrp="1"/>
-          </p:cNvSpPr>
-          <p:nvPr>
-            <p:ph type="title"/>
-          </p:nvPr>
-        </p:nvSpPr>
-        <p:spPr/>
-        <p:txBody>
-          <a:bodyPr/>
-          <a:lstStyle/>
-          <a:p>
-            <a:endParaRPr lang="zh-TW" altLang="en-US"/>
-          </a:p>
-        </p:txBody>
-      </p:sp>
-      <p:sp>
-        <p:nvSpPr>
-          <p:cNvPr id="3" name="內容版面配置區 2">
-            <a:extLst>
-              <a:ext uri="{FF2B5EF4-FFF2-40B4-BE49-F238E27FC236}">
-                <a16:creationId xmlns:a16="http://schemas.microsoft.com/office/drawing/2014/main" id="{E3D7B753-0588-CBC2-B10F-10F5DC3A4CB8}"/>
-              </a:ext>
-            </a:extLst>
-          </p:cNvPr>
-          <p:cNvSpPr>
-            <a:spLocks noGrp="1"/>
-          </p:cNvSpPr>
-          <p:nvPr>
-            <p:ph idx="1"/>
-          </p:nvPr>
-        </p:nvSpPr>
-        <p:spPr/>
-        <p:txBody>
-          <a:bodyPr>
-            <a:normAutofit fontScale="62500" lnSpcReduction="20000"/>
-          </a:bodyPr>
-          <a:lstStyle/>
-          <a:p>
-            <a:r>
-              <a:rPr lang="en-US" altLang="zh-TW" b="1" dirty="0"/>
-              <a:t>3. </a:t>
-            </a:r>
-            <a:r>
-              <a:rPr lang="zh-TW" altLang="en-US" b="1" dirty="0"/>
-              <a:t>資料建模與分析亮點 </a:t>
-            </a:r>
-            <a:r>
-              <a:rPr lang="en-US" altLang="zh-TW" b="1" dirty="0"/>
-              <a:t>(</a:t>
-            </a:r>
-            <a:r>
-              <a:rPr lang="zh-TW" altLang="en-US" b="1" dirty="0"/>
-              <a:t>簡報結論預告</a:t>
-            </a:r>
-            <a:r>
-              <a:rPr lang="en-US" altLang="zh-TW" b="1" dirty="0"/>
-              <a:t>)</a:t>
-            </a:r>
-          </a:p>
-          <a:p>
-            <a:r>
-              <a:rPr lang="zh-TW" altLang="en-US" dirty="0"/>
-              <a:t>透過上述處理，這份資料現在具備了支持以下兩大發現的能力：</a:t>
-            </a:r>
-          </a:p>
-          <a:p>
-            <a:r>
-              <a:rPr lang="zh-TW" altLang="en-US" b="1" dirty="0"/>
-              <a:t>結構交叉點 </a:t>
-            </a:r>
-            <a:r>
-              <a:rPr lang="en-US" altLang="zh-TW" b="1" dirty="0"/>
-              <a:t>(</a:t>
-            </a:r>
-            <a:r>
-              <a:rPr lang="zh-TW" altLang="en-US" b="1" dirty="0"/>
-              <a:t>方向四</a:t>
-            </a:r>
-            <a:r>
-              <a:rPr lang="en-US" altLang="zh-TW" b="1" dirty="0"/>
-              <a:t>)</a:t>
-            </a:r>
-            <a:r>
-              <a:rPr lang="zh-TW" altLang="en-US" b="1" dirty="0"/>
-              <a:t>：</a:t>
-            </a:r>
-            <a:r>
-              <a:rPr lang="zh-TW" altLang="en-US" dirty="0"/>
-              <a:t> 能夠精準鎖定「再生能源」月產出正式超越「核能」的歷史瞬間，觀察能源接力賽的轉折。</a:t>
-            </a:r>
-          </a:p>
-          <a:p>
-            <a:r>
-              <a:rPr lang="zh-TW" altLang="en-US" b="1" dirty="0"/>
-              <a:t>民間動能 </a:t>
-            </a:r>
-            <a:r>
-              <a:rPr lang="en-US" altLang="zh-TW" b="1" dirty="0"/>
-              <a:t>(</a:t>
-            </a:r>
-            <a:r>
-              <a:rPr lang="zh-TW" altLang="en-US" b="1" dirty="0"/>
-              <a:t>方向三</a:t>
-            </a:r>
-            <a:r>
-              <a:rPr lang="en-US" altLang="zh-TW" b="1" dirty="0"/>
-              <a:t>)</a:t>
-            </a:r>
-            <a:r>
-              <a:rPr lang="zh-TW" altLang="en-US" b="1" dirty="0"/>
-              <a:t>：</a:t>
-            </a:r>
-            <a:r>
-              <a:rPr lang="zh-TW" altLang="en-US" dirty="0"/>
-              <a:t> 透過 經營主體 與 潔淨標籤 的交叉分析，實證了 </a:t>
-            </a:r>
-            <a:r>
-              <a:rPr lang="zh-TW" altLang="en-US" b="1" dirty="0"/>
-              <a:t>「自用發電設備」</a:t>
-            </a:r>
-            <a:r>
-              <a:rPr lang="zh-TW" altLang="en-US" dirty="0"/>
-              <a:t> 才是目前推動潔淨能源佔比上升的最快引擎（能源民主化趨勢）。</a:t>
-            </a:r>
-          </a:p>
-          <a:p>
-            <a:br>
-              <a:rPr lang="zh-TW" altLang="en-US" dirty="0"/>
-            </a:br>
-            <a:endParaRPr lang="zh-TW" altLang="en-US" dirty="0"/>
-          </a:p>
-          <a:p>
-            <a:r>
-              <a:rPr lang="zh-TW" altLang="en-US" b="1" dirty="0"/>
-              <a:t>💡 給簡報的小建議</a:t>
-            </a:r>
-          </a:p>
-          <a:p>
-            <a:r>
-              <a:rPr lang="zh-TW" altLang="en-US" dirty="0"/>
-              <a:t>在簡報這部分時，你可以放一張 </a:t>
-            </a:r>
-            <a:r>
-              <a:rPr lang="zh-TW" altLang="en-US" b="1" dirty="0"/>
-              <a:t>「清洗前 </a:t>
-            </a:r>
-            <a:r>
-              <a:rPr lang="en-US" altLang="zh-TW" b="1" dirty="0"/>
-              <a:t>(Before) vs. </a:t>
-            </a:r>
-            <a:r>
-              <a:rPr lang="zh-TW" altLang="en-US" b="1" dirty="0"/>
-              <a:t>清洗後 </a:t>
-            </a:r>
-            <a:r>
-              <a:rPr lang="en-US" altLang="zh-TW" b="1" dirty="0"/>
-              <a:t>(After)</a:t>
-            </a:r>
-            <a:r>
-              <a:rPr lang="zh-TW" altLang="en-US" b="1" dirty="0"/>
-              <a:t>」</a:t>
-            </a:r>
-            <a:r>
-              <a:rPr lang="zh-TW" altLang="en-US" dirty="0"/>
-              <a:t> 的截圖對比。</a:t>
-            </a:r>
-          </a:p>
-          <a:p>
-            <a:r>
-              <a:rPr lang="en-US" altLang="zh-TW" b="1" dirty="0"/>
-              <a:t>Before:</a:t>
-            </a:r>
-            <a:r>
-              <a:rPr lang="zh-TW" altLang="en-US" dirty="0"/>
-              <a:t> 密密麻麻、看不到盡頭的 </a:t>
-            </a:r>
-            <a:r>
-              <a:rPr lang="en-US" altLang="zh-TW" dirty="0"/>
-              <a:t>Excel </a:t>
-            </a:r>
-            <a:r>
-              <a:rPr lang="zh-TW" altLang="en-US" dirty="0"/>
-              <a:t>欄位。</a:t>
-            </a:r>
-          </a:p>
-          <a:p>
-            <a:r>
-              <a:rPr lang="en-US" altLang="zh-TW" b="1" dirty="0"/>
-              <a:t>After:</a:t>
-            </a:r>
-            <a:r>
-              <a:rPr lang="zh-TW" altLang="en-US" dirty="0"/>
-              <a:t> 簡潔、具有「大類</a:t>
-            </a:r>
-            <a:r>
-              <a:rPr lang="en-US" altLang="zh-TW" dirty="0"/>
-              <a:t>/</a:t>
-            </a:r>
-            <a:r>
-              <a:rPr lang="zh-TW" altLang="en-US" dirty="0"/>
-              <a:t>主體</a:t>
-            </a:r>
-            <a:r>
-              <a:rPr lang="en-US" altLang="zh-TW" dirty="0"/>
-              <a:t>/</a:t>
-            </a:r>
-            <a:r>
-              <a:rPr lang="zh-TW" altLang="en-US" dirty="0"/>
-              <a:t>潔淨」標籤的結構化表格。 這能讓評審或主管立刻看出你的 </a:t>
-            </a:r>
-            <a:r>
-              <a:rPr lang="en-US" altLang="zh-TW" b="1" dirty="0"/>
-              <a:t>Data Sense (</a:t>
-            </a:r>
-            <a:r>
-              <a:rPr lang="zh-TW" altLang="en-US" b="1" dirty="0"/>
-              <a:t>資料感</a:t>
-            </a:r>
-            <a:r>
-              <a:rPr lang="en-US" altLang="zh-TW" b="1" dirty="0"/>
-              <a:t>)</a:t>
-            </a:r>
-            <a:r>
-              <a:rPr lang="zh-TW" altLang="en-US" dirty="0"/>
-              <a:t>。</a:t>
-            </a:r>
-          </a:p>
-          <a:p>
-            <a:r>
-              <a:rPr lang="zh-TW" altLang="en-US" b="1" dirty="0"/>
-              <a:t>既然 </a:t>
-            </a:r>
-            <a:r>
-              <a:rPr lang="en-US" altLang="zh-TW" b="1" dirty="0"/>
-              <a:t>ETL Summary </a:t>
-            </a:r>
-            <a:r>
-              <a:rPr lang="zh-TW" altLang="en-US" b="1" dirty="0"/>
-              <a:t>做好了，需要我幫你擬一份這份專題簡報的「大綱與目錄」嗎？幫你把分析發現串成一個有溫度的故事。</a:t>
-            </a:r>
-            <a:endParaRPr lang="zh-TW" altLang="en-US" dirty="0"/>
-          </a:p>
-          <a:p>
-            <a:endParaRPr lang="zh-TW" altLang="en-US" dirty="0"/>
-          </a:p>
-        </p:txBody>
-      </p:sp>
-    </p:spTree>
-    <p:extLst>
-      <p:ext uri="{BB962C8B-B14F-4D97-AF65-F5344CB8AC3E}">
-        <p14:creationId xmlns:p14="http://schemas.microsoft.com/office/powerpoint/2010/main" val="2689570967"/>
-      </p:ext>
-    </p:extLst>
-  </p:cSld>
-  <p:clrMapOvr>
-    <a:masterClrMapping/>
-  </p:clrMapOvr>
-</p:sld>
-</file>
-
 <file path=ppt/slides/slide19.xml><?xml version="1.0" encoding="utf-8"?>
 <p:sld xmlns:a="http://schemas.openxmlformats.org/drawingml/2006/main" xmlns:r="http://schemas.openxmlformats.org/officeDocument/2006/relationships" xmlns:p="http://schemas.openxmlformats.org/presentationml/2006/main">
   <p:cSld>
@@ -5604,7 +5401,7 @@
           <p:cNvPr id="2" name="標題 1">
             <a:extLst>
               <a:ext uri="{FF2B5EF4-FFF2-40B4-BE49-F238E27FC236}">
-                <a16:creationId xmlns:a16="http://schemas.microsoft.com/office/drawing/2014/main" id="{C343A1D4-1F22-0E32-9B64-AD1583DFCA49}"/>
+                <a16:creationId xmlns:a16="http://schemas.microsoft.com/office/drawing/2014/main" id="{2DD9E8DE-6366-C9E2-2316-E298ADBC0203}"/>
               </a:ext>
             </a:extLst>
           </p:cNvPr>
@@ -5629,7 +5426,7 @@
           <p:cNvPr id="3" name="內容版面配置區 2">
             <a:extLst>
               <a:ext uri="{FF2B5EF4-FFF2-40B4-BE49-F238E27FC236}">
-                <a16:creationId xmlns:a16="http://schemas.microsoft.com/office/drawing/2014/main" id="{239686E7-8DAA-2821-8CE5-DDC316FA8AD3}"/>
+                <a16:creationId xmlns:a16="http://schemas.microsoft.com/office/drawing/2014/main" id="{E3D7B753-0588-CBC2-B10F-10F5DC3A4CB8}"/>
               </a:ext>
             </a:extLst>
           </p:cNvPr>
@@ -5642,132 +5439,166 @@
         </p:nvSpPr>
         <p:spPr/>
         <p:txBody>
-          <a:bodyPr/>
-          <a:lstStyle/>
-          <a:p>
-            <a:endParaRPr lang="zh-TW" altLang="en-US"/>
-          </a:p>
-        </p:txBody>
-      </p:sp>
-      <p:sp>
-        <p:nvSpPr>
-          <p:cNvPr id="5" name="文字方塊 4">
-            <a:extLst>
-              <a:ext uri="{FF2B5EF4-FFF2-40B4-BE49-F238E27FC236}">
-                <a16:creationId xmlns:a16="http://schemas.microsoft.com/office/drawing/2014/main" id="{37AEF719-94EA-D524-FCCC-04205D3EB30D}"/>
-              </a:ext>
-            </a:extLst>
-          </p:cNvPr>
-          <p:cNvSpPr txBox="1"/>
-          <p:nvPr/>
-        </p:nvSpPr>
-        <p:spPr>
-          <a:xfrm>
-            <a:off x="3048000" y="-3262682"/>
-            <a:ext cx="6096000" cy="13388280"/>
-          </a:xfrm>
-          <a:prstGeom prst="rect">
-            <a:avLst/>
-          </a:prstGeom>
-          <a:noFill/>
-        </p:spPr>
-        <p:txBody>
-          <a:bodyPr wrap="square">
-            <a:spAutoFit/>
+          <a:bodyPr>
+            <a:normAutofit fontScale="62500" lnSpcReduction="20000"/>
           </a:bodyPr>
           <a:lstStyle/>
           <a:p>
-            <a:pPr>
-              <a:buNone/>
-            </a:pPr>
-            <a:r>
-              <a:rPr lang="zh-TW" altLang="en-US" b="1" dirty="0"/>
-              <a:t>📊 專題資料處理與清洗技術紀錄 </a:t>
-            </a:r>
             <a:r>
               <a:rPr lang="en-US" altLang="zh-TW" b="1" dirty="0"/>
-              <a:t>(ETL Summary)</a:t>
-            </a:r>
-          </a:p>
-          <a:p>
-            <a:pPr>
-              <a:buNone/>
-            </a:pPr>
-            <a:r>
-              <a:rPr lang="zh-TW" altLang="en-US" b="1" dirty="0"/>
-              <a:t>階段一：原始資料檢視 </a:t>
+              <a:t>3. </a:t>
+            </a:r>
+            <a:r>
+              <a:rPr lang="zh-TW" altLang="en-US" b="1" dirty="0"/>
+              <a:t>資料建模與分析亮點 </a:t>
             </a:r>
             <a:r>
               <a:rPr lang="en-US" altLang="zh-TW" b="1" dirty="0"/>
-              <a:t>(Data Assessment)</a:t>
-            </a:r>
-          </a:p>
-          <a:p>
-            <a:pPr>
-              <a:buFont typeface="Arial" panose="020B0604020202020204" pitchFamily="34" charset="0"/>
-              <a:buChar char="•"/>
-            </a:pPr>
-            <a:r>
-              <a:rPr lang="zh-TW" altLang="en-US" b="1" dirty="0"/>
-              <a:t>資料特徵：</a:t>
-            </a:r>
-            <a:r>
-              <a:rPr lang="zh-TW" altLang="en-US" dirty="0"/>
-              <a:t> 涵蓋 </a:t>
+              <a:t>(</a:t>
+            </a:r>
+            <a:r>
+              <a:rPr lang="zh-TW" altLang="en-US" b="1" dirty="0"/>
+              <a:t>簡報結論預告</a:t>
+            </a:r>
+            <a:r>
+              <a:rPr lang="en-US" altLang="zh-TW" b="1" dirty="0"/>
+              <a:t>)</a:t>
+            </a:r>
+          </a:p>
+          <a:p>
+            <a:r>
+              <a:rPr lang="zh-TW" altLang="en-US" dirty="0"/>
+              <a:t>透過上述處理，這份資料現在具備了支持以下兩大發現的能力：</a:t>
+            </a:r>
+          </a:p>
+          <a:p>
+            <a:r>
+              <a:rPr lang="zh-TW" altLang="en-US" b="1" dirty="0"/>
+              <a:t>結構交叉點 </a:t>
+            </a:r>
+            <a:r>
+              <a:rPr lang="en-US" altLang="zh-TW" b="1" dirty="0"/>
+              <a:t>(</a:t>
+            </a:r>
+            <a:r>
+              <a:rPr lang="zh-TW" altLang="en-US" b="1" dirty="0"/>
+              <a:t>方向四</a:t>
+            </a:r>
+            <a:r>
+              <a:rPr lang="en-US" altLang="zh-TW" b="1" dirty="0"/>
+              <a:t>)</a:t>
+            </a:r>
+            <a:r>
+              <a:rPr lang="zh-TW" altLang="en-US" b="1" dirty="0"/>
+              <a:t>：</a:t>
+            </a:r>
+            <a:r>
+              <a:rPr lang="zh-TW" altLang="en-US" dirty="0"/>
+              <a:t> 能夠精準鎖定「再生能源」月產出正式超越「核能」的歷史瞬間，觀察能源接力賽的轉折。</a:t>
+            </a:r>
+          </a:p>
+          <a:p>
+            <a:r>
+              <a:rPr lang="zh-TW" altLang="en-US" b="1" dirty="0"/>
+              <a:t>民間動能 </a:t>
+            </a:r>
+            <a:r>
+              <a:rPr lang="en-US" altLang="zh-TW" b="1" dirty="0"/>
+              <a:t>(</a:t>
+            </a:r>
+            <a:r>
+              <a:rPr lang="zh-TW" altLang="en-US" b="1" dirty="0"/>
+              <a:t>方向三</a:t>
+            </a:r>
+            <a:r>
+              <a:rPr lang="en-US" altLang="zh-TW" b="1" dirty="0"/>
+              <a:t>)</a:t>
+            </a:r>
+            <a:r>
+              <a:rPr lang="zh-TW" altLang="en-US" b="1" dirty="0"/>
+              <a:t>：</a:t>
+            </a:r>
+            <a:r>
+              <a:rPr lang="zh-TW" altLang="en-US" dirty="0"/>
+              <a:t> 透過 經營主體 與 潔淨標籤 的交叉分析，實證了 </a:t>
+            </a:r>
+            <a:r>
+              <a:rPr lang="zh-TW" altLang="en-US" b="1" dirty="0"/>
+              <a:t>「自用發電設備」</a:t>
+            </a:r>
+            <a:r>
+              <a:rPr lang="zh-TW" altLang="en-US" dirty="0"/>
+              <a:t> 才是目前推動潔淨能源佔比上升的最快引擎（能源民主化趨勢）。</a:t>
+            </a:r>
+          </a:p>
+          <a:p>
+            <a:br>
+              <a:rPr lang="zh-TW" altLang="en-US" dirty="0"/>
+            </a:br>
+            <a:endParaRPr lang="zh-TW" altLang="en-US" dirty="0"/>
+          </a:p>
+          <a:p>
+            <a:r>
+              <a:rPr lang="zh-TW" altLang="en-US" b="1" dirty="0"/>
+              <a:t>💡 給簡報的小建議</a:t>
+            </a:r>
+          </a:p>
+          <a:p>
+            <a:r>
+              <a:rPr lang="zh-TW" altLang="en-US" dirty="0"/>
+              <a:t>在簡報這部分時，你可以放一張 </a:t>
+            </a:r>
+            <a:r>
+              <a:rPr lang="zh-TW" altLang="en-US" b="1" dirty="0"/>
+              <a:t>「清洗前 </a:t>
+            </a:r>
+            <a:r>
+              <a:rPr lang="en-US" altLang="zh-TW" b="1" dirty="0"/>
+              <a:t>(Before) vs. </a:t>
+            </a:r>
+            <a:r>
+              <a:rPr lang="zh-TW" altLang="en-US" b="1" dirty="0"/>
+              <a:t>清洗後 </a:t>
+            </a:r>
+            <a:r>
+              <a:rPr lang="en-US" altLang="zh-TW" b="1" dirty="0"/>
+              <a:t>(After)</a:t>
+            </a:r>
+            <a:r>
+              <a:rPr lang="zh-TW" altLang="en-US" b="1" dirty="0"/>
+              <a:t>」</a:t>
+            </a:r>
+            <a:r>
+              <a:rPr lang="zh-TW" altLang="en-US" dirty="0"/>
+              <a:t> 的截圖對比。</a:t>
+            </a:r>
+          </a:p>
+          <a:p>
+            <a:r>
+              <a:rPr lang="en-US" altLang="zh-TW" b="1" dirty="0"/>
+              <a:t>Before:</a:t>
+            </a:r>
+            <a:r>
+              <a:rPr lang="zh-TW" altLang="en-US" dirty="0"/>
+              <a:t> 密密麻麻、看不到盡頭的 </a:t>
             </a:r>
             <a:r>
               <a:rPr lang="en-US" altLang="zh-TW" dirty="0"/>
-              <a:t>2007 </a:t>
-            </a:r>
-            <a:r>
-              <a:rPr lang="zh-TW" altLang="en-US" dirty="0"/>
-              <a:t>年至 </a:t>
-            </a:r>
-            <a:r>
-              <a:rPr lang="en-US" altLang="zh-TW" dirty="0"/>
-              <a:t>2026 </a:t>
-            </a:r>
-            <a:r>
-              <a:rPr lang="zh-TW" altLang="en-US" dirty="0"/>
-              <a:t>年（預估）之台灣逐月發電量，欄位多達 </a:t>
-            </a:r>
-            <a:r>
-              <a:rPr lang="en-US" altLang="zh-TW" dirty="0"/>
-              <a:t>50 </a:t>
-            </a:r>
-            <a:r>
-              <a:rPr lang="zh-TW" altLang="en-US" dirty="0"/>
-              <a:t>餘項。</a:t>
-            </a:r>
-          </a:p>
-          <a:p>
-            <a:pPr>
-              <a:buFont typeface="Arial" panose="020B0604020202020204" pitchFamily="34" charset="0"/>
-              <a:buChar char="•"/>
-            </a:pPr>
-            <a:r>
-              <a:rPr lang="zh-TW" altLang="en-US" b="1" dirty="0"/>
-              <a:t>原始挑戰：</a:t>
-            </a:r>
-            <a:r>
-              <a:rPr lang="zh-TW" altLang="en-US" dirty="0"/>
-              <a:t> * </a:t>
-            </a:r>
-            <a:r>
-              <a:rPr lang="zh-TW" altLang="en-US" b="1" dirty="0"/>
-              <a:t>寬表困境 </a:t>
-            </a:r>
+              <a:t>Excel </a:t>
+            </a:r>
+            <a:r>
+              <a:rPr lang="zh-TW" altLang="en-US" dirty="0"/>
+              <a:t>欄位。</a:t>
+            </a:r>
+          </a:p>
+          <a:p>
             <a:r>
               <a:rPr lang="en-US" altLang="zh-TW" b="1" dirty="0"/>
-              <a:t>(Wide Format)</a:t>
-            </a:r>
-            <a:r>
-              <a:rPr lang="zh-TW" altLang="en-US" b="1" dirty="0"/>
-              <a:t>：</a:t>
-            </a:r>
-            <a:r>
-              <a:rPr lang="zh-TW" altLang="en-US" dirty="0"/>
-              <a:t> 經營主體（台電</a:t>
+              <a:t>After:</a:t>
+            </a:r>
+            <a:r>
+              <a:rPr lang="zh-TW" altLang="en-US" dirty="0"/>
+              <a:t> 簡潔、具有「大類</a:t>
             </a:r>
             <a:r>
               <a:rPr lang="en-US" altLang="zh-TW" dirty="0"/>
@@ -5775,7 +5606,7 @@
             </a:r>
             <a:r>
               <a:rPr lang="zh-TW" altLang="en-US" dirty="0"/>
-              <a:t>民營</a:t>
+              <a:t>主體</a:t>
             </a:r>
             <a:r>
               <a:rPr lang="en-US" altLang="zh-TW" dirty="0"/>
@@ -5783,695 +5614,49 @@
             </a:r>
             <a:r>
               <a:rPr lang="zh-TW" altLang="en-US" dirty="0"/>
-              <a:t>自用）與能源細項全擠在欄位名稱中，無法進行動態分類。</a:t>
-            </a:r>
-          </a:p>
-          <a:p>
-            <a:pPr marL="742950" lvl="1" indent="-285750">
-              <a:buFont typeface="Arial" panose="020B0604020202020204" pitchFamily="34" charset="0"/>
-              <a:buChar char="•"/>
-            </a:pPr>
-            <a:r>
-              <a:rPr lang="zh-TW" altLang="en-US" b="1" dirty="0"/>
-              <a:t>命名雜訊：</a:t>
-            </a:r>
-            <a:r>
-              <a:rPr lang="zh-TW" altLang="en-US" dirty="0"/>
-              <a:t> 欄位標題帶有 </a:t>
-            </a:r>
-            <a:r>
-              <a:rPr lang="en-US" altLang="zh-TW" dirty="0">
-                <a:latin typeface="Courier New" panose="02070309020205020404" pitchFamily="49" charset="0"/>
-              </a:rPr>
-              <a:t>(</a:t>
-            </a:r>
-            <a:r>
-              <a:rPr lang="zh-TW" altLang="en-US" dirty="0">
-                <a:latin typeface="Courier New" panose="02070309020205020404" pitchFamily="49" charset="0"/>
-              </a:rPr>
-              <a:t>數值</a:t>
-            </a:r>
-            <a:r>
-              <a:rPr lang="en-US" altLang="zh-TW" dirty="0">
-                <a:latin typeface="Courier New" panose="02070309020205020404" pitchFamily="49" charset="0"/>
-              </a:rPr>
-              <a:t>)</a:t>
-            </a:r>
-            <a:r>
-              <a:rPr lang="zh-TW" altLang="en-US" dirty="0"/>
-              <a:t> 或 </a:t>
-            </a:r>
-            <a:r>
-              <a:rPr lang="en-US" altLang="zh-TW" dirty="0">
-                <a:latin typeface="Courier New" panose="02070309020205020404" pitchFamily="49" charset="0"/>
-              </a:rPr>
-              <a:t>_</a:t>
-            </a:r>
-            <a:r>
-              <a:rPr lang="zh-TW" altLang="en-US" dirty="0">
-                <a:latin typeface="Courier New" panose="02070309020205020404" pitchFamily="49" charset="0"/>
-              </a:rPr>
-              <a:t>全國</a:t>
-            </a:r>
-            <a:r>
-              <a:rPr lang="zh-TW" altLang="en-US" dirty="0"/>
-              <a:t> 等非結構化贅字。</a:t>
-            </a:r>
-          </a:p>
-          <a:p>
-            <a:pPr marL="742950" lvl="1" indent="-285750">
-              <a:buFont typeface="Arial" panose="020B0604020202020204" pitchFamily="34" charset="0"/>
-              <a:buChar char="•"/>
-            </a:pPr>
-            <a:r>
-              <a:rPr lang="zh-TW" altLang="en-US" b="1" dirty="0"/>
-              <a:t>重複計算風險：</a:t>
-            </a:r>
-            <a:r>
-              <a:rPr lang="zh-TW" altLang="en-US" dirty="0"/>
-              <a:t> 原始表包含「全國總量」與「各主體細項」，若不處理會造成數據加倍。</a:t>
-            </a:r>
-          </a:p>
-          <a:p>
-            <a:pPr>
-              <a:buNone/>
-            </a:pPr>
-            <a:r>
-              <a:rPr lang="zh-TW" altLang="en-US" b="1" dirty="0"/>
-              <a:t>階段二：核心 </a:t>
+              <a:t>潔淨」標籤的結構化表格。 這能讓評審或主管立刻看出你的 </a:t>
             </a:r>
             <a:r>
               <a:rPr lang="en-US" altLang="zh-TW" b="1" dirty="0"/>
-              <a:t>ETL </a:t>
-            </a:r>
-            <a:r>
-              <a:rPr lang="zh-TW" altLang="en-US" b="1" dirty="0"/>
-              <a:t>清洗流程 </a:t>
-            </a:r>
-            <a:r>
-              <a:rPr lang="en-US" altLang="zh-TW" b="1" dirty="0"/>
-              <a:t>(The Transformation)</a:t>
-            </a:r>
-          </a:p>
-          <a:p>
-            <a:pPr>
-              <a:buNone/>
-            </a:pPr>
-            <a:r>
-              <a:rPr lang="zh-TW" altLang="en-US" dirty="0"/>
-              <a:t>在 </a:t>
-            </a:r>
-            <a:r>
-              <a:rPr lang="en-US" altLang="zh-TW" dirty="0"/>
-              <a:t>Power BI </a:t>
-            </a:r>
-            <a:r>
-              <a:rPr lang="zh-TW" altLang="en-US" dirty="0"/>
-              <a:t>的 </a:t>
-            </a:r>
-            <a:r>
-              <a:rPr lang="en-US" altLang="zh-TW" dirty="0"/>
-              <a:t>Power Query </a:t>
-            </a:r>
-            <a:r>
-              <a:rPr lang="zh-TW" altLang="en-US" dirty="0"/>
-              <a:t>環境中，我們執行了以下關鍵轉換：</a:t>
-            </a:r>
-          </a:p>
-          <a:p>
-            <a:pPr>
-              <a:buFont typeface="+mj-lt"/>
-              <a:buAutoNum type="arabicPeriod"/>
-            </a:pPr>
-            <a:r>
-              <a:rPr lang="zh-TW" altLang="en-US" b="1" dirty="0"/>
-              <a:t>取消樞紐 </a:t>
-            </a:r>
-            <a:r>
-              <a:rPr lang="en-US" altLang="zh-TW" b="1" dirty="0"/>
-              <a:t>(Unpivot Columns)</a:t>
-            </a:r>
-            <a:r>
-              <a:rPr lang="zh-TW" altLang="en-US" b="1" dirty="0"/>
-              <a:t>：</a:t>
-            </a:r>
-            <a:r>
-              <a:rPr lang="zh-TW" altLang="en-US" dirty="0"/>
-              <a:t> 將 </a:t>
-            </a:r>
-            <a:r>
-              <a:rPr lang="en-US" altLang="zh-TW" dirty="0"/>
-              <a:t>50 </a:t>
-            </a:r>
-            <a:r>
-              <a:rPr lang="zh-TW" altLang="en-US" dirty="0"/>
-              <a:t>幾個橫向欄位轉化為縱向的 </a:t>
-            </a:r>
-            <a:r>
-              <a:rPr lang="zh-TW" altLang="en-US" b="1" dirty="0"/>
-              <a:t>「多列 </a:t>
-            </a:r>
-            <a:r>
-              <a:rPr lang="en-US" altLang="zh-TW" b="1" dirty="0"/>
-              <a:t>(Rows) </a:t>
-            </a:r>
-            <a:r>
-              <a:rPr lang="zh-TW" altLang="en-US" b="1" dirty="0"/>
-              <a:t>結構」</a:t>
-            </a:r>
-            <a:r>
-              <a:rPr lang="zh-TW" altLang="en-US" dirty="0"/>
-              <a:t>，讓每一筆數據都配備一組屬性標籤。</a:t>
-            </a:r>
-          </a:p>
-          <a:p>
-            <a:pPr>
-              <a:buFont typeface="+mj-lt"/>
-              <a:buAutoNum type="arabicPeriod"/>
-            </a:pPr>
-            <a:r>
-              <a:rPr lang="zh-TW" altLang="en-US" b="1" dirty="0"/>
-              <a:t>階層式拆分 </a:t>
-            </a:r>
-            <a:r>
-              <a:rPr lang="en-US" altLang="zh-TW" b="1" dirty="0"/>
-              <a:t>(Split by Delimiter)</a:t>
-            </a:r>
-            <a:r>
-              <a:rPr lang="zh-TW" altLang="en-US" b="1" dirty="0"/>
-              <a:t>：</a:t>
-            </a:r>
-            <a:r>
-              <a:rPr lang="zh-TW" altLang="en-US" dirty="0"/>
-              <a:t> 利用底線 </a:t>
-            </a:r>
-            <a:r>
-              <a:rPr lang="en-US" altLang="zh-TW" dirty="0">
-                <a:latin typeface="Courier New" panose="02070309020205020404" pitchFamily="49" charset="0"/>
-              </a:rPr>
-              <a:t>_</a:t>
-            </a:r>
-            <a:r>
-              <a:rPr lang="zh-TW" altLang="en-US" dirty="0"/>
-              <a:t> 將屬性拆解為三個核心維度：</a:t>
-            </a:r>
-            <a:r>
-              <a:rPr lang="en-US" altLang="zh-TW" b="1" dirty="0"/>
-              <a:t>[</a:t>
-            </a:r>
-            <a:r>
-              <a:rPr lang="zh-TW" altLang="en-US" b="1" dirty="0"/>
-              <a:t>經營主體</a:t>
-            </a:r>
-            <a:r>
-              <a:rPr lang="en-US" altLang="zh-TW" b="1" dirty="0"/>
-              <a:t>]</a:t>
-            </a:r>
-            <a:r>
-              <a:rPr lang="zh-TW" altLang="en-US" b="1" dirty="0"/>
-              <a:t>、</a:t>
-            </a:r>
-            <a:r>
-              <a:rPr lang="en-US" altLang="zh-TW" b="1" dirty="0"/>
-              <a:t>[</a:t>
-            </a:r>
-            <a:r>
-              <a:rPr lang="zh-TW" altLang="en-US" b="1" dirty="0"/>
-              <a:t>能源大類</a:t>
-            </a:r>
-            <a:r>
-              <a:rPr lang="en-US" altLang="zh-TW" b="1" dirty="0"/>
-              <a:t>]</a:t>
-            </a:r>
-            <a:r>
-              <a:rPr lang="zh-TW" altLang="en-US" b="1" dirty="0"/>
-              <a:t>、</a:t>
-            </a:r>
-            <a:r>
-              <a:rPr lang="en-US" altLang="zh-TW" b="1" dirty="0"/>
-              <a:t>[</a:t>
-            </a:r>
-            <a:r>
-              <a:rPr lang="zh-TW" altLang="en-US" b="1" dirty="0"/>
-              <a:t>能源細項</a:t>
-            </a:r>
-            <a:r>
-              <a:rPr lang="en-US" altLang="zh-TW" b="1" dirty="0"/>
-              <a:t>]</a:t>
-            </a:r>
-            <a:r>
-              <a:rPr lang="zh-TW" altLang="en-US" dirty="0"/>
-              <a:t>。</a:t>
-            </a:r>
-          </a:p>
-          <a:p>
-            <a:pPr>
-              <a:buFont typeface="+mj-lt"/>
-              <a:buAutoNum type="arabicPeriod"/>
-            </a:pPr>
-            <a:r>
-              <a:rPr lang="zh-TW" altLang="en-US" b="1" dirty="0"/>
-              <a:t>精準清理 </a:t>
-            </a:r>
-            <a:r>
-              <a:rPr lang="en-US" altLang="zh-TW" b="1" dirty="0"/>
-              <a:t>(Data Cleansing)</a:t>
-            </a:r>
-            <a:r>
-              <a:rPr lang="zh-TW" altLang="en-US" b="1" dirty="0"/>
-              <a:t>：</a:t>
-            </a:r>
-            <a:r>
-              <a:rPr lang="zh-TW" altLang="en-US" dirty="0"/>
-              <a:t> * 批次移除 </a:t>
-            </a:r>
-            <a:r>
-              <a:rPr lang="en-US" altLang="zh-TW" dirty="0">
-                <a:latin typeface="Courier New" panose="02070309020205020404" pitchFamily="49" charset="0"/>
-              </a:rPr>
-              <a:t>(</a:t>
-            </a:r>
-            <a:r>
-              <a:rPr lang="zh-TW" altLang="en-US" dirty="0">
-                <a:latin typeface="Courier New" panose="02070309020205020404" pitchFamily="49" charset="0"/>
-              </a:rPr>
-              <a:t>數值</a:t>
-            </a:r>
-            <a:r>
-              <a:rPr lang="en-US" altLang="zh-TW" dirty="0">
-                <a:latin typeface="Courier New" panose="02070309020205020404" pitchFamily="49" charset="0"/>
-              </a:rPr>
-              <a:t>)</a:t>
-            </a:r>
-            <a:r>
-              <a:rPr lang="zh-TW" altLang="en-US" dirty="0"/>
-              <a:t> 與 </a:t>
-            </a:r>
-            <a:r>
-              <a:rPr lang="en-US" altLang="zh-TW" dirty="0">
-                <a:latin typeface="Courier New" panose="02070309020205020404" pitchFamily="49" charset="0"/>
-              </a:rPr>
-              <a:t>_</a:t>
-            </a:r>
-            <a:r>
-              <a:rPr lang="zh-TW" altLang="en-US" dirty="0">
-                <a:latin typeface="Courier New" panose="02070309020205020404" pitchFamily="49" charset="0"/>
-              </a:rPr>
-              <a:t>全國</a:t>
-            </a:r>
-            <a:r>
-              <a:rPr lang="zh-TW" altLang="en-US" dirty="0"/>
-              <a:t> 字眼。</a:t>
-            </a:r>
-          </a:p>
-          <a:p>
-            <a:pPr marL="742950" lvl="1" indent="-285750">
-              <a:buFont typeface="+mj-lt"/>
-              <a:buAutoNum type="arabicPeriod"/>
-            </a:pPr>
-            <a:r>
-              <a:rPr lang="zh-TW" altLang="en-US" dirty="0"/>
-              <a:t>執行 </a:t>
-            </a:r>
-            <a:r>
-              <a:rPr lang="zh-TW" altLang="en-US" b="1" dirty="0"/>
-              <a:t>修剪 </a:t>
-            </a:r>
-            <a:r>
-              <a:rPr lang="en-US" altLang="zh-TW" b="1" dirty="0"/>
-              <a:t>(Trim)</a:t>
-            </a:r>
-            <a:r>
-              <a:rPr lang="zh-TW" altLang="en-US" dirty="0"/>
-              <a:t> 與 </a:t>
-            </a:r>
-            <a:r>
-              <a:rPr lang="zh-TW" altLang="en-US" b="1" dirty="0"/>
-              <a:t>清除 </a:t>
-            </a:r>
-            <a:r>
-              <a:rPr lang="en-US" altLang="zh-TW" b="1" dirty="0"/>
-              <a:t>(Clean)</a:t>
-            </a:r>
-            <a:r>
-              <a:rPr lang="zh-TW" altLang="en-US" dirty="0"/>
-              <a:t>，排除看不見的空白字元，確保資料比對 </a:t>
-            </a:r>
-            <a:r>
-              <a:rPr lang="en-US" altLang="zh-TW" dirty="0"/>
-              <a:t>100% </a:t>
-            </a:r>
-            <a:r>
-              <a:rPr lang="zh-TW" altLang="en-US" dirty="0"/>
-              <a:t>精確。</a:t>
-            </a:r>
-          </a:p>
-          <a:p>
-            <a:pPr>
-              <a:buFont typeface="+mj-lt"/>
-              <a:buAutoNum type="arabicPeriod"/>
-            </a:pPr>
-            <a:r>
-              <a:rPr lang="zh-TW" altLang="en-US" b="1" dirty="0"/>
-              <a:t>條件式校正 </a:t>
-            </a:r>
-            <a:r>
-              <a:rPr lang="en-US" altLang="zh-TW" b="1" dirty="0"/>
-              <a:t>(Conditional Alignment)</a:t>
-            </a:r>
-            <a:r>
-              <a:rPr lang="zh-TW" altLang="en-US" b="1" dirty="0"/>
-              <a:t>：</a:t>
-            </a:r>
-            <a:r>
-              <a:rPr lang="zh-TW" altLang="en-US" dirty="0"/>
-              <a:t> 針對核能等不對稱層級（只有兩層），利用「條件式資料行」實施 </a:t>
-            </a:r>
-            <a:r>
-              <a:rPr lang="zh-TW" altLang="en-US" b="1" dirty="0"/>
-              <a:t>「向左填補邏輯」</a:t>
-            </a:r>
-            <a:r>
-              <a:rPr lang="zh-TW" altLang="en-US" dirty="0"/>
-              <a:t>，確保所有標籤對齊。</a:t>
-            </a:r>
-          </a:p>
-          <a:p>
-            <a:pPr>
-              <a:buNone/>
-            </a:pPr>
-            <a:r>
-              <a:rPr lang="zh-TW" altLang="en-US" b="1" dirty="0"/>
-              <a:t>階段三：特徵工程與價值定義 </a:t>
-            </a:r>
-            <a:r>
-              <a:rPr lang="en-US" altLang="zh-TW" b="1" dirty="0"/>
-              <a:t>(Feature Engineering)</a:t>
-            </a:r>
-          </a:p>
-          <a:p>
-            <a:pPr>
-              <a:buFont typeface="Arial" panose="020B0604020202020204" pitchFamily="34" charset="0"/>
-              <a:buChar char="•"/>
-            </a:pPr>
-            <a:r>
-              <a:rPr lang="zh-TW" altLang="en-US" b="1" dirty="0"/>
-              <a:t>新增「潔淨能源」判定欄位：</a:t>
-            </a:r>
-            <a:r>
-              <a:rPr lang="zh-TW" altLang="en-US" dirty="0"/>
-              <a:t> * </a:t>
-            </a:r>
-            <a:r>
-              <a:rPr lang="zh-TW" altLang="en-US" b="1" dirty="0"/>
-              <a:t>邏輯定義：</a:t>
-            </a:r>
-            <a:r>
-              <a:rPr lang="zh-TW" altLang="en-US" dirty="0"/>
-              <a:t> 將 </a:t>
-            </a:r>
-            <a:r>
-              <a:rPr lang="zh-TW" altLang="en-US" dirty="0">
-                <a:latin typeface="Courier New" panose="02070309020205020404" pitchFamily="49" charset="0"/>
-              </a:rPr>
-              <a:t>再生能源</a:t>
-            </a:r>
-            <a:r>
-              <a:rPr lang="zh-TW" altLang="en-US" dirty="0"/>
-              <a:t> 與 </a:t>
-            </a:r>
-            <a:r>
-              <a:rPr lang="zh-TW" altLang="en-US" dirty="0">
-                <a:latin typeface="Courier New" panose="02070309020205020404" pitchFamily="49" charset="0"/>
-              </a:rPr>
-              <a:t>核能</a:t>
-            </a:r>
-            <a:r>
-              <a:rPr lang="zh-TW" altLang="en-US" dirty="0"/>
-              <a:t> 統一標註為 </a:t>
-            </a:r>
-            <a:r>
-              <a:rPr lang="zh-TW" altLang="en-US" b="1" dirty="0"/>
-              <a:t>「潔淨能源」</a:t>
-            </a:r>
-            <a:r>
-              <a:rPr lang="zh-TW" altLang="en-US" dirty="0"/>
-              <a:t>，其餘標註為 </a:t>
-            </a:r>
-            <a:r>
-              <a:rPr lang="zh-TW" altLang="en-US" b="1" dirty="0"/>
-              <a:t>「傳統火力」</a:t>
-            </a:r>
-            <a:r>
-              <a:rPr lang="zh-TW" altLang="en-US" dirty="0"/>
-              <a:t>。</a:t>
-            </a:r>
-          </a:p>
-          <a:p>
-            <a:pPr marL="742950" lvl="1" indent="-285750">
-              <a:buFont typeface="Arial" panose="020B0604020202020204" pitchFamily="34" charset="0"/>
-              <a:buChar char="•"/>
-            </a:pPr>
-            <a:r>
-              <a:rPr lang="zh-TW" altLang="en-US" b="1" dirty="0"/>
-              <a:t>特殊處理：</a:t>
-            </a:r>
-            <a:r>
-              <a:rPr lang="zh-TW" altLang="en-US" dirty="0"/>
-              <a:t> 將 </a:t>
-            </a:r>
-            <a:r>
-              <a:rPr lang="zh-TW" altLang="en-US" b="1" dirty="0"/>
-              <a:t>「抽蓄水力」</a:t>
-            </a:r>
-            <a:r>
-              <a:rPr lang="zh-TW" altLang="en-US" dirty="0"/>
-              <a:t> 納入標籤，作為儲能調度的觀測指標。</a:t>
-            </a:r>
-          </a:p>
-          <a:p>
-            <a:pPr>
-              <a:buFont typeface="Arial" panose="020B0604020202020204" pitchFamily="34" charset="0"/>
-              <a:buChar char="•"/>
-            </a:pPr>
-            <a:r>
-              <a:rPr lang="en-US" altLang="zh-TW" b="1" dirty="0"/>
-              <a:t>DAX </a:t>
-            </a:r>
-            <a:r>
-              <a:rPr lang="zh-TW" altLang="en-US" b="1" dirty="0"/>
-              <a:t>建模：</a:t>
-            </a:r>
-            <a:r>
-              <a:rPr lang="zh-TW" altLang="en-US" dirty="0"/>
-              <a:t> 撰寫動態量值 </a:t>
-            </a:r>
-            <a:r>
-              <a:rPr lang="en-US" altLang="zh-TW" dirty="0"/>
-              <a:t>(Measures)</a:t>
-            </a:r>
-            <a:r>
-              <a:rPr lang="zh-TW" altLang="en-US" dirty="0"/>
-              <a:t>，即時計算 </a:t>
-            </a:r>
-            <a:r>
-              <a:rPr lang="zh-TW" altLang="en-US" b="1" dirty="0"/>
-              <a:t>「潔淨能源佔比 </a:t>
-            </a:r>
-            <a:r>
-              <a:rPr lang="en-US" altLang="zh-TW" b="1" dirty="0"/>
-              <a:t>%</a:t>
-            </a:r>
-            <a:r>
-              <a:rPr lang="zh-TW" altLang="en-US" b="1" dirty="0"/>
-              <a:t>」</a:t>
-            </a:r>
-            <a:r>
-              <a:rPr lang="zh-TW" altLang="en-US" dirty="0"/>
-              <a:t>。</a:t>
-            </a:r>
-          </a:p>
-          <a:p>
-            <a:pPr>
-              <a:buNone/>
-            </a:pPr>
-            <a:r>
-              <a:rPr lang="zh-TW" altLang="en-US" b="1" dirty="0"/>
-              <a:t>階段四：專題分析發現預告 </a:t>
-            </a:r>
-            <a:r>
-              <a:rPr lang="en-US" altLang="zh-TW" b="1" dirty="0"/>
-              <a:t>(Analytical Insights)</a:t>
-            </a:r>
-          </a:p>
-          <a:p>
-            <a:pPr>
-              <a:buFont typeface="Arial" panose="020B0604020202020204" pitchFamily="34" charset="0"/>
-              <a:buChar char="•"/>
-            </a:pPr>
-            <a:r>
-              <a:rPr lang="zh-TW" altLang="en-US" b="1" dirty="0"/>
-              <a:t>結構交叉分析 </a:t>
-            </a:r>
-            <a:r>
-              <a:rPr lang="en-US" altLang="zh-TW" b="1" dirty="0"/>
-              <a:t>(</a:t>
-            </a:r>
-            <a:r>
-              <a:rPr lang="zh-TW" altLang="en-US" b="1" dirty="0"/>
-              <a:t>方向四</a:t>
+              <a:t>Data Sense (</a:t>
+            </a:r>
+            <a:r>
+              <a:rPr lang="zh-TW" altLang="en-US" b="1" dirty="0"/>
+              <a:t>資料感</a:t>
             </a:r>
             <a:r>
               <a:rPr lang="en-US" altLang="zh-TW" b="1" dirty="0"/>
               <a:t>)</a:t>
             </a:r>
             <a:r>
-              <a:rPr lang="zh-TW" altLang="en-US" b="1" dirty="0"/>
-              <a:t>：</a:t>
-            </a:r>
-            <a:r>
-              <a:rPr lang="zh-TW" altLang="en-US" dirty="0"/>
-              <a:t> 成功鎖定再生能源超越核能的歷史「黃金交叉點」。</a:t>
-            </a:r>
-          </a:p>
-          <a:p>
-            <a:pPr>
-              <a:buFont typeface="Arial" panose="020B0604020202020204" pitchFamily="34" charset="0"/>
-              <a:buChar char="•"/>
-            </a:pPr>
-            <a:r>
-              <a:rPr lang="zh-TW" altLang="en-US" b="1" dirty="0"/>
-              <a:t>主體動能對比 </a:t>
+              <a:rPr lang="zh-TW" altLang="en-US" dirty="0"/>
+              <a:t>。</a:t>
+            </a:r>
+          </a:p>
+          <a:p>
+            <a:r>
+              <a:rPr lang="zh-TW" altLang="en-US" b="1" dirty="0"/>
+              <a:t>既然 </a:t>
             </a:r>
             <a:r>
               <a:rPr lang="en-US" altLang="zh-TW" b="1" dirty="0"/>
-              <a:t>(</a:t>
-            </a:r>
-            <a:r>
-              <a:rPr lang="zh-TW" altLang="en-US" b="1" dirty="0"/>
-              <a:t>方向三</a:t>
-            </a:r>
-            <a:r>
-              <a:rPr lang="en-US" altLang="zh-TW" b="1" dirty="0"/>
-              <a:t>)</a:t>
-            </a:r>
-            <a:r>
-              <a:rPr lang="zh-TW" altLang="en-US" b="1" dirty="0"/>
-              <a:t>：</a:t>
-            </a:r>
-            <a:r>
-              <a:rPr lang="zh-TW" altLang="en-US" dirty="0"/>
-              <a:t> 實證 </a:t>
-            </a:r>
-            <a:r>
-              <a:rPr lang="zh-TW" altLang="en-US" b="1" dirty="0"/>
-              <a:t>「自用發電設備」</a:t>
-            </a:r>
-            <a:r>
-              <a:rPr lang="zh-TW" altLang="en-US" dirty="0"/>
-              <a:t> 在潔淨能源佔比的成長率遠高於國營電廠，反映企業 </a:t>
-            </a:r>
-            <a:r>
-              <a:rPr lang="en-US" altLang="zh-TW" dirty="0"/>
-              <a:t>ESG </a:t>
-            </a:r>
-            <a:r>
-              <a:rPr lang="zh-TW" altLang="en-US" dirty="0"/>
-              <a:t>的強勁拉動力。</a:t>
-            </a:r>
-          </a:p>
-          <a:p>
-            <a:pPr>
-              <a:buNone/>
-            </a:pPr>
-            <a:br>
-              <a:rPr lang="zh-TW" altLang="en-US" dirty="0"/>
-            </a:br>
+              <a:t>ETL Summary </a:t>
+            </a:r>
+            <a:r>
+              <a:rPr lang="zh-TW" altLang="en-US" b="1" dirty="0"/>
+              <a:t>做好了，需要我幫你擬一份這份專題簡報的「大綱與目錄」嗎？幫你把分析發現串成一個有溫度的故事。</a:t>
+            </a:r>
             <a:endParaRPr lang="zh-TW" altLang="en-US" dirty="0"/>
           </a:p>
           <a:p>
-            <a:pPr>
-              <a:buNone/>
-            </a:pPr>
-            <a:r>
-              <a:rPr lang="zh-TW" altLang="en-US" b="1" dirty="0"/>
-              <a:t>💡 簡報呈現小秘訣</a:t>
-            </a:r>
-          </a:p>
-          <a:p>
-            <a:pPr>
-              <a:buFont typeface="+mj-lt"/>
-              <a:buAutoNum type="arabicPeriod"/>
-            </a:pPr>
-            <a:r>
-              <a:rPr lang="zh-TW" altLang="en-US" b="1" dirty="0"/>
-              <a:t>放一張 </a:t>
-            </a:r>
-            <a:r>
-              <a:rPr lang="en-US" altLang="zh-TW" b="1" dirty="0"/>
-              <a:t>Before/After </a:t>
-            </a:r>
-            <a:r>
-              <a:rPr lang="zh-TW" altLang="en-US" b="1" dirty="0"/>
-              <a:t>圖：</a:t>
-            </a:r>
-            <a:r>
-              <a:rPr lang="zh-TW" altLang="en-US" dirty="0"/>
-              <a:t> 左邊放雜亂的 </a:t>
-            </a:r>
-            <a:r>
-              <a:rPr lang="en-US" altLang="zh-TW" dirty="0"/>
-              <a:t>Excel </a:t>
-            </a:r>
-            <a:r>
-              <a:rPr lang="zh-TW" altLang="en-US" dirty="0"/>
-              <a:t>原始截圖，右邊放你整理好的漂亮長表。</a:t>
-            </a:r>
-          </a:p>
-          <a:p>
-            <a:pPr>
-              <a:buFont typeface="+mj-lt"/>
-              <a:buAutoNum type="arabicPeriod"/>
-            </a:pPr>
-            <a:r>
-              <a:rPr lang="zh-TW" altLang="en-US" b="1" dirty="0"/>
-              <a:t>強調「自動化」：</a:t>
-            </a:r>
-            <a:r>
-              <a:rPr lang="zh-TW" altLang="en-US" dirty="0"/>
-              <a:t> 提到這套 </a:t>
-            </a:r>
-            <a:r>
-              <a:rPr lang="en-US" altLang="zh-TW" dirty="0"/>
-              <a:t>ETL </a:t>
-            </a:r>
-            <a:r>
-              <a:rPr lang="zh-TW" altLang="en-US" dirty="0"/>
-              <a:t>流程未來只要「點擊重新整理」，就能自動處理 </a:t>
-            </a:r>
-            <a:r>
-              <a:rPr lang="en-US" altLang="zh-TW" dirty="0"/>
-              <a:t>2026 </a:t>
-            </a:r>
-            <a:r>
-              <a:rPr lang="zh-TW" altLang="en-US" dirty="0"/>
-              <a:t>年以後的新數據，這展現了你的</a:t>
-            </a:r>
-            <a:r>
-              <a:rPr lang="zh-TW" altLang="en-US" b="1" dirty="0"/>
-              <a:t>工程思維</a:t>
-            </a:r>
-            <a:r>
-              <a:rPr lang="zh-TW" altLang="en-US" dirty="0"/>
-              <a:t>。</a:t>
-            </a:r>
+            <a:endParaRPr lang="zh-TW" altLang="en-US" dirty="0"/>
           </a:p>
         </p:txBody>
       </p:sp>
     </p:spTree>
     <p:extLst>
       <p:ext uri="{BB962C8B-B14F-4D97-AF65-F5344CB8AC3E}">
-        <p14:creationId xmlns:p14="http://schemas.microsoft.com/office/powerpoint/2010/main" val="92267392"/>
+        <p14:creationId xmlns:p14="http://schemas.microsoft.com/office/powerpoint/2010/main" val="2689570967"/>
       </p:ext>
     </p:extLst>
   </p:cSld>
@@ -8019,6 +7204,905 @@
           <p:cNvPr id="2" name="標題 1">
             <a:extLst>
               <a:ext uri="{FF2B5EF4-FFF2-40B4-BE49-F238E27FC236}">
+                <a16:creationId xmlns:a16="http://schemas.microsoft.com/office/drawing/2014/main" id="{C343A1D4-1F22-0E32-9B64-AD1583DFCA49}"/>
+              </a:ext>
+            </a:extLst>
+          </p:cNvPr>
+          <p:cNvSpPr>
+            <a:spLocks noGrp="1"/>
+          </p:cNvSpPr>
+          <p:nvPr>
+            <p:ph type="title"/>
+          </p:nvPr>
+        </p:nvSpPr>
+        <p:spPr/>
+        <p:txBody>
+          <a:bodyPr/>
+          <a:lstStyle/>
+          <a:p>
+            <a:endParaRPr lang="zh-TW" altLang="en-US"/>
+          </a:p>
+        </p:txBody>
+      </p:sp>
+      <p:sp>
+        <p:nvSpPr>
+          <p:cNvPr id="3" name="內容版面配置區 2">
+            <a:extLst>
+              <a:ext uri="{FF2B5EF4-FFF2-40B4-BE49-F238E27FC236}">
+                <a16:creationId xmlns:a16="http://schemas.microsoft.com/office/drawing/2014/main" id="{239686E7-8DAA-2821-8CE5-DDC316FA8AD3}"/>
+              </a:ext>
+            </a:extLst>
+          </p:cNvPr>
+          <p:cNvSpPr>
+            <a:spLocks noGrp="1"/>
+          </p:cNvSpPr>
+          <p:nvPr>
+            <p:ph idx="1"/>
+          </p:nvPr>
+        </p:nvSpPr>
+        <p:spPr/>
+        <p:txBody>
+          <a:bodyPr/>
+          <a:lstStyle/>
+          <a:p>
+            <a:endParaRPr lang="zh-TW" altLang="en-US"/>
+          </a:p>
+        </p:txBody>
+      </p:sp>
+      <p:sp>
+        <p:nvSpPr>
+          <p:cNvPr id="5" name="文字方塊 4">
+            <a:extLst>
+              <a:ext uri="{FF2B5EF4-FFF2-40B4-BE49-F238E27FC236}">
+                <a16:creationId xmlns:a16="http://schemas.microsoft.com/office/drawing/2014/main" id="{37AEF719-94EA-D524-FCCC-04205D3EB30D}"/>
+              </a:ext>
+            </a:extLst>
+          </p:cNvPr>
+          <p:cNvSpPr txBox="1"/>
+          <p:nvPr/>
+        </p:nvSpPr>
+        <p:spPr>
+          <a:xfrm>
+            <a:off x="3048000" y="-3262682"/>
+            <a:ext cx="6096000" cy="13388280"/>
+          </a:xfrm>
+          <a:prstGeom prst="rect">
+            <a:avLst/>
+          </a:prstGeom>
+          <a:noFill/>
+        </p:spPr>
+        <p:txBody>
+          <a:bodyPr wrap="square">
+            <a:spAutoFit/>
+          </a:bodyPr>
+          <a:lstStyle/>
+          <a:p>
+            <a:pPr>
+              <a:buNone/>
+            </a:pPr>
+            <a:r>
+              <a:rPr lang="zh-TW" altLang="en-US" b="1" dirty="0"/>
+              <a:t>📊 專題資料處理與清洗技術紀錄 </a:t>
+            </a:r>
+            <a:r>
+              <a:rPr lang="en-US" altLang="zh-TW" b="1" dirty="0"/>
+              <a:t>(ETL Summary)</a:t>
+            </a:r>
+          </a:p>
+          <a:p>
+            <a:pPr>
+              <a:buNone/>
+            </a:pPr>
+            <a:r>
+              <a:rPr lang="zh-TW" altLang="en-US" b="1" dirty="0"/>
+              <a:t>階段一：原始資料檢視 </a:t>
+            </a:r>
+            <a:r>
+              <a:rPr lang="en-US" altLang="zh-TW" b="1" dirty="0"/>
+              <a:t>(Data Assessment)</a:t>
+            </a:r>
+          </a:p>
+          <a:p>
+            <a:pPr>
+              <a:buFont typeface="Arial" panose="020B0604020202020204" pitchFamily="34" charset="0"/>
+              <a:buChar char="•"/>
+            </a:pPr>
+            <a:r>
+              <a:rPr lang="zh-TW" altLang="en-US" b="1" dirty="0"/>
+              <a:t>資料特徵：</a:t>
+            </a:r>
+            <a:r>
+              <a:rPr lang="zh-TW" altLang="en-US" dirty="0"/>
+              <a:t> 涵蓋 </a:t>
+            </a:r>
+            <a:r>
+              <a:rPr lang="en-US" altLang="zh-TW" dirty="0"/>
+              <a:t>2007 </a:t>
+            </a:r>
+            <a:r>
+              <a:rPr lang="zh-TW" altLang="en-US" dirty="0"/>
+              <a:t>年至 </a:t>
+            </a:r>
+            <a:r>
+              <a:rPr lang="en-US" altLang="zh-TW" dirty="0"/>
+              <a:t>2026 </a:t>
+            </a:r>
+            <a:r>
+              <a:rPr lang="zh-TW" altLang="en-US" dirty="0"/>
+              <a:t>年（預估）之台灣逐月發電量，欄位多達 </a:t>
+            </a:r>
+            <a:r>
+              <a:rPr lang="en-US" altLang="zh-TW" dirty="0"/>
+              <a:t>50 </a:t>
+            </a:r>
+            <a:r>
+              <a:rPr lang="zh-TW" altLang="en-US" dirty="0"/>
+              <a:t>餘項。</a:t>
+            </a:r>
+          </a:p>
+          <a:p>
+            <a:pPr>
+              <a:buFont typeface="Arial" panose="020B0604020202020204" pitchFamily="34" charset="0"/>
+              <a:buChar char="•"/>
+            </a:pPr>
+            <a:r>
+              <a:rPr lang="zh-TW" altLang="en-US" b="1" dirty="0"/>
+              <a:t>原始挑戰：</a:t>
+            </a:r>
+            <a:r>
+              <a:rPr lang="zh-TW" altLang="en-US" dirty="0"/>
+              <a:t> * </a:t>
+            </a:r>
+            <a:r>
+              <a:rPr lang="zh-TW" altLang="en-US" b="1" dirty="0"/>
+              <a:t>寬表困境 </a:t>
+            </a:r>
+            <a:r>
+              <a:rPr lang="en-US" altLang="zh-TW" b="1" dirty="0"/>
+              <a:t>(Wide Format)</a:t>
+            </a:r>
+            <a:r>
+              <a:rPr lang="zh-TW" altLang="en-US" b="1" dirty="0"/>
+              <a:t>：</a:t>
+            </a:r>
+            <a:r>
+              <a:rPr lang="zh-TW" altLang="en-US" dirty="0"/>
+              <a:t> 經營主體（台電</a:t>
+            </a:r>
+            <a:r>
+              <a:rPr lang="en-US" altLang="zh-TW" dirty="0"/>
+              <a:t>/</a:t>
+            </a:r>
+            <a:r>
+              <a:rPr lang="zh-TW" altLang="en-US" dirty="0"/>
+              <a:t>民營</a:t>
+            </a:r>
+            <a:r>
+              <a:rPr lang="en-US" altLang="zh-TW" dirty="0"/>
+              <a:t>/</a:t>
+            </a:r>
+            <a:r>
+              <a:rPr lang="zh-TW" altLang="en-US" dirty="0"/>
+              <a:t>自用）與能源細項全擠在欄位名稱中，無法進行動態分類。</a:t>
+            </a:r>
+          </a:p>
+          <a:p>
+            <a:pPr marL="742950" lvl="1" indent="-285750">
+              <a:buFont typeface="Arial" panose="020B0604020202020204" pitchFamily="34" charset="0"/>
+              <a:buChar char="•"/>
+            </a:pPr>
+            <a:r>
+              <a:rPr lang="zh-TW" altLang="en-US" b="1" dirty="0"/>
+              <a:t>命名雜訊：</a:t>
+            </a:r>
+            <a:r>
+              <a:rPr lang="zh-TW" altLang="en-US" dirty="0"/>
+              <a:t> 欄位標題帶有 </a:t>
+            </a:r>
+            <a:r>
+              <a:rPr lang="en-US" altLang="zh-TW" dirty="0">
+                <a:latin typeface="Courier New" panose="02070309020205020404" pitchFamily="49" charset="0"/>
+              </a:rPr>
+              <a:t>(</a:t>
+            </a:r>
+            <a:r>
+              <a:rPr lang="zh-TW" altLang="en-US" dirty="0">
+                <a:latin typeface="Courier New" panose="02070309020205020404" pitchFamily="49" charset="0"/>
+              </a:rPr>
+              <a:t>數值</a:t>
+            </a:r>
+            <a:r>
+              <a:rPr lang="en-US" altLang="zh-TW" dirty="0">
+                <a:latin typeface="Courier New" panose="02070309020205020404" pitchFamily="49" charset="0"/>
+              </a:rPr>
+              <a:t>)</a:t>
+            </a:r>
+            <a:r>
+              <a:rPr lang="zh-TW" altLang="en-US" dirty="0"/>
+              <a:t> 或 </a:t>
+            </a:r>
+            <a:r>
+              <a:rPr lang="en-US" altLang="zh-TW" dirty="0">
+                <a:latin typeface="Courier New" panose="02070309020205020404" pitchFamily="49" charset="0"/>
+              </a:rPr>
+              <a:t>_</a:t>
+            </a:r>
+            <a:r>
+              <a:rPr lang="zh-TW" altLang="en-US" dirty="0">
+                <a:latin typeface="Courier New" panose="02070309020205020404" pitchFamily="49" charset="0"/>
+              </a:rPr>
+              <a:t>全國</a:t>
+            </a:r>
+            <a:r>
+              <a:rPr lang="zh-TW" altLang="en-US" dirty="0"/>
+              <a:t> 等非結構化贅字。</a:t>
+            </a:r>
+          </a:p>
+          <a:p>
+            <a:pPr marL="742950" lvl="1" indent="-285750">
+              <a:buFont typeface="Arial" panose="020B0604020202020204" pitchFamily="34" charset="0"/>
+              <a:buChar char="•"/>
+            </a:pPr>
+            <a:r>
+              <a:rPr lang="zh-TW" altLang="en-US" b="1" dirty="0"/>
+              <a:t>重複計算風險：</a:t>
+            </a:r>
+            <a:r>
+              <a:rPr lang="zh-TW" altLang="en-US" dirty="0"/>
+              <a:t> 原始表包含「全國總量」與「各主體細項」，若不處理會造成數據加倍。</a:t>
+            </a:r>
+          </a:p>
+          <a:p>
+            <a:pPr>
+              <a:buNone/>
+            </a:pPr>
+            <a:r>
+              <a:rPr lang="zh-TW" altLang="en-US" b="1" dirty="0"/>
+              <a:t>階段二：核心 </a:t>
+            </a:r>
+            <a:r>
+              <a:rPr lang="en-US" altLang="zh-TW" b="1" dirty="0"/>
+              <a:t>ETL </a:t>
+            </a:r>
+            <a:r>
+              <a:rPr lang="zh-TW" altLang="en-US" b="1" dirty="0"/>
+              <a:t>清洗流程 </a:t>
+            </a:r>
+            <a:r>
+              <a:rPr lang="en-US" altLang="zh-TW" b="1" dirty="0"/>
+              <a:t>(The Transformation)</a:t>
+            </a:r>
+          </a:p>
+          <a:p>
+            <a:pPr>
+              <a:buNone/>
+            </a:pPr>
+            <a:r>
+              <a:rPr lang="zh-TW" altLang="en-US" dirty="0"/>
+              <a:t>在 </a:t>
+            </a:r>
+            <a:r>
+              <a:rPr lang="en-US" altLang="zh-TW" dirty="0"/>
+              <a:t>Power BI </a:t>
+            </a:r>
+            <a:r>
+              <a:rPr lang="zh-TW" altLang="en-US" dirty="0"/>
+              <a:t>的 </a:t>
+            </a:r>
+            <a:r>
+              <a:rPr lang="en-US" altLang="zh-TW" dirty="0"/>
+              <a:t>Power Query </a:t>
+            </a:r>
+            <a:r>
+              <a:rPr lang="zh-TW" altLang="en-US" dirty="0"/>
+              <a:t>環境中，我們執行了以下關鍵轉換：</a:t>
+            </a:r>
+          </a:p>
+          <a:p>
+            <a:pPr>
+              <a:buFont typeface="+mj-lt"/>
+              <a:buAutoNum type="arabicPeriod"/>
+            </a:pPr>
+            <a:r>
+              <a:rPr lang="zh-TW" altLang="en-US" b="1" dirty="0"/>
+              <a:t>取消樞紐 </a:t>
+            </a:r>
+            <a:r>
+              <a:rPr lang="en-US" altLang="zh-TW" b="1" dirty="0"/>
+              <a:t>(Unpivot Columns)</a:t>
+            </a:r>
+            <a:r>
+              <a:rPr lang="zh-TW" altLang="en-US" b="1" dirty="0"/>
+              <a:t>：</a:t>
+            </a:r>
+            <a:r>
+              <a:rPr lang="zh-TW" altLang="en-US" dirty="0"/>
+              <a:t> 將 </a:t>
+            </a:r>
+            <a:r>
+              <a:rPr lang="en-US" altLang="zh-TW" dirty="0"/>
+              <a:t>50 </a:t>
+            </a:r>
+            <a:r>
+              <a:rPr lang="zh-TW" altLang="en-US" dirty="0"/>
+              <a:t>幾個橫向欄位轉化為縱向的 </a:t>
+            </a:r>
+            <a:r>
+              <a:rPr lang="zh-TW" altLang="en-US" b="1" dirty="0"/>
+              <a:t>「多列 </a:t>
+            </a:r>
+            <a:r>
+              <a:rPr lang="en-US" altLang="zh-TW" b="1" dirty="0"/>
+              <a:t>(Rows) </a:t>
+            </a:r>
+            <a:r>
+              <a:rPr lang="zh-TW" altLang="en-US" b="1" dirty="0"/>
+              <a:t>結構」</a:t>
+            </a:r>
+            <a:r>
+              <a:rPr lang="zh-TW" altLang="en-US" dirty="0"/>
+              <a:t>，讓每一筆數據都配備一組屬性標籤。</a:t>
+            </a:r>
+          </a:p>
+          <a:p>
+            <a:pPr>
+              <a:buFont typeface="+mj-lt"/>
+              <a:buAutoNum type="arabicPeriod"/>
+            </a:pPr>
+            <a:r>
+              <a:rPr lang="zh-TW" altLang="en-US" b="1" dirty="0"/>
+              <a:t>階層式拆分 </a:t>
+            </a:r>
+            <a:r>
+              <a:rPr lang="en-US" altLang="zh-TW" b="1" dirty="0"/>
+              <a:t>(Split by Delimiter)</a:t>
+            </a:r>
+            <a:r>
+              <a:rPr lang="zh-TW" altLang="en-US" b="1" dirty="0"/>
+              <a:t>：</a:t>
+            </a:r>
+            <a:r>
+              <a:rPr lang="zh-TW" altLang="en-US" dirty="0"/>
+              <a:t> 利用底線 </a:t>
+            </a:r>
+            <a:r>
+              <a:rPr lang="en-US" altLang="zh-TW" dirty="0">
+                <a:latin typeface="Courier New" panose="02070309020205020404" pitchFamily="49" charset="0"/>
+              </a:rPr>
+              <a:t>_</a:t>
+            </a:r>
+            <a:r>
+              <a:rPr lang="zh-TW" altLang="en-US" dirty="0"/>
+              <a:t> 將屬性拆解為三個核心維度：</a:t>
+            </a:r>
+            <a:r>
+              <a:rPr lang="en-US" altLang="zh-TW" b="1" dirty="0"/>
+              <a:t>[</a:t>
+            </a:r>
+            <a:r>
+              <a:rPr lang="zh-TW" altLang="en-US" b="1" dirty="0"/>
+              <a:t>經營主體</a:t>
+            </a:r>
+            <a:r>
+              <a:rPr lang="en-US" altLang="zh-TW" b="1" dirty="0"/>
+              <a:t>]</a:t>
+            </a:r>
+            <a:r>
+              <a:rPr lang="zh-TW" altLang="en-US" b="1" dirty="0"/>
+              <a:t>、</a:t>
+            </a:r>
+            <a:r>
+              <a:rPr lang="en-US" altLang="zh-TW" b="1" dirty="0"/>
+              <a:t>[</a:t>
+            </a:r>
+            <a:r>
+              <a:rPr lang="zh-TW" altLang="en-US" b="1" dirty="0"/>
+              <a:t>能源大類</a:t>
+            </a:r>
+            <a:r>
+              <a:rPr lang="en-US" altLang="zh-TW" b="1" dirty="0"/>
+              <a:t>]</a:t>
+            </a:r>
+            <a:r>
+              <a:rPr lang="zh-TW" altLang="en-US" b="1" dirty="0"/>
+              <a:t>、</a:t>
+            </a:r>
+            <a:r>
+              <a:rPr lang="en-US" altLang="zh-TW" b="1" dirty="0"/>
+              <a:t>[</a:t>
+            </a:r>
+            <a:r>
+              <a:rPr lang="zh-TW" altLang="en-US" b="1" dirty="0"/>
+              <a:t>能源細項</a:t>
+            </a:r>
+            <a:r>
+              <a:rPr lang="en-US" altLang="zh-TW" b="1" dirty="0"/>
+              <a:t>]</a:t>
+            </a:r>
+            <a:r>
+              <a:rPr lang="zh-TW" altLang="en-US" dirty="0"/>
+              <a:t>。</a:t>
+            </a:r>
+          </a:p>
+          <a:p>
+            <a:pPr>
+              <a:buFont typeface="+mj-lt"/>
+              <a:buAutoNum type="arabicPeriod"/>
+            </a:pPr>
+            <a:r>
+              <a:rPr lang="zh-TW" altLang="en-US" b="1" dirty="0"/>
+              <a:t>精準清理 </a:t>
+            </a:r>
+            <a:r>
+              <a:rPr lang="en-US" altLang="zh-TW" b="1" dirty="0"/>
+              <a:t>(Data Cleansing)</a:t>
+            </a:r>
+            <a:r>
+              <a:rPr lang="zh-TW" altLang="en-US" b="1" dirty="0"/>
+              <a:t>：</a:t>
+            </a:r>
+            <a:r>
+              <a:rPr lang="zh-TW" altLang="en-US" dirty="0"/>
+              <a:t> * 批次移除 </a:t>
+            </a:r>
+            <a:r>
+              <a:rPr lang="en-US" altLang="zh-TW" dirty="0">
+                <a:latin typeface="Courier New" panose="02070309020205020404" pitchFamily="49" charset="0"/>
+              </a:rPr>
+              <a:t>(</a:t>
+            </a:r>
+            <a:r>
+              <a:rPr lang="zh-TW" altLang="en-US" dirty="0">
+                <a:latin typeface="Courier New" panose="02070309020205020404" pitchFamily="49" charset="0"/>
+              </a:rPr>
+              <a:t>數值</a:t>
+            </a:r>
+            <a:r>
+              <a:rPr lang="en-US" altLang="zh-TW" dirty="0">
+                <a:latin typeface="Courier New" panose="02070309020205020404" pitchFamily="49" charset="0"/>
+              </a:rPr>
+              <a:t>)</a:t>
+            </a:r>
+            <a:r>
+              <a:rPr lang="zh-TW" altLang="en-US" dirty="0"/>
+              <a:t> 與 </a:t>
+            </a:r>
+            <a:r>
+              <a:rPr lang="en-US" altLang="zh-TW" dirty="0">
+                <a:latin typeface="Courier New" panose="02070309020205020404" pitchFamily="49" charset="0"/>
+              </a:rPr>
+              <a:t>_</a:t>
+            </a:r>
+            <a:r>
+              <a:rPr lang="zh-TW" altLang="en-US" dirty="0">
+                <a:latin typeface="Courier New" panose="02070309020205020404" pitchFamily="49" charset="0"/>
+              </a:rPr>
+              <a:t>全國</a:t>
+            </a:r>
+            <a:r>
+              <a:rPr lang="zh-TW" altLang="en-US" dirty="0"/>
+              <a:t> 字眼。</a:t>
+            </a:r>
+          </a:p>
+          <a:p>
+            <a:pPr marL="742950" lvl="1" indent="-285750">
+              <a:buFont typeface="+mj-lt"/>
+              <a:buAutoNum type="arabicPeriod"/>
+            </a:pPr>
+            <a:r>
+              <a:rPr lang="zh-TW" altLang="en-US" dirty="0"/>
+              <a:t>執行 </a:t>
+            </a:r>
+            <a:r>
+              <a:rPr lang="zh-TW" altLang="en-US" b="1" dirty="0"/>
+              <a:t>修剪 </a:t>
+            </a:r>
+            <a:r>
+              <a:rPr lang="en-US" altLang="zh-TW" b="1" dirty="0"/>
+              <a:t>(Trim)</a:t>
+            </a:r>
+            <a:r>
+              <a:rPr lang="zh-TW" altLang="en-US" dirty="0"/>
+              <a:t> 與 </a:t>
+            </a:r>
+            <a:r>
+              <a:rPr lang="zh-TW" altLang="en-US" b="1" dirty="0"/>
+              <a:t>清除 </a:t>
+            </a:r>
+            <a:r>
+              <a:rPr lang="en-US" altLang="zh-TW" b="1" dirty="0"/>
+              <a:t>(Clean)</a:t>
+            </a:r>
+            <a:r>
+              <a:rPr lang="zh-TW" altLang="en-US" dirty="0"/>
+              <a:t>，排除看不見的空白字元，確保資料比對 </a:t>
+            </a:r>
+            <a:r>
+              <a:rPr lang="en-US" altLang="zh-TW" dirty="0"/>
+              <a:t>100% </a:t>
+            </a:r>
+            <a:r>
+              <a:rPr lang="zh-TW" altLang="en-US" dirty="0"/>
+              <a:t>精確。</a:t>
+            </a:r>
+          </a:p>
+          <a:p>
+            <a:pPr>
+              <a:buFont typeface="+mj-lt"/>
+              <a:buAutoNum type="arabicPeriod"/>
+            </a:pPr>
+            <a:r>
+              <a:rPr lang="zh-TW" altLang="en-US" b="1" dirty="0"/>
+              <a:t>條件式校正 </a:t>
+            </a:r>
+            <a:r>
+              <a:rPr lang="en-US" altLang="zh-TW" b="1" dirty="0"/>
+              <a:t>(Conditional Alignment)</a:t>
+            </a:r>
+            <a:r>
+              <a:rPr lang="zh-TW" altLang="en-US" b="1" dirty="0"/>
+              <a:t>：</a:t>
+            </a:r>
+            <a:r>
+              <a:rPr lang="zh-TW" altLang="en-US" dirty="0"/>
+              <a:t> 針對核能等不對稱層級（只有兩層），利用「條件式資料行」實施 </a:t>
+            </a:r>
+            <a:r>
+              <a:rPr lang="zh-TW" altLang="en-US" b="1" dirty="0"/>
+              <a:t>「向左填補邏輯」</a:t>
+            </a:r>
+            <a:r>
+              <a:rPr lang="zh-TW" altLang="en-US" dirty="0"/>
+              <a:t>，確保所有標籤對齊。</a:t>
+            </a:r>
+          </a:p>
+          <a:p>
+            <a:pPr>
+              <a:buNone/>
+            </a:pPr>
+            <a:r>
+              <a:rPr lang="zh-TW" altLang="en-US" b="1" dirty="0"/>
+              <a:t>階段三：特徵工程與價值定義 </a:t>
+            </a:r>
+            <a:r>
+              <a:rPr lang="en-US" altLang="zh-TW" b="1" dirty="0"/>
+              <a:t>(Feature Engineering)</a:t>
+            </a:r>
+          </a:p>
+          <a:p>
+            <a:pPr>
+              <a:buFont typeface="Arial" panose="020B0604020202020204" pitchFamily="34" charset="0"/>
+              <a:buChar char="•"/>
+            </a:pPr>
+            <a:r>
+              <a:rPr lang="zh-TW" altLang="en-US" b="1" dirty="0"/>
+              <a:t>新增「潔淨能源」判定欄位：</a:t>
+            </a:r>
+            <a:r>
+              <a:rPr lang="zh-TW" altLang="en-US" dirty="0"/>
+              <a:t> * </a:t>
+            </a:r>
+            <a:r>
+              <a:rPr lang="zh-TW" altLang="en-US" b="1" dirty="0"/>
+              <a:t>邏輯定義：</a:t>
+            </a:r>
+            <a:r>
+              <a:rPr lang="zh-TW" altLang="en-US" dirty="0"/>
+              <a:t> 將 </a:t>
+            </a:r>
+            <a:r>
+              <a:rPr lang="zh-TW" altLang="en-US" dirty="0">
+                <a:latin typeface="Courier New" panose="02070309020205020404" pitchFamily="49" charset="0"/>
+              </a:rPr>
+              <a:t>再生能源</a:t>
+            </a:r>
+            <a:r>
+              <a:rPr lang="zh-TW" altLang="en-US" dirty="0"/>
+              <a:t> 與 </a:t>
+            </a:r>
+            <a:r>
+              <a:rPr lang="zh-TW" altLang="en-US" dirty="0">
+                <a:latin typeface="Courier New" panose="02070309020205020404" pitchFamily="49" charset="0"/>
+              </a:rPr>
+              <a:t>核能</a:t>
+            </a:r>
+            <a:r>
+              <a:rPr lang="zh-TW" altLang="en-US" dirty="0"/>
+              <a:t> 統一標註為 </a:t>
+            </a:r>
+            <a:r>
+              <a:rPr lang="zh-TW" altLang="en-US" b="1" dirty="0"/>
+              <a:t>「潔淨能源」</a:t>
+            </a:r>
+            <a:r>
+              <a:rPr lang="zh-TW" altLang="en-US" dirty="0"/>
+              <a:t>，其餘標註為 </a:t>
+            </a:r>
+            <a:r>
+              <a:rPr lang="zh-TW" altLang="en-US" b="1" dirty="0"/>
+              <a:t>「傳統火力」</a:t>
+            </a:r>
+            <a:r>
+              <a:rPr lang="zh-TW" altLang="en-US" dirty="0"/>
+              <a:t>。</a:t>
+            </a:r>
+          </a:p>
+          <a:p>
+            <a:pPr marL="742950" lvl="1" indent="-285750">
+              <a:buFont typeface="Arial" panose="020B0604020202020204" pitchFamily="34" charset="0"/>
+              <a:buChar char="•"/>
+            </a:pPr>
+            <a:r>
+              <a:rPr lang="zh-TW" altLang="en-US" b="1" dirty="0"/>
+              <a:t>特殊處理：</a:t>
+            </a:r>
+            <a:r>
+              <a:rPr lang="zh-TW" altLang="en-US" dirty="0"/>
+              <a:t> 將 </a:t>
+            </a:r>
+            <a:r>
+              <a:rPr lang="zh-TW" altLang="en-US" b="1" dirty="0"/>
+              <a:t>「抽蓄水力」</a:t>
+            </a:r>
+            <a:r>
+              <a:rPr lang="zh-TW" altLang="en-US" dirty="0"/>
+              <a:t> 納入標籤，作為儲能調度的觀測指標。</a:t>
+            </a:r>
+          </a:p>
+          <a:p>
+            <a:pPr>
+              <a:buFont typeface="Arial" panose="020B0604020202020204" pitchFamily="34" charset="0"/>
+              <a:buChar char="•"/>
+            </a:pPr>
+            <a:r>
+              <a:rPr lang="en-US" altLang="zh-TW" b="1" dirty="0"/>
+              <a:t>DAX </a:t>
+            </a:r>
+            <a:r>
+              <a:rPr lang="zh-TW" altLang="en-US" b="1" dirty="0"/>
+              <a:t>建模：</a:t>
+            </a:r>
+            <a:r>
+              <a:rPr lang="zh-TW" altLang="en-US" dirty="0"/>
+              <a:t> 撰寫動態量值 </a:t>
+            </a:r>
+            <a:r>
+              <a:rPr lang="en-US" altLang="zh-TW" dirty="0"/>
+              <a:t>(Measures)</a:t>
+            </a:r>
+            <a:r>
+              <a:rPr lang="zh-TW" altLang="en-US" dirty="0"/>
+              <a:t>，即時計算 </a:t>
+            </a:r>
+            <a:r>
+              <a:rPr lang="zh-TW" altLang="en-US" b="1" dirty="0"/>
+              <a:t>「潔淨能源佔比 </a:t>
+            </a:r>
+            <a:r>
+              <a:rPr lang="en-US" altLang="zh-TW" b="1" dirty="0"/>
+              <a:t>%</a:t>
+            </a:r>
+            <a:r>
+              <a:rPr lang="zh-TW" altLang="en-US" b="1" dirty="0"/>
+              <a:t>」</a:t>
+            </a:r>
+            <a:r>
+              <a:rPr lang="zh-TW" altLang="en-US" dirty="0"/>
+              <a:t>。</a:t>
+            </a:r>
+          </a:p>
+          <a:p>
+            <a:pPr>
+              <a:buNone/>
+            </a:pPr>
+            <a:r>
+              <a:rPr lang="zh-TW" altLang="en-US" b="1" dirty="0"/>
+              <a:t>階段四：專題分析發現預告 </a:t>
+            </a:r>
+            <a:r>
+              <a:rPr lang="en-US" altLang="zh-TW" b="1" dirty="0"/>
+              <a:t>(Analytical Insights)</a:t>
+            </a:r>
+          </a:p>
+          <a:p>
+            <a:pPr>
+              <a:buFont typeface="Arial" panose="020B0604020202020204" pitchFamily="34" charset="0"/>
+              <a:buChar char="•"/>
+            </a:pPr>
+            <a:r>
+              <a:rPr lang="zh-TW" altLang="en-US" b="1" dirty="0"/>
+              <a:t>結構交叉分析 </a:t>
+            </a:r>
+            <a:r>
+              <a:rPr lang="en-US" altLang="zh-TW" b="1" dirty="0"/>
+              <a:t>(</a:t>
+            </a:r>
+            <a:r>
+              <a:rPr lang="zh-TW" altLang="en-US" b="1" dirty="0"/>
+              <a:t>方向四</a:t>
+            </a:r>
+            <a:r>
+              <a:rPr lang="en-US" altLang="zh-TW" b="1" dirty="0"/>
+              <a:t>)</a:t>
+            </a:r>
+            <a:r>
+              <a:rPr lang="zh-TW" altLang="en-US" b="1" dirty="0"/>
+              <a:t>：</a:t>
+            </a:r>
+            <a:r>
+              <a:rPr lang="zh-TW" altLang="en-US" dirty="0"/>
+              <a:t> 成功鎖定再生能源超越核能的歷史「黃金交叉點」。</a:t>
+            </a:r>
+          </a:p>
+          <a:p>
+            <a:pPr>
+              <a:buFont typeface="Arial" panose="020B0604020202020204" pitchFamily="34" charset="0"/>
+              <a:buChar char="•"/>
+            </a:pPr>
+            <a:r>
+              <a:rPr lang="zh-TW" altLang="en-US" b="1" dirty="0"/>
+              <a:t>主體動能對比 </a:t>
+            </a:r>
+            <a:r>
+              <a:rPr lang="en-US" altLang="zh-TW" b="1" dirty="0"/>
+              <a:t>(</a:t>
+            </a:r>
+            <a:r>
+              <a:rPr lang="zh-TW" altLang="en-US" b="1" dirty="0"/>
+              <a:t>方向三</a:t>
+            </a:r>
+            <a:r>
+              <a:rPr lang="en-US" altLang="zh-TW" b="1" dirty="0"/>
+              <a:t>)</a:t>
+            </a:r>
+            <a:r>
+              <a:rPr lang="zh-TW" altLang="en-US" b="1" dirty="0"/>
+              <a:t>：</a:t>
+            </a:r>
+            <a:r>
+              <a:rPr lang="zh-TW" altLang="en-US" dirty="0"/>
+              <a:t> 實證 </a:t>
+            </a:r>
+            <a:r>
+              <a:rPr lang="zh-TW" altLang="en-US" b="1" dirty="0"/>
+              <a:t>「自用發電設備」</a:t>
+            </a:r>
+            <a:r>
+              <a:rPr lang="zh-TW" altLang="en-US" dirty="0"/>
+              <a:t> 在潔淨能源佔比的成長率遠高於國營電廠，反映企業 </a:t>
+            </a:r>
+            <a:r>
+              <a:rPr lang="en-US" altLang="zh-TW" dirty="0"/>
+              <a:t>ESG </a:t>
+            </a:r>
+            <a:r>
+              <a:rPr lang="zh-TW" altLang="en-US" dirty="0"/>
+              <a:t>的強勁拉動力。</a:t>
+            </a:r>
+          </a:p>
+          <a:p>
+            <a:pPr>
+              <a:buNone/>
+            </a:pPr>
+            <a:br>
+              <a:rPr lang="zh-TW" altLang="en-US" dirty="0"/>
+            </a:br>
+            <a:endParaRPr lang="zh-TW" altLang="en-US" dirty="0"/>
+          </a:p>
+          <a:p>
+            <a:pPr>
+              <a:buNone/>
+            </a:pPr>
+            <a:r>
+              <a:rPr lang="zh-TW" altLang="en-US" b="1" dirty="0"/>
+              <a:t>💡 簡報呈現小秘訣</a:t>
+            </a:r>
+          </a:p>
+          <a:p>
+            <a:pPr>
+              <a:buFont typeface="+mj-lt"/>
+              <a:buAutoNum type="arabicPeriod"/>
+            </a:pPr>
+            <a:r>
+              <a:rPr lang="zh-TW" altLang="en-US" b="1" dirty="0"/>
+              <a:t>放一張 </a:t>
+            </a:r>
+            <a:r>
+              <a:rPr lang="en-US" altLang="zh-TW" b="1" dirty="0"/>
+              <a:t>Before/After </a:t>
+            </a:r>
+            <a:r>
+              <a:rPr lang="zh-TW" altLang="en-US" b="1" dirty="0"/>
+              <a:t>圖：</a:t>
+            </a:r>
+            <a:r>
+              <a:rPr lang="zh-TW" altLang="en-US" dirty="0"/>
+              <a:t> 左邊放雜亂的 </a:t>
+            </a:r>
+            <a:r>
+              <a:rPr lang="en-US" altLang="zh-TW" dirty="0"/>
+              <a:t>Excel </a:t>
+            </a:r>
+            <a:r>
+              <a:rPr lang="zh-TW" altLang="en-US" dirty="0"/>
+              <a:t>原始截圖，右邊放你整理好的漂亮長表。</a:t>
+            </a:r>
+          </a:p>
+          <a:p>
+            <a:pPr>
+              <a:buFont typeface="+mj-lt"/>
+              <a:buAutoNum type="arabicPeriod"/>
+            </a:pPr>
+            <a:r>
+              <a:rPr lang="zh-TW" altLang="en-US" b="1" dirty="0"/>
+              <a:t>強調「自動化」：</a:t>
+            </a:r>
+            <a:r>
+              <a:rPr lang="zh-TW" altLang="en-US" dirty="0"/>
+              <a:t> 提到這套 </a:t>
+            </a:r>
+            <a:r>
+              <a:rPr lang="en-US" altLang="zh-TW" dirty="0"/>
+              <a:t>ETL </a:t>
+            </a:r>
+            <a:r>
+              <a:rPr lang="zh-TW" altLang="en-US" dirty="0"/>
+              <a:t>流程未來只要「點擊重新整理」，就能自動處理 </a:t>
+            </a:r>
+            <a:r>
+              <a:rPr lang="en-US" altLang="zh-TW" dirty="0"/>
+              <a:t>2026 </a:t>
+            </a:r>
+            <a:r>
+              <a:rPr lang="zh-TW" altLang="en-US" dirty="0"/>
+              <a:t>年以後的新數據，這展現了你的</a:t>
+            </a:r>
+            <a:r>
+              <a:rPr lang="zh-TW" altLang="en-US" b="1" dirty="0"/>
+              <a:t>工程思維</a:t>
+            </a:r>
+            <a:r>
+              <a:rPr lang="zh-TW" altLang="en-US" dirty="0"/>
+              <a:t>。</a:t>
+            </a:r>
+          </a:p>
+        </p:txBody>
+      </p:sp>
+    </p:spTree>
+    <p:extLst>
+      <p:ext uri="{BB962C8B-B14F-4D97-AF65-F5344CB8AC3E}">
+        <p14:creationId xmlns:p14="http://schemas.microsoft.com/office/powerpoint/2010/main" val="92267392"/>
+      </p:ext>
+    </p:extLst>
+  </p:cSld>
+  <p:clrMapOvr>
+    <a:masterClrMapping/>
+  </p:clrMapOvr>
+</p:sld>
+</file>
+
+<file path=ppt/slides/slide21.xml><?xml version="1.0" encoding="utf-8"?>
+<p:sld xmlns:a="http://schemas.openxmlformats.org/drawingml/2006/main" xmlns:r="http://schemas.openxmlformats.org/officeDocument/2006/relationships" xmlns:p="http://schemas.openxmlformats.org/presentationml/2006/main">
+  <p:cSld>
+    <p:spTree>
+      <p:nvGrpSpPr>
+        <p:cNvPr id="1" name=""/>
+        <p:cNvGrpSpPr/>
+        <p:nvPr/>
+      </p:nvGrpSpPr>
+      <p:grpSpPr>
+        <a:xfrm>
+          <a:off x="0" y="0"/>
+          <a:ext cx="0" cy="0"/>
+          <a:chOff x="0" y="0"/>
+          <a:chExt cx="0" cy="0"/>
+        </a:xfrm>
+      </p:grpSpPr>
+      <p:sp>
+        <p:nvSpPr>
+          <p:cNvPr id="2" name="標題 1">
+            <a:extLst>
+              <a:ext uri="{FF2B5EF4-FFF2-40B4-BE49-F238E27FC236}">
                 <a16:creationId xmlns:a16="http://schemas.microsoft.com/office/drawing/2014/main" id="{2012A99B-5995-015E-CA3A-30F5F5478ECE}"/>
               </a:ext>
             </a:extLst>
@@ -8243,7 +8327,7 @@
 </p:sld>
 </file>
 
-<file path=ppt/slides/slide21.xml><?xml version="1.0" encoding="utf-8"?>
+<file path=ppt/slides/slide22.xml><?xml version="1.0" encoding="utf-8"?>
 <p:sld xmlns:a="http://schemas.openxmlformats.org/drawingml/2006/main" xmlns:r="http://schemas.openxmlformats.org/officeDocument/2006/relationships" xmlns:p="http://schemas.openxmlformats.org/presentationml/2006/main">
   <p:cSld>
     <p:spTree>
@@ -8581,7 +8665,12 @@
             <p:ph idx="1"/>
           </p:nvPr>
         </p:nvSpPr>
-        <p:spPr/>
+        <p:spPr>
+          <a:xfrm>
+            <a:off x="838200" y="1825625"/>
+            <a:ext cx="10515600" cy="2057753"/>
+          </a:xfrm>
+        </p:spPr>
         <p:txBody>
           <a:bodyPr/>
           <a:lstStyle/>
@@ -8637,6 +8726,140 @@
           </a:p>
           <a:p>
             <a:endParaRPr lang="zh-TW" altLang="en-US" dirty="0"/>
+          </a:p>
+        </p:txBody>
+      </p:sp>
+      <p:sp>
+        <p:nvSpPr>
+          <p:cNvPr id="5" name="文字方塊 4">
+            <a:extLst>
+              <a:ext uri="{FF2B5EF4-FFF2-40B4-BE49-F238E27FC236}">
+                <a16:creationId xmlns:a16="http://schemas.microsoft.com/office/drawing/2014/main" id="{AFE5E3F6-6908-F65E-5A6B-3095253E5412}"/>
+              </a:ext>
+            </a:extLst>
+          </p:cNvPr>
+          <p:cNvSpPr txBox="1"/>
+          <p:nvPr/>
+        </p:nvSpPr>
+        <p:spPr>
+          <a:xfrm>
+            <a:off x="1535289" y="4018315"/>
+            <a:ext cx="6096000" cy="1200329"/>
+          </a:xfrm>
+          <a:prstGeom prst="rect">
+            <a:avLst/>
+          </a:prstGeom>
+          <a:noFill/>
+        </p:spPr>
+        <p:txBody>
+          <a:bodyPr wrap="square">
+            <a:spAutoFit/>
+          </a:bodyPr>
+          <a:lstStyle/>
+          <a:p>
+            <a:r>
+              <a:rPr lang="zh-TW" altLang="en-US" b="1"/>
+              <a:t>「</a:t>
+            </a:r>
+            <a:r>
+              <a:rPr lang="zh-TW" altLang="en-US" b="1" dirty="0"/>
+              <a:t>數據說明：</a:t>
+            </a:r>
+            <a:r>
+              <a:rPr lang="zh-TW" altLang="en-US" dirty="0"/>
+              <a:t> 本研究之</a:t>
+            </a:r>
+            <a:r>
+              <a:rPr lang="en-US" altLang="zh-TW" dirty="0"/>
+              <a:t>『</a:t>
+            </a:r>
+            <a:r>
+              <a:rPr lang="zh-TW" altLang="en-US" dirty="0"/>
+              <a:t>民間自用</a:t>
+            </a:r>
+            <a:r>
+              <a:rPr lang="en-US" altLang="zh-TW" dirty="0"/>
+              <a:t>』</a:t>
+            </a:r>
+            <a:r>
+              <a:rPr lang="zh-TW" altLang="en-US" dirty="0"/>
+              <a:t>數據源自台電併網統計與能源署備案資料，涵蓋工業、農業及住宅之自用發電設備。增幅之計算基礎為正式申報之發電量，反映了台灣分散式電力系統的實質滲透程度。」</a:t>
+            </a:r>
+          </a:p>
+        </p:txBody>
+      </p:sp>
+      <p:sp>
+        <p:nvSpPr>
+          <p:cNvPr id="7" name="文字方塊 6">
+            <a:extLst>
+              <a:ext uri="{FF2B5EF4-FFF2-40B4-BE49-F238E27FC236}">
+                <a16:creationId xmlns:a16="http://schemas.microsoft.com/office/drawing/2014/main" id="{2040D312-4C5E-4C01-E6D5-FFE282077E1E}"/>
+              </a:ext>
+            </a:extLst>
+          </p:cNvPr>
+          <p:cNvSpPr txBox="1"/>
+          <p:nvPr/>
+        </p:nvSpPr>
+        <p:spPr>
+          <a:xfrm>
+            <a:off x="1535289" y="5518414"/>
+            <a:ext cx="6096000" cy="1200329"/>
+          </a:xfrm>
+          <a:prstGeom prst="rect">
+            <a:avLst/>
+          </a:prstGeom>
+          <a:noFill/>
+        </p:spPr>
+        <p:txBody>
+          <a:bodyPr wrap="square">
+            <a:spAutoFit/>
+          </a:bodyPr>
+          <a:lstStyle/>
+          <a:p>
+            <a:r>
+              <a:rPr lang="zh-TW" altLang="en-US" dirty="0"/>
+              <a:t>「民營電廠的角色已從早期的</a:t>
+            </a:r>
+            <a:r>
+              <a:rPr lang="en-US" altLang="zh-TW" dirty="0"/>
+              <a:t>『</a:t>
+            </a:r>
+            <a:r>
+              <a:rPr lang="zh-TW" altLang="en-US" dirty="0"/>
+              <a:t>火力補充</a:t>
+            </a:r>
+            <a:r>
+              <a:rPr lang="en-US" altLang="zh-TW" dirty="0"/>
+              <a:t>』</a:t>
+            </a:r>
+            <a:r>
+              <a:rPr lang="zh-TW" altLang="en-US" dirty="0"/>
+              <a:t>轉型為</a:t>
+            </a:r>
+            <a:r>
+              <a:rPr lang="en-US" altLang="zh-TW" dirty="0"/>
+              <a:t>『</a:t>
+            </a:r>
+            <a:r>
+              <a:rPr lang="zh-TW" altLang="en-US" dirty="0"/>
+              <a:t>綠能主力</a:t>
+            </a:r>
+            <a:r>
+              <a:rPr lang="en-US" altLang="zh-TW" dirty="0"/>
+              <a:t>』</a:t>
+            </a:r>
+            <a:r>
+              <a:rPr lang="zh-TW" altLang="en-US" dirty="0"/>
+              <a:t>。研究數據顯示，民營綠能在 </a:t>
+            </a:r>
+            <a:r>
+              <a:rPr lang="en-US" altLang="zh-TW" dirty="0"/>
+              <a:t>2017-2025 </a:t>
+            </a:r>
+            <a:r>
+              <a:rPr lang="zh-TW" altLang="en-US" dirty="0"/>
+              <a:t>年間的爆發式增長，主要受益於離岸風電與大型光電場的併網，其規模化效應明顯高於分散式的民間自用設備。」</a:t>
+            </a:r>
           </a:p>
         </p:txBody>
       </p:sp>

--- a/《誰在推動綠能？——.pptx
+++ b/《誰在推動綠能？——.pptx
@@ -27,6 +27,7 @@
     <p:sldId id="261" r:id="rId21"/>
     <p:sldId id="270" r:id="rId22"/>
     <p:sldId id="271" r:id="rId23"/>
+    <p:sldId id="278" r:id="rId24"/>
   </p:sldIdLst>
   <p:sldSz cx="12192000" cy="6858000"/>
   <p:notesSz cx="6858000" cy="9144000"/>
@@ -280,7 +281,7 @@
           <a:p>
             <a:fld id="{9CD0EF91-A124-4443-A6AC-125C7A94C0BC}" type="datetimeFigureOut">
               <a:rPr lang="zh-TW" altLang="en-US" smtClean="0"/>
-              <a:t>2026/3/25</a:t>
+              <a:t>2026/3/31</a:t>
             </a:fld>
             <a:endParaRPr lang="zh-TW" altLang="en-US"/>
           </a:p>
@@ -478,7 +479,7 @@
           <a:p>
             <a:fld id="{9CD0EF91-A124-4443-A6AC-125C7A94C0BC}" type="datetimeFigureOut">
               <a:rPr lang="zh-TW" altLang="en-US" smtClean="0"/>
-              <a:t>2026/3/25</a:t>
+              <a:t>2026/3/31</a:t>
             </a:fld>
             <a:endParaRPr lang="zh-TW" altLang="en-US"/>
           </a:p>
@@ -686,7 +687,7 @@
           <a:p>
             <a:fld id="{9CD0EF91-A124-4443-A6AC-125C7A94C0BC}" type="datetimeFigureOut">
               <a:rPr lang="zh-TW" altLang="en-US" smtClean="0"/>
-              <a:t>2026/3/25</a:t>
+              <a:t>2026/3/31</a:t>
             </a:fld>
             <a:endParaRPr lang="zh-TW" altLang="en-US"/>
           </a:p>
@@ -884,7 +885,7 @@
           <a:p>
             <a:fld id="{9CD0EF91-A124-4443-A6AC-125C7A94C0BC}" type="datetimeFigureOut">
               <a:rPr lang="zh-TW" altLang="en-US" smtClean="0"/>
-              <a:t>2026/3/25</a:t>
+              <a:t>2026/3/31</a:t>
             </a:fld>
             <a:endParaRPr lang="zh-TW" altLang="en-US"/>
           </a:p>
@@ -1159,7 +1160,7 @@
           <a:p>
             <a:fld id="{9CD0EF91-A124-4443-A6AC-125C7A94C0BC}" type="datetimeFigureOut">
               <a:rPr lang="zh-TW" altLang="en-US" smtClean="0"/>
-              <a:t>2026/3/25</a:t>
+              <a:t>2026/3/31</a:t>
             </a:fld>
             <a:endParaRPr lang="zh-TW" altLang="en-US"/>
           </a:p>
@@ -1424,7 +1425,7 @@
           <a:p>
             <a:fld id="{9CD0EF91-A124-4443-A6AC-125C7A94C0BC}" type="datetimeFigureOut">
               <a:rPr lang="zh-TW" altLang="en-US" smtClean="0"/>
-              <a:t>2026/3/25</a:t>
+              <a:t>2026/3/31</a:t>
             </a:fld>
             <a:endParaRPr lang="zh-TW" altLang="en-US"/>
           </a:p>
@@ -1836,7 +1837,7 @@
           <a:p>
             <a:fld id="{9CD0EF91-A124-4443-A6AC-125C7A94C0BC}" type="datetimeFigureOut">
               <a:rPr lang="zh-TW" altLang="en-US" smtClean="0"/>
-              <a:t>2026/3/25</a:t>
+              <a:t>2026/3/31</a:t>
             </a:fld>
             <a:endParaRPr lang="zh-TW" altLang="en-US"/>
           </a:p>
@@ -1977,7 +1978,7 @@
           <a:p>
             <a:fld id="{9CD0EF91-A124-4443-A6AC-125C7A94C0BC}" type="datetimeFigureOut">
               <a:rPr lang="zh-TW" altLang="en-US" smtClean="0"/>
-              <a:t>2026/3/25</a:t>
+              <a:t>2026/3/31</a:t>
             </a:fld>
             <a:endParaRPr lang="zh-TW" altLang="en-US"/>
           </a:p>
@@ -2090,7 +2091,7 @@
           <a:p>
             <a:fld id="{9CD0EF91-A124-4443-A6AC-125C7A94C0BC}" type="datetimeFigureOut">
               <a:rPr lang="zh-TW" altLang="en-US" smtClean="0"/>
-              <a:t>2026/3/25</a:t>
+              <a:t>2026/3/31</a:t>
             </a:fld>
             <a:endParaRPr lang="zh-TW" altLang="en-US"/>
           </a:p>
@@ -2401,7 +2402,7 @@
           <a:p>
             <a:fld id="{9CD0EF91-A124-4443-A6AC-125C7A94C0BC}" type="datetimeFigureOut">
               <a:rPr lang="zh-TW" altLang="en-US" smtClean="0"/>
-              <a:t>2026/3/25</a:t>
+              <a:t>2026/3/31</a:t>
             </a:fld>
             <a:endParaRPr lang="zh-TW" altLang="en-US"/>
           </a:p>
@@ -2689,7 +2690,7 @@
           <a:p>
             <a:fld id="{9CD0EF91-A124-4443-A6AC-125C7A94C0BC}" type="datetimeFigureOut">
               <a:rPr lang="zh-TW" altLang="en-US" smtClean="0"/>
-              <a:t>2026/3/25</a:t>
+              <a:t>2026/3/31</a:t>
             </a:fld>
             <a:endParaRPr lang="zh-TW" altLang="en-US"/>
           </a:p>
@@ -2930,7 +2931,7 @@
           <a:p>
             <a:fld id="{9CD0EF91-A124-4443-A6AC-125C7A94C0BC}" type="datetimeFigureOut">
               <a:rPr lang="zh-TW" altLang="en-US" smtClean="0"/>
-              <a:t>2026/3/25</a:t>
+              <a:t>2026/3/31</a:t>
             </a:fld>
             <a:endParaRPr lang="zh-TW" altLang="en-US"/>
           </a:p>
@@ -8470,6 +8471,175 @@
 </p:sld>
 </file>
 
+<file path=ppt/slides/slide23.xml><?xml version="1.0" encoding="utf-8"?>
+<p:sld xmlns:a="http://schemas.openxmlformats.org/drawingml/2006/main" xmlns:r="http://schemas.openxmlformats.org/officeDocument/2006/relationships" xmlns:p="http://schemas.openxmlformats.org/presentationml/2006/main">
+  <p:cSld>
+    <p:spTree>
+      <p:nvGrpSpPr>
+        <p:cNvPr id="1" name=""/>
+        <p:cNvGrpSpPr/>
+        <p:nvPr/>
+      </p:nvGrpSpPr>
+      <p:grpSpPr>
+        <a:xfrm>
+          <a:off x="0" y="0"/>
+          <a:ext cx="0" cy="0"/>
+          <a:chOff x="0" y="0"/>
+          <a:chExt cx="0" cy="0"/>
+        </a:xfrm>
+      </p:grpSpPr>
+      <p:sp>
+        <p:nvSpPr>
+          <p:cNvPr id="2" name="標題 1">
+            <a:extLst>
+              <a:ext uri="{FF2B5EF4-FFF2-40B4-BE49-F238E27FC236}">
+                <a16:creationId xmlns:a16="http://schemas.microsoft.com/office/drawing/2014/main" id="{ADD95F4C-5C96-7068-9455-85D1C0DECC34}"/>
+              </a:ext>
+            </a:extLst>
+          </p:cNvPr>
+          <p:cNvSpPr>
+            <a:spLocks noGrp="1"/>
+          </p:cNvSpPr>
+          <p:nvPr>
+            <p:ph type="title"/>
+          </p:nvPr>
+        </p:nvSpPr>
+        <p:spPr/>
+        <p:txBody>
+          <a:bodyPr/>
+          <a:lstStyle/>
+          <a:p>
+            <a:endParaRPr lang="zh-TW" altLang="en-US"/>
+          </a:p>
+        </p:txBody>
+      </p:sp>
+      <p:sp>
+        <p:nvSpPr>
+          <p:cNvPr id="4" name="矩形 3">
+            <a:extLst>
+              <a:ext uri="{FF2B5EF4-FFF2-40B4-BE49-F238E27FC236}">
+                <a16:creationId xmlns:a16="http://schemas.microsoft.com/office/drawing/2014/main" id="{3A9F71E9-4089-B16D-2A35-243D04ACF829}"/>
+              </a:ext>
+            </a:extLst>
+          </p:cNvPr>
+          <p:cNvSpPr/>
+          <p:nvPr/>
+        </p:nvSpPr>
+        <p:spPr>
+          <a:xfrm>
+            <a:off x="2939143" y="2969948"/>
+            <a:ext cx="5621867" cy="2709333"/>
+          </a:xfrm>
+          <a:prstGeom prst="rect">
+            <a:avLst/>
+          </a:prstGeom>
+          <a:gradFill>
+            <a:gsLst>
+              <a:gs pos="0">
+                <a:schemeClr val="accent3">
+                  <a:lumMod val="5000"/>
+                  <a:lumOff val="95000"/>
+                </a:schemeClr>
+              </a:gs>
+              <a:gs pos="100000">
+                <a:schemeClr val="accent3">
+                  <a:lumMod val="30000"/>
+                  <a:lumOff val="70000"/>
+                </a:schemeClr>
+              </a:gs>
+            </a:gsLst>
+            <a:lin ang="2700000" scaled="1"/>
+          </a:gradFill>
+        </p:spPr>
+        <p:style>
+          <a:lnRef idx="2">
+            <a:schemeClr val="accent1">
+              <a:shade val="15000"/>
+            </a:schemeClr>
+          </a:lnRef>
+          <a:fillRef idx="1">
+            <a:schemeClr val="accent1"/>
+          </a:fillRef>
+          <a:effectRef idx="0">
+            <a:schemeClr val="accent1"/>
+          </a:effectRef>
+          <a:fontRef idx="minor">
+            <a:schemeClr val="lt1"/>
+          </a:fontRef>
+        </p:style>
+        <p:txBody>
+          <a:bodyPr rtlCol="0" anchor="ctr"/>
+          <a:lstStyle/>
+          <a:p>
+            <a:pPr algn="ctr"/>
+            <a:endParaRPr lang="zh-TW" altLang="en-US" dirty="0"/>
+          </a:p>
+        </p:txBody>
+      </p:sp>
+      <p:sp>
+        <p:nvSpPr>
+          <p:cNvPr id="6" name="文字方塊 5">
+            <a:extLst>
+              <a:ext uri="{FF2B5EF4-FFF2-40B4-BE49-F238E27FC236}">
+                <a16:creationId xmlns:a16="http://schemas.microsoft.com/office/drawing/2014/main" id="{23480EE8-E653-2F80-6F9E-E434FBCDF1A7}"/>
+              </a:ext>
+            </a:extLst>
+          </p:cNvPr>
+          <p:cNvSpPr txBox="1"/>
+          <p:nvPr/>
+        </p:nvSpPr>
+        <p:spPr>
+          <a:xfrm>
+            <a:off x="3046912" y="2967335"/>
+            <a:ext cx="6093822" cy="923330"/>
+          </a:xfrm>
+          <a:prstGeom prst="rect">
+            <a:avLst/>
+          </a:prstGeom>
+          <a:noFill/>
+        </p:spPr>
+        <p:txBody>
+          <a:bodyPr wrap="square">
+            <a:spAutoFit/>
+          </a:bodyPr>
+          <a:lstStyle/>
+          <a:p>
+            <a:r>
+              <a:rPr lang="zh-TW" altLang="en-US"/>
+              <a:t>「註：</a:t>
+            </a:r>
+            <a:r>
+              <a:rPr lang="en-US" altLang="zh-TW" dirty="0"/>
+              <a:t>2025 </a:t>
+            </a:r>
+            <a:r>
+              <a:rPr lang="zh-TW" altLang="en-US" dirty="0"/>
+              <a:t>年數據包含預測與政策目標值。再生能源的顯著增長主要集中於 </a:t>
+            </a:r>
+            <a:r>
+              <a:rPr lang="en-US" altLang="zh-TW" dirty="0"/>
+              <a:t>10:00 - 14:00 </a:t>
+            </a:r>
+            <a:r>
+              <a:rPr lang="zh-TW" altLang="en-US" dirty="0"/>
+              <a:t>的光電尖峰，有效分擔了傳統機組在夏季高溫下的運轉壓力。</a:t>
+            </a:r>
+          </a:p>
+        </p:txBody>
+      </p:sp>
+    </p:spTree>
+    <p:extLst>
+      <p:ext uri="{BB962C8B-B14F-4D97-AF65-F5344CB8AC3E}">
+        <p14:creationId xmlns:p14="http://schemas.microsoft.com/office/powerpoint/2010/main" val="3035677187"/>
+      </p:ext>
+    </p:extLst>
+  </p:cSld>
+  <p:clrMapOvr>
+    <a:masterClrMapping/>
+  </p:clrMapOvr>
+</p:sld>
+</file>
+
 <file path=ppt/slides/slide3.xml><?xml version="1.0" encoding="utf-8"?>
 <p:sld xmlns:a="http://schemas.openxmlformats.org/drawingml/2006/main" xmlns:r="http://schemas.openxmlformats.org/officeDocument/2006/relationships" xmlns:p="http://schemas.openxmlformats.org/presentationml/2006/main">
   <p:cSld>
